--- a/presentation/submission/26년 포스코퓨처엠 AI활용전문가 과정_사무계_송다혜.pptx
+++ b/presentation/submission/26년 포스코퓨처엠 AI활용전문가 과정_사무계_송다혜.pptx
@@ -14,7 +14,7 @@
     <p:sldId id="279" r:id="rId5"/>
     <p:sldId id="282" r:id="rId6"/>
     <p:sldId id="280" r:id="rId7"/>
-    <p:sldId id="281" r:id="rId8"/>
+    <p:sldId id="283" r:id="rId8"/>
   </p:sldIdLst>
   <p:sldSz cx="9906000" cy="6858000" type="A4"/>
   <p:notesSz cx="6858000" cy="9144000"/>
@@ -20323,24 +20323,97 @@
               <a:buChar char="§"/>
             </a:pPr>
             <a:r>
-              <a:rPr lang="ko-KR" altLang="en-US" sz="1400">
-                <a:latin typeface="+mn-ea"/>
-              </a:rPr>
-              <a:t> 업무 문제를 </a:t>
-            </a:r>
-            <a:r>
-              <a:rPr lang="en-US" altLang="ko-KR" sz="1400">
-                <a:latin typeface="+mn-ea"/>
-              </a:rPr>
-              <a:t>AI </a:t>
-            </a:r>
-            <a:r>
-              <a:rPr lang="ko-KR" altLang="en-US" sz="1400">
-                <a:latin typeface="+mn-ea"/>
-              </a:rPr>
-              <a:t>관점에서 다시 바라보는 경험</a:t>
-            </a:r>
-            <a:endParaRPr lang="en-US" altLang="ko-KR" sz="1400">
+              <a:rPr lang="en-US" altLang="ko-KR" sz="1400" spc="-40">
+                <a:latin typeface="+mn-ea"/>
+              </a:rPr>
+              <a:t> Python </a:t>
+            </a:r>
+            <a:r>
+              <a:rPr lang="ko-KR" altLang="en-US" sz="1400" spc="-40">
+                <a:latin typeface="+mn-ea"/>
+              </a:rPr>
+              <a:t>기초</a:t>
+            </a:r>
+            <a:r>
+              <a:rPr lang="en-US" altLang="ko-KR" sz="1400" spc="-40">
+                <a:latin typeface="+mn-ea"/>
+              </a:rPr>
+              <a:t>, VS</a:t>
+            </a:r>
+            <a:r>
+              <a:rPr lang="ko-KR" altLang="en-US" sz="1400" spc="-40">
+                <a:latin typeface="+mn-ea"/>
+              </a:rPr>
+              <a:t> </a:t>
+            </a:r>
+            <a:r>
+              <a:rPr lang="en-US" altLang="ko-KR" sz="1400" spc="-40">
+                <a:latin typeface="+mn-ea"/>
+              </a:rPr>
+              <a:t>Code,</a:t>
+            </a:r>
+            <a:r>
+              <a:rPr lang="ko-KR" altLang="en-US" sz="1400" spc="-40">
+                <a:latin typeface="+mn-ea"/>
+              </a:rPr>
+              <a:t> </a:t>
+            </a:r>
+            <a:r>
+              <a:rPr lang="en-US" altLang="ko-KR" sz="1400" spc="-40">
+                <a:latin typeface="+mn-ea"/>
+              </a:rPr>
+              <a:t>GitHub, LangChain, RAG </a:t>
+            </a:r>
+            <a:r>
+              <a:rPr lang="ko-KR" altLang="en-US" sz="1400" spc="-40">
+                <a:latin typeface="+mn-ea"/>
+              </a:rPr>
+              <a:t>등</a:t>
+            </a:r>
+            <a:endParaRPr lang="en-US" altLang="ko-KR" sz="1400" spc="-40">
+              <a:latin typeface="+mn-ea"/>
+            </a:endParaRPr>
+          </a:p>
+          <a:p>
+            <a:pPr>
+              <a:spcBef>
+                <a:spcPts val="500"/>
+              </a:spcBef>
+              <a:spcAft>
+                <a:spcPts val="500"/>
+              </a:spcAft>
+              <a:buClr>
+                <a:schemeClr val="accent1">
+                  <a:lumMod val="60000"/>
+                  <a:lumOff val="40000"/>
+                </a:schemeClr>
+              </a:buClr>
+            </a:pPr>
+            <a:r>
+              <a:rPr lang="en-US" altLang="ko-KR" sz="1400" spc="-40">
+                <a:latin typeface="+mn-ea"/>
+              </a:rPr>
+              <a:t>  </a:t>
+            </a:r>
+            <a:r>
+              <a:rPr lang="ko-KR" altLang="en-US" sz="1400" spc="-40">
+                <a:latin typeface="+mn-ea"/>
+              </a:rPr>
+              <a:t>새로운 개념 학습</a:t>
+            </a:r>
+            <a:r>
+              <a:rPr lang="en-US" altLang="ko-KR" sz="1400" spc="-40">
+                <a:latin typeface="+mn-ea"/>
+              </a:rPr>
+              <a:t> </a:t>
+            </a:r>
+            <a:r>
+              <a:rPr lang="ko-KR" altLang="en-US" sz="1400" spc="-40">
+                <a:latin typeface="+mn-ea"/>
+              </a:rPr>
+              <a:t>→ 실제 웹 서비스 구현에 활용</a:t>
+            </a:r>
+            <a:endParaRPr lang="en-US" altLang="ko-KR" sz="1400" spc="-40">
               <a:latin typeface="+mn-ea"/>
             </a:endParaRPr>
           </a:p>
@@ -20362,97 +20435,36 @@
               <a:buChar char="§"/>
             </a:pPr>
             <a:r>
-              <a:rPr lang="en-US" altLang="ko-KR" sz="1400">
-                <a:latin typeface="+mn-ea"/>
-              </a:rPr>
-              <a:t> Python </a:t>
-            </a:r>
-            <a:r>
-              <a:rPr lang="ko-KR" altLang="en-US" sz="1400">
-                <a:latin typeface="+mn-ea"/>
-              </a:rPr>
-              <a:t>기초</a:t>
-            </a:r>
-            <a:r>
-              <a:rPr lang="en-US" altLang="ko-KR" sz="1400">
-                <a:latin typeface="+mn-ea"/>
-              </a:rPr>
-              <a:t>, VS</a:t>
-            </a:r>
-            <a:r>
-              <a:rPr lang="ko-KR" altLang="en-US" sz="1400">
-                <a:latin typeface="+mn-ea"/>
-              </a:rPr>
-              <a:t> </a:t>
-            </a:r>
-            <a:r>
-              <a:rPr lang="en-US" altLang="ko-KR" sz="1400">
-                <a:latin typeface="+mn-ea"/>
-              </a:rPr>
-              <a:t>Code,</a:t>
-            </a:r>
-            <a:r>
-              <a:rPr lang="ko-KR" altLang="en-US" sz="1400">
-                <a:latin typeface="+mn-ea"/>
-              </a:rPr>
-              <a:t> </a:t>
-            </a:r>
-            <a:r>
-              <a:rPr lang="en-US" altLang="ko-KR" sz="1400">
-                <a:latin typeface="+mn-ea"/>
-              </a:rPr>
-              <a:t>GitHub, LangChain, RAG </a:t>
-            </a:r>
-            <a:r>
-              <a:rPr lang="ko-KR" altLang="en-US" sz="1400">
-                <a:latin typeface="+mn-ea"/>
-              </a:rPr>
-              <a:t>등</a:t>
-            </a:r>
-            <a:endParaRPr lang="en-US" altLang="ko-KR" sz="1400">
-              <a:latin typeface="+mn-ea"/>
-            </a:endParaRPr>
-          </a:p>
-          <a:p>
-            <a:pPr>
-              <a:spcBef>
-                <a:spcPts val="500"/>
-              </a:spcBef>
-              <a:spcAft>
-                <a:spcPts val="500"/>
-              </a:spcAft>
-              <a:buClr>
-                <a:schemeClr val="accent1">
-                  <a:lumMod val="60000"/>
-                  <a:lumOff val="40000"/>
-                </a:schemeClr>
-              </a:buClr>
-            </a:pPr>
-            <a:r>
-              <a:rPr lang="en-US" altLang="ko-KR" sz="1400">
-                <a:latin typeface="+mn-ea"/>
-              </a:rPr>
-              <a:t>  </a:t>
-            </a:r>
-            <a:r>
-              <a:rPr lang="ko-KR" altLang="en-US" sz="1400">
-                <a:latin typeface="+mn-ea"/>
-              </a:rPr>
-              <a:t>새로운 개념 학습</a:t>
-            </a:r>
-            <a:r>
-              <a:rPr lang="en-US" altLang="ko-KR" sz="1400">
-                <a:latin typeface="+mn-ea"/>
-              </a:rPr>
-              <a:t> </a:t>
-            </a:r>
-            <a:r>
-              <a:rPr lang="ko-KR" altLang="en-US" sz="1400">
-                <a:latin typeface="+mn-ea"/>
-              </a:rPr>
-              <a:t>→ 실제 웹 서비스 구현에 활용</a:t>
-            </a:r>
-            <a:endParaRPr lang="en-US" altLang="ko-KR" sz="1400">
+              <a:rPr lang="ko-KR" altLang="en-US" sz="1400" spc="-40">
+                <a:latin typeface="+mn-ea"/>
+              </a:rPr>
+              <a:t> 골든셋 평가로 주관부서 매칭 정확도 </a:t>
+            </a:r>
+            <a:r>
+              <a:rPr lang="en-US" altLang="ko-KR" sz="1400" spc="-40">
+                <a:latin typeface="+mn-ea"/>
+              </a:rPr>
+              <a:t>79</a:t>
+            </a:r>
+            <a:r>
+              <a:rPr lang="ko-KR" altLang="en-US" sz="1400" spc="-40">
+                <a:latin typeface="+mn-ea"/>
+              </a:rPr>
+              <a:t>→</a:t>
+            </a:r>
+            <a:r>
+              <a:rPr lang="en-US" altLang="ko-KR" sz="1400" spc="-40">
+                <a:latin typeface="+mn-ea"/>
+              </a:rPr>
+              <a:t>95% </a:t>
+            </a:r>
+            <a:r>
+              <a:rPr lang="ko-KR" altLang="en-US" sz="1400" spc="-40">
+                <a:latin typeface="+mn-ea"/>
+              </a:rPr>
+              <a:t>개선</a:t>
+            </a:r>
+            <a:endParaRPr lang="en-US" altLang="ko-KR" sz="1400" spc="-40">
               <a:latin typeface="+mn-ea"/>
             </a:endParaRPr>
           </a:p>
@@ -20474,36 +20486,30 @@
               <a:buChar char="§"/>
             </a:pPr>
             <a:r>
-              <a:rPr lang="ko-KR" altLang="en-US" sz="1400">
-                <a:latin typeface="+mn-ea"/>
-              </a:rPr>
-              <a:t> </a:t>
-            </a:r>
-            <a:r>
-              <a:rPr lang="en-US" altLang="ko-KR" sz="1400">
-                <a:latin typeface="+mn-ea"/>
-              </a:rPr>
-              <a:t>LangSmith </a:t>
-            </a:r>
-            <a:r>
-              <a:rPr lang="ko-KR" altLang="en-US" sz="1400">
-                <a:latin typeface="+mn-ea"/>
-              </a:rPr>
-              <a:t>트레이싱</a:t>
-            </a:r>
-            <a:r>
-              <a:rPr lang="en-US" altLang="ko-KR" sz="1400">
+              <a:rPr lang="en-US" altLang="ko-KR" sz="1400" spc="-40">
+                <a:latin typeface="+mn-ea"/>
+              </a:rPr>
+              <a:t> LangSmith</a:t>
+            </a:r>
+            <a:r>
+              <a:rPr lang="ko-KR" altLang="en-US" sz="1400" spc="-40">
+                <a:latin typeface="+mn-ea"/>
+              </a:rPr>
+              <a:t> 트레이싱</a:t>
+            </a:r>
+            <a:r>
+              <a:rPr lang="en-US" altLang="ko-KR" sz="1400" spc="-40">
                 <a:latin typeface="+mn-ea"/>
               </a:rPr>
               <a:t>·</a:t>
             </a:r>
             <a:r>
-              <a:rPr lang="ko-KR" altLang="en-US" sz="1400">
-                <a:latin typeface="+mn-ea"/>
-              </a:rPr>
-              <a:t>자동 채점 시스템 구축 경험</a:t>
-            </a:r>
-            <a:endParaRPr lang="en-US" altLang="ko-KR" sz="1400">
+              <a:rPr lang="ko-KR" altLang="en-US" sz="1400" spc="-40">
+                <a:latin typeface="+mn-ea"/>
+              </a:rPr>
+              <a:t>자동 채점 시스템 구축 </a:t>
+            </a:r>
+            <a:endParaRPr lang="en-US" altLang="ko-KR" sz="1400" spc="-40">
               <a:latin typeface="+mn-ea"/>
             </a:endParaRPr>
           </a:p>
@@ -20523,8 +20529,8 @@
         </p:nvSpPr>
         <p:spPr>
           <a:xfrm>
-            <a:off x="5015346" y="1878502"/>
-            <a:ext cx="4568663" cy="1338828"/>
+            <a:off x="5015345" y="1878502"/>
+            <a:ext cx="5219699" cy="1338828"/>
           </a:xfrm>
           <a:prstGeom prst="rect">
             <a:avLst/>
@@ -20644,20 +20650,17 @@
               <a:t> </a:t>
             </a:r>
             <a:r>
-              <a:rPr lang="ko-KR" altLang="en-US" sz="1400"/>
-              <a:t>재순위화</a:t>
-            </a:r>
-            <a:r>
-              <a:rPr lang="en-US" altLang="ko-KR" sz="1400"/>
-              <a:t>(rerank) </a:t>
-            </a:r>
-            <a:r>
-              <a:rPr lang="ko-KR" altLang="en-US" sz="1400"/>
-              <a:t>등 검색 정확도 근본 개선</a:t>
-            </a:r>
-            <a:endParaRPr lang="en-US" altLang="ko-KR" sz="1400">
-              <a:latin typeface="+mn-ea"/>
-            </a:endParaRPr>
+              <a:rPr lang="ko-KR" altLang="en-US" sz="1400" spc="-40">
+                <a:latin typeface="+mn-ea"/>
+              </a:rPr>
+              <a:t>임베딩 유사도만으로 애매한 경계 사례 보완 </a:t>
+            </a:r>
+            <a:r>
+              <a:rPr lang="en-US" altLang="ko-KR" sz="1400" spc="-40">
+                <a:latin typeface="+mn-ea"/>
+              </a:rPr>
+              <a:t>(Reranking)</a:t>
+            </a:r>
           </a:p>
           <a:p>
             <a:pPr marL="90488" indent="-90488">
@@ -20686,7 +20689,7 @@
               <a:rPr lang="ko-KR" altLang="en-US" sz="1400">
                 <a:latin typeface="+mn-ea"/>
               </a:rPr>
-              <a:t>현업 사용자 의견을 반영한 서비스 개선</a:t>
+              <a:t>현업 사용자 의견을 반영한 서비스 향상</a:t>
             </a:r>
             <a:endParaRPr lang="en-US" altLang="ko-KR" sz="1400">
               <a:latin typeface="+mn-ea"/>
@@ -21030,7 +21033,7 @@
     </p:spTree>
     <p:extLst>
       <p:ext uri="{BB962C8B-B14F-4D97-AF65-F5344CB8AC3E}">
-        <p14:creationId xmlns:p14="http://schemas.microsoft.com/office/powerpoint/2010/main" val="195416393"/>
+        <p14:creationId xmlns:p14="http://schemas.microsoft.com/office/powerpoint/2010/main" val="1126135889"/>
       </p:ext>
     </p:extLst>
   </p:cSld>

--- a/presentation/submission/26년 포스코퓨처엠 AI활용전문가 과정_사무계_송다혜.pptx
+++ b/presentation/submission/26년 포스코퓨처엠 AI활용전문가 과정_사무계_송다혜.pptx
@@ -9,8 +9,8 @@
   </p:notesMasterIdLst>
   <p:sldIdLst>
     <p:sldId id="256" r:id="rId2"/>
-    <p:sldId id="263" r:id="rId3"/>
-    <p:sldId id="278" r:id="rId4"/>
+    <p:sldId id="284" r:id="rId3"/>
+    <p:sldId id="285" r:id="rId4"/>
     <p:sldId id="279" r:id="rId5"/>
     <p:sldId id="282" r:id="rId6"/>
     <p:sldId id="280" r:id="rId7"/>
@@ -5219,8 +5219,8 @@
         </p:nvSpPr>
         <p:spPr>
           <a:xfrm>
-            <a:off x="400395" y="5988125"/>
-            <a:ext cx="9289581" cy="505290"/>
+            <a:off x="330495" y="6092035"/>
+            <a:ext cx="9409457" cy="505290"/>
           </a:xfrm>
           <a:prstGeom prst="rect">
             <a:avLst/>
@@ -5260,43 +5260,1085 @@
           <a:bodyPr rtlCol="0" anchor="ctr"/>
           <a:lstStyle/>
           <a:p>
+            <a:r>
+              <a:rPr lang="ko-KR" altLang="en-US" sz="1500" b="1">
+                <a:solidFill>
+                  <a:schemeClr val="tx1"/>
+                </a:solidFill>
+                <a:latin typeface="+mn-ea"/>
+              </a:rPr>
+              <a:t>        필요한 지침을 빠르게 찾아</a:t>
+            </a:r>
+            <a:r>
+              <a:rPr lang="en-US" altLang="ko-KR" sz="1500" b="1">
+                <a:solidFill>
+                  <a:schemeClr val="tx1"/>
+                </a:solidFill>
+                <a:latin typeface="+mn-ea"/>
+              </a:rPr>
+              <a:t>, </a:t>
+            </a:r>
+            <a:r>
+              <a:rPr lang="ko-KR" altLang="en-US" sz="1500" b="1">
+                <a:solidFill>
+                  <a:schemeClr val="tx1"/>
+                </a:solidFill>
+                <a:latin typeface="+mn-ea"/>
+              </a:rPr>
+              <a:t>시작부터 완료까지 정확하게 업무를 처리하도록 체계적으로 지원</a:t>
+            </a:r>
+          </a:p>
+        </p:txBody>
+      </p:sp>
+      <p:sp>
+        <p:nvSpPr>
+          <p:cNvPr id="62" name="사각형: 둥근 모서리 61">
+            <a:extLst>
+              <a:ext uri="{FF2B5EF4-FFF2-40B4-BE49-F238E27FC236}">
+                <a16:creationId xmlns:a16="http://schemas.microsoft.com/office/drawing/2014/main" id="{BFB32620-BF19-4B11-B076-46885445DCD3}"/>
+              </a:ext>
+            </a:extLst>
+          </p:cNvPr>
+          <p:cNvSpPr>
+            <a:spLocks noGrp="1"/>
+          </p:cNvSpPr>
+          <p:nvPr/>
+        </p:nvSpPr>
+        <p:spPr>
+          <a:xfrm>
+            <a:off x="330495" y="4817740"/>
+            <a:ext cx="9409457" cy="999163"/>
+          </a:xfrm>
+          <a:prstGeom prst="roundRect">
+            <a:avLst>
+              <a:gd name="adj" fmla="val 5139"/>
+            </a:avLst>
+          </a:prstGeom>
+          <a:noFill/>
+          <a:ln w="12700">
+            <a:solidFill>
+              <a:schemeClr val="bg1">
+                <a:lumMod val="75000"/>
+              </a:schemeClr>
+            </a:solidFill>
+            <a:prstDash val="solid"/>
+          </a:ln>
+        </p:spPr>
+        <p:txBody>
+          <a:bodyPr anchor="ctr" anchorCtr="0"/>
+          <a:lstStyle/>
+          <a:p>
             <a:pPr algn="ctr"/>
-            <a:r>
-              <a:rPr lang="ko-KR" altLang="en-US" sz="1500" b="1">
-                <a:solidFill>
-                  <a:schemeClr val="tx1"/>
-                </a:solidFill>
-                <a:latin typeface="+mn-ea"/>
-              </a:rPr>
-              <a:t>필요한 지침을 빠르게 찾아</a:t>
-            </a:r>
-            <a:r>
-              <a:rPr lang="en-US" altLang="ko-KR" sz="1500" b="1">
-                <a:solidFill>
-                  <a:schemeClr val="tx1"/>
-                </a:solidFill>
-                <a:latin typeface="+mn-ea"/>
-              </a:rPr>
-              <a:t>, </a:t>
-            </a:r>
-            <a:r>
-              <a:rPr lang="ko-KR" altLang="en-US" sz="1500" b="1">
-                <a:solidFill>
-                  <a:schemeClr val="tx1"/>
-                </a:solidFill>
-                <a:latin typeface="+mn-ea"/>
-              </a:rPr>
-              <a:t>시작부터 완료까지 정확하게 업무를 처리하도록 체계적으로 지원</a:t>
-            </a:r>
+            <a:endParaRPr lang="ko-KR" altLang="en-US" sz="1400" b="1"/>
+          </a:p>
+        </p:txBody>
+      </p:sp>
+      <p:sp>
+        <p:nvSpPr>
+          <p:cNvPr id="64" name="이등변 삼각형 63">
+            <a:extLst>
+              <a:ext uri="{FF2B5EF4-FFF2-40B4-BE49-F238E27FC236}">
+                <a16:creationId xmlns:a16="http://schemas.microsoft.com/office/drawing/2014/main" id="{CBE0F7A1-7FBC-4044-82C1-997A319E3071}"/>
+              </a:ext>
+            </a:extLst>
+          </p:cNvPr>
+          <p:cNvSpPr/>
+          <p:nvPr/>
+        </p:nvSpPr>
+        <p:spPr>
+          <a:xfrm rot="5400000">
+            <a:off x="2699726" y="5328339"/>
+            <a:ext cx="166088" cy="120792"/>
+          </a:xfrm>
+          <a:prstGeom prst="triangle">
+            <a:avLst/>
+          </a:prstGeom>
+          <a:solidFill>
+            <a:schemeClr val="bg1">
+              <a:lumMod val="75000"/>
+            </a:schemeClr>
+          </a:solidFill>
+          <a:ln>
+            <a:noFill/>
+          </a:ln>
+        </p:spPr>
+        <p:style>
+          <a:lnRef idx="2">
+            <a:schemeClr val="accent1">
+              <a:shade val="50000"/>
+            </a:schemeClr>
+          </a:lnRef>
+          <a:fillRef idx="1">
+            <a:schemeClr val="accent1"/>
+          </a:fillRef>
+          <a:effectRef idx="0">
+            <a:schemeClr val="accent1"/>
+          </a:effectRef>
+          <a:fontRef idx="minor">
+            <a:schemeClr val="lt1"/>
+          </a:fontRef>
+        </p:style>
+        <p:txBody>
+          <a:bodyPr rtlCol="0" anchor="ctr"/>
+          <a:lstStyle/>
+          <a:p>
+            <a:pPr algn="ctr"/>
+            <a:endParaRPr lang="ko-KR" altLang="en-US"/>
+          </a:p>
+        </p:txBody>
+      </p:sp>
+      <p:sp>
+        <p:nvSpPr>
+          <p:cNvPr id="65" name="이등변 삼각형 64">
+            <a:extLst>
+              <a:ext uri="{FF2B5EF4-FFF2-40B4-BE49-F238E27FC236}">
+                <a16:creationId xmlns:a16="http://schemas.microsoft.com/office/drawing/2014/main" id="{2EDC7E73-7337-42B2-928F-D70EB47D31EC}"/>
+              </a:ext>
+            </a:extLst>
+          </p:cNvPr>
+          <p:cNvSpPr/>
+          <p:nvPr/>
+        </p:nvSpPr>
+        <p:spPr>
+          <a:xfrm rot="5400000">
+            <a:off x="7072446" y="5330017"/>
+            <a:ext cx="166088" cy="120792"/>
+          </a:xfrm>
+          <a:prstGeom prst="triangle">
+            <a:avLst/>
+          </a:prstGeom>
+          <a:solidFill>
+            <a:schemeClr val="bg1">
+              <a:lumMod val="75000"/>
+            </a:schemeClr>
+          </a:solidFill>
+          <a:ln>
+            <a:noFill/>
+          </a:ln>
+        </p:spPr>
+        <p:style>
+          <a:lnRef idx="2">
+            <a:schemeClr val="accent1">
+              <a:shade val="50000"/>
+            </a:schemeClr>
+          </a:lnRef>
+          <a:fillRef idx="1">
+            <a:schemeClr val="accent1"/>
+          </a:fillRef>
+          <a:effectRef idx="0">
+            <a:schemeClr val="accent1"/>
+          </a:effectRef>
+          <a:fontRef idx="minor">
+            <a:schemeClr val="lt1"/>
+          </a:fontRef>
+        </p:style>
+        <p:txBody>
+          <a:bodyPr rtlCol="0" anchor="ctr"/>
+          <a:lstStyle/>
+          <a:p>
+            <a:pPr algn="ctr"/>
+            <a:endParaRPr lang="ko-KR" altLang="en-US"/>
+          </a:p>
+        </p:txBody>
+      </p:sp>
+      <p:sp>
+        <p:nvSpPr>
+          <p:cNvPr id="3" name="사각형: 둥근 모서리 2">
+            <a:extLst>
+              <a:ext uri="{FF2B5EF4-FFF2-40B4-BE49-F238E27FC236}">
+                <a16:creationId xmlns:a16="http://schemas.microsoft.com/office/drawing/2014/main" id="{1D30FD96-B91F-4CF6-97C0-E4128ECEA73A}"/>
+              </a:ext>
+            </a:extLst>
+          </p:cNvPr>
+          <p:cNvSpPr/>
+          <p:nvPr/>
+        </p:nvSpPr>
+        <p:spPr>
+          <a:xfrm>
+            <a:off x="330495" y="1217806"/>
+            <a:ext cx="2985462" cy="2881439"/>
+          </a:xfrm>
+          <a:prstGeom prst="roundRect">
+            <a:avLst>
+              <a:gd name="adj" fmla="val 5661"/>
+            </a:avLst>
+          </a:prstGeom>
+          <a:solidFill>
+            <a:schemeClr val="bg1"/>
+          </a:solidFill>
+          <a:ln>
+            <a:noFill/>
+          </a:ln>
+          <a:effectLst>
+            <a:outerShdw blurRad="228600" dist="50800" dir="5400000" rotWithShape="0">
+              <a:srgbClr val="1B2A4A">
+                <a:alpha val="22000"/>
+              </a:srgbClr>
+            </a:outerShdw>
+          </a:effectLst>
+        </p:spPr>
+        <p:style>
+          <a:lnRef idx="2">
+            <a:schemeClr val="accent1">
+              <a:shade val="50000"/>
+            </a:schemeClr>
+          </a:lnRef>
+          <a:fillRef idx="1">
+            <a:schemeClr val="accent1"/>
+          </a:fillRef>
+          <a:effectRef idx="0">
+            <a:schemeClr val="accent1"/>
+          </a:effectRef>
+          <a:fontRef idx="minor">
+            <a:schemeClr val="lt1"/>
+          </a:fontRef>
+        </p:style>
+        <p:txBody>
+          <a:bodyPr rtlCol="0" anchor="ctr"/>
+          <a:lstStyle/>
+          <a:p>
+            <a:pPr algn="ctr"/>
+            <a:endParaRPr lang="ko-KR" altLang="en-US"/>
+          </a:p>
+        </p:txBody>
+      </p:sp>
+      <p:sp>
+        <p:nvSpPr>
+          <p:cNvPr id="45" name="사각형: 둥근 모서리 44">
+            <a:extLst>
+              <a:ext uri="{FF2B5EF4-FFF2-40B4-BE49-F238E27FC236}">
+                <a16:creationId xmlns:a16="http://schemas.microsoft.com/office/drawing/2014/main" id="{D1C99C70-2C60-484C-89CD-FC823E3E9CFE}"/>
+              </a:ext>
+            </a:extLst>
+          </p:cNvPr>
+          <p:cNvSpPr/>
+          <p:nvPr/>
+        </p:nvSpPr>
+        <p:spPr>
+          <a:xfrm>
+            <a:off x="3527540" y="1217806"/>
+            <a:ext cx="2985462" cy="2881439"/>
+          </a:xfrm>
+          <a:prstGeom prst="roundRect">
+            <a:avLst>
+              <a:gd name="adj" fmla="val 5661"/>
+            </a:avLst>
+          </a:prstGeom>
+          <a:solidFill>
+            <a:schemeClr val="bg1"/>
+          </a:solidFill>
+          <a:ln>
+            <a:noFill/>
+          </a:ln>
+          <a:effectLst>
+            <a:outerShdw blurRad="228600" dist="50800" dir="5400000" rotWithShape="0">
+              <a:srgbClr val="1B2A4A">
+                <a:alpha val="22000"/>
+              </a:srgbClr>
+            </a:outerShdw>
+          </a:effectLst>
+        </p:spPr>
+        <p:style>
+          <a:lnRef idx="2">
+            <a:schemeClr val="accent1">
+              <a:shade val="50000"/>
+            </a:schemeClr>
+          </a:lnRef>
+          <a:fillRef idx="1">
+            <a:schemeClr val="accent1"/>
+          </a:fillRef>
+          <a:effectRef idx="0">
+            <a:schemeClr val="accent1"/>
+          </a:effectRef>
+          <a:fontRef idx="minor">
+            <a:schemeClr val="lt1"/>
+          </a:fontRef>
+        </p:style>
+        <p:txBody>
+          <a:bodyPr rtlCol="0" anchor="ctr"/>
+          <a:lstStyle/>
+          <a:p>
+            <a:pPr algn="ctr"/>
+            <a:endParaRPr lang="ko-KR" altLang="en-US"/>
+          </a:p>
+        </p:txBody>
+      </p:sp>
+      <p:sp>
+        <p:nvSpPr>
+          <p:cNvPr id="46" name="사각형: 둥근 모서리 45">
+            <a:extLst>
+              <a:ext uri="{FF2B5EF4-FFF2-40B4-BE49-F238E27FC236}">
+                <a16:creationId xmlns:a16="http://schemas.microsoft.com/office/drawing/2014/main" id="{12465051-9ABA-4C7D-A1B9-A3D705ADEC72}"/>
+              </a:ext>
+            </a:extLst>
+          </p:cNvPr>
+          <p:cNvSpPr/>
+          <p:nvPr/>
+        </p:nvSpPr>
+        <p:spPr>
+          <a:xfrm>
+            <a:off x="6713611" y="1217806"/>
+            <a:ext cx="2985462" cy="2881439"/>
+          </a:xfrm>
+          <a:prstGeom prst="roundRect">
+            <a:avLst>
+              <a:gd name="adj" fmla="val 5661"/>
+            </a:avLst>
+          </a:prstGeom>
+          <a:solidFill>
+            <a:schemeClr val="bg1"/>
+          </a:solidFill>
+          <a:ln>
+            <a:noFill/>
+          </a:ln>
+          <a:effectLst>
+            <a:outerShdw blurRad="228600" dist="50800" dir="5400000" rotWithShape="0">
+              <a:srgbClr val="1B2A4A">
+                <a:alpha val="22000"/>
+              </a:srgbClr>
+            </a:outerShdw>
+          </a:effectLst>
+        </p:spPr>
+        <p:style>
+          <a:lnRef idx="2">
+            <a:schemeClr val="accent1">
+              <a:shade val="50000"/>
+            </a:schemeClr>
+          </a:lnRef>
+          <a:fillRef idx="1">
+            <a:schemeClr val="accent1"/>
+          </a:fillRef>
+          <a:effectRef idx="0">
+            <a:schemeClr val="accent1"/>
+          </a:effectRef>
+          <a:fontRef idx="minor">
+            <a:schemeClr val="lt1"/>
+          </a:fontRef>
+        </p:style>
+        <p:txBody>
+          <a:bodyPr rtlCol="0" anchor="ctr"/>
+          <a:lstStyle/>
+          <a:p>
+            <a:pPr algn="ctr"/>
+            <a:endParaRPr lang="ko-KR" altLang="en-US"/>
+          </a:p>
+        </p:txBody>
+      </p:sp>
+      <p:sp>
+        <p:nvSpPr>
+          <p:cNvPr id="12" name="TextBox 11">
+            <a:extLst>
+              <a:ext uri="{FF2B5EF4-FFF2-40B4-BE49-F238E27FC236}">
+                <a16:creationId xmlns:a16="http://schemas.microsoft.com/office/drawing/2014/main" id="{1FA75749-6157-40BB-A74E-394D6C347B77}"/>
+              </a:ext>
+            </a:extLst>
+          </p:cNvPr>
+          <p:cNvSpPr txBox="1"/>
+          <p:nvPr/>
+        </p:nvSpPr>
+        <p:spPr>
+          <a:xfrm>
+            <a:off x="562773" y="1335924"/>
+            <a:ext cx="2520908" cy="323165"/>
+          </a:xfrm>
+          <a:prstGeom prst="rect">
+            <a:avLst/>
+          </a:prstGeom>
+          <a:noFill/>
+        </p:spPr>
+        <p:txBody>
+          <a:bodyPr wrap="square" rtlCol="0">
+            <a:spAutoFit/>
+          </a:bodyPr>
+          <a:lstStyle/>
+          <a:p>
+            <a:pPr algn="ctr"/>
+            <a:r>
+              <a:rPr lang="ko-KR" altLang="en-US" sz="1500" b="1"/>
+              <a:t>회사 업무</a:t>
+            </a:r>
+          </a:p>
+        </p:txBody>
+      </p:sp>
+      <p:cxnSp>
+        <p:nvCxnSpPr>
+          <p:cNvPr id="14" name="직선 연결선 13">
+            <a:extLst>
+              <a:ext uri="{FF2B5EF4-FFF2-40B4-BE49-F238E27FC236}">
+                <a16:creationId xmlns:a16="http://schemas.microsoft.com/office/drawing/2014/main" id="{3336D8E1-00F3-4635-8A14-6290ADD2EACF}"/>
+              </a:ext>
+            </a:extLst>
+          </p:cNvPr>
+          <p:cNvCxnSpPr>
+            <a:cxnSpLocks/>
+          </p:cNvCxnSpPr>
+          <p:nvPr/>
+        </p:nvCxnSpPr>
+        <p:spPr>
+          <a:xfrm>
+            <a:off x="470559" y="1739203"/>
+            <a:ext cx="2705337" cy="0"/>
+          </a:xfrm>
+          <a:prstGeom prst="line">
+            <a:avLst/>
+          </a:prstGeom>
+        </p:spPr>
+        <p:style>
+          <a:lnRef idx="1">
+            <a:schemeClr val="accent1"/>
+          </a:lnRef>
+          <a:fillRef idx="0">
+            <a:schemeClr val="accent1"/>
+          </a:fillRef>
+          <a:effectRef idx="0">
+            <a:schemeClr val="accent1"/>
+          </a:effectRef>
+          <a:fontRef idx="minor">
+            <a:schemeClr val="tx1"/>
+          </a:fontRef>
+        </p:style>
+      </p:cxnSp>
+      <p:sp>
+        <p:nvSpPr>
+          <p:cNvPr id="50" name="TextBox 49">
+            <a:extLst>
+              <a:ext uri="{FF2B5EF4-FFF2-40B4-BE49-F238E27FC236}">
+                <a16:creationId xmlns:a16="http://schemas.microsoft.com/office/drawing/2014/main" id="{6EBBEF99-4056-4026-9C0A-5F83DA10A174}"/>
+              </a:ext>
+            </a:extLst>
+          </p:cNvPr>
+          <p:cNvSpPr txBox="1"/>
+          <p:nvPr/>
+        </p:nvSpPr>
+        <p:spPr>
+          <a:xfrm>
+            <a:off x="3779919" y="1335924"/>
+            <a:ext cx="2520908" cy="323165"/>
+          </a:xfrm>
+          <a:prstGeom prst="rect">
+            <a:avLst/>
+          </a:prstGeom>
+          <a:noFill/>
+        </p:spPr>
+        <p:txBody>
+          <a:bodyPr wrap="square" rtlCol="0">
+            <a:spAutoFit/>
+          </a:bodyPr>
+          <a:lstStyle/>
+          <a:p>
+            <a:pPr algn="ctr"/>
+            <a:r>
+              <a:rPr lang="ko-KR" altLang="en-US" sz="1500" b="1"/>
+              <a:t>문제점</a:t>
+            </a:r>
+          </a:p>
+        </p:txBody>
+      </p:sp>
+      <p:cxnSp>
+        <p:nvCxnSpPr>
+          <p:cNvPr id="52" name="직선 연결선 51">
+            <a:extLst>
+              <a:ext uri="{FF2B5EF4-FFF2-40B4-BE49-F238E27FC236}">
+                <a16:creationId xmlns:a16="http://schemas.microsoft.com/office/drawing/2014/main" id="{6F79F0D2-2158-4094-8A1A-0BCE7B519E87}"/>
+              </a:ext>
+            </a:extLst>
+          </p:cNvPr>
+          <p:cNvCxnSpPr>
+            <a:cxnSpLocks/>
+          </p:cNvCxnSpPr>
+          <p:nvPr/>
+        </p:nvCxnSpPr>
+        <p:spPr>
+          <a:xfrm>
+            <a:off x="3687705" y="1739203"/>
+            <a:ext cx="2705337" cy="0"/>
+          </a:xfrm>
+          <a:prstGeom prst="line">
+            <a:avLst/>
+          </a:prstGeom>
+        </p:spPr>
+        <p:style>
+          <a:lnRef idx="1">
+            <a:schemeClr val="accent1"/>
+          </a:lnRef>
+          <a:fillRef idx="0">
+            <a:schemeClr val="accent1"/>
+          </a:fillRef>
+          <a:effectRef idx="0">
+            <a:schemeClr val="accent1"/>
+          </a:effectRef>
+          <a:fontRef idx="minor">
+            <a:schemeClr val="tx1"/>
+          </a:fontRef>
+        </p:style>
+      </p:cxnSp>
+      <p:sp>
+        <p:nvSpPr>
+          <p:cNvPr id="57" name="TextBox 56">
+            <a:extLst>
+              <a:ext uri="{FF2B5EF4-FFF2-40B4-BE49-F238E27FC236}">
+                <a16:creationId xmlns:a16="http://schemas.microsoft.com/office/drawing/2014/main" id="{C584307B-0BB5-4521-B4EE-F153D3B5F5AE}"/>
+              </a:ext>
+            </a:extLst>
+          </p:cNvPr>
+          <p:cNvSpPr txBox="1"/>
+          <p:nvPr/>
+        </p:nvSpPr>
+        <p:spPr>
+          <a:xfrm>
+            <a:off x="6945888" y="1335924"/>
+            <a:ext cx="2520908" cy="323165"/>
+          </a:xfrm>
+          <a:prstGeom prst="rect">
+            <a:avLst/>
+          </a:prstGeom>
+          <a:noFill/>
+        </p:spPr>
+        <p:txBody>
+          <a:bodyPr wrap="square" rtlCol="0">
+            <a:spAutoFit/>
+          </a:bodyPr>
+          <a:lstStyle/>
+          <a:p>
+            <a:pPr algn="ctr"/>
+            <a:r>
+              <a:rPr lang="ko-KR" altLang="en-US" sz="1500" b="1"/>
+              <a:t>개선 방안</a:t>
+            </a:r>
+          </a:p>
+        </p:txBody>
+      </p:sp>
+      <p:cxnSp>
+        <p:nvCxnSpPr>
+          <p:cNvPr id="60" name="직선 연결선 59">
+            <a:extLst>
+              <a:ext uri="{FF2B5EF4-FFF2-40B4-BE49-F238E27FC236}">
+                <a16:creationId xmlns:a16="http://schemas.microsoft.com/office/drawing/2014/main" id="{D9796B37-8472-4D2F-A913-646D47B51A80}"/>
+              </a:ext>
+            </a:extLst>
+          </p:cNvPr>
+          <p:cNvCxnSpPr>
+            <a:cxnSpLocks/>
+          </p:cNvCxnSpPr>
+          <p:nvPr/>
+        </p:nvCxnSpPr>
+        <p:spPr>
+          <a:xfrm>
+            <a:off x="6853674" y="1739203"/>
+            <a:ext cx="2705337" cy="0"/>
+          </a:xfrm>
+          <a:prstGeom prst="line">
+            <a:avLst/>
+          </a:prstGeom>
+        </p:spPr>
+        <p:style>
+          <a:lnRef idx="1">
+            <a:schemeClr val="accent1"/>
+          </a:lnRef>
+          <a:fillRef idx="0">
+            <a:schemeClr val="accent1"/>
+          </a:fillRef>
+          <a:effectRef idx="0">
+            <a:schemeClr val="accent1"/>
+          </a:effectRef>
+          <a:fontRef idx="minor">
+            <a:schemeClr val="tx1"/>
+          </a:fontRef>
+        </p:style>
+      </p:cxnSp>
+      <p:sp>
+        <p:nvSpPr>
+          <p:cNvPr id="39" name="TextBox 38">
+            <a:extLst>
+              <a:ext uri="{FF2B5EF4-FFF2-40B4-BE49-F238E27FC236}">
+                <a16:creationId xmlns:a16="http://schemas.microsoft.com/office/drawing/2014/main" id="{DFE79726-461E-4F9B-A835-7A3125F4632A}"/>
+              </a:ext>
+            </a:extLst>
+          </p:cNvPr>
+          <p:cNvSpPr txBox="1"/>
+          <p:nvPr/>
+        </p:nvSpPr>
+        <p:spPr>
+          <a:xfrm>
+            <a:off x="349148" y="2995774"/>
+            <a:ext cx="2985461" cy="948978"/>
+          </a:xfrm>
+          <a:prstGeom prst="rect">
+            <a:avLst/>
+          </a:prstGeom>
+          <a:noFill/>
+        </p:spPr>
+        <p:txBody>
+          <a:bodyPr wrap="square" rtlCol="0">
+            <a:spAutoFit/>
+          </a:bodyPr>
+          <a:lstStyle/>
+          <a:p>
+            <a:pPr marL="90488" indent="-90488">
+              <a:spcBef>
+                <a:spcPts val="500"/>
+              </a:spcBef>
+              <a:spcAft>
+                <a:spcPts val="500"/>
+              </a:spcAft>
+              <a:buClr>
+                <a:schemeClr val="accent1">
+                  <a:lumMod val="60000"/>
+                  <a:lumOff val="40000"/>
+                </a:schemeClr>
+              </a:buClr>
+              <a:buFont typeface="Wingdings" panose="05000000000000000000" pitchFamily="2" charset="2"/>
+              <a:buChar char="§"/>
+            </a:pPr>
+            <a:r>
+              <a:rPr lang="ko-KR" altLang="en-US" sz="1300"/>
+              <a:t> 정해진 프로세스와 절차에 따라 처리</a:t>
+            </a:r>
+            <a:endParaRPr lang="en-US" altLang="ko-KR" sz="1300"/>
+          </a:p>
+          <a:p>
+            <a:pPr marL="90488" indent="-90488">
+              <a:spcBef>
+                <a:spcPts val="500"/>
+              </a:spcBef>
+              <a:spcAft>
+                <a:spcPts val="500"/>
+              </a:spcAft>
+              <a:buClr>
+                <a:schemeClr val="accent1">
+                  <a:lumMod val="60000"/>
+                  <a:lumOff val="40000"/>
+                </a:schemeClr>
+              </a:buClr>
+              <a:buFont typeface="Wingdings" panose="05000000000000000000" pitchFamily="2" charset="2"/>
+              <a:buChar char="§"/>
+            </a:pPr>
+            <a:r>
+              <a:rPr lang="en-US" altLang="ko-KR" sz="1300"/>
+              <a:t> </a:t>
+            </a:r>
+            <a:r>
+              <a:rPr lang="ko-KR" altLang="en-US" sz="1300"/>
+              <a:t>담당자가 바뀌어도 필수 절차 준수</a:t>
+            </a:r>
+            <a:endParaRPr lang="en-US" altLang="ko-KR" sz="1300"/>
+          </a:p>
+          <a:p>
+            <a:pPr marL="90488" indent="-90488">
+              <a:spcBef>
+                <a:spcPts val="500"/>
+              </a:spcBef>
+              <a:spcAft>
+                <a:spcPts val="500"/>
+              </a:spcAft>
+              <a:buClr>
+                <a:schemeClr val="accent1">
+                  <a:lumMod val="60000"/>
+                  <a:lumOff val="40000"/>
+                </a:schemeClr>
+              </a:buClr>
+              <a:buFont typeface="Wingdings" panose="05000000000000000000" pitchFamily="2" charset="2"/>
+              <a:buChar char="§"/>
+            </a:pPr>
+            <a:r>
+              <a:rPr lang="ko-KR" altLang="en-US" sz="1300"/>
+              <a:t> 일관된 결과물 확보 필요</a:t>
+            </a:r>
+          </a:p>
+        </p:txBody>
+      </p:sp>
+      <p:pic>
+        <p:nvPicPr>
+          <p:cNvPr id="13" name="그래픽 12" descr="체크리스트 단색으로 채워진">
+            <a:extLst>
+              <a:ext uri="{FF2B5EF4-FFF2-40B4-BE49-F238E27FC236}">
+                <a16:creationId xmlns:a16="http://schemas.microsoft.com/office/drawing/2014/main" id="{0135F75B-0F42-4B60-AC08-FD2CF59A281B}"/>
+              </a:ext>
+            </a:extLst>
+          </p:cNvPr>
+          <p:cNvPicPr>
+            <a:picLocks noChangeAspect="1"/>
+          </p:cNvPicPr>
+          <p:nvPr/>
+        </p:nvPicPr>
+        <p:blipFill>
+          <a:blip r:embed="rId12">
+            <a:extLst>
+              <a:ext uri="{28A0092B-C50C-407E-A947-70E740481C1C}">
+                <a14:useLocalDpi xmlns:a14="http://schemas.microsoft.com/office/drawing/2010/main" val="0"/>
+              </a:ext>
+            </a:extLst>
+          </a:blip>
+          <a:stretch>
+            <a:fillRect/>
+          </a:stretch>
+        </p:blipFill>
+        <p:spPr>
+          <a:xfrm>
+            <a:off x="1475519" y="1959127"/>
+            <a:ext cx="755703" cy="755703"/>
+          </a:xfrm>
+          <a:prstGeom prst="rect">
+            <a:avLst/>
+          </a:prstGeom>
+        </p:spPr>
+      </p:pic>
+      <p:sp>
+        <p:nvSpPr>
+          <p:cNvPr id="43" name="TextBox 42">
+            <a:extLst>
+              <a:ext uri="{FF2B5EF4-FFF2-40B4-BE49-F238E27FC236}">
+                <a16:creationId xmlns:a16="http://schemas.microsoft.com/office/drawing/2014/main" id="{80CE7C00-4BD4-4C02-BA3C-66110498AE87}"/>
+              </a:ext>
+            </a:extLst>
+          </p:cNvPr>
+          <p:cNvSpPr txBox="1"/>
+          <p:nvPr/>
+        </p:nvSpPr>
+        <p:spPr>
+          <a:xfrm>
+            <a:off x="3527541" y="2995774"/>
+            <a:ext cx="3114419" cy="948978"/>
+          </a:xfrm>
+          <a:prstGeom prst="rect">
+            <a:avLst/>
+          </a:prstGeom>
+          <a:noFill/>
+        </p:spPr>
+        <p:txBody>
+          <a:bodyPr wrap="square" rtlCol="0">
+            <a:spAutoFit/>
+          </a:bodyPr>
+          <a:lstStyle/>
+          <a:p>
+            <a:pPr marL="90488" indent="-90488">
+              <a:spcBef>
+                <a:spcPts val="500"/>
+              </a:spcBef>
+              <a:spcAft>
+                <a:spcPts val="500"/>
+              </a:spcAft>
+              <a:buClr>
+                <a:schemeClr val="accent1">
+                  <a:lumMod val="60000"/>
+                  <a:lumOff val="40000"/>
+                </a:schemeClr>
+              </a:buClr>
+              <a:buFont typeface="Wingdings" panose="05000000000000000000" pitchFamily="2" charset="2"/>
+              <a:buChar char="§"/>
+            </a:pPr>
+            <a:r>
+              <a:rPr lang="ko-KR" altLang="en-US" sz="1300"/>
+              <a:t> </a:t>
+            </a:r>
+            <a:r>
+              <a:rPr lang="ko-KR" altLang="en-US" sz="1300" spc="-40"/>
+              <a:t>필요한 절차와 지침을 찾는데 시간 소요</a:t>
+            </a:r>
+            <a:endParaRPr lang="en-US" altLang="ko-KR" sz="1300" spc="-40"/>
+          </a:p>
+          <a:p>
+            <a:pPr marL="90488" indent="-90488">
+              <a:spcBef>
+                <a:spcPts val="500"/>
+              </a:spcBef>
+              <a:spcAft>
+                <a:spcPts val="500"/>
+              </a:spcAft>
+              <a:buClr>
+                <a:schemeClr val="accent1">
+                  <a:lumMod val="60000"/>
+                  <a:lumOff val="40000"/>
+                </a:schemeClr>
+              </a:buClr>
+              <a:buFont typeface="Wingdings" panose="05000000000000000000" pitchFamily="2" charset="2"/>
+              <a:buChar char="§"/>
+            </a:pPr>
+            <a:r>
+              <a:rPr lang="en-US" altLang="ko-KR" sz="1300" spc="-40"/>
+              <a:t> </a:t>
+            </a:r>
+            <a:r>
+              <a:rPr lang="ko-KR" altLang="en-US" sz="1300"/>
+              <a:t>담당자마다 처리 방식이 다름</a:t>
+            </a:r>
+            <a:endParaRPr lang="en-US" altLang="ko-KR" sz="1300"/>
+          </a:p>
+          <a:p>
+            <a:pPr marL="90488" indent="-90488">
+              <a:spcBef>
+                <a:spcPts val="500"/>
+              </a:spcBef>
+              <a:spcAft>
+                <a:spcPts val="500"/>
+              </a:spcAft>
+              <a:buClr>
+                <a:schemeClr val="accent1">
+                  <a:lumMod val="60000"/>
+                  <a:lumOff val="40000"/>
+                </a:schemeClr>
+              </a:buClr>
+              <a:buFont typeface="Wingdings" panose="05000000000000000000" pitchFamily="2" charset="2"/>
+              <a:buChar char="§"/>
+            </a:pPr>
+            <a:r>
+              <a:rPr lang="ko-KR" altLang="en-US" sz="1300"/>
+              <a:t> 업무 누락과 편차 발생</a:t>
+            </a:r>
+          </a:p>
+        </p:txBody>
+      </p:sp>
+      <p:pic>
+        <p:nvPicPr>
+          <p:cNvPr id="16" name="그래픽 15" descr="물음표 단색으로 채워진">
+            <a:extLst>
+              <a:ext uri="{FF2B5EF4-FFF2-40B4-BE49-F238E27FC236}">
+                <a16:creationId xmlns:a16="http://schemas.microsoft.com/office/drawing/2014/main" id="{37F2DC6D-0D3D-47E1-B656-D277CD737936}"/>
+              </a:ext>
+            </a:extLst>
+          </p:cNvPr>
+          <p:cNvPicPr>
+            <a:picLocks noChangeAspect="1"/>
+          </p:cNvPicPr>
+          <p:nvPr/>
+        </p:nvPicPr>
+        <p:blipFill>
+          <a:blip r:embed="rId13">
+            <a:extLst>
+              <a:ext uri="{28A0092B-C50C-407E-A947-70E740481C1C}">
+                <a14:useLocalDpi xmlns:a14="http://schemas.microsoft.com/office/drawing/2010/main" val="0"/>
+              </a:ext>
+            </a:extLst>
+          </a:blip>
+          <a:stretch>
+            <a:fillRect/>
+          </a:stretch>
+        </p:blipFill>
+        <p:spPr>
+          <a:xfrm>
+            <a:off x="4597946" y="1959127"/>
+            <a:ext cx="755703" cy="755703"/>
+          </a:xfrm>
+          <a:prstGeom prst="rect">
+            <a:avLst/>
+          </a:prstGeom>
+        </p:spPr>
+      </p:pic>
+      <p:sp>
+        <p:nvSpPr>
+          <p:cNvPr id="51" name="TextBox 50">
+            <a:extLst>
+              <a:ext uri="{FF2B5EF4-FFF2-40B4-BE49-F238E27FC236}">
+                <a16:creationId xmlns:a16="http://schemas.microsoft.com/office/drawing/2014/main" id="{BFA5A8A9-28C1-465A-8FA8-791A2996B35D}"/>
+              </a:ext>
+            </a:extLst>
+          </p:cNvPr>
+          <p:cNvSpPr txBox="1"/>
+          <p:nvPr/>
+        </p:nvSpPr>
+        <p:spPr>
+          <a:xfrm>
+            <a:off x="6713612" y="2995774"/>
+            <a:ext cx="2985461" cy="820738"/>
+          </a:xfrm>
+          <a:prstGeom prst="rect">
+            <a:avLst/>
+          </a:prstGeom>
+          <a:noFill/>
+        </p:spPr>
+        <p:txBody>
+          <a:bodyPr wrap="square" rtlCol="0">
+            <a:spAutoFit/>
+          </a:bodyPr>
+          <a:lstStyle/>
+          <a:p>
+            <a:pPr marL="90488" indent="-90488">
+              <a:spcBef>
+                <a:spcPts val="500"/>
+              </a:spcBef>
+              <a:buClr>
+                <a:schemeClr val="accent1">
+                  <a:lumMod val="60000"/>
+                  <a:lumOff val="40000"/>
+                </a:schemeClr>
+              </a:buClr>
+              <a:buFont typeface="Wingdings" panose="05000000000000000000" pitchFamily="2" charset="2"/>
+              <a:buChar char="§"/>
+            </a:pPr>
+            <a:r>
+              <a:rPr lang="ko-KR" altLang="en-US" sz="1300"/>
+              <a:t> </a:t>
+            </a:r>
+            <a:r>
+              <a:rPr lang="ko-KR" altLang="en-US" sz="1300" spc="-40">
+                <a:solidFill>
+                  <a:prstClr val="black"/>
+                </a:solidFill>
+                <a:latin typeface="맑은 고딕"/>
+                <a:ea typeface="맑은 고딕" panose="020B0503020000020004" pitchFamily="50" charset="-127"/>
+                <a:sym typeface="Wingdings" pitchFamily="2" charset="2"/>
+              </a:rPr>
+              <a:t>수행하려는 업무를 </a:t>
+            </a:r>
+            <a:r>
+              <a:rPr lang="ko-KR" altLang="en-US" sz="1300"/>
+              <a:t>입력하면 </a:t>
+            </a:r>
+            <a:endParaRPr lang="en-US" altLang="ko-KR" sz="1300"/>
+          </a:p>
+          <a:p>
+            <a:pPr>
+              <a:spcBef>
+                <a:spcPts val="500"/>
+              </a:spcBef>
+              <a:buClr>
+                <a:schemeClr val="accent1">
+                  <a:lumMod val="60000"/>
+                  <a:lumOff val="40000"/>
+                </a:schemeClr>
+              </a:buClr>
+            </a:pPr>
+            <a:r>
+              <a:rPr lang="en-US" altLang="ko-KR" sz="1300"/>
+              <a:t>   </a:t>
+            </a:r>
+            <a:r>
+              <a:rPr lang="ko-KR" altLang="en-US" sz="1300" b="1"/>
+              <a:t>처리 절차와 지침을 쉽게 안내하는</a:t>
+            </a:r>
+            <a:endParaRPr lang="en-US" altLang="ko-KR" sz="1300" b="1"/>
+          </a:p>
+          <a:p>
+            <a:pPr>
+              <a:spcBef>
+                <a:spcPts val="500"/>
+              </a:spcBef>
+              <a:buClr>
+                <a:schemeClr val="accent1">
+                  <a:lumMod val="60000"/>
+                  <a:lumOff val="40000"/>
+                </a:schemeClr>
+              </a:buClr>
+            </a:pPr>
+            <a:r>
+              <a:rPr lang="en-US" altLang="ko-KR" sz="1300" b="1"/>
+              <a:t>  </a:t>
+            </a:r>
+            <a:r>
+              <a:rPr lang="ko-KR" altLang="en-US" sz="1300" b="1"/>
+              <a:t> </a:t>
+            </a:r>
+            <a:r>
+              <a:rPr lang="en-US" altLang="ko-KR" sz="1300" b="1"/>
+              <a:t>『</a:t>
+            </a:r>
+            <a:r>
+              <a:rPr lang="ko-KR" altLang="en-US" sz="1300" b="1"/>
+              <a:t>업무 지침 네비게이터</a:t>
+            </a:r>
+            <a:r>
+              <a:rPr lang="en-US" altLang="ko-KR" sz="1300" b="1"/>
+              <a:t>』 </a:t>
+            </a:r>
+            <a:r>
+              <a:rPr lang="ko-KR" altLang="en-US" sz="1300" b="1"/>
+              <a:t>구축</a:t>
+            </a:r>
+            <a:endParaRPr lang="ko-KR" altLang="en-US" sz="1300"/>
+          </a:p>
+        </p:txBody>
+      </p:sp>
+      <p:pic>
+        <p:nvPicPr>
+          <p:cNvPr id="34" name="그림 33">
+            <a:extLst>
+              <a:ext uri="{FF2B5EF4-FFF2-40B4-BE49-F238E27FC236}">
+                <a16:creationId xmlns:a16="http://schemas.microsoft.com/office/drawing/2014/main" id="{9D207778-395A-407B-BF36-D2E69C775692}"/>
+              </a:ext>
+            </a:extLst>
+          </p:cNvPr>
+          <p:cNvPicPr>
+            <a:picLocks noChangeAspect="1"/>
+          </p:cNvPicPr>
+          <p:nvPr/>
+        </p:nvPicPr>
+        <p:blipFill>
+          <a:blip r:embed="rId14">
+            <a:extLst>
+              <a:ext uri="{28A0092B-C50C-407E-A947-70E740481C1C}">
+                <a14:useLocalDpi xmlns:a14="http://schemas.microsoft.com/office/drawing/2010/main" val="0"/>
+              </a:ext>
+            </a:extLst>
+          </a:blip>
+          <a:stretch>
+            <a:fillRect/>
+          </a:stretch>
+        </p:blipFill>
+        <p:spPr>
+          <a:xfrm>
+            <a:off x="7256630" y="1814756"/>
+            <a:ext cx="1899424" cy="1068994"/>
+          </a:xfrm>
+          <a:prstGeom prst="rect">
+            <a:avLst/>
+          </a:prstGeom>
+        </p:spPr>
+      </p:pic>
+      <p:sp>
+        <p:nvSpPr>
+          <p:cNvPr id="56" name="TextBox 55">
+            <a:extLst>
+              <a:ext uri="{FF2B5EF4-FFF2-40B4-BE49-F238E27FC236}">
+                <a16:creationId xmlns:a16="http://schemas.microsoft.com/office/drawing/2014/main" id="{84379734-9EBD-4B03-9465-8E1A8B1D887B}"/>
+              </a:ext>
+            </a:extLst>
+          </p:cNvPr>
+          <p:cNvSpPr txBox="1"/>
+          <p:nvPr/>
+        </p:nvSpPr>
+        <p:spPr>
+          <a:xfrm>
+            <a:off x="8792918" y="283028"/>
+            <a:ext cx="1091310" cy="307777"/>
+          </a:xfrm>
+          <a:prstGeom prst="rect">
+            <a:avLst/>
+          </a:prstGeom>
+          <a:noFill/>
+        </p:spPr>
+        <p:txBody>
+          <a:bodyPr wrap="square" rtlCol="0">
+            <a:spAutoFit/>
+          </a:bodyPr>
+          <a:lstStyle/>
+          <a:p>
+            <a:pPr algn="r"/>
+            <a:r>
+              <a:rPr lang="en-US" altLang="ko-KR" sz="1400" b="1">
+                <a:solidFill>
+                  <a:schemeClr val="bg1"/>
+                </a:solidFill>
+                <a:latin typeface="+mj-ea"/>
+                <a:ea typeface="+mj-ea"/>
+              </a:rPr>
+              <a:t>(1/6)</a:t>
+            </a:r>
+            <a:endParaRPr lang="ko-KR" altLang="en-US" sz="1400" b="1">
+              <a:solidFill>
+                <a:schemeClr val="bg1"/>
+              </a:solidFill>
+              <a:latin typeface="+mj-ea"/>
+              <a:ea typeface="+mj-ea"/>
+            </a:endParaRPr>
           </a:p>
         </p:txBody>
       </p:sp>
       <p:grpSp>
         <p:nvGrpSpPr>
-          <p:cNvPr id="42" name="그룹 41">
-            <a:extLst>
-              <a:ext uri="{FF2B5EF4-FFF2-40B4-BE49-F238E27FC236}">
-                <a16:creationId xmlns:a16="http://schemas.microsoft.com/office/drawing/2014/main" id="{D707C160-1EC8-44FC-B4D0-7B733975BF70}"/>
+          <p:cNvPr id="49" name="그룹 48">
+            <a:extLst>
+              <a:ext uri="{FF2B5EF4-FFF2-40B4-BE49-F238E27FC236}">
+                <a16:creationId xmlns:a16="http://schemas.microsoft.com/office/drawing/2014/main" id="{DB273691-F70E-4DA3-8FC4-27B912BBBBB3}"/>
               </a:ext>
             </a:extLst>
           </p:cNvPr>
@@ -5305,7 +6347,7 @@
         </p:nvGrpSpPr>
         <p:grpSpPr>
           <a:xfrm>
-            <a:off x="408628" y="6025044"/>
+            <a:off x="325500" y="6138454"/>
             <a:ext cx="511817" cy="431452"/>
             <a:chOff x="-895525" y="3274733"/>
             <a:chExt cx="619300" cy="474597"/>
@@ -5313,10 +6355,10 @@
         </p:grpSpPr>
         <p:sp>
           <p:nvSpPr>
-            <p:cNvPr id="40" name="타원 39">
+            <p:cNvPr id="53" name="타원 52">
               <a:extLst>
                 <a:ext uri="{FF2B5EF4-FFF2-40B4-BE49-F238E27FC236}">
-                  <a16:creationId xmlns:a16="http://schemas.microsoft.com/office/drawing/2014/main" id="{DA20131F-F70E-4A56-981E-03309AF0D12C}"/>
+                  <a16:creationId xmlns:a16="http://schemas.microsoft.com/office/drawing/2014/main" id="{1FF74794-DBB2-42EC-9656-063B13795A7D}"/>
                 </a:ext>
               </a:extLst>
             </p:cNvPr>
@@ -5362,10 +6404,10 @@
         </p:sp>
         <p:sp>
           <p:nvSpPr>
-            <p:cNvPr id="41" name="화살표: 오른쪽 40">
+            <p:cNvPr id="54" name="화살표: 오른쪽 53">
               <a:extLst>
                 <a:ext uri="{FF2B5EF4-FFF2-40B4-BE49-F238E27FC236}">
-                  <a16:creationId xmlns:a16="http://schemas.microsoft.com/office/drawing/2014/main" id="{82487A50-08B9-4EF0-9A7E-A9A654CF1493}"/>
+                  <a16:creationId xmlns:a16="http://schemas.microsoft.com/office/drawing/2014/main" id="{8CA3DC86-BB4D-45F2-B178-FE7EBBAA57FA}"/>
                 </a:ext>
               </a:extLst>
             </p:cNvPr>
@@ -5421,1053 +6463,10 @@
           </p:txBody>
         </p:sp>
       </p:grpSp>
-      <p:sp>
-        <p:nvSpPr>
-          <p:cNvPr id="62" name="사각형: 둥근 모서리 61">
-            <a:extLst>
-              <a:ext uri="{FF2B5EF4-FFF2-40B4-BE49-F238E27FC236}">
-                <a16:creationId xmlns:a16="http://schemas.microsoft.com/office/drawing/2014/main" id="{BFB32620-BF19-4B11-B076-46885445DCD3}"/>
-              </a:ext>
-            </a:extLst>
-          </p:cNvPr>
-          <p:cNvSpPr>
-            <a:spLocks noGrp="1"/>
-          </p:cNvSpPr>
-          <p:nvPr/>
-        </p:nvSpPr>
-        <p:spPr>
-          <a:xfrm>
-            <a:off x="330495" y="4817740"/>
-            <a:ext cx="9409457" cy="999163"/>
-          </a:xfrm>
-          <a:prstGeom prst="roundRect">
-            <a:avLst>
-              <a:gd name="adj" fmla="val 5139"/>
-            </a:avLst>
-          </a:prstGeom>
-          <a:noFill/>
-          <a:ln w="12700">
-            <a:solidFill>
-              <a:schemeClr val="bg1">
-                <a:lumMod val="75000"/>
-              </a:schemeClr>
-            </a:solidFill>
-            <a:prstDash val="solid"/>
-          </a:ln>
-        </p:spPr>
-        <p:txBody>
-          <a:bodyPr anchor="ctr" anchorCtr="0"/>
-          <a:lstStyle/>
-          <a:p>
-            <a:pPr algn="ctr"/>
-            <a:endParaRPr lang="ko-KR" altLang="en-US" sz="1400" b="1"/>
-          </a:p>
-        </p:txBody>
-      </p:sp>
-      <p:sp>
-        <p:nvSpPr>
-          <p:cNvPr id="64" name="이등변 삼각형 63">
-            <a:extLst>
-              <a:ext uri="{FF2B5EF4-FFF2-40B4-BE49-F238E27FC236}">
-                <a16:creationId xmlns:a16="http://schemas.microsoft.com/office/drawing/2014/main" id="{CBE0F7A1-7FBC-4044-82C1-997A319E3071}"/>
-              </a:ext>
-            </a:extLst>
-          </p:cNvPr>
-          <p:cNvSpPr/>
-          <p:nvPr/>
-        </p:nvSpPr>
-        <p:spPr>
-          <a:xfrm rot="5400000">
-            <a:off x="2699726" y="5328339"/>
-            <a:ext cx="166088" cy="120792"/>
-          </a:xfrm>
-          <a:prstGeom prst="triangle">
-            <a:avLst/>
-          </a:prstGeom>
-          <a:solidFill>
-            <a:schemeClr val="bg1">
-              <a:lumMod val="75000"/>
-            </a:schemeClr>
-          </a:solidFill>
-          <a:ln>
-            <a:noFill/>
-          </a:ln>
-        </p:spPr>
-        <p:style>
-          <a:lnRef idx="2">
-            <a:schemeClr val="accent1">
-              <a:shade val="50000"/>
-            </a:schemeClr>
-          </a:lnRef>
-          <a:fillRef idx="1">
-            <a:schemeClr val="accent1"/>
-          </a:fillRef>
-          <a:effectRef idx="0">
-            <a:schemeClr val="accent1"/>
-          </a:effectRef>
-          <a:fontRef idx="minor">
-            <a:schemeClr val="lt1"/>
-          </a:fontRef>
-        </p:style>
-        <p:txBody>
-          <a:bodyPr rtlCol="0" anchor="ctr"/>
-          <a:lstStyle/>
-          <a:p>
-            <a:pPr algn="ctr"/>
-            <a:endParaRPr lang="ko-KR" altLang="en-US"/>
-          </a:p>
-        </p:txBody>
-      </p:sp>
-      <p:sp>
-        <p:nvSpPr>
-          <p:cNvPr id="65" name="이등변 삼각형 64">
-            <a:extLst>
-              <a:ext uri="{FF2B5EF4-FFF2-40B4-BE49-F238E27FC236}">
-                <a16:creationId xmlns:a16="http://schemas.microsoft.com/office/drawing/2014/main" id="{2EDC7E73-7337-42B2-928F-D70EB47D31EC}"/>
-              </a:ext>
-            </a:extLst>
-          </p:cNvPr>
-          <p:cNvSpPr/>
-          <p:nvPr/>
-        </p:nvSpPr>
-        <p:spPr>
-          <a:xfrm rot="5400000">
-            <a:off x="7072446" y="5330017"/>
-            <a:ext cx="166088" cy="120792"/>
-          </a:xfrm>
-          <a:prstGeom prst="triangle">
-            <a:avLst/>
-          </a:prstGeom>
-          <a:solidFill>
-            <a:schemeClr val="bg1">
-              <a:lumMod val="75000"/>
-            </a:schemeClr>
-          </a:solidFill>
-          <a:ln>
-            <a:noFill/>
-          </a:ln>
-        </p:spPr>
-        <p:style>
-          <a:lnRef idx="2">
-            <a:schemeClr val="accent1">
-              <a:shade val="50000"/>
-            </a:schemeClr>
-          </a:lnRef>
-          <a:fillRef idx="1">
-            <a:schemeClr val="accent1"/>
-          </a:fillRef>
-          <a:effectRef idx="0">
-            <a:schemeClr val="accent1"/>
-          </a:effectRef>
-          <a:fontRef idx="minor">
-            <a:schemeClr val="lt1"/>
-          </a:fontRef>
-        </p:style>
-        <p:txBody>
-          <a:bodyPr rtlCol="0" anchor="ctr"/>
-          <a:lstStyle/>
-          <a:p>
-            <a:pPr algn="ctr"/>
-            <a:endParaRPr lang="ko-KR" altLang="en-US"/>
-          </a:p>
-        </p:txBody>
-      </p:sp>
-      <p:sp>
-        <p:nvSpPr>
-          <p:cNvPr id="3" name="사각형: 둥근 모서리 2">
-            <a:extLst>
-              <a:ext uri="{FF2B5EF4-FFF2-40B4-BE49-F238E27FC236}">
-                <a16:creationId xmlns:a16="http://schemas.microsoft.com/office/drawing/2014/main" id="{1D30FD96-B91F-4CF6-97C0-E4128ECEA73A}"/>
-              </a:ext>
-            </a:extLst>
-          </p:cNvPr>
-          <p:cNvSpPr/>
-          <p:nvPr/>
-        </p:nvSpPr>
-        <p:spPr>
-          <a:xfrm>
-            <a:off x="330495" y="1217806"/>
-            <a:ext cx="2985462" cy="2881439"/>
-          </a:xfrm>
-          <a:prstGeom prst="roundRect">
-            <a:avLst>
-              <a:gd name="adj" fmla="val 5661"/>
-            </a:avLst>
-          </a:prstGeom>
-          <a:solidFill>
-            <a:schemeClr val="bg1"/>
-          </a:solidFill>
-          <a:ln>
-            <a:noFill/>
-          </a:ln>
-          <a:effectLst>
-            <a:outerShdw blurRad="228600" dist="50800" dir="5400000" rotWithShape="0">
-              <a:srgbClr val="1B2A4A">
-                <a:alpha val="22000"/>
-              </a:srgbClr>
-            </a:outerShdw>
-          </a:effectLst>
-        </p:spPr>
-        <p:style>
-          <a:lnRef idx="2">
-            <a:schemeClr val="accent1">
-              <a:shade val="50000"/>
-            </a:schemeClr>
-          </a:lnRef>
-          <a:fillRef idx="1">
-            <a:schemeClr val="accent1"/>
-          </a:fillRef>
-          <a:effectRef idx="0">
-            <a:schemeClr val="accent1"/>
-          </a:effectRef>
-          <a:fontRef idx="minor">
-            <a:schemeClr val="lt1"/>
-          </a:fontRef>
-        </p:style>
-        <p:txBody>
-          <a:bodyPr rtlCol="0" anchor="ctr"/>
-          <a:lstStyle/>
-          <a:p>
-            <a:pPr algn="ctr"/>
-            <a:endParaRPr lang="ko-KR" altLang="en-US"/>
-          </a:p>
-        </p:txBody>
-      </p:sp>
-      <p:sp>
-        <p:nvSpPr>
-          <p:cNvPr id="45" name="사각형: 둥근 모서리 44">
-            <a:extLst>
-              <a:ext uri="{FF2B5EF4-FFF2-40B4-BE49-F238E27FC236}">
-                <a16:creationId xmlns:a16="http://schemas.microsoft.com/office/drawing/2014/main" id="{D1C99C70-2C60-484C-89CD-FC823E3E9CFE}"/>
-              </a:ext>
-            </a:extLst>
-          </p:cNvPr>
-          <p:cNvSpPr/>
-          <p:nvPr/>
-        </p:nvSpPr>
-        <p:spPr>
-          <a:xfrm>
-            <a:off x="3527540" y="1217806"/>
-            <a:ext cx="2985462" cy="2881439"/>
-          </a:xfrm>
-          <a:prstGeom prst="roundRect">
-            <a:avLst>
-              <a:gd name="adj" fmla="val 5661"/>
-            </a:avLst>
-          </a:prstGeom>
-          <a:solidFill>
-            <a:schemeClr val="bg1"/>
-          </a:solidFill>
-          <a:ln>
-            <a:noFill/>
-          </a:ln>
-          <a:effectLst>
-            <a:outerShdw blurRad="228600" dist="50800" dir="5400000" rotWithShape="0">
-              <a:srgbClr val="1B2A4A">
-                <a:alpha val="22000"/>
-              </a:srgbClr>
-            </a:outerShdw>
-          </a:effectLst>
-        </p:spPr>
-        <p:style>
-          <a:lnRef idx="2">
-            <a:schemeClr val="accent1">
-              <a:shade val="50000"/>
-            </a:schemeClr>
-          </a:lnRef>
-          <a:fillRef idx="1">
-            <a:schemeClr val="accent1"/>
-          </a:fillRef>
-          <a:effectRef idx="0">
-            <a:schemeClr val="accent1"/>
-          </a:effectRef>
-          <a:fontRef idx="minor">
-            <a:schemeClr val="lt1"/>
-          </a:fontRef>
-        </p:style>
-        <p:txBody>
-          <a:bodyPr rtlCol="0" anchor="ctr"/>
-          <a:lstStyle/>
-          <a:p>
-            <a:pPr algn="ctr"/>
-            <a:endParaRPr lang="ko-KR" altLang="en-US"/>
-          </a:p>
-        </p:txBody>
-      </p:sp>
-      <p:sp>
-        <p:nvSpPr>
-          <p:cNvPr id="46" name="사각형: 둥근 모서리 45">
-            <a:extLst>
-              <a:ext uri="{FF2B5EF4-FFF2-40B4-BE49-F238E27FC236}">
-                <a16:creationId xmlns:a16="http://schemas.microsoft.com/office/drawing/2014/main" id="{12465051-9ABA-4C7D-A1B9-A3D705ADEC72}"/>
-              </a:ext>
-            </a:extLst>
-          </p:cNvPr>
-          <p:cNvSpPr/>
-          <p:nvPr/>
-        </p:nvSpPr>
-        <p:spPr>
-          <a:xfrm>
-            <a:off x="6713611" y="1217806"/>
-            <a:ext cx="2985462" cy="2881439"/>
-          </a:xfrm>
-          <a:prstGeom prst="roundRect">
-            <a:avLst>
-              <a:gd name="adj" fmla="val 5661"/>
-            </a:avLst>
-          </a:prstGeom>
-          <a:solidFill>
-            <a:schemeClr val="bg1"/>
-          </a:solidFill>
-          <a:ln>
-            <a:noFill/>
-          </a:ln>
-          <a:effectLst>
-            <a:outerShdw blurRad="228600" dist="50800" dir="5400000" rotWithShape="0">
-              <a:srgbClr val="1B2A4A">
-                <a:alpha val="22000"/>
-              </a:srgbClr>
-            </a:outerShdw>
-          </a:effectLst>
-        </p:spPr>
-        <p:style>
-          <a:lnRef idx="2">
-            <a:schemeClr val="accent1">
-              <a:shade val="50000"/>
-            </a:schemeClr>
-          </a:lnRef>
-          <a:fillRef idx="1">
-            <a:schemeClr val="accent1"/>
-          </a:fillRef>
-          <a:effectRef idx="0">
-            <a:schemeClr val="accent1"/>
-          </a:effectRef>
-          <a:fontRef idx="minor">
-            <a:schemeClr val="lt1"/>
-          </a:fontRef>
-        </p:style>
-        <p:txBody>
-          <a:bodyPr rtlCol="0" anchor="ctr"/>
-          <a:lstStyle/>
-          <a:p>
-            <a:pPr algn="ctr"/>
-            <a:endParaRPr lang="ko-KR" altLang="en-US"/>
-          </a:p>
-        </p:txBody>
-      </p:sp>
-      <p:sp>
-        <p:nvSpPr>
-          <p:cNvPr id="12" name="TextBox 11">
-            <a:extLst>
-              <a:ext uri="{FF2B5EF4-FFF2-40B4-BE49-F238E27FC236}">
-                <a16:creationId xmlns:a16="http://schemas.microsoft.com/office/drawing/2014/main" id="{1FA75749-6157-40BB-A74E-394D6C347B77}"/>
-              </a:ext>
-            </a:extLst>
-          </p:cNvPr>
-          <p:cNvSpPr txBox="1"/>
-          <p:nvPr/>
-        </p:nvSpPr>
-        <p:spPr>
-          <a:xfrm>
-            <a:off x="562773" y="1335924"/>
-            <a:ext cx="2520908" cy="323165"/>
-          </a:xfrm>
-          <a:prstGeom prst="rect">
-            <a:avLst/>
-          </a:prstGeom>
-          <a:noFill/>
-        </p:spPr>
-        <p:txBody>
-          <a:bodyPr wrap="square" rtlCol="0">
-            <a:spAutoFit/>
-          </a:bodyPr>
-          <a:lstStyle/>
-          <a:p>
-            <a:pPr algn="ctr"/>
-            <a:r>
-              <a:rPr lang="ko-KR" altLang="en-US" sz="1500" b="1"/>
-              <a:t>회사 업무</a:t>
-            </a:r>
-          </a:p>
-        </p:txBody>
-      </p:sp>
-      <p:cxnSp>
-        <p:nvCxnSpPr>
-          <p:cNvPr id="14" name="직선 연결선 13">
-            <a:extLst>
-              <a:ext uri="{FF2B5EF4-FFF2-40B4-BE49-F238E27FC236}">
-                <a16:creationId xmlns:a16="http://schemas.microsoft.com/office/drawing/2014/main" id="{3336D8E1-00F3-4635-8A14-6290ADD2EACF}"/>
-              </a:ext>
-            </a:extLst>
-          </p:cNvPr>
-          <p:cNvCxnSpPr>
-            <a:cxnSpLocks/>
-          </p:cNvCxnSpPr>
-          <p:nvPr/>
-        </p:nvCxnSpPr>
-        <p:spPr>
-          <a:xfrm>
-            <a:off x="470559" y="1739203"/>
-            <a:ext cx="2705337" cy="0"/>
-          </a:xfrm>
-          <a:prstGeom prst="line">
-            <a:avLst/>
-          </a:prstGeom>
-        </p:spPr>
-        <p:style>
-          <a:lnRef idx="1">
-            <a:schemeClr val="accent1"/>
-          </a:lnRef>
-          <a:fillRef idx="0">
-            <a:schemeClr val="accent1"/>
-          </a:fillRef>
-          <a:effectRef idx="0">
-            <a:schemeClr val="accent1"/>
-          </a:effectRef>
-          <a:fontRef idx="minor">
-            <a:schemeClr val="tx1"/>
-          </a:fontRef>
-        </p:style>
-      </p:cxnSp>
-      <p:sp>
-        <p:nvSpPr>
-          <p:cNvPr id="50" name="TextBox 49">
-            <a:extLst>
-              <a:ext uri="{FF2B5EF4-FFF2-40B4-BE49-F238E27FC236}">
-                <a16:creationId xmlns:a16="http://schemas.microsoft.com/office/drawing/2014/main" id="{6EBBEF99-4056-4026-9C0A-5F83DA10A174}"/>
-              </a:ext>
-            </a:extLst>
-          </p:cNvPr>
-          <p:cNvSpPr txBox="1"/>
-          <p:nvPr/>
-        </p:nvSpPr>
-        <p:spPr>
-          <a:xfrm>
-            <a:off x="3779919" y="1335924"/>
-            <a:ext cx="2520908" cy="323165"/>
-          </a:xfrm>
-          <a:prstGeom prst="rect">
-            <a:avLst/>
-          </a:prstGeom>
-          <a:noFill/>
-        </p:spPr>
-        <p:txBody>
-          <a:bodyPr wrap="square" rtlCol="0">
-            <a:spAutoFit/>
-          </a:bodyPr>
-          <a:lstStyle/>
-          <a:p>
-            <a:pPr algn="ctr"/>
-            <a:r>
-              <a:rPr lang="ko-KR" altLang="en-US" sz="1500" b="1"/>
-              <a:t>문제점</a:t>
-            </a:r>
-          </a:p>
-        </p:txBody>
-      </p:sp>
-      <p:cxnSp>
-        <p:nvCxnSpPr>
-          <p:cNvPr id="52" name="직선 연결선 51">
-            <a:extLst>
-              <a:ext uri="{FF2B5EF4-FFF2-40B4-BE49-F238E27FC236}">
-                <a16:creationId xmlns:a16="http://schemas.microsoft.com/office/drawing/2014/main" id="{6F79F0D2-2158-4094-8A1A-0BCE7B519E87}"/>
-              </a:ext>
-            </a:extLst>
-          </p:cNvPr>
-          <p:cNvCxnSpPr>
-            <a:cxnSpLocks/>
-          </p:cNvCxnSpPr>
-          <p:nvPr/>
-        </p:nvCxnSpPr>
-        <p:spPr>
-          <a:xfrm>
-            <a:off x="3687705" y="1739203"/>
-            <a:ext cx="2705337" cy="0"/>
-          </a:xfrm>
-          <a:prstGeom prst="line">
-            <a:avLst/>
-          </a:prstGeom>
-        </p:spPr>
-        <p:style>
-          <a:lnRef idx="1">
-            <a:schemeClr val="accent1"/>
-          </a:lnRef>
-          <a:fillRef idx="0">
-            <a:schemeClr val="accent1"/>
-          </a:fillRef>
-          <a:effectRef idx="0">
-            <a:schemeClr val="accent1"/>
-          </a:effectRef>
-          <a:fontRef idx="minor">
-            <a:schemeClr val="tx1"/>
-          </a:fontRef>
-        </p:style>
-      </p:cxnSp>
-      <p:sp>
-        <p:nvSpPr>
-          <p:cNvPr id="57" name="TextBox 56">
-            <a:extLst>
-              <a:ext uri="{FF2B5EF4-FFF2-40B4-BE49-F238E27FC236}">
-                <a16:creationId xmlns:a16="http://schemas.microsoft.com/office/drawing/2014/main" id="{C584307B-0BB5-4521-B4EE-F153D3B5F5AE}"/>
-              </a:ext>
-            </a:extLst>
-          </p:cNvPr>
-          <p:cNvSpPr txBox="1"/>
-          <p:nvPr/>
-        </p:nvSpPr>
-        <p:spPr>
-          <a:xfrm>
-            <a:off x="6945888" y="1335924"/>
-            <a:ext cx="2520908" cy="323165"/>
-          </a:xfrm>
-          <a:prstGeom prst="rect">
-            <a:avLst/>
-          </a:prstGeom>
-          <a:noFill/>
-        </p:spPr>
-        <p:txBody>
-          <a:bodyPr wrap="square" rtlCol="0">
-            <a:spAutoFit/>
-          </a:bodyPr>
-          <a:lstStyle/>
-          <a:p>
-            <a:pPr algn="ctr"/>
-            <a:r>
-              <a:rPr lang="ko-KR" altLang="en-US" sz="1500" b="1"/>
-              <a:t>개선 방안</a:t>
-            </a:r>
-          </a:p>
-        </p:txBody>
-      </p:sp>
-      <p:cxnSp>
-        <p:nvCxnSpPr>
-          <p:cNvPr id="60" name="직선 연결선 59">
-            <a:extLst>
-              <a:ext uri="{FF2B5EF4-FFF2-40B4-BE49-F238E27FC236}">
-                <a16:creationId xmlns:a16="http://schemas.microsoft.com/office/drawing/2014/main" id="{D9796B37-8472-4D2F-A913-646D47B51A80}"/>
-              </a:ext>
-            </a:extLst>
-          </p:cNvPr>
-          <p:cNvCxnSpPr>
-            <a:cxnSpLocks/>
-          </p:cNvCxnSpPr>
-          <p:nvPr/>
-        </p:nvCxnSpPr>
-        <p:spPr>
-          <a:xfrm>
-            <a:off x="6853674" y="1739203"/>
-            <a:ext cx="2705337" cy="0"/>
-          </a:xfrm>
-          <a:prstGeom prst="line">
-            <a:avLst/>
-          </a:prstGeom>
-        </p:spPr>
-        <p:style>
-          <a:lnRef idx="1">
-            <a:schemeClr val="accent1"/>
-          </a:lnRef>
-          <a:fillRef idx="0">
-            <a:schemeClr val="accent1"/>
-          </a:fillRef>
-          <a:effectRef idx="0">
-            <a:schemeClr val="accent1"/>
-          </a:effectRef>
-          <a:fontRef idx="minor">
-            <a:schemeClr val="tx1"/>
-          </a:fontRef>
-        </p:style>
-      </p:cxnSp>
-      <p:sp>
-        <p:nvSpPr>
-          <p:cNvPr id="39" name="TextBox 38">
-            <a:extLst>
-              <a:ext uri="{FF2B5EF4-FFF2-40B4-BE49-F238E27FC236}">
-                <a16:creationId xmlns:a16="http://schemas.microsoft.com/office/drawing/2014/main" id="{DFE79726-461E-4F9B-A835-7A3125F4632A}"/>
-              </a:ext>
-            </a:extLst>
-          </p:cNvPr>
-          <p:cNvSpPr txBox="1"/>
-          <p:nvPr/>
-        </p:nvSpPr>
-        <p:spPr>
-          <a:xfrm>
-            <a:off x="349148" y="2995774"/>
-            <a:ext cx="2985461" cy="948978"/>
-          </a:xfrm>
-          <a:prstGeom prst="rect">
-            <a:avLst/>
-          </a:prstGeom>
-          <a:noFill/>
-        </p:spPr>
-        <p:txBody>
-          <a:bodyPr wrap="square" rtlCol="0">
-            <a:spAutoFit/>
-          </a:bodyPr>
-          <a:lstStyle/>
-          <a:p>
-            <a:pPr marL="90488" indent="-90488">
-              <a:spcBef>
-                <a:spcPts val="500"/>
-              </a:spcBef>
-              <a:spcAft>
-                <a:spcPts val="500"/>
-              </a:spcAft>
-              <a:buClr>
-                <a:schemeClr val="accent1">
-                  <a:lumMod val="60000"/>
-                  <a:lumOff val="40000"/>
-                </a:schemeClr>
-              </a:buClr>
-              <a:buFont typeface="Wingdings" panose="05000000000000000000" pitchFamily="2" charset="2"/>
-              <a:buChar char="§"/>
-            </a:pPr>
-            <a:r>
-              <a:rPr lang="ko-KR" altLang="en-US" sz="1300"/>
-              <a:t> 정해진 프로세스와 절차에 따라 처리</a:t>
-            </a:r>
-            <a:endParaRPr lang="en-US" altLang="ko-KR" sz="1300"/>
-          </a:p>
-          <a:p>
-            <a:pPr marL="90488" indent="-90488">
-              <a:spcBef>
-                <a:spcPts val="500"/>
-              </a:spcBef>
-              <a:spcAft>
-                <a:spcPts val="500"/>
-              </a:spcAft>
-              <a:buClr>
-                <a:schemeClr val="accent1">
-                  <a:lumMod val="60000"/>
-                  <a:lumOff val="40000"/>
-                </a:schemeClr>
-              </a:buClr>
-              <a:buFont typeface="Wingdings" panose="05000000000000000000" pitchFamily="2" charset="2"/>
-              <a:buChar char="§"/>
-            </a:pPr>
-            <a:r>
-              <a:rPr lang="en-US" altLang="ko-KR" sz="1300"/>
-              <a:t> </a:t>
-            </a:r>
-            <a:r>
-              <a:rPr lang="ko-KR" altLang="en-US" sz="1300"/>
-              <a:t>담당자가 바뀌어도 필수 절차 준수</a:t>
-            </a:r>
-            <a:endParaRPr lang="en-US" altLang="ko-KR" sz="1300"/>
-          </a:p>
-          <a:p>
-            <a:pPr marL="90488" indent="-90488">
-              <a:spcBef>
-                <a:spcPts val="500"/>
-              </a:spcBef>
-              <a:spcAft>
-                <a:spcPts val="500"/>
-              </a:spcAft>
-              <a:buClr>
-                <a:schemeClr val="accent1">
-                  <a:lumMod val="60000"/>
-                  <a:lumOff val="40000"/>
-                </a:schemeClr>
-              </a:buClr>
-              <a:buFont typeface="Wingdings" panose="05000000000000000000" pitchFamily="2" charset="2"/>
-              <a:buChar char="§"/>
-            </a:pPr>
-            <a:r>
-              <a:rPr lang="ko-KR" altLang="en-US" sz="1300"/>
-              <a:t> 일관된 결과물 확보 필요</a:t>
-            </a:r>
-          </a:p>
-        </p:txBody>
-      </p:sp>
-      <p:pic>
-        <p:nvPicPr>
-          <p:cNvPr id="13" name="그래픽 12" descr="체크리스트 단색으로 채워진">
-            <a:extLst>
-              <a:ext uri="{FF2B5EF4-FFF2-40B4-BE49-F238E27FC236}">
-                <a16:creationId xmlns:a16="http://schemas.microsoft.com/office/drawing/2014/main" id="{0135F75B-0F42-4B60-AC08-FD2CF59A281B}"/>
-              </a:ext>
-            </a:extLst>
-          </p:cNvPr>
-          <p:cNvPicPr>
-            <a:picLocks noChangeAspect="1"/>
-          </p:cNvPicPr>
-          <p:nvPr/>
-        </p:nvPicPr>
-        <p:blipFill>
-          <a:blip r:embed="rId12">
-            <a:extLst>
-              <a:ext uri="{28A0092B-C50C-407E-A947-70E740481C1C}">
-                <a14:useLocalDpi xmlns:a14="http://schemas.microsoft.com/office/drawing/2010/main" val="0"/>
-              </a:ext>
-            </a:extLst>
-          </a:blip>
-          <a:stretch>
-            <a:fillRect/>
-          </a:stretch>
-        </p:blipFill>
-        <p:spPr>
-          <a:xfrm>
-            <a:off x="1475519" y="1959127"/>
-            <a:ext cx="755703" cy="755703"/>
-          </a:xfrm>
-          <a:prstGeom prst="rect">
-            <a:avLst/>
-          </a:prstGeom>
-        </p:spPr>
-      </p:pic>
-      <p:sp>
-        <p:nvSpPr>
-          <p:cNvPr id="43" name="TextBox 42">
-            <a:extLst>
-              <a:ext uri="{FF2B5EF4-FFF2-40B4-BE49-F238E27FC236}">
-                <a16:creationId xmlns:a16="http://schemas.microsoft.com/office/drawing/2014/main" id="{80CE7C00-4BD4-4C02-BA3C-66110498AE87}"/>
-              </a:ext>
-            </a:extLst>
-          </p:cNvPr>
-          <p:cNvSpPr txBox="1"/>
-          <p:nvPr/>
-        </p:nvSpPr>
-        <p:spPr>
-          <a:xfrm>
-            <a:off x="3527541" y="2995774"/>
-            <a:ext cx="3114419" cy="948978"/>
-          </a:xfrm>
-          <a:prstGeom prst="rect">
-            <a:avLst/>
-          </a:prstGeom>
-          <a:noFill/>
-        </p:spPr>
-        <p:txBody>
-          <a:bodyPr wrap="square" rtlCol="0">
-            <a:spAutoFit/>
-          </a:bodyPr>
-          <a:lstStyle/>
-          <a:p>
-            <a:pPr marL="90488" indent="-90488">
-              <a:spcBef>
-                <a:spcPts val="500"/>
-              </a:spcBef>
-              <a:spcAft>
-                <a:spcPts val="500"/>
-              </a:spcAft>
-              <a:buClr>
-                <a:schemeClr val="accent1">
-                  <a:lumMod val="60000"/>
-                  <a:lumOff val="40000"/>
-                </a:schemeClr>
-              </a:buClr>
-              <a:buFont typeface="Wingdings" panose="05000000000000000000" pitchFamily="2" charset="2"/>
-              <a:buChar char="§"/>
-            </a:pPr>
-            <a:r>
-              <a:rPr lang="ko-KR" altLang="en-US" sz="1300"/>
-              <a:t> </a:t>
-            </a:r>
-            <a:r>
-              <a:rPr lang="ko-KR" altLang="en-US" sz="1300" spc="-40"/>
-              <a:t>필요한 절차와 지침을 찾는데 시간 소요</a:t>
-            </a:r>
-            <a:endParaRPr lang="en-US" altLang="ko-KR" sz="1300" spc="-40"/>
-          </a:p>
-          <a:p>
-            <a:pPr marL="90488" indent="-90488">
-              <a:spcBef>
-                <a:spcPts val="500"/>
-              </a:spcBef>
-              <a:spcAft>
-                <a:spcPts val="500"/>
-              </a:spcAft>
-              <a:buClr>
-                <a:schemeClr val="accent1">
-                  <a:lumMod val="60000"/>
-                  <a:lumOff val="40000"/>
-                </a:schemeClr>
-              </a:buClr>
-              <a:buFont typeface="Wingdings" panose="05000000000000000000" pitchFamily="2" charset="2"/>
-              <a:buChar char="§"/>
-            </a:pPr>
-            <a:r>
-              <a:rPr lang="en-US" altLang="ko-KR" sz="1300" spc="-40"/>
-              <a:t> </a:t>
-            </a:r>
-            <a:r>
-              <a:rPr lang="ko-KR" altLang="en-US" sz="1300"/>
-              <a:t>담당자마다 처리 방식이 다름</a:t>
-            </a:r>
-            <a:endParaRPr lang="en-US" altLang="ko-KR" sz="1300"/>
-          </a:p>
-          <a:p>
-            <a:pPr marL="90488" indent="-90488">
-              <a:spcBef>
-                <a:spcPts val="500"/>
-              </a:spcBef>
-              <a:spcAft>
-                <a:spcPts val="500"/>
-              </a:spcAft>
-              <a:buClr>
-                <a:schemeClr val="accent1">
-                  <a:lumMod val="60000"/>
-                  <a:lumOff val="40000"/>
-                </a:schemeClr>
-              </a:buClr>
-              <a:buFont typeface="Wingdings" panose="05000000000000000000" pitchFamily="2" charset="2"/>
-              <a:buChar char="§"/>
-            </a:pPr>
-            <a:r>
-              <a:rPr lang="ko-KR" altLang="en-US" sz="1300"/>
-              <a:t> 업무 누락과 편차 발생</a:t>
-            </a:r>
-          </a:p>
-        </p:txBody>
-      </p:sp>
-      <p:pic>
-        <p:nvPicPr>
-          <p:cNvPr id="16" name="그래픽 15" descr="물음표 단색으로 채워진">
-            <a:extLst>
-              <a:ext uri="{FF2B5EF4-FFF2-40B4-BE49-F238E27FC236}">
-                <a16:creationId xmlns:a16="http://schemas.microsoft.com/office/drawing/2014/main" id="{37F2DC6D-0D3D-47E1-B656-D277CD737936}"/>
-              </a:ext>
-            </a:extLst>
-          </p:cNvPr>
-          <p:cNvPicPr>
-            <a:picLocks noChangeAspect="1"/>
-          </p:cNvPicPr>
-          <p:nvPr/>
-        </p:nvPicPr>
-        <p:blipFill>
-          <a:blip r:embed="rId13">
-            <a:extLst>
-              <a:ext uri="{28A0092B-C50C-407E-A947-70E740481C1C}">
-                <a14:useLocalDpi xmlns:a14="http://schemas.microsoft.com/office/drawing/2010/main" val="0"/>
-              </a:ext>
-            </a:extLst>
-          </a:blip>
-          <a:stretch>
-            <a:fillRect/>
-          </a:stretch>
-        </p:blipFill>
-        <p:spPr>
-          <a:xfrm>
-            <a:off x="4597946" y="1959127"/>
-            <a:ext cx="755703" cy="755703"/>
-          </a:xfrm>
-          <a:prstGeom prst="rect">
-            <a:avLst/>
-          </a:prstGeom>
-        </p:spPr>
-      </p:pic>
-      <p:sp>
-        <p:nvSpPr>
-          <p:cNvPr id="51" name="TextBox 50">
-            <a:extLst>
-              <a:ext uri="{FF2B5EF4-FFF2-40B4-BE49-F238E27FC236}">
-                <a16:creationId xmlns:a16="http://schemas.microsoft.com/office/drawing/2014/main" id="{BFA5A8A9-28C1-465A-8FA8-791A2996B35D}"/>
-              </a:ext>
-            </a:extLst>
-          </p:cNvPr>
-          <p:cNvSpPr txBox="1"/>
-          <p:nvPr/>
-        </p:nvSpPr>
-        <p:spPr>
-          <a:xfrm>
-            <a:off x="6713612" y="2995774"/>
-            <a:ext cx="2985461" cy="820738"/>
-          </a:xfrm>
-          <a:prstGeom prst="rect">
-            <a:avLst/>
-          </a:prstGeom>
-          <a:noFill/>
-        </p:spPr>
-        <p:txBody>
-          <a:bodyPr wrap="square" rtlCol="0">
-            <a:spAutoFit/>
-          </a:bodyPr>
-          <a:lstStyle/>
-          <a:p>
-            <a:pPr marL="90488" indent="-90488">
-              <a:spcBef>
-                <a:spcPts val="500"/>
-              </a:spcBef>
-              <a:buClr>
-                <a:schemeClr val="accent1">
-                  <a:lumMod val="60000"/>
-                  <a:lumOff val="40000"/>
-                </a:schemeClr>
-              </a:buClr>
-              <a:buFont typeface="Wingdings" panose="05000000000000000000" pitchFamily="2" charset="2"/>
-              <a:buChar char="§"/>
-            </a:pPr>
-            <a:r>
-              <a:rPr lang="ko-KR" altLang="en-US" sz="1300"/>
-              <a:t> </a:t>
-            </a:r>
-            <a:r>
-              <a:rPr lang="ko-KR" altLang="en-US" sz="1300" spc="-40">
-                <a:solidFill>
-                  <a:prstClr val="black"/>
-                </a:solidFill>
-                <a:latin typeface="맑은 고딕"/>
-                <a:ea typeface="맑은 고딕" panose="020B0503020000020004" pitchFamily="50" charset="-127"/>
-                <a:sym typeface="Wingdings" pitchFamily="2" charset="2"/>
-              </a:rPr>
-              <a:t>수행하려는 업무를 </a:t>
-            </a:r>
-            <a:r>
-              <a:rPr lang="ko-KR" altLang="en-US" sz="1300"/>
-              <a:t>입력하면 </a:t>
-            </a:r>
-            <a:endParaRPr lang="en-US" altLang="ko-KR" sz="1300"/>
-          </a:p>
-          <a:p>
-            <a:pPr>
-              <a:spcBef>
-                <a:spcPts val="500"/>
-              </a:spcBef>
-              <a:buClr>
-                <a:schemeClr val="accent1">
-                  <a:lumMod val="60000"/>
-                  <a:lumOff val="40000"/>
-                </a:schemeClr>
-              </a:buClr>
-            </a:pPr>
-            <a:r>
-              <a:rPr lang="en-US" altLang="ko-KR" sz="1300"/>
-              <a:t>   </a:t>
-            </a:r>
-            <a:r>
-              <a:rPr lang="ko-KR" altLang="en-US" sz="1300" b="1"/>
-              <a:t>처리 절차와 지침을 쉽게 안내하는</a:t>
-            </a:r>
-            <a:endParaRPr lang="en-US" altLang="ko-KR" sz="1300" b="1"/>
-          </a:p>
-          <a:p>
-            <a:pPr>
-              <a:spcBef>
-                <a:spcPts val="500"/>
-              </a:spcBef>
-              <a:buClr>
-                <a:schemeClr val="accent1">
-                  <a:lumMod val="60000"/>
-                  <a:lumOff val="40000"/>
-                </a:schemeClr>
-              </a:buClr>
-            </a:pPr>
-            <a:r>
-              <a:rPr lang="en-US" altLang="ko-KR" sz="1300" b="1"/>
-              <a:t>  </a:t>
-            </a:r>
-            <a:r>
-              <a:rPr lang="ko-KR" altLang="en-US" sz="1300" b="1"/>
-              <a:t> </a:t>
-            </a:r>
-            <a:r>
-              <a:rPr lang="en-US" altLang="ko-KR" sz="1300" b="1"/>
-              <a:t>『</a:t>
-            </a:r>
-            <a:r>
-              <a:rPr lang="ko-KR" altLang="en-US" sz="1300" b="1"/>
-              <a:t>업무 지침 네비게이터</a:t>
-            </a:r>
-            <a:r>
-              <a:rPr lang="en-US" altLang="ko-KR" sz="1300" b="1"/>
-              <a:t>』 </a:t>
-            </a:r>
-            <a:r>
-              <a:rPr lang="ko-KR" altLang="en-US" sz="1300" b="1"/>
-              <a:t>구축</a:t>
-            </a:r>
-            <a:endParaRPr lang="ko-KR" altLang="en-US" sz="1300"/>
-          </a:p>
-        </p:txBody>
-      </p:sp>
-      <p:pic>
-        <p:nvPicPr>
-          <p:cNvPr id="34" name="그림 33">
-            <a:extLst>
-              <a:ext uri="{FF2B5EF4-FFF2-40B4-BE49-F238E27FC236}">
-                <a16:creationId xmlns:a16="http://schemas.microsoft.com/office/drawing/2014/main" id="{9D207778-395A-407B-BF36-D2E69C775692}"/>
-              </a:ext>
-            </a:extLst>
-          </p:cNvPr>
-          <p:cNvPicPr>
-            <a:picLocks noChangeAspect="1"/>
-          </p:cNvPicPr>
-          <p:nvPr/>
-        </p:nvPicPr>
-        <p:blipFill>
-          <a:blip r:embed="rId14">
-            <a:extLst>
-              <a:ext uri="{28A0092B-C50C-407E-A947-70E740481C1C}">
-                <a14:useLocalDpi xmlns:a14="http://schemas.microsoft.com/office/drawing/2010/main" val="0"/>
-              </a:ext>
-            </a:extLst>
-          </a:blip>
-          <a:stretch>
-            <a:fillRect/>
-          </a:stretch>
-        </p:blipFill>
-        <p:spPr>
-          <a:xfrm>
-            <a:off x="7256630" y="1814756"/>
-            <a:ext cx="1899424" cy="1068994"/>
-          </a:xfrm>
-          <a:prstGeom prst="rect">
-            <a:avLst/>
-          </a:prstGeom>
-        </p:spPr>
-      </p:pic>
-      <p:sp>
-        <p:nvSpPr>
-          <p:cNvPr id="56" name="TextBox 55">
-            <a:extLst>
-              <a:ext uri="{FF2B5EF4-FFF2-40B4-BE49-F238E27FC236}">
-                <a16:creationId xmlns:a16="http://schemas.microsoft.com/office/drawing/2014/main" id="{84379734-9EBD-4B03-9465-8E1A8B1D887B}"/>
-              </a:ext>
-            </a:extLst>
-          </p:cNvPr>
-          <p:cNvSpPr txBox="1"/>
-          <p:nvPr/>
-        </p:nvSpPr>
-        <p:spPr>
-          <a:xfrm>
-            <a:off x="8792918" y="283028"/>
-            <a:ext cx="1091310" cy="307777"/>
-          </a:xfrm>
-          <a:prstGeom prst="rect">
-            <a:avLst/>
-          </a:prstGeom>
-          <a:noFill/>
-        </p:spPr>
-        <p:txBody>
-          <a:bodyPr wrap="square" rtlCol="0">
-            <a:spAutoFit/>
-          </a:bodyPr>
-          <a:lstStyle/>
-          <a:p>
-            <a:pPr algn="r"/>
-            <a:r>
-              <a:rPr lang="en-US" altLang="ko-KR" sz="1400" b="1">
-                <a:solidFill>
-                  <a:schemeClr val="bg1"/>
-                </a:solidFill>
-                <a:latin typeface="+mj-ea"/>
-                <a:ea typeface="+mj-ea"/>
-              </a:rPr>
-              <a:t>(1/6)</a:t>
-            </a:r>
-            <a:endParaRPr lang="ko-KR" altLang="en-US" sz="1400" b="1">
-              <a:solidFill>
-                <a:schemeClr val="bg1"/>
-              </a:solidFill>
-              <a:latin typeface="+mj-ea"/>
-              <a:ea typeface="+mj-ea"/>
-            </a:endParaRPr>
-          </a:p>
-        </p:txBody>
-      </p:sp>
     </p:spTree>
     <p:extLst>
       <p:ext uri="{BB962C8B-B14F-4D97-AF65-F5344CB8AC3E}">
-        <p14:creationId xmlns:p14="http://schemas.microsoft.com/office/powerpoint/2010/main" val="4171628309"/>
+        <p14:creationId xmlns:p14="http://schemas.microsoft.com/office/powerpoint/2010/main" val="3597174069"/>
       </p:ext>
     </p:extLst>
   </p:cSld>
@@ -6508,8 +6507,8 @@
         </p:nvSpPr>
         <p:spPr>
           <a:xfrm>
-            <a:off x="269680" y="6101535"/>
-            <a:ext cx="9420639" cy="505290"/>
+            <a:off x="325500" y="6101535"/>
+            <a:ext cx="9354428" cy="505290"/>
           </a:xfrm>
           <a:prstGeom prst="rect">
             <a:avLst/>
@@ -9935,7 +9934,7 @@
         </p:nvGrpSpPr>
         <p:grpSpPr>
           <a:xfrm>
-            <a:off x="335891" y="6138454"/>
+            <a:off x="325500" y="6138454"/>
             <a:ext cx="511817" cy="431452"/>
             <a:chOff x="-895525" y="3274733"/>
             <a:chExt cx="619300" cy="474597"/>
@@ -10054,7 +10053,7 @@
     </p:spTree>
     <p:extLst>
       <p:ext uri="{BB962C8B-B14F-4D97-AF65-F5344CB8AC3E}">
-        <p14:creationId xmlns:p14="http://schemas.microsoft.com/office/powerpoint/2010/main" val="1258906867"/>
+        <p14:creationId xmlns:p14="http://schemas.microsoft.com/office/powerpoint/2010/main" val="731787589"/>
       </p:ext>
     </p:extLst>
   </p:cSld>
@@ -10198,7 +10197,7 @@
                 <a:latin typeface="+mn-ea"/>
                 <a:cs typeface="+mn-cs"/>
               </a:rPr>
-              <a:t>. (</a:t>
+              <a:t>. </a:t>
             </a:r>
             <a:r>
               <a:rPr lang="en-US" altLang="ko-KR" sz="2000" b="1" spc="-100">
@@ -10216,7 +10215,7 @@
                 </a:solidFill>
                 <a:latin typeface="+mn-ea"/>
               </a:rPr>
-              <a:t> 시도</a:t>
+              <a:t> 시도를 통한</a:t>
             </a:r>
             <a:r>
               <a:rPr lang="en-US" altLang="ko-KR" sz="2000" b="1" spc="-100">
@@ -10225,7 +10224,7 @@
                 </a:solidFill>
                 <a:latin typeface="+mn-ea"/>
               </a:rPr>
-              <a:t>) </a:t>
+              <a:t> </a:t>
             </a:r>
             <a:r>
               <a:rPr lang="ko-KR" altLang="en-US" sz="2000" b="1" spc="-100">
@@ -13272,7 +13271,7 @@
         </p:nvSpPr>
         <p:spPr>
           <a:xfrm>
-            <a:off x="6621341" y="5016607"/>
+            <a:off x="6621341" y="4975043"/>
             <a:ext cx="2928750" cy="634989"/>
           </a:xfrm>
           <a:prstGeom prst="roundRect">
@@ -13321,7 +13320,7 @@
         </p:nvSpPr>
         <p:spPr>
           <a:xfrm>
-            <a:off x="630194" y="5016607"/>
+            <a:off x="630194" y="4975043"/>
             <a:ext cx="2928750" cy="634989"/>
           </a:xfrm>
           <a:prstGeom prst="roundRect">
@@ -13370,7 +13369,7 @@
         </p:nvSpPr>
         <p:spPr>
           <a:xfrm>
-            <a:off x="3624568" y="5016607"/>
+            <a:off x="3624568" y="4975043"/>
             <a:ext cx="2928750" cy="634989"/>
           </a:xfrm>
           <a:prstGeom prst="roundRect">
@@ -13417,7 +13416,7 @@
         </p:nvSpPr>
         <p:spPr>
           <a:xfrm>
-            <a:off x="6621341" y="5028292"/>
+            <a:off x="6621341" y="4986728"/>
             <a:ext cx="1044224" cy="369332"/>
           </a:xfrm>
           <a:prstGeom prst="rect">
@@ -13457,7 +13456,7 @@
         </p:nvSpPr>
         <p:spPr>
           <a:xfrm>
-            <a:off x="7392159" y="5066764"/>
+            <a:off x="7392159" y="5025200"/>
             <a:ext cx="1670730" cy="292388"/>
           </a:xfrm>
           <a:prstGeom prst="rect">
@@ -13502,7 +13501,7 @@
         </p:nvSpPr>
         <p:spPr>
           <a:xfrm>
-            <a:off x="630194" y="5028292"/>
+            <a:off x="630194" y="4986728"/>
             <a:ext cx="759638" cy="369332"/>
           </a:xfrm>
           <a:prstGeom prst="rect">
@@ -13539,7 +13538,7 @@
         </p:nvSpPr>
         <p:spPr>
           <a:xfrm>
-            <a:off x="1447713" y="5066764"/>
+            <a:off x="1447713" y="5025200"/>
             <a:ext cx="2176854" cy="292388"/>
           </a:xfrm>
           <a:prstGeom prst="rect">
@@ -13582,7 +13581,7 @@
         </p:nvSpPr>
         <p:spPr>
           <a:xfrm>
-            <a:off x="3624568" y="5028292"/>
+            <a:off x="3624568" y="4986728"/>
             <a:ext cx="728638" cy="369332"/>
           </a:xfrm>
           <a:prstGeom prst="rect">
@@ -13622,7 +13621,7 @@
         </p:nvSpPr>
         <p:spPr>
           <a:xfrm>
-            <a:off x="4395269" y="5066764"/>
+            <a:off x="4395269" y="5025200"/>
             <a:ext cx="2200109" cy="292388"/>
           </a:xfrm>
           <a:prstGeom prst="rect">
@@ -13667,7 +13666,7 @@
         </p:nvSpPr>
         <p:spPr>
           <a:xfrm>
-            <a:off x="4395269" y="5383311"/>
+            <a:off x="4395269" y="5341747"/>
             <a:ext cx="2200109" cy="276999"/>
           </a:xfrm>
           <a:prstGeom prst="rect">
@@ -13771,7 +13770,7 @@
         </p:nvSpPr>
         <p:spPr>
           <a:xfrm>
-            <a:off x="1489277" y="5383311"/>
+            <a:off x="1489277" y="5341747"/>
             <a:ext cx="2139762" cy="276999"/>
           </a:xfrm>
           <a:prstGeom prst="rect">
@@ -13877,7 +13876,7 @@
         </p:nvSpPr>
         <p:spPr>
           <a:xfrm>
-            <a:off x="7392159" y="5383311"/>
+            <a:off x="7392159" y="5341747"/>
             <a:ext cx="2252206" cy="276999"/>
           </a:xfrm>
           <a:prstGeom prst="rect">
@@ -15336,7 +15335,7 @@
         </p:nvSpPr>
         <p:spPr>
           <a:xfrm>
-            <a:off x="400396" y="5791856"/>
+            <a:off x="400396" y="5733441"/>
             <a:ext cx="707535" cy="276999"/>
           </a:xfrm>
           <a:prstGeom prst="roundRect">
@@ -15395,7 +15394,7 @@
         </p:nvSpPr>
         <p:spPr>
           <a:xfrm>
-            <a:off x="400396" y="4673646"/>
+            <a:off x="400396" y="4632082"/>
             <a:ext cx="707535" cy="276999"/>
           </a:xfrm>
           <a:prstGeom prst="roundRect">
@@ -15454,7 +15453,7 @@
         </p:nvCxnSpPr>
         <p:spPr>
           <a:xfrm>
-            <a:off x="500611" y="4980166"/>
+            <a:off x="500611" y="4938602"/>
             <a:ext cx="0" cy="747657"/>
           </a:xfrm>
           <a:prstGeom prst="straightConnector1">
@@ -15493,8 +15492,8 @@
         </p:nvSpPr>
         <p:spPr>
           <a:xfrm>
-            <a:off x="1193871" y="5768544"/>
-            <a:ext cx="5329732" cy="307777"/>
+            <a:off x="1193870" y="5717419"/>
+            <a:ext cx="7875945" cy="309043"/>
           </a:xfrm>
           <a:prstGeom prst="rect">
             <a:avLst/>
@@ -15549,7 +15548,49 @@
               </a:rPr>
               <a:t> GPT-5.6 Luna) </a:t>
             </a:r>
-            <a:endParaRPr lang="ko-KR" altLang="en-US" sz="1400">
+            <a:r>
+              <a:rPr lang="ko-KR" altLang="en-US" sz="1400" b="1" i="0">
+                <a:solidFill>
+                  <a:srgbClr val="0000FF"/>
+                </a:solidFill>
+                <a:effectLst/>
+                <a:latin typeface="+mn-ea"/>
+              </a:rPr>
+              <a:t>→ </a:t>
+            </a:r>
+            <a:r>
+              <a:rPr lang="en-US" altLang="ko-KR" sz="1400" b="1" i="0">
+                <a:solidFill>
+                  <a:srgbClr val="0000FF"/>
+                </a:solidFill>
+                <a:effectLst/>
+                <a:latin typeface="+mn-ea"/>
+              </a:rPr>
+              <a:t>GPT-5.6 Luna </a:t>
+            </a:r>
+            <a:r>
+              <a:rPr lang="ko-KR" altLang="en-US" sz="1400" b="1">
+                <a:solidFill>
+                  <a:srgbClr val="0000FF"/>
+                </a:solidFill>
+                <a:latin typeface="+mn-ea"/>
+              </a:rPr>
+              <a:t>최종 채택</a:t>
+            </a:r>
+            <a:r>
+              <a:rPr lang="en-US" altLang="ko-KR" sz="1400" b="1" i="0">
+                <a:solidFill>
+                  <a:srgbClr val="0000FF"/>
+                </a:solidFill>
+                <a:effectLst/>
+                <a:latin typeface="+mn-ea"/>
+              </a:rPr>
+              <a:t> </a:t>
+            </a:r>
+            <a:endParaRPr lang="ko-KR" altLang="en-US" sz="1400" b="1">
+              <a:solidFill>
+                <a:srgbClr val="0000FF"/>
+              </a:solidFill>
               <a:latin typeface="+mn-ea"/>
             </a:endParaRPr>
           </a:p>
@@ -15571,7 +15612,7 @@
         </p:nvSpPr>
         <p:spPr>
           <a:xfrm>
-            <a:off x="6621341" y="6124968"/>
+            <a:off x="6621341" y="6083404"/>
             <a:ext cx="2928750" cy="634989"/>
           </a:xfrm>
           <a:prstGeom prst="roundRect">
@@ -15620,7 +15661,7 @@
         </p:nvSpPr>
         <p:spPr>
           <a:xfrm>
-            <a:off x="630194" y="6124968"/>
+            <a:off x="630194" y="6083404"/>
             <a:ext cx="2928750" cy="634989"/>
           </a:xfrm>
           <a:prstGeom prst="roundRect">
@@ -15671,7 +15712,7 @@
         </p:nvSpPr>
         <p:spPr>
           <a:xfrm>
-            <a:off x="3624568" y="6124968"/>
+            <a:off x="3624568" y="6083404"/>
             <a:ext cx="2928750" cy="634989"/>
           </a:xfrm>
           <a:prstGeom prst="roundRect">
@@ -15720,7 +15761,7 @@
         </p:nvSpPr>
         <p:spPr>
           <a:xfrm>
-            <a:off x="6621341" y="6136653"/>
+            <a:off x="6621341" y="6095089"/>
             <a:ext cx="1044224" cy="369332"/>
           </a:xfrm>
           <a:prstGeom prst="rect">
@@ -15763,7 +15804,7 @@
         </p:nvSpPr>
         <p:spPr>
           <a:xfrm>
-            <a:off x="7399086" y="6175125"/>
+            <a:off x="7399086" y="6133561"/>
             <a:ext cx="1670730" cy="292388"/>
           </a:xfrm>
           <a:prstGeom prst="rect">
@@ -15808,7 +15849,7 @@
         </p:nvSpPr>
         <p:spPr>
           <a:xfrm>
-            <a:off x="630194" y="6136653"/>
+            <a:off x="630194" y="6095089"/>
             <a:ext cx="759638" cy="369332"/>
           </a:xfrm>
           <a:prstGeom prst="rect">
@@ -15845,7 +15886,7 @@
         </p:nvSpPr>
         <p:spPr>
           <a:xfrm>
-            <a:off x="1444249" y="6175125"/>
+            <a:off x="1444249" y="6133561"/>
             <a:ext cx="2176854" cy="292388"/>
           </a:xfrm>
           <a:prstGeom prst="rect">
@@ -15888,7 +15929,7 @@
         </p:nvSpPr>
         <p:spPr>
           <a:xfrm>
-            <a:off x="3624568" y="6136653"/>
+            <a:off x="3624568" y="6095089"/>
             <a:ext cx="728638" cy="369332"/>
           </a:xfrm>
           <a:prstGeom prst="rect">
@@ -15928,7 +15969,7 @@
         </p:nvSpPr>
         <p:spPr>
           <a:xfrm>
-            <a:off x="4402196" y="6175125"/>
+            <a:off x="4402196" y="6133561"/>
             <a:ext cx="2200109" cy="292388"/>
           </a:xfrm>
           <a:prstGeom prst="rect">
@@ -15973,7 +16014,7 @@
         </p:nvSpPr>
         <p:spPr>
           <a:xfrm>
-            <a:off x="4402196" y="6491672"/>
+            <a:off x="4402196" y="6450108"/>
             <a:ext cx="2200109" cy="276999"/>
           </a:xfrm>
           <a:prstGeom prst="rect">
@@ -16077,7 +16118,7 @@
         </p:nvSpPr>
         <p:spPr>
           <a:xfrm>
-            <a:off x="1485813" y="6491672"/>
+            <a:off x="1485813" y="6450108"/>
             <a:ext cx="2139762" cy="276999"/>
           </a:xfrm>
           <a:prstGeom prst="rect">
@@ -16173,7 +16214,7 @@
         </p:nvSpPr>
         <p:spPr>
           <a:xfrm>
-            <a:off x="7399086" y="6491672"/>
+            <a:off x="7399086" y="6450108"/>
             <a:ext cx="2252206" cy="276999"/>
           </a:xfrm>
           <a:prstGeom prst="rect">
@@ -16240,7 +16281,7 @@
         </p:nvSpPr>
         <p:spPr>
           <a:xfrm>
-            <a:off x="1193871" y="4658257"/>
+            <a:off x="1193870" y="4616693"/>
             <a:ext cx="4951268" cy="307777"/>
           </a:xfrm>
           <a:prstGeom prst="rect">

--- a/presentation/submission/26년 포스코퓨처엠 AI활용전문가 과정_사무계_송다혜.pptx
+++ b/presentation/submission/26년 포스코퓨처엠 AI활용전문가 과정_사무계_송다혜.pptx
@@ -686,7 +686,7 @@
           <a:p>
             <a:fld id="{6AC0F0B2-DC44-4D7F-B9BC-23EB46679998}" type="datetimeFigureOut">
               <a:rPr lang="ko-KR" altLang="en-US" smtClean="0"/>
-              <a:t>2026-09-12</a:t>
+              <a:t>2026-09-13</a:t>
             </a:fld>
             <a:endParaRPr lang="ko-KR" altLang="en-US"/>
           </a:p>
@@ -856,7 +856,7 @@
           <a:p>
             <a:fld id="{6AC0F0B2-DC44-4D7F-B9BC-23EB46679998}" type="datetimeFigureOut">
               <a:rPr lang="ko-KR" altLang="en-US" smtClean="0"/>
-              <a:t>2026-09-12</a:t>
+              <a:t>2026-09-13</a:t>
             </a:fld>
             <a:endParaRPr lang="ko-KR" altLang="en-US"/>
           </a:p>
@@ -1036,7 +1036,7 @@
           <a:p>
             <a:fld id="{6AC0F0B2-DC44-4D7F-B9BC-23EB46679998}" type="datetimeFigureOut">
               <a:rPr lang="ko-KR" altLang="en-US" smtClean="0"/>
-              <a:t>2026-09-12</a:t>
+              <a:t>2026-09-13</a:t>
             </a:fld>
             <a:endParaRPr lang="ko-KR" altLang="en-US"/>
           </a:p>
@@ -1206,7 +1206,7 @@
           <a:p>
             <a:fld id="{6AC0F0B2-DC44-4D7F-B9BC-23EB46679998}" type="datetimeFigureOut">
               <a:rPr lang="ko-KR" altLang="en-US" smtClean="0"/>
-              <a:t>2026-09-12</a:t>
+              <a:t>2026-09-13</a:t>
             </a:fld>
             <a:endParaRPr lang="ko-KR" altLang="en-US"/>
           </a:p>
@@ -1450,7 +1450,7 @@
           <a:p>
             <a:fld id="{6AC0F0B2-DC44-4D7F-B9BC-23EB46679998}" type="datetimeFigureOut">
               <a:rPr lang="ko-KR" altLang="en-US" smtClean="0"/>
-              <a:t>2026-09-12</a:t>
+              <a:t>2026-09-13</a:t>
             </a:fld>
             <a:endParaRPr lang="ko-KR" altLang="en-US"/>
           </a:p>
@@ -1682,7 +1682,7 @@
           <a:p>
             <a:fld id="{6AC0F0B2-DC44-4D7F-B9BC-23EB46679998}" type="datetimeFigureOut">
               <a:rPr lang="ko-KR" altLang="en-US" smtClean="0"/>
-              <a:t>2026-09-12</a:t>
+              <a:t>2026-09-13</a:t>
             </a:fld>
             <a:endParaRPr lang="ko-KR" altLang="en-US"/>
           </a:p>
@@ -2049,7 +2049,7 @@
           <a:p>
             <a:fld id="{6AC0F0B2-DC44-4D7F-B9BC-23EB46679998}" type="datetimeFigureOut">
               <a:rPr lang="ko-KR" altLang="en-US" smtClean="0"/>
-              <a:t>2026-09-12</a:t>
+              <a:t>2026-09-13</a:t>
             </a:fld>
             <a:endParaRPr lang="ko-KR" altLang="en-US"/>
           </a:p>
@@ -2167,7 +2167,7 @@
           <a:p>
             <a:fld id="{6AC0F0B2-DC44-4D7F-B9BC-23EB46679998}" type="datetimeFigureOut">
               <a:rPr lang="ko-KR" altLang="en-US" smtClean="0"/>
-              <a:t>2026-09-12</a:t>
+              <a:t>2026-09-13</a:t>
             </a:fld>
             <a:endParaRPr lang="ko-KR" altLang="en-US"/>
           </a:p>
@@ -2262,7 +2262,7 @@
           <a:p>
             <a:fld id="{6AC0F0B2-DC44-4D7F-B9BC-23EB46679998}" type="datetimeFigureOut">
               <a:rPr lang="ko-KR" altLang="en-US" smtClean="0"/>
-              <a:t>2026-09-12</a:t>
+              <a:t>2026-09-13</a:t>
             </a:fld>
             <a:endParaRPr lang="ko-KR" altLang="en-US"/>
           </a:p>
@@ -2539,7 +2539,7 @@
           <a:p>
             <a:fld id="{6AC0F0B2-DC44-4D7F-B9BC-23EB46679998}" type="datetimeFigureOut">
               <a:rPr lang="ko-KR" altLang="en-US" smtClean="0"/>
-              <a:t>2026-09-12</a:t>
+              <a:t>2026-09-13</a:t>
             </a:fld>
             <a:endParaRPr lang="ko-KR" altLang="en-US"/>
           </a:p>
@@ -2796,7 +2796,7 @@
           <a:p>
             <a:fld id="{6AC0F0B2-DC44-4D7F-B9BC-23EB46679998}" type="datetimeFigureOut">
               <a:rPr lang="ko-KR" altLang="en-US" smtClean="0"/>
-              <a:t>2026-09-12</a:t>
+              <a:t>2026-09-13</a:t>
             </a:fld>
             <a:endParaRPr lang="ko-KR" altLang="en-US"/>
           </a:p>
@@ -3009,7 +3009,7 @@
           <a:p>
             <a:fld id="{6AC0F0B2-DC44-4D7F-B9BC-23EB46679998}" type="datetimeFigureOut">
               <a:rPr lang="ko-KR" altLang="en-US" smtClean="0"/>
-              <a:t>2026-09-12</a:t>
+              <a:t>2026-09-13</a:t>
             </a:fld>
             <a:endParaRPr lang="ko-KR" altLang="en-US"/>
           </a:p>
@@ -16546,7 +16546,7 @@
         </p:nvSpPr>
         <p:spPr>
           <a:xfrm>
-            <a:off x="4257155" y="1290892"/>
+            <a:off x="4018162" y="1290892"/>
             <a:ext cx="1657198" cy="406475"/>
           </a:xfrm>
           <a:prstGeom prst="roundRect">
@@ -16615,7 +16615,7 @@
         </p:nvSpPr>
         <p:spPr>
           <a:xfrm>
-            <a:off x="4257155" y="2096435"/>
+            <a:off x="4018162" y="2096435"/>
             <a:ext cx="1657198" cy="406475"/>
           </a:xfrm>
           <a:prstGeom prst="roundRect">
@@ -16702,7 +16702,7 @@
         </p:nvSpPr>
         <p:spPr>
           <a:xfrm>
-            <a:off x="4257156" y="2957030"/>
+            <a:off x="4018163" y="2957030"/>
             <a:ext cx="1657197" cy="406475"/>
           </a:xfrm>
           <a:prstGeom prst="roundRect">
@@ -16765,7 +16765,7 @@
         </p:nvSpPr>
         <p:spPr>
           <a:xfrm>
-            <a:off x="5924403" y="1228672"/>
+            <a:off x="5685410" y="1228672"/>
             <a:ext cx="4221088" cy="530915"/>
           </a:xfrm>
           <a:prstGeom prst="rect">
@@ -16869,7 +16869,7 @@
         </p:nvSpPr>
         <p:spPr>
           <a:xfrm>
-            <a:off x="5924403" y="2034215"/>
+            <a:off x="5685410" y="2034215"/>
             <a:ext cx="4101344" cy="530915"/>
           </a:xfrm>
           <a:prstGeom prst="rect">
@@ -16994,7 +16994,7 @@
         </p:nvSpPr>
         <p:spPr>
           <a:xfrm>
-            <a:off x="5924403" y="2775547"/>
+            <a:off x="5685410" y="2775547"/>
             <a:ext cx="4101344" cy="769441"/>
           </a:xfrm>
           <a:prstGeom prst="rect">
@@ -17148,7 +17148,7 @@
         </p:blipFill>
         <p:spPr>
           <a:xfrm rot="5400000">
-            <a:off x="4904443" y="1587729"/>
+            <a:off x="4665450" y="1587729"/>
             <a:ext cx="362623" cy="624548"/>
           </a:xfrm>
           <a:prstGeom prst="rect">
@@ -17187,7 +17187,7 @@
         </p:blipFill>
         <p:spPr>
           <a:xfrm rot="5400000">
-            <a:off x="4904443" y="2415046"/>
+            <a:off x="4665450" y="2415046"/>
             <a:ext cx="362623" cy="624548"/>
           </a:xfrm>
           <a:prstGeom prst="rect">
@@ -18095,44 +18095,6 @@
           </p:spPr>
         </p:pic>
       </p:grpSp>
-      <p:pic>
-        <p:nvPicPr>
-          <p:cNvPr id="34" name="그림 33">
-            <a:hlinkClick r:id="rId5" action="ppaction://hlinkfile"/>
-            <a:extLst>
-              <a:ext uri="{FF2B5EF4-FFF2-40B4-BE49-F238E27FC236}">
-                <a16:creationId xmlns:a16="http://schemas.microsoft.com/office/drawing/2014/main" id="{E98EEE92-2BAD-48E7-A9E1-5FE5B50C593C}"/>
-              </a:ext>
-            </a:extLst>
-          </p:cNvPr>
-          <p:cNvPicPr>
-            <a:picLocks noChangeAspect="1"/>
-          </p:cNvPicPr>
-          <p:nvPr/>
-        </p:nvPicPr>
-        <p:blipFill rotWithShape="1">
-          <a:blip r:embed="rId6"/>
-          <a:stretch/>
-        </p:blipFill>
-        <p:spPr>
-          <a:xfrm>
-            <a:off x="417123" y="1271745"/>
-            <a:ext cx="3645785" cy="2136473"/>
-          </a:xfrm>
-          <a:prstGeom prst="roundRect">
-            <a:avLst>
-              <a:gd name="adj" fmla="val 3500"/>
-            </a:avLst>
-          </a:prstGeom>
-          <a:effectLst>
-            <a:outerShdw blurRad="228600" dist="50800" dir="5400000" rotWithShape="0">
-              <a:srgbClr val="1B2A4A">
-                <a:alpha val="22000"/>
-              </a:srgbClr>
-            </a:outerShdw>
-          </a:effectLst>
-        </p:spPr>
-      </p:pic>
       <p:sp>
         <p:nvSpPr>
           <p:cNvPr id="32" name="TextBox 31">
@@ -18837,7 +18799,7 @@
           <p:nvPr/>
         </p:nvPicPr>
         <p:blipFill>
-          <a:blip r:embed="rId7"/>
+          <a:blip r:embed="rId5"/>
           <a:stretch>
             <a:fillRect/>
           </a:stretch>
@@ -18867,7 +18829,7 @@
           <p:nvPr/>
         </p:nvPicPr>
         <p:blipFill>
-          <a:blip r:embed="rId8"/>
+          <a:blip r:embed="rId6"/>
           <a:stretch>
             <a:fillRect/>
           </a:stretch>
@@ -18897,13 +18859,13 @@
           <p:nvPr/>
         </p:nvPicPr>
         <p:blipFill>
-          <a:blip r:embed="rId9">
+          <a:blip r:embed="rId7">
             <a:extLst>
               <a:ext uri="{28A0092B-C50C-407E-A947-70E740481C1C}">
                 <a14:useLocalDpi xmlns:a14="http://schemas.microsoft.com/office/drawing/2010/main" val="0"/>
               </a:ext>
               <a:ext uri="{96DAC541-7B7A-43D3-8B79-37D633B846F1}">
-                <asvg:svgBlip xmlns:asvg="http://schemas.microsoft.com/office/drawing/2016/SVG/main" r:embed="rId10"/>
+                <asvg:svgBlip xmlns:asvg="http://schemas.microsoft.com/office/drawing/2016/SVG/main" r:embed="rId8"/>
               </a:ext>
             </a:extLst>
           </a:blip>
@@ -18915,6 +18877,37 @@
           <a:xfrm>
             <a:off x="6817188" y="4753390"/>
             <a:ext cx="320492" cy="320492"/>
+          </a:xfrm>
+          <a:prstGeom prst="rect">
+            <a:avLst/>
+          </a:prstGeom>
+        </p:spPr>
+      </p:pic>
+      <p:pic>
+        <p:nvPicPr>
+          <p:cNvPr id="5" name="그림 4">
+            <a:hlinkClick r:id="rId9" action="ppaction://hlinkfile"/>
+            <a:extLst>
+              <a:ext uri="{FF2B5EF4-FFF2-40B4-BE49-F238E27FC236}">
+                <a16:creationId xmlns:a16="http://schemas.microsoft.com/office/drawing/2014/main" id="{AEE86CA0-2D91-494D-AA7D-58705289DE60}"/>
+              </a:ext>
+            </a:extLst>
+          </p:cNvPr>
+          <p:cNvPicPr>
+            <a:picLocks noChangeAspect="1"/>
+          </p:cNvPicPr>
+          <p:nvPr/>
+        </p:nvPicPr>
+        <p:blipFill>
+          <a:blip r:embed="rId10"/>
+          <a:stretch>
+            <a:fillRect/>
+          </a:stretch>
+        </p:blipFill>
+        <p:spPr>
+          <a:xfrm>
+            <a:off x="407561" y="1123557"/>
+            <a:ext cx="3401618" cy="2548297"/>
           </a:xfrm>
           <a:prstGeom prst="rect">
             <a:avLst/>

--- a/presentation/submission/26년 포스코퓨처엠 AI활용전문가 과정_사무계_송다혜.pptx
+++ b/presentation/submission/26년 포스코퓨처엠 AI활용전문가 과정_사무계_송다혜.pptx
@@ -19745,7 +19745,7 @@
             <a:p>
               <a:r>
                 <a:rPr lang="ko-KR" altLang="en-US" sz="1400" b="1"/>
-                <a:t>기반 보완</a:t>
+                <a:t>품질 보완</a:t>
               </a:r>
             </a:p>
           </p:txBody>
@@ -19997,11 +19997,7 @@
               <a:rPr lang="ko-KR" altLang="en-US" sz="1300" spc="-40">
                 <a:latin typeface="+mn-ea"/>
               </a:rPr>
-              <a:t>개 </a:t>
-            </a:r>
-            <a:r>
-              <a:rPr lang="ko-KR" altLang="en-US" sz="1300" spc="-40"/>
-              <a:t>부서의 업무 데이터 정비</a:t>
+              <a:t>개 부서의 업무 데이터 정비</a:t>
             </a:r>
             <a:endParaRPr lang="ko-KR" altLang="en-US" sz="1300" spc="-40">
               <a:solidFill>
@@ -20028,7 +20024,7 @@
         <p:spPr>
           <a:xfrm>
             <a:off x="360341" y="5486518"/>
-            <a:ext cx="2959800" cy="292388"/>
+            <a:ext cx="2959800" cy="492443"/>
           </a:xfrm>
           <a:prstGeom prst="rect">
             <a:avLst/>
@@ -20042,8 +20038,33 @@
           <a:lstStyle/>
           <a:p>
             <a:r>
-              <a:rPr lang="ko-KR" altLang="en-US" sz="1300" spc="-40"/>
-              <a:t>명확한 업무부터 핵심 기능 검증</a:t>
+              <a:rPr lang="ko-KR" altLang="en-US" sz="1300" spc="-50">
+                <a:latin typeface="+mn-ea"/>
+              </a:rPr>
+              <a:t>핵심 기능 검증</a:t>
+            </a:r>
+            <a:r>
+              <a:rPr lang="en-US" altLang="ko-KR" sz="1300" spc="-50">
+                <a:latin typeface="+mn-ea"/>
+              </a:rPr>
+              <a:t>, </a:t>
+            </a:r>
+            <a:r>
+              <a:rPr lang="ko-KR" altLang="en-US" sz="1300" spc="-50">
+                <a:latin typeface="+mn-ea"/>
+              </a:rPr>
+              <a:t>서버 확인 절차 등 </a:t>
+            </a:r>
+            <a:endParaRPr lang="en-US" altLang="ko-KR" sz="1300" spc="-50">
+              <a:latin typeface="+mn-ea"/>
+            </a:endParaRPr>
+          </a:p>
+          <a:p>
+            <a:r>
+              <a:rPr lang="ko-KR" altLang="en-US" sz="1300" spc="-50">
+                <a:latin typeface="+mn-ea"/>
+              </a:rPr>
+              <a:t>안전장치 보완</a:t>
             </a:r>
           </a:p>
         </p:txBody>

--- a/presentation/submission/26년 포스코퓨처엠 AI활용전문가 과정_사무계_송다혜.pptx
+++ b/presentation/submission/26년 포스코퓨처엠 AI활용전문가 과정_사무계_송다혜.pptx
@@ -13474,7 +13474,7 @@
               <a:rPr lang="ko-KR" altLang="en-US" sz="1300" spc="-40">
                 <a:latin typeface="+mn-ea"/>
               </a:rPr>
-              <a:t>종합 정답률 상승 </a:t>
+              <a:t>골든셋 정답률 상승 </a:t>
             </a:r>
             <a:endParaRPr lang="ko-KR" altLang="en-US" sz="1300" spc="-40">
               <a:solidFill>
@@ -13726,17 +13726,7 @@
                 <a:latin typeface="+mn-ea"/>
                 <a:sym typeface="Wingdings" panose="05000000000000000000" pitchFamily="2" charset="2"/>
               </a:rPr>
-              <a:t>89%, F1 score</a:t>
-            </a:r>
-            <a:r>
-              <a:rPr lang="ko-KR" altLang="en-US" sz="1200" b="1" spc="-60">
-                <a:solidFill>
-                  <a:srgbClr val="0F64C0"/>
-                </a:solidFill>
-                <a:latin typeface="+mn-ea"/>
-                <a:sym typeface="Wingdings" panose="05000000000000000000" pitchFamily="2" charset="2"/>
-              </a:rPr>
-              <a:t>로 측정</a:t>
+              <a:t>89%,</a:t>
             </a:r>
             <a:r>
               <a:rPr lang="en-US" altLang="ko-KR" sz="1200" b="1" spc="-60">
@@ -13841,17 +13831,7 @@
                 <a:latin typeface="+mn-ea"/>
                 <a:sym typeface="Wingdings" panose="05000000000000000000" pitchFamily="2" charset="2"/>
               </a:rPr>
-              <a:t>79%, </a:t>
-            </a:r>
-            <a:r>
-              <a:rPr lang="ko-KR" altLang="en-US" sz="1200" b="1" spc="-60">
-                <a:solidFill>
-                  <a:srgbClr val="0F64C0"/>
-                </a:solidFill>
-                <a:latin typeface="+mn-ea"/>
-                <a:sym typeface="Wingdings" panose="05000000000000000000" pitchFamily="2" charset="2"/>
-              </a:rPr>
-              <a:t>일치율로 측정</a:t>
+              <a:t>79%</a:t>
             </a:r>
             <a:endParaRPr lang="ko-KR" altLang="en-US" sz="1200" b="1" spc="-60">
               <a:solidFill>
@@ -14068,7 +14048,7 @@
                 </a:solidFill>
                 <a:latin typeface="+mn-ea"/>
               </a:rPr>
-              <a:t>종합 정답률 개선 </a:t>
+              <a:t>골든셋 정답률 개선 </a:t>
             </a:r>
           </a:p>
         </p:txBody>
@@ -18381,8 +18361,8 @@
         </p:nvSpPr>
         <p:spPr>
           <a:xfrm>
-            <a:off x="1336883" y="5975887"/>
-            <a:ext cx="1670730" cy="292388"/>
+            <a:off x="1336882" y="5975887"/>
+            <a:ext cx="2136839" cy="292388"/>
           </a:xfrm>
           <a:prstGeom prst="rect">
             <a:avLst/>
@@ -18397,7 +18377,7 @@
           <a:p>
             <a:r>
               <a:rPr lang="ko-KR" altLang="en-US" sz="1300" spc="-60"/>
-              <a:t>업무 분류 정확도</a:t>
+              <a:t>업무 분류 정확도 확보</a:t>
             </a:r>
             <a:endParaRPr lang="ko-KR" altLang="en-US" sz="1300" spc="-60">
               <a:solidFill>
@@ -18757,8 +18737,10 @@
                 <a:solidFill>
                   <a:srgbClr val="0F64C0"/>
                 </a:solidFill>
-              </a:rPr>
-              <a:t>/</a:t>
+                <a:latin typeface="맑은 고딕" panose="020B0503020000020004" pitchFamily="50" charset="-127"/>
+                <a:ea typeface="맑은 고딕" panose="020B0503020000020004" pitchFamily="50" charset="-127"/>
+              </a:rPr>
+              <a:t>〮</a:t>
             </a:r>
             <a:r>
               <a:rPr lang="ko-KR" altLang="en-US" sz="1200" b="1" spc="-80">

--- a/presentation/submission/26년 포스코퓨처엠 AI활용전문가 과정_사무계_송다혜.pptx
+++ b/presentation/submission/26년 포스코퓨처엠 AI활용전문가 과정_사무계_송다혜.pptx
@@ -14764,7 +14764,7 @@
         <p:spPr>
           <a:xfrm>
             <a:off x="5481206" y="3235224"/>
-            <a:ext cx="4221262" cy="543739"/>
+            <a:ext cx="4618758" cy="543739"/>
           </a:xfrm>
           <a:prstGeom prst="rect">
             <a:avLst/>
@@ -14786,7 +14786,7 @@
               <a:rPr lang="ko-KR" altLang="en-US" sz="1300" spc="-40">
                 <a:latin typeface="+mn-ea"/>
               </a:rPr>
-              <a:t>반복 재평가로 개선 효과를 정량 확인 </a:t>
+              <a:t>반복 재평가로 개선 효과 정량적 확인 </a:t>
             </a:r>
             <a:endParaRPr lang="en-US" altLang="ko-KR" sz="1300" spc="-40">
               <a:latin typeface="+mn-ea"/>
@@ -14799,48 +14799,48 @@
               </a:spcBef>
             </a:pPr>
             <a:r>
-              <a:rPr lang="en-US" altLang="ko-KR" sz="1300" spc="-40">
+              <a:rPr lang="en-US" altLang="ko-KR" sz="1300" spc="-80">
                 <a:latin typeface="+mn-ea"/>
               </a:rPr>
               <a:t>3</a:t>
             </a:r>
             <a:r>
-              <a:rPr lang="ko-KR" altLang="en-US" sz="1300" spc="-40">
-                <a:latin typeface="+mn-ea"/>
-              </a:rPr>
-              <a:t>라운드에 걸쳐 정답률 단계적 개선 </a:t>
-            </a:r>
-            <a:r>
-              <a:rPr lang="en-US" altLang="ko-KR" sz="1300" spc="-40">
+              <a:rPr lang="ko-KR" altLang="en-US" sz="1300" spc="-80">
+                <a:latin typeface="+mn-ea"/>
+              </a:rPr>
+              <a:t>라운드에 걸쳐 골든셋 정답률 단계적 개선 </a:t>
+            </a:r>
+            <a:r>
+              <a:rPr lang="en-US" altLang="ko-KR" sz="1300" spc="-80">
                 <a:latin typeface="+mn-ea"/>
               </a:rPr>
               <a:t>(37</a:t>
             </a:r>
             <a:r>
-              <a:rPr lang="ko-KR" altLang="en-US" sz="1300" spc="-40">
+              <a:rPr lang="ko-KR" altLang="en-US" sz="1300" spc="-80">
                 <a:latin typeface="+mn-ea"/>
               </a:rPr>
               <a:t>→</a:t>
             </a:r>
             <a:r>
-              <a:rPr lang="en-US" altLang="ko-KR" sz="1300" spc="-40">
+              <a:rPr lang="en-US" altLang="ko-KR" sz="1300" spc="-80">
                 <a:latin typeface="+mn-ea"/>
               </a:rPr>
               <a:t>58</a:t>
             </a:r>
             <a:r>
-              <a:rPr lang="ko-KR" altLang="en-US" sz="1300" spc="-40">
+              <a:rPr lang="ko-KR" altLang="en-US" sz="1300" spc="-80">
                 <a:latin typeface="+mn-ea"/>
               </a:rPr>
               <a:t>→</a:t>
             </a:r>
             <a:r>
-              <a:rPr lang="en-US" altLang="ko-KR" sz="1300" spc="-40">
+              <a:rPr lang="en-US" altLang="ko-KR" sz="1300" spc="-80">
                 <a:latin typeface="+mn-ea"/>
               </a:rPr>
               <a:t>68%)</a:t>
             </a:r>
-            <a:endParaRPr lang="ko-KR" altLang="en-US" sz="1300" spc="-40">
+            <a:endParaRPr lang="ko-KR" altLang="en-US" sz="1300" spc="-80">
               <a:latin typeface="+mn-ea"/>
             </a:endParaRPr>
           </a:p>
@@ -20237,8 +20237,8 @@
         </p:nvSpPr>
         <p:spPr>
           <a:xfrm>
-            <a:off x="315347" y="1356790"/>
-            <a:ext cx="4637654" cy="2207293"/>
+            <a:off x="304955" y="1356790"/>
+            <a:ext cx="4747501" cy="2207293"/>
           </a:xfrm>
           <a:prstGeom prst="roundRect">
             <a:avLst>
@@ -20284,7 +20284,7 @@
         </p:nvSpPr>
         <p:spPr>
           <a:xfrm>
-            <a:off x="5014458" y="1356790"/>
+            <a:off x="5087195" y="1356790"/>
             <a:ext cx="4637654" cy="2207293"/>
           </a:xfrm>
           <a:prstGeom prst="roundRect">
@@ -20329,8 +20329,8 @@
         </p:nvSpPr>
         <p:spPr>
           <a:xfrm>
-            <a:off x="321991" y="1878502"/>
-            <a:ext cx="4568663" cy="1338828"/>
+            <a:off x="311600" y="1878502"/>
+            <a:ext cx="4915027" cy="1338828"/>
           </a:xfrm>
           <a:prstGeom prst="rect">
             <a:avLst/>
@@ -20475,13 +20475,13 @@
               <a:rPr lang="ko-KR" altLang="en-US" sz="1400" spc="-40">
                 <a:latin typeface="+mn-ea"/>
               </a:rPr>
-              <a:t> 골든셋 평가로 주관부서 매칭 정확도 </a:t>
+              <a:t> 반복 평가〮모델 개선으로 주관부서 매칭 정확도 </a:t>
             </a:r>
             <a:r>
               <a:rPr lang="en-US" altLang="ko-KR" sz="1400" spc="-40">
                 <a:latin typeface="+mn-ea"/>
               </a:rPr>
-              <a:t>79</a:t>
+              <a:t>63</a:t>
             </a:r>
             <a:r>
               <a:rPr lang="ko-KR" altLang="en-US" sz="1400" spc="-40">
@@ -20495,15 +20495,6 @@
               </a:rPr>
               <a:t>95% </a:t>
             </a:r>
-            <a:r>
-              <a:rPr lang="ko-KR" altLang="en-US" sz="1400" spc="-40">
-                <a:latin typeface="+mn-ea"/>
-              </a:rPr>
-              <a:t>개선</a:t>
-            </a:r>
-            <a:endParaRPr lang="en-US" altLang="ko-KR" sz="1400" spc="-40">
-              <a:latin typeface="+mn-ea"/>
-            </a:endParaRPr>
           </a:p>
           <a:p>
             <a:pPr marL="90488" indent="-90488">
@@ -20544,7 +20535,7 @@
               <a:rPr lang="ko-KR" altLang="en-US" sz="1400" spc="-40">
                 <a:latin typeface="+mn-ea"/>
               </a:rPr>
-              <a:t>자동 채점 시스템 구축 </a:t>
+              <a:t>자동 채점 시스템 경험 </a:t>
             </a:r>
             <a:endParaRPr lang="en-US" altLang="ko-KR" sz="1400" spc="-40">
               <a:latin typeface="+mn-ea"/>
@@ -20566,8 +20557,8 @@
         </p:nvSpPr>
         <p:spPr>
           <a:xfrm>
-            <a:off x="5015345" y="1878502"/>
-            <a:ext cx="5219699" cy="1338828"/>
+            <a:off x="5088082" y="1878502"/>
+            <a:ext cx="4890655" cy="1338828"/>
           </a:xfrm>
           <a:prstGeom prst="rect">
             <a:avLst/>
@@ -20597,36 +20588,36 @@
               <a:buChar char="§"/>
             </a:pPr>
             <a:r>
-              <a:rPr lang="ko-KR" altLang="en-US" sz="1400">
+              <a:rPr lang="ko-KR" altLang="en-US" sz="1400" spc="-40">
                 <a:latin typeface="+mn-ea"/>
               </a:rPr>
               <a:t> 회사 지침</a:t>
             </a:r>
             <a:r>
-              <a:rPr lang="en-US" altLang="ko-KR" sz="1400">
+              <a:rPr lang="en-US" altLang="ko-KR" sz="1400" spc="-40">
                 <a:latin typeface="+mn-ea"/>
               </a:rPr>
               <a:t>, </a:t>
             </a:r>
             <a:r>
-              <a:rPr lang="ko-KR" altLang="en-US" sz="1400">
+              <a:rPr lang="ko-KR" altLang="en-US" sz="1400" spc="-40">
                 <a:latin typeface="+mn-ea"/>
               </a:rPr>
               <a:t>규정</a:t>
             </a:r>
             <a:r>
-              <a:rPr lang="en-US" altLang="ko-KR" sz="1400">
+              <a:rPr lang="en-US" altLang="ko-KR" sz="1400" spc="-40">
                 <a:latin typeface="+mn-ea"/>
               </a:rPr>
               <a:t>, </a:t>
             </a:r>
             <a:r>
-              <a:rPr lang="ko-KR" altLang="en-US" sz="1400">
+              <a:rPr lang="ko-KR" altLang="en-US" sz="1400" spc="-40">
                 <a:latin typeface="+mn-ea"/>
               </a:rPr>
               <a:t>프로세스 데이터 추가 확보</a:t>
             </a:r>
-            <a:endParaRPr lang="en-US" altLang="ko-KR" sz="1400">
+            <a:endParaRPr lang="en-US" altLang="ko-KR" sz="1400" spc="-40">
               <a:latin typeface="+mn-ea"/>
             </a:endParaRPr>
           </a:p>
@@ -20648,18 +20639,18 @@
               <a:buChar char="§"/>
             </a:pPr>
             <a:r>
-              <a:rPr lang="en-US" altLang="ko-KR" sz="1400">
+              <a:rPr lang="en-US" altLang="ko-KR" sz="1400" spc="-40">
                 <a:latin typeface="+mn-ea"/>
               </a:rPr>
               <a:t> </a:t>
             </a:r>
             <a:r>
-              <a:rPr lang="ko-KR" altLang="en-US" sz="1400">
+              <a:rPr lang="ko-KR" altLang="en-US" sz="1400" spc="-40">
                 <a:latin typeface="+mn-ea"/>
               </a:rPr>
               <a:t>실제 업무 데이터로 다양한 상황 검증</a:t>
             </a:r>
-            <a:endParaRPr lang="en-US" altLang="ko-KR" sz="1400">
+            <a:endParaRPr lang="en-US" altLang="ko-KR" sz="1400" spc="-40">
               <a:latin typeface="+mn-ea"/>
             </a:endParaRPr>
           </a:p>
@@ -20681,7 +20672,7 @@
               <a:buChar char="§"/>
             </a:pPr>
             <a:r>
-              <a:rPr lang="en-US" altLang="ko-KR" sz="1400">
+              <a:rPr lang="en-US" altLang="ko-KR" sz="1400" spc="-40">
                 <a:latin typeface="+mn-ea"/>
               </a:rPr>
               <a:t> </a:t>
@@ -20717,18 +20708,18 @@
               <a:buChar char="§"/>
             </a:pPr>
             <a:r>
-              <a:rPr lang="en-US" altLang="ko-KR" sz="1400">
+              <a:rPr lang="en-US" altLang="ko-KR" sz="1400" spc="-40">
                 <a:latin typeface="+mn-ea"/>
               </a:rPr>
               <a:t> </a:t>
             </a:r>
             <a:r>
-              <a:rPr lang="ko-KR" altLang="en-US" sz="1400">
+              <a:rPr lang="ko-KR" altLang="en-US" sz="1400" spc="-40">
                 <a:latin typeface="+mn-ea"/>
               </a:rPr>
               <a:t>현업 사용자 의견을 반영한 서비스 향상</a:t>
             </a:r>
-            <a:endParaRPr lang="en-US" altLang="ko-KR" sz="1400">
+            <a:endParaRPr lang="en-US" altLang="ko-KR" sz="1400" spc="-40">
               <a:latin typeface="+mn-ea"/>
             </a:endParaRPr>
           </a:p>
@@ -20971,7 +20962,7 @@
         </p:nvSpPr>
         <p:spPr>
           <a:xfrm>
-            <a:off x="5662058" y="1223492"/>
+            <a:off x="5734795" y="1223492"/>
             <a:ext cx="3359671" cy="314383"/>
           </a:xfrm>
           <a:prstGeom prst="roundRect">
@@ -21026,7 +21017,7 @@
         </p:nvSpPr>
         <p:spPr>
           <a:xfrm>
-            <a:off x="962947" y="1223492"/>
+            <a:off x="952556" y="1223492"/>
             <a:ext cx="3359671" cy="314383"/>
           </a:xfrm>
           <a:prstGeom prst="roundRect">

--- a/presentation/submission/26년 포스코퓨처엠 AI활용전문가 과정_사무계_송다혜.pptx
+++ b/presentation/submission/26년 포스코퓨처엠 AI활용전문가 과정_사무계_송다혜.pptx
@@ -5,40 +5,41 @@
     <p:sldMasterId id="2147483650" r:id="rId1"/>
   </p:sldMasterIdLst>
   <p:notesMasterIdLst>
-    <p:notesMasterId r:id="rId9"/>
+    <p:notesMasterId r:id="rId10"/>
   </p:notesMasterIdLst>
   <p:sldIdLst>
     <p:sldId id="256" r:id="rId2"/>
     <p:sldId id="284" r:id="rId3"/>
     <p:sldId id="285" r:id="rId4"/>
     <p:sldId id="279" r:id="rId5"/>
-    <p:sldId id="282" r:id="rId6"/>
+    <p:sldId id="287" r:id="rId6"/>
     <p:sldId id="280" r:id="rId7"/>
     <p:sldId id="283" r:id="rId8"/>
+    <p:sldId id="288" r:id="rId9"/>
   </p:sldIdLst>
   <p:sldSz cx="9906000" cy="6858000" type="A4"/>
   <p:notesSz cx="6858000" cy="9144000"/>
   <p:embeddedFontLst>
     <p:embeddedFont>
       <p:font typeface="Calibri" panose="020F0502020204030204" pitchFamily="34" charset="0"/>
-      <p:regular r:id="rId10"/>
-      <p:bold r:id="rId11"/>
-      <p:italic r:id="rId12"/>
-      <p:boldItalic r:id="rId13"/>
+      <p:regular r:id="rId11"/>
+      <p:bold r:id="rId12"/>
+      <p:italic r:id="rId13"/>
+      <p:boldItalic r:id="rId14"/>
     </p:embeddedFont>
     <p:embeddedFont>
       <p:font typeface="Calibri Light" panose="020F0302020204030204" pitchFamily="34" charset="0"/>
-      <p:regular r:id="rId14"/>
-      <p:italic r:id="rId15"/>
+      <p:regular r:id="rId15"/>
+      <p:italic r:id="rId16"/>
     </p:embeddedFont>
     <p:embeddedFont>
       <p:font typeface="HY견고딕" panose="02030600000101010101" pitchFamily="18" charset="-127"/>
-      <p:regular r:id="rId16"/>
+      <p:regular r:id="rId17"/>
     </p:embeddedFont>
     <p:embeddedFont>
       <p:font typeface="맑은 고딕" panose="020B0503020000020004" pitchFamily="50" charset="-127"/>
-      <p:regular r:id="rId17"/>
-      <p:bold r:id="rId18"/>
+      <p:regular r:id="rId18"/>
+      <p:bold r:id="rId19"/>
     </p:embeddedFont>
   </p:embeddedFontLst>
   <p:defaultTextStyle>
@@ -546,6 +547,86 @@
     <p:extLst>
       <p:ext uri="{BB962C8B-B14F-4D97-AF65-F5344CB8AC3E}">
         <p14:creationId xmlns:p14="http://schemas.microsoft.com/office/powerpoint/2010/main" val="4285272690"/>
+      </p:ext>
+    </p:extLst>
+  </p:cSld>
+  <p:clrMapOvr>
+    <a:masterClrMapping/>
+  </p:clrMapOvr>
+</p:notes>
+</file>
+
+<file path=ppt/notesSlides/notesSlide4.xml><?xml version="1.0" encoding="utf-8"?>
+<p:notes xmlns:a="http://schemas.openxmlformats.org/drawingml/2006/main" xmlns:r="http://schemas.openxmlformats.org/officeDocument/2006/relationships" xmlns:p="http://schemas.openxmlformats.org/presentationml/2006/main">
+  <p:cSld>
+    <p:spTree>
+      <p:nvGrpSpPr>
+        <p:cNvPr id="1" name=""/>
+        <p:cNvGrpSpPr/>
+        <p:nvPr/>
+      </p:nvGrpSpPr>
+      <p:grpSpPr>
+        <a:xfrm>
+          <a:off x="0" y="0"/>
+          <a:ext cx="0" cy="0"/>
+          <a:chOff x="0" y="0"/>
+          <a:chExt cx="0" cy="0"/>
+        </a:xfrm>
+      </p:grpSpPr>
+      <p:sp>
+        <p:nvSpPr>
+          <p:cNvPr id="2" name="슬라이드 이미지 개체 틀 1"/>
+          <p:cNvSpPr>
+            <a:spLocks noGrp="1" noRot="1" noChangeAspect="1"/>
+          </p:cNvSpPr>
+          <p:nvPr>
+            <p:ph type="sldImg"/>
+          </p:nvPr>
+        </p:nvSpPr>
+        <p:spPr/>
+      </p:sp>
+      <p:sp>
+        <p:nvSpPr>
+          <p:cNvPr id="3" name="슬라이드 노트 개체 틀 2"/>
+          <p:cNvSpPr>
+            <a:spLocks noGrp="1"/>
+          </p:cNvSpPr>
+          <p:nvPr>
+            <p:ph type="body" idx="1"/>
+          </p:nvPr>
+        </p:nvSpPr>
+        <p:spPr/>
+        <p:txBody>
+          <a:bodyPr/>
+          <a:lstStyle/>
+          <a:p>
+            <a:endParaRPr lang="ko-KR" altLang="en-US"/>
+          </a:p>
+        </p:txBody>
+      </p:sp>
+      <p:sp>
+        <p:nvSpPr>
+          <p:cNvPr id="4" name="슬라이드 번호 개체 틀 3"/>
+          <p:cNvSpPr>
+            <a:spLocks noGrp="1"/>
+          </p:cNvSpPr>
+          <p:nvPr>
+            <p:ph type="sldNum" sz="quarter" idx="5"/>
+          </p:nvPr>
+        </p:nvSpPr>
+        <p:spPr/>
+        <p:txBody>
+          <a:bodyPr/>
+          <a:lstStyle/>
+          <a:p>
+            <a:endParaRPr lang="ko-KR" altLang="en-US"/>
+          </a:p>
+        </p:txBody>
+      </p:sp>
+    </p:spTree>
+    <p:extLst>
+      <p:ext uri="{BB962C8B-B14F-4D97-AF65-F5344CB8AC3E}">
+        <p14:creationId xmlns:p14="http://schemas.microsoft.com/office/powerpoint/2010/main" val="4151298242"/>
       </p:ext>
     </p:extLst>
   </p:cSld>
@@ -4902,11 +4983,17 @@
               <a:t>               키워드 </a:t>
             </a:r>
             <a:r>
+              <a:rPr lang="en-US" altLang="ko-KR" sz="1400" b="1">
+                <a:latin typeface="+mn-ea"/>
+              </a:rPr>
+              <a:t>·</a:t>
+            </a:r>
+            <a:r>
               <a:rPr lang="ko-KR" altLang="en-US" sz="1400" b="1">
                 <a:latin typeface="맑은 고딕" panose="020B0503020000020004" pitchFamily="50" charset="-127"/>
                 <a:ea typeface="맑은 고딕" panose="020B0503020000020004" pitchFamily="50" charset="-127"/>
               </a:rPr>
-              <a:t>〮 </a:t>
+              <a:t> </a:t>
             </a:r>
             <a:r>
               <a:rPr lang="ko-KR" altLang="en-US" sz="1400" b="1"/>
@@ -4915,13 +5002,19 @@
             <a:r>
               <a:rPr lang="en-US" altLang="ko-KR" sz="1400" b="1"/>
               <a:t> </a:t>
+            </a:r>
+            <a:r>
+              <a:rPr lang="en-US" altLang="ko-KR" sz="1400" b="1">
+                <a:latin typeface="+mn-ea"/>
+              </a:rPr>
+              <a:t>·</a:t>
             </a:r>
             <a:r>
               <a:rPr lang="ko-KR" altLang="en-US" sz="1400" b="1">
                 <a:latin typeface="맑은 고딕" panose="020B0503020000020004" pitchFamily="50" charset="-127"/>
                 <a:ea typeface="맑은 고딕" panose="020B0503020000020004" pitchFamily="50" charset="-127"/>
               </a:rPr>
-              <a:t>〮 </a:t>
+              <a:t> </a:t>
             </a:r>
             <a:r>
               <a:rPr lang="ko-KR" altLang="en-US" sz="1400" b="1"/>
@@ -7607,34 +7700,50 @@
               <a:buChar char="§"/>
             </a:pPr>
             <a:r>
-              <a:rPr lang="ko-KR" altLang="en-US" sz="1300"/>
+              <a:rPr lang="ko-KR" altLang="en-US" sz="1300">
+                <a:latin typeface="+mn-ea"/>
+              </a:rPr>
               <a:t> 사규</a:t>
             </a:r>
             <a:r>
-              <a:rPr lang="en-US" altLang="ko-KR" sz="1300"/>
+              <a:rPr lang="en-US" altLang="ko-KR" sz="1300">
+                <a:latin typeface="+mn-ea"/>
+              </a:rPr>
               <a:t>, </a:t>
             </a:r>
             <a:r>
-              <a:rPr lang="ko-KR" altLang="en-US" sz="1300"/>
+              <a:rPr lang="ko-KR" altLang="en-US" sz="1300">
+                <a:latin typeface="+mn-ea"/>
+              </a:rPr>
               <a:t>정책</a:t>
             </a:r>
             <a:r>
-              <a:rPr lang="en-US" altLang="ko-KR" sz="1300"/>
+              <a:rPr lang="en-US" altLang="ko-KR" sz="1300">
+                <a:latin typeface="+mn-ea"/>
+              </a:rPr>
               <a:t> </a:t>
             </a:r>
             <a:r>
-              <a:rPr lang="ko-KR" altLang="en-US" sz="1300"/>
+              <a:rPr lang="ko-KR" altLang="en-US" sz="1300">
+                <a:latin typeface="+mn-ea"/>
+              </a:rPr>
               <a:t>문서 </a:t>
             </a:r>
             <a:r>
-              <a:rPr lang="en-US" altLang="ko-KR" sz="1300"/>
+              <a:rPr lang="en-US" altLang="ko-KR" sz="1300">
+                <a:latin typeface="+mn-ea"/>
+              </a:rPr>
               <a:t>3,450</a:t>
             </a:r>
             <a:r>
-              <a:rPr lang="ko-KR" altLang="en-US" sz="1300"/>
+              <a:rPr lang="ko-KR" altLang="en-US" sz="1300">
+                <a:latin typeface="+mn-ea"/>
+              </a:rPr>
               <a:t>여개 </a:t>
             </a:r>
-            <a:endParaRPr lang="en-US" altLang="ko-KR" sz="1300"/>
+            <a:endParaRPr lang="en-US" altLang="ko-KR" sz="1300">
+              <a:latin typeface="+mn-ea"/>
+            </a:endParaRPr>
           </a:p>
           <a:p>
             <a:pPr marL="90488" indent="-90488">
@@ -7654,22 +7763,32 @@
               <a:buChar char="§"/>
             </a:pPr>
             <a:r>
-              <a:rPr lang="en-US" altLang="ko-KR" sz="1300"/>
+              <a:rPr lang="en-US" altLang="ko-KR" sz="1300">
+                <a:latin typeface="+mn-ea"/>
+              </a:rPr>
               <a:t> </a:t>
             </a:r>
             <a:r>
-              <a:rPr lang="ko-KR" altLang="en-US" sz="1300"/>
+              <a:rPr lang="ko-KR" altLang="en-US" sz="1300">
+                <a:latin typeface="+mn-ea"/>
+              </a:rPr>
               <a:t>조직 </a:t>
             </a:r>
             <a:r>
-              <a:rPr lang="en-US" altLang="ko-KR" sz="1300"/>
+              <a:rPr lang="en-US" altLang="ko-KR" sz="1300">
+                <a:latin typeface="+mn-ea"/>
+              </a:rPr>
               <a:t>126</a:t>
             </a:r>
             <a:r>
-              <a:rPr lang="ko-KR" altLang="en-US" sz="1300"/>
+              <a:rPr lang="ko-KR" altLang="en-US" sz="1300">
+                <a:latin typeface="+mn-ea"/>
+              </a:rPr>
               <a:t>개 </a:t>
             </a:r>
-            <a:endParaRPr lang="en-US" altLang="ko-KR" sz="1300"/>
+            <a:endParaRPr lang="en-US" altLang="ko-KR" sz="1300">
+              <a:latin typeface="+mn-ea"/>
+            </a:endParaRPr>
           </a:p>
           <a:p>
             <a:pPr marL="90488" indent="-90488">
@@ -7689,11 +7808,15 @@
               <a:buChar char="§"/>
             </a:pPr>
             <a:r>
-              <a:rPr lang="ko-KR" altLang="en-US" sz="1300"/>
-              <a:t> 대표부서 선정 </a:t>
-            </a:r>
-            <a:r>
-              <a:rPr lang="en-US" altLang="ko-KR" sz="1300"/>
+              <a:rPr lang="ko-KR" altLang="en-US" sz="1300">
+                <a:latin typeface="+mn-ea"/>
+              </a:rPr>
+              <a:t> 대표부서 선정</a:t>
+            </a:r>
+            <a:r>
+              <a:rPr lang="en-US" altLang="ko-KR" sz="1300">
+                <a:latin typeface="+mn-ea"/>
+              </a:rPr>
               <a:t>(10 </a:t>
             </a:r>
             <a:r>
@@ -7703,22 +7826,32 @@
               <a:t>→</a:t>
             </a:r>
             <a:r>
-              <a:rPr lang="ko-KR" altLang="en-US" sz="1300"/>
+              <a:rPr lang="ko-KR" altLang="en-US" sz="1300">
+                <a:latin typeface="+mn-ea"/>
+              </a:rPr>
               <a:t> </a:t>
             </a:r>
             <a:r>
-              <a:rPr lang="en-US" altLang="ko-KR" sz="1300"/>
+              <a:rPr lang="en-US" altLang="ko-KR" sz="1300">
+                <a:latin typeface="+mn-ea"/>
+              </a:rPr>
               <a:t>35</a:t>
             </a:r>
             <a:r>
-              <a:rPr lang="ko-KR" altLang="en-US" sz="1300"/>
+              <a:rPr lang="ko-KR" altLang="en-US" sz="1300">
+                <a:latin typeface="+mn-ea"/>
+              </a:rPr>
               <a:t>개</a:t>
             </a:r>
             <a:r>
-              <a:rPr lang="en-US" altLang="ko-KR" sz="1300"/>
+              <a:rPr lang="en-US" altLang="ko-KR" sz="1300">
+                <a:latin typeface="+mn-ea"/>
+              </a:rPr>
               <a:t>)</a:t>
             </a:r>
-            <a:endParaRPr lang="ko-KR" altLang="en-US" sz="1300"/>
+            <a:endParaRPr lang="ko-KR" altLang="en-US" sz="1300">
+              <a:latin typeface="+mn-ea"/>
+            </a:endParaRPr>
           </a:p>
         </p:txBody>
       </p:sp>
@@ -8021,7 +8154,25 @@
                 </a:solidFill>
                 <a:latin typeface="+mn-ea"/>
               </a:rPr>
-              <a:t>투자〮회계</a:t>
+              <a:t>투자</a:t>
+            </a:r>
+            <a:r>
+              <a:rPr lang="en-US" altLang="ko-KR" sz="1200" b="1">
+                <a:solidFill>
+                  <a:srgbClr val="0000FF"/>
+                </a:solidFill>
+                <a:latin typeface="+mn-ea"/>
+              </a:rPr>
+              <a:t>·</a:t>
+            </a:r>
+            <a:r>
+              <a:rPr lang="ko-KR" altLang="en-US" sz="1300" spc="-40">
+                <a:solidFill>
+                  <a:srgbClr val="0000FF"/>
+                </a:solidFill>
+                <a:latin typeface="+mn-ea"/>
+              </a:rPr>
+              <a:t>회계</a:t>
             </a:r>
             <a:r>
               <a:rPr lang="en-US" altLang="ko-KR" sz="1300" spc="-40">
@@ -9595,7 +9746,7 @@
                 </a:solidFill>
                 <a:latin typeface="+mn-ea"/>
               </a:rPr>
-              <a:t>검색품질 고도화</a:t>
+              <a:t>검색 품질 고도화</a:t>
             </a:r>
           </a:p>
         </p:txBody>
@@ -12502,7 +12653,7 @@
                 </a:solidFill>
                 <a:latin typeface="+mn-ea"/>
               </a:rPr>
-              <a:t>‘ </a:t>
+              <a:t>’ </a:t>
             </a:r>
             <a:r>
               <a:rPr lang="ko-KR" altLang="en-US" sz="1500" b="1">
@@ -13031,7 +13182,7 @@
           </a:xfrm>
           <a:prstGeom prst="roundRect">
             <a:avLst>
-              <a:gd name="adj" fmla="val 7059"/>
+              <a:gd name="adj" fmla="val 2633"/>
             </a:avLst>
           </a:prstGeom>
           <a:solidFill>
@@ -13052,6 +13203,36 @@
           </a:effectLst>
         </p:spPr>
       </p:sp>
+      <p:pic>
+        <p:nvPicPr>
+          <p:cNvPr id="5" name="그림 4">
+            <a:extLst>
+              <a:ext uri="{FF2B5EF4-FFF2-40B4-BE49-F238E27FC236}">
+                <a16:creationId xmlns:a16="http://schemas.microsoft.com/office/drawing/2014/main" id="{E0C020AD-6E54-46E0-97B0-59A01BE40467}"/>
+              </a:ext>
+            </a:extLst>
+          </p:cNvPr>
+          <p:cNvPicPr>
+            <a:picLocks noChangeAspect="1"/>
+          </p:cNvPicPr>
+          <p:nvPr/>
+        </p:nvPicPr>
+        <p:blipFill>
+          <a:blip r:embed="rId3"/>
+          <a:stretch>
+            <a:fillRect/>
+          </a:stretch>
+        </p:blipFill>
+        <p:spPr>
+          <a:xfrm>
+            <a:off x="398361" y="1459854"/>
+            <a:ext cx="4445565" cy="2254216"/>
+          </a:xfrm>
+          <a:prstGeom prst="rect">
+            <a:avLst/>
+          </a:prstGeom>
+        </p:spPr>
+      </p:pic>
       <p:sp>
         <p:nvSpPr>
           <p:cNvPr id="91" name="Shape 10">
@@ -13071,7 +13252,7 @@
           </a:xfrm>
           <a:prstGeom prst="roundRect">
             <a:avLst>
-              <a:gd name="adj" fmla="val 7059"/>
+              <a:gd name="adj" fmla="val 2633"/>
             </a:avLst>
           </a:prstGeom>
           <a:solidFill>
@@ -13271,7 +13452,7 @@
         </p:nvSpPr>
         <p:spPr>
           <a:xfrm>
-            <a:off x="6621341" y="4975043"/>
+            <a:off x="6652514" y="4975043"/>
             <a:ext cx="2928750" cy="634989"/>
           </a:xfrm>
           <a:prstGeom prst="roundRect">
@@ -13320,7 +13501,7 @@
         </p:nvSpPr>
         <p:spPr>
           <a:xfrm>
-            <a:off x="630194" y="4975043"/>
+            <a:off x="661367" y="4975043"/>
             <a:ext cx="2928750" cy="634989"/>
           </a:xfrm>
           <a:prstGeom prst="roundRect">
@@ -13369,7 +13550,7 @@
         </p:nvSpPr>
         <p:spPr>
           <a:xfrm>
-            <a:off x="3624568" y="4975043"/>
+            <a:off x="3655741" y="4975043"/>
             <a:ext cx="2928750" cy="634989"/>
           </a:xfrm>
           <a:prstGeom prst="roundRect">
@@ -13416,7 +13597,7 @@
         </p:nvSpPr>
         <p:spPr>
           <a:xfrm>
-            <a:off x="6621341" y="4986728"/>
+            <a:off x="6652514" y="4986728"/>
             <a:ext cx="1044224" cy="369332"/>
           </a:xfrm>
           <a:prstGeom prst="rect">
@@ -13456,7 +13637,7 @@
         </p:nvSpPr>
         <p:spPr>
           <a:xfrm>
-            <a:off x="7392159" y="5025200"/>
+            <a:off x="7423332" y="5025200"/>
             <a:ext cx="1670730" cy="292388"/>
           </a:xfrm>
           <a:prstGeom prst="rect">
@@ -13501,7 +13682,7 @@
         </p:nvSpPr>
         <p:spPr>
           <a:xfrm>
-            <a:off x="630194" y="4986728"/>
+            <a:off x="661367" y="4986728"/>
             <a:ext cx="759638" cy="369332"/>
           </a:xfrm>
           <a:prstGeom prst="rect">
@@ -13538,7 +13719,7 @@
         </p:nvSpPr>
         <p:spPr>
           <a:xfrm>
-            <a:off x="1447713" y="5025200"/>
+            <a:off x="1478886" y="5025200"/>
             <a:ext cx="2176854" cy="292388"/>
           </a:xfrm>
           <a:prstGeom prst="rect">
@@ -13581,7 +13762,7 @@
         </p:nvSpPr>
         <p:spPr>
           <a:xfrm>
-            <a:off x="3624568" y="4986728"/>
+            <a:off x="3655741" y="4986728"/>
             <a:ext cx="728638" cy="369332"/>
           </a:xfrm>
           <a:prstGeom prst="rect">
@@ -13621,7 +13802,7 @@
         </p:nvSpPr>
         <p:spPr>
           <a:xfrm>
-            <a:off x="4395269" y="5025200"/>
+            <a:off x="4426442" y="5025200"/>
             <a:ext cx="2200109" cy="292388"/>
           </a:xfrm>
           <a:prstGeom prst="rect">
@@ -13666,7 +13847,7 @@
         </p:nvSpPr>
         <p:spPr>
           <a:xfrm>
-            <a:off x="4395269" y="5341747"/>
+            <a:off x="4426442" y="5341747"/>
             <a:ext cx="2200109" cy="276999"/>
           </a:xfrm>
           <a:prstGeom prst="rect">
@@ -13726,7 +13907,7 @@
                 <a:latin typeface="+mn-ea"/>
                 <a:sym typeface="Wingdings" panose="05000000000000000000" pitchFamily="2" charset="2"/>
               </a:rPr>
-              <a:t>89%,</a:t>
+              <a:t>89%</a:t>
             </a:r>
             <a:r>
               <a:rPr lang="en-US" altLang="ko-KR" sz="1200" b="1" spc="-60">
@@ -13760,7 +13941,7 @@
         </p:nvSpPr>
         <p:spPr>
           <a:xfrm>
-            <a:off x="1489277" y="5341747"/>
+            <a:off x="1520450" y="5341747"/>
             <a:ext cx="2139762" cy="276999"/>
           </a:xfrm>
           <a:prstGeom prst="rect">
@@ -13856,7 +14037,7 @@
         </p:nvSpPr>
         <p:spPr>
           <a:xfrm>
-            <a:off x="7392159" y="5341747"/>
+            <a:off x="7423332" y="5341747"/>
             <a:ext cx="2252206" cy="276999"/>
           </a:xfrm>
           <a:prstGeom prst="rect">
@@ -13888,47 +14069,7 @@
                 <a:latin typeface="+mn-ea"/>
                 <a:sym typeface="Wingdings" panose="05000000000000000000" pitchFamily="2" charset="2"/>
               </a:rPr>
-              <a:t>19</a:t>
-            </a:r>
-            <a:r>
-              <a:rPr lang="ko-KR" altLang="en-US" sz="1200" b="1" spc="-80">
-                <a:solidFill>
-                  <a:srgbClr val="0F64C0"/>
-                </a:solidFill>
-                <a:latin typeface="+mn-ea"/>
-                <a:sym typeface="Wingdings" panose="05000000000000000000" pitchFamily="2" charset="2"/>
-              </a:rPr>
-              <a:t>건</a:t>
-            </a:r>
-            <a:r>
-              <a:rPr lang="en-US" altLang="ko-KR" sz="1200" b="1" spc="-80">
-                <a:solidFill>
-                  <a:srgbClr val="0F64C0"/>
-                </a:solidFill>
-                <a:latin typeface="+mn-ea"/>
-                <a:sym typeface="Wingdings" panose="05000000000000000000" pitchFamily="2" charset="2"/>
-              </a:rPr>
-              <a:t> </a:t>
-            </a:r>
-            <a:r>
-              <a:rPr lang="ko-KR" altLang="en-US" sz="1200" b="1" spc="-80">
-                <a:solidFill>
-                  <a:srgbClr val="0F64C0"/>
-                </a:solidFill>
-                <a:latin typeface="+mn-ea"/>
-                <a:sym typeface="Wingdings" panose="05000000000000000000" pitchFamily="2" charset="2"/>
-              </a:rPr>
-              <a:t>자동 채점</a:t>
-            </a:r>
-            <a:r>
-              <a:rPr lang="en-US" altLang="ko-KR" sz="1200" b="1" spc="-80">
-                <a:solidFill>
-                  <a:srgbClr val="0F64C0"/>
-                </a:solidFill>
-                <a:latin typeface="+mn-ea"/>
-                <a:sym typeface="Wingdings" panose="05000000000000000000" pitchFamily="2" charset="2"/>
-              </a:rPr>
-              <a:t>, 37 </a:t>
+              <a:t>37 </a:t>
             </a:r>
             <a:r>
               <a:rPr lang="ko-KR" altLang="en-US" sz="1200" b="1" spc="-40">
@@ -13946,7 +14087,25 @@
                 </a:solidFill>
                 <a:latin typeface="+mn-ea"/>
               </a:rPr>
-              <a:t>68%</a:t>
+              <a:t>58 </a:t>
+            </a:r>
+            <a:r>
+              <a:rPr lang="ko-KR" altLang="en-US" sz="1200" b="1" spc="-40">
+                <a:solidFill>
+                  <a:srgbClr val="2082C8"/>
+                </a:solidFill>
+                <a:latin typeface="+mn-ea"/>
+              </a:rPr>
+              <a:t>→</a:t>
+            </a:r>
+            <a:r>
+              <a:rPr lang="en-US" altLang="ko-KR" sz="1200" b="1" spc="-40">
+                <a:solidFill>
+                  <a:srgbClr val="2082C8"/>
+                </a:solidFill>
+                <a:latin typeface="+mn-ea"/>
+              </a:rPr>
+              <a:t> 68%</a:t>
             </a:r>
             <a:r>
               <a:rPr lang="en-US" altLang="ko-KR" sz="1200" b="1" spc="-80">
@@ -13981,8 +14140,8 @@
         </p:nvSpPr>
         <p:spPr>
           <a:xfrm>
-            <a:off x="400396" y="4003465"/>
-            <a:ext cx="9176682" cy="505290"/>
+            <a:off x="351453" y="4003465"/>
+            <a:ext cx="9267683" cy="505290"/>
           </a:xfrm>
           <a:prstGeom prst="rect">
             <a:avLst/>
@@ -14402,7 +14561,7 @@
             <p:nvPr/>
           </p:nvPicPr>
           <p:blipFill>
-            <a:blip r:embed="rId3" cstate="print"/>
+            <a:blip r:embed="rId4" cstate="print"/>
             <a:srcRect/>
             <a:stretch>
               <a:fillRect/>
@@ -14421,35 +14580,6 @@
           </p:spPr>
         </p:pic>
       </p:grpSp>
-      <p:pic>
-        <p:nvPicPr>
-          <p:cNvPr id="6" name="그림 5">
-            <a:extLst>
-              <a:ext uri="{FF2B5EF4-FFF2-40B4-BE49-F238E27FC236}">
-                <a16:creationId xmlns:a16="http://schemas.microsoft.com/office/drawing/2014/main" id="{652B555B-12D7-43F1-9863-D55660601EF6}"/>
-              </a:ext>
-            </a:extLst>
-          </p:cNvPr>
-          <p:cNvPicPr>
-            <a:picLocks noChangeAspect="1"/>
-          </p:cNvPicPr>
-          <p:nvPr/>
-        </p:nvPicPr>
-        <p:blipFill rotWithShape="1">
-          <a:blip r:embed="rId4"/>
-          <a:srcRect t="1" b="-7835"/>
-          <a:stretch/>
-        </p:blipFill>
-        <p:spPr>
-          <a:xfrm>
-            <a:off x="390005" y="1495099"/>
-            <a:ext cx="4441768" cy="2446498"/>
-          </a:xfrm>
-          <a:prstGeom prst="rect">
-            <a:avLst/>
-          </a:prstGeom>
-        </p:spPr>
-      </p:pic>
       <p:sp>
         <p:nvSpPr>
           <p:cNvPr id="74" name="사각형: 둥근 모서리 73">
@@ -14511,6 +14641,12 @@
                 <a:latin typeface="+mn-ea"/>
               </a:rPr>
               <a:t>로 질문→검색→답변 과정 트레이싱</a:t>
+            </a:r>
+            <a:r>
+              <a:rPr lang="en-US" altLang="ko-KR" sz="1500" b="1" spc="-30">
+                <a:latin typeface="+mn-ea"/>
+              </a:rPr>
+              <a:t>*</a:t>
             </a:r>
             <a:endParaRPr lang="ko-KR" altLang="en-US" sz="1500" b="1" spc="-30"/>
           </a:p>
@@ -15010,7 +15146,7 @@
                 <a:buNone/>
               </a:pPr>
               <a:r>
-                <a:rPr lang="en-US" sz="1100" b="1" dirty="0">
+                <a:rPr lang="en-US" sz="1100" b="1">
                   <a:solidFill>
                     <a:srgbClr val="FFFFFF"/>
                   </a:solidFill>
@@ -15018,7 +15154,7 @@
                   <a:ea typeface="HY견고딕" pitchFamily="34" charset="-122"/>
                   <a:cs typeface="HY견고딕" pitchFamily="34" charset="-120"/>
                 </a:rPr>
-                <a:t>①</a:t>
+                <a:t>1</a:t>
               </a:r>
               <a:endParaRPr lang="en-US" sz="1100" dirty="0"/>
             </a:p>
@@ -15102,7 +15238,7 @@
                 <a:buNone/>
               </a:pPr>
               <a:r>
-                <a:rPr lang="en-US" sz="1100" b="1" dirty="0">
+                <a:rPr lang="en-US" sz="1100" b="1">
                   <a:solidFill>
                     <a:srgbClr val="FFFFFF"/>
                   </a:solidFill>
@@ -15110,7 +15246,7 @@
                   <a:ea typeface="HY견고딕" pitchFamily="34" charset="-122"/>
                   <a:cs typeface="HY견고딕" pitchFamily="34" charset="-120"/>
                 </a:rPr>
-                <a:t>②</a:t>
+                <a:t>2</a:t>
               </a:r>
               <a:endParaRPr lang="en-US" sz="1100" dirty="0"/>
             </a:p>
@@ -15194,7 +15330,7 @@
                 <a:buNone/>
               </a:pPr>
               <a:r>
-                <a:rPr lang="en-US" sz="1100" b="1" dirty="0">
+                <a:rPr lang="en-US" sz="1100" b="1">
                   <a:solidFill>
                     <a:srgbClr val="FFFFFF"/>
                   </a:solidFill>
@@ -15202,7 +15338,7 @@
                   <a:ea typeface="HY견고딕" pitchFamily="34" charset="-122"/>
                   <a:cs typeface="HY견고딕" pitchFamily="34" charset="-120"/>
                 </a:rPr>
-                <a:t>③</a:t>
+                <a:t>3</a:t>
               </a:r>
               <a:endParaRPr lang="en-US" sz="1100" dirty="0"/>
             </a:p>
@@ -15286,7 +15422,7 @@
                 <a:buNone/>
               </a:pPr>
               <a:r>
-                <a:rPr lang="en-US" sz="1100" b="1" dirty="0">
+                <a:rPr lang="en-US" sz="1100" b="1">
                   <a:solidFill>
                     <a:srgbClr val="FFFFFF"/>
                   </a:solidFill>
@@ -15294,7 +15430,7 @@
                   <a:ea typeface="HY견고딕" pitchFamily="34" charset="-122"/>
                   <a:cs typeface="HY견고딕" pitchFamily="34" charset="-120"/>
                 </a:rPr>
-                <a:t>④</a:t>
+                <a:t>4</a:t>
               </a:r>
               <a:endParaRPr lang="en-US" sz="1100" dirty="0"/>
             </a:p>
@@ -15592,7 +15728,7 @@
         </p:nvSpPr>
         <p:spPr>
           <a:xfrm>
-            <a:off x="6621341" y="6083404"/>
+            <a:off x="6652514" y="6083404"/>
             <a:ext cx="2928750" cy="634989"/>
           </a:xfrm>
           <a:prstGeom prst="roundRect">
@@ -15641,7 +15777,7 @@
         </p:nvSpPr>
         <p:spPr>
           <a:xfrm>
-            <a:off x="630194" y="6083404"/>
+            <a:off x="661367" y="6083404"/>
             <a:ext cx="2928750" cy="634989"/>
           </a:xfrm>
           <a:prstGeom prst="roundRect">
@@ -15692,7 +15828,7 @@
         </p:nvSpPr>
         <p:spPr>
           <a:xfrm>
-            <a:off x="3624568" y="6083404"/>
+            <a:off x="3655741" y="6083404"/>
             <a:ext cx="2928750" cy="634989"/>
           </a:xfrm>
           <a:prstGeom prst="roundRect">
@@ -15741,7 +15877,7 @@
         </p:nvSpPr>
         <p:spPr>
           <a:xfrm>
-            <a:off x="6621341" y="6095089"/>
+            <a:off x="6652514" y="6095089"/>
             <a:ext cx="1044224" cy="369332"/>
           </a:xfrm>
           <a:prstGeom prst="rect">
@@ -15784,7 +15920,7 @@
         </p:nvSpPr>
         <p:spPr>
           <a:xfrm>
-            <a:off x="7399086" y="6133561"/>
+            <a:off x="7430259" y="6133561"/>
             <a:ext cx="1670730" cy="292388"/>
           </a:xfrm>
           <a:prstGeom prst="rect">
@@ -15829,7 +15965,7 @@
         </p:nvSpPr>
         <p:spPr>
           <a:xfrm>
-            <a:off x="630194" y="6095089"/>
+            <a:off x="661367" y="6095089"/>
             <a:ext cx="759638" cy="369332"/>
           </a:xfrm>
           <a:prstGeom prst="rect">
@@ -15866,7 +16002,7 @@
         </p:nvSpPr>
         <p:spPr>
           <a:xfrm>
-            <a:off x="1444249" y="6133561"/>
+            <a:off x="1475422" y="6133561"/>
             <a:ext cx="2176854" cy="292388"/>
           </a:xfrm>
           <a:prstGeom prst="rect">
@@ -15909,7 +16045,7 @@
         </p:nvSpPr>
         <p:spPr>
           <a:xfrm>
-            <a:off x="3624568" y="6095089"/>
+            <a:off x="3655741" y="6095089"/>
             <a:ext cx="728638" cy="369332"/>
           </a:xfrm>
           <a:prstGeom prst="rect">
@@ -15949,7 +16085,7 @@
         </p:nvSpPr>
         <p:spPr>
           <a:xfrm>
-            <a:off x="4402196" y="6133561"/>
+            <a:off x="4433369" y="6133561"/>
             <a:ext cx="2200109" cy="292388"/>
           </a:xfrm>
           <a:prstGeom prst="rect">
@@ -15994,7 +16130,7 @@
         </p:nvSpPr>
         <p:spPr>
           <a:xfrm>
-            <a:off x="4402196" y="6450108"/>
+            <a:off x="4433369" y="6450108"/>
             <a:ext cx="2200109" cy="276999"/>
           </a:xfrm>
           <a:prstGeom prst="rect">
@@ -16098,7 +16234,7 @@
         </p:nvSpPr>
         <p:spPr>
           <a:xfrm>
-            <a:off x="1485813" y="6450108"/>
+            <a:off x="1516986" y="6450108"/>
             <a:ext cx="2139762" cy="276999"/>
           </a:xfrm>
           <a:prstGeom prst="rect">
@@ -16194,7 +16330,7 @@
         </p:nvSpPr>
         <p:spPr>
           <a:xfrm>
-            <a:off x="7399086" y="6450108"/>
+            <a:off x="7430259" y="6450108"/>
             <a:ext cx="2252206" cy="276999"/>
           </a:xfrm>
           <a:prstGeom prst="rect">
@@ -16290,10 +16426,225 @@
           </a:p>
         </p:txBody>
       </p:sp>
+      <p:sp>
+        <p:nvSpPr>
+          <p:cNvPr id="72" name="TextBox 71">
+            <a:extLst>
+              <a:ext uri="{FF2B5EF4-FFF2-40B4-BE49-F238E27FC236}">
+                <a16:creationId xmlns:a16="http://schemas.microsoft.com/office/drawing/2014/main" id="{9F1399A8-F879-4FEC-9DFB-1D11467EC11B}"/>
+              </a:ext>
+            </a:extLst>
+          </p:cNvPr>
+          <p:cNvSpPr txBox="1"/>
+          <p:nvPr/>
+        </p:nvSpPr>
+        <p:spPr>
+          <a:xfrm>
+            <a:off x="2566555" y="3674689"/>
+            <a:ext cx="2286571" cy="261610"/>
+          </a:xfrm>
+          <a:prstGeom prst="rect">
+            <a:avLst/>
+          </a:prstGeom>
+          <a:noFill/>
+        </p:spPr>
+        <p:txBody>
+          <a:bodyPr wrap="square" rtlCol="0">
+            <a:spAutoFit/>
+          </a:bodyPr>
+          <a:lstStyle/>
+          <a:p>
+            <a:pPr algn="r"/>
+            <a:r>
+              <a:rPr lang="en-US" altLang="ko-KR" sz="1100">
+                <a:latin typeface="+mn-ea"/>
+              </a:rPr>
+              <a:t>* </a:t>
+            </a:r>
+            <a:r>
+              <a:rPr lang="ko-KR" altLang="en-US" sz="1100">
+                <a:latin typeface="+mn-ea"/>
+              </a:rPr>
+              <a:t>골든셋 </a:t>
+            </a:r>
+            <a:r>
+              <a:rPr lang="en-US" altLang="ko-KR" sz="1100">
+                <a:latin typeface="+mn-ea"/>
+              </a:rPr>
+              <a:t>19</a:t>
+            </a:r>
+            <a:r>
+              <a:rPr lang="ko-KR" altLang="en-US" sz="1100">
+                <a:latin typeface="+mn-ea"/>
+              </a:rPr>
+              <a:t>건 기준</a:t>
+            </a:r>
+          </a:p>
+        </p:txBody>
+      </p:sp>
+      <p:grpSp>
+        <p:nvGrpSpPr>
+          <p:cNvPr id="10" name="그룹 9">
+            <a:extLst>
+              <a:ext uri="{FF2B5EF4-FFF2-40B4-BE49-F238E27FC236}">
+                <a16:creationId xmlns:a16="http://schemas.microsoft.com/office/drawing/2014/main" id="{A879A11C-BFE7-4663-8070-C7683062E7FC}"/>
+              </a:ext>
+            </a:extLst>
+          </p:cNvPr>
+          <p:cNvGrpSpPr/>
+          <p:nvPr/>
+        </p:nvGrpSpPr>
+        <p:grpSpPr>
+          <a:xfrm>
+            <a:off x="1065233" y="2172115"/>
+            <a:ext cx="3820041" cy="551408"/>
+            <a:chOff x="-3319430" y="2677076"/>
+            <a:chExt cx="3820041" cy="551408"/>
+          </a:xfrm>
+        </p:grpSpPr>
+        <p:sp>
+          <p:nvSpPr>
+            <p:cNvPr id="9" name="사각형: 둥근 모서리 8">
+              <a:extLst>
+                <a:ext uri="{FF2B5EF4-FFF2-40B4-BE49-F238E27FC236}">
+                  <a16:creationId xmlns:a16="http://schemas.microsoft.com/office/drawing/2014/main" id="{7034B27B-D7F7-49BF-8CF1-7AA52843A412}"/>
+                </a:ext>
+              </a:extLst>
+            </p:cNvPr>
+            <p:cNvSpPr/>
+            <p:nvPr/>
+          </p:nvSpPr>
+          <p:spPr>
+            <a:xfrm>
+              <a:off x="-3319430" y="2677076"/>
+              <a:ext cx="3820041" cy="551408"/>
+            </a:xfrm>
+            <a:prstGeom prst="roundRect">
+              <a:avLst/>
+            </a:prstGeom>
+            <a:noFill/>
+            <a:ln w="19050">
+              <a:solidFill>
+                <a:srgbClr val="0070C0"/>
+              </a:solidFill>
+            </a:ln>
+          </p:spPr>
+          <p:style>
+            <a:lnRef idx="2">
+              <a:schemeClr val="accent1">
+                <a:shade val="50000"/>
+              </a:schemeClr>
+            </a:lnRef>
+            <a:fillRef idx="1">
+              <a:schemeClr val="accent1"/>
+            </a:fillRef>
+            <a:effectRef idx="0">
+              <a:schemeClr val="accent1"/>
+            </a:effectRef>
+            <a:fontRef idx="minor">
+              <a:schemeClr val="lt1"/>
+            </a:fontRef>
+          </p:style>
+          <p:txBody>
+            <a:bodyPr rtlCol="0" anchor="ctr"/>
+            <a:lstStyle/>
+            <a:p>
+              <a:pPr algn="ctr"/>
+              <a:endParaRPr lang="ko-KR" altLang="en-US"/>
+            </a:p>
+          </p:txBody>
+        </p:sp>
+        <p:pic>
+          <p:nvPicPr>
+            <p:cNvPr id="73" name="그림 72">
+              <a:extLst>
+                <a:ext uri="{FF2B5EF4-FFF2-40B4-BE49-F238E27FC236}">
+                  <a16:creationId xmlns:a16="http://schemas.microsoft.com/office/drawing/2014/main" id="{B2414B01-EA20-4F93-BFED-40DAB6411FC0}"/>
+                </a:ext>
+              </a:extLst>
+            </p:cNvPr>
+            <p:cNvPicPr>
+              <a:picLocks noChangeAspect="1"/>
+            </p:cNvPicPr>
+            <p:nvPr/>
+          </p:nvPicPr>
+          <p:blipFill>
+            <a:blip r:embed="rId5"/>
+            <a:stretch>
+              <a:fillRect/>
+            </a:stretch>
+          </p:blipFill>
+          <p:spPr>
+            <a:xfrm>
+              <a:off x="-3254283" y="2706981"/>
+              <a:ext cx="3711262" cy="487624"/>
+            </a:xfrm>
+            <a:prstGeom prst="rect">
+              <a:avLst/>
+            </a:prstGeom>
+            <a:noFill/>
+            <a:ln w="19050">
+              <a:noFill/>
+            </a:ln>
+          </p:spPr>
+        </p:pic>
+      </p:grpSp>
+      <p:sp>
+        <p:nvSpPr>
+          <p:cNvPr id="75" name="사각형: 둥근 모서리 74">
+            <a:extLst>
+              <a:ext uri="{FF2B5EF4-FFF2-40B4-BE49-F238E27FC236}">
+                <a16:creationId xmlns:a16="http://schemas.microsoft.com/office/drawing/2014/main" id="{B3369A65-3330-4382-810B-16F512116A9D}"/>
+              </a:ext>
+            </a:extLst>
+          </p:cNvPr>
+          <p:cNvSpPr/>
+          <p:nvPr/>
+        </p:nvSpPr>
+        <p:spPr>
+          <a:xfrm>
+            <a:off x="3278007" y="1601231"/>
+            <a:ext cx="1597664" cy="169741"/>
+          </a:xfrm>
+          <a:prstGeom prst="roundRect">
+            <a:avLst/>
+          </a:prstGeom>
+          <a:noFill/>
+          <a:ln w="19050">
+            <a:solidFill>
+              <a:srgbClr val="0070C0"/>
+            </a:solidFill>
+          </a:ln>
+        </p:spPr>
+        <p:style>
+          <a:lnRef idx="2">
+            <a:schemeClr val="accent1">
+              <a:shade val="50000"/>
+            </a:schemeClr>
+          </a:lnRef>
+          <a:fillRef idx="1">
+            <a:schemeClr val="accent1"/>
+          </a:fillRef>
+          <a:effectRef idx="0">
+            <a:schemeClr val="accent1"/>
+          </a:effectRef>
+          <a:fontRef idx="minor">
+            <a:schemeClr val="lt1"/>
+          </a:fontRef>
+        </p:style>
+        <p:txBody>
+          <a:bodyPr rtlCol="0" anchor="ctr"/>
+          <a:lstStyle/>
+          <a:p>
+            <a:pPr algn="ctr"/>
+            <a:endParaRPr lang="ko-KR" altLang="en-US"/>
+          </a:p>
+        </p:txBody>
+      </p:sp>
     </p:spTree>
     <p:extLst>
       <p:ext uri="{BB962C8B-B14F-4D97-AF65-F5344CB8AC3E}">
-        <p14:creationId xmlns:p14="http://schemas.microsoft.com/office/powerpoint/2010/main" val="2381020833"/>
+        <p14:creationId xmlns:p14="http://schemas.microsoft.com/office/powerpoint/2010/main" val="187503836"/>
       </p:ext>
     </p:extLst>
   </p:cSld>
@@ -18733,14 +19084,13 @@
               <a:t>투자</a:t>
             </a:r>
             <a:r>
-              <a:rPr lang="en-US" altLang="ko-KR" sz="1200" b="1" spc="-80">
+              <a:rPr lang="en-US" altLang="ko-KR" sz="1200" b="1">
                 <a:solidFill>
-                  <a:srgbClr val="0F64C0"/>
+                  <a:srgbClr val="00B0F0"/>
                 </a:solidFill>
-                <a:latin typeface="맑은 고딕" panose="020B0503020000020004" pitchFamily="50" charset="-127"/>
-                <a:ea typeface="맑은 고딕" panose="020B0503020000020004" pitchFamily="50" charset="-127"/>
-              </a:rPr>
-              <a:t>〮</a:t>
+                <a:latin typeface="+mn-ea"/>
+              </a:rPr>
+              <a:t>·</a:t>
             </a:r>
             <a:r>
               <a:rPr lang="ko-KR" altLang="en-US" sz="1200" b="1" spc="-80">
@@ -20475,19 +20825,31 @@
               <a:rPr lang="ko-KR" altLang="en-US" sz="1400" spc="-40">
                 <a:latin typeface="+mn-ea"/>
               </a:rPr>
-              <a:t> 반복 평가〮모델 개선으로 주관부서 매칭 정확도 </a:t>
+              <a:t> 반복 평가</a:t>
+            </a:r>
+            <a:r>
+              <a:rPr lang="en-US" altLang="ko-KR" sz="1400" b="1">
+                <a:latin typeface="+mn-ea"/>
+              </a:rPr>
+              <a:t>·</a:t>
+            </a:r>
+            <a:r>
+              <a:rPr lang="ko-KR" altLang="en-US" sz="1400" spc="-40">
+                <a:latin typeface="+mn-ea"/>
+              </a:rPr>
+              <a:t>모델 개선으로 주관부서 매칭 정확도 </a:t>
             </a:r>
             <a:r>
               <a:rPr lang="en-US" altLang="ko-KR" sz="1400" spc="-40">
                 <a:latin typeface="+mn-ea"/>
               </a:rPr>
-              <a:t>63</a:t>
+              <a:t>63 </a:t>
             </a:r>
             <a:r>
               <a:rPr lang="ko-KR" altLang="en-US" sz="1400" spc="-40">
                 <a:latin typeface="+mn-ea"/>
               </a:rPr>
-              <a:t>→</a:t>
+              <a:t>→ </a:t>
             </a:r>
             <a:r>
               <a:rPr lang="en-US" altLang="ko-KR" sz="1400" spc="-40">
@@ -21062,6 +21424,3587 @@
     <p:extLst>
       <p:ext uri="{BB962C8B-B14F-4D97-AF65-F5344CB8AC3E}">
         <p14:creationId xmlns:p14="http://schemas.microsoft.com/office/powerpoint/2010/main" val="1126135889"/>
+      </p:ext>
+    </p:extLst>
+  </p:cSld>
+  <p:clrMapOvr>
+    <a:masterClrMapping/>
+  </p:clrMapOvr>
+</p:sld>
+</file>
+
+<file path=ppt/slides/slide8.xml><?xml version="1.0" encoding="utf-8"?>
+<p:sld xmlns:a="http://schemas.openxmlformats.org/drawingml/2006/main" xmlns:r="http://schemas.openxmlformats.org/officeDocument/2006/relationships" xmlns:p="http://schemas.openxmlformats.org/presentationml/2006/main">
+  <p:cSld>
+    <p:spTree>
+      <p:nvGrpSpPr>
+        <p:cNvPr id="1" name=""/>
+        <p:cNvGrpSpPr/>
+        <p:nvPr/>
+      </p:nvGrpSpPr>
+      <p:grpSpPr>
+        <a:xfrm>
+          <a:off x="0" y="0"/>
+          <a:ext cx="0" cy="0"/>
+          <a:chOff x="0" y="0"/>
+          <a:chExt cx="0" cy="0"/>
+        </a:xfrm>
+      </p:grpSpPr>
+      <p:sp>
+        <p:nvSpPr>
+          <p:cNvPr id="91" name="사각형: 둥근 모서리 90">
+            <a:extLst>
+              <a:ext uri="{FF2B5EF4-FFF2-40B4-BE49-F238E27FC236}">
+                <a16:creationId xmlns:a16="http://schemas.microsoft.com/office/drawing/2014/main" id="{48188336-0194-41F9-8F5E-A01D05CA77ED}"/>
+              </a:ext>
+            </a:extLst>
+          </p:cNvPr>
+          <p:cNvSpPr>
+            <a:spLocks noGrp="1"/>
+          </p:cNvSpPr>
+          <p:nvPr/>
+        </p:nvSpPr>
+        <p:spPr>
+          <a:xfrm>
+            <a:off x="3448587" y="2042591"/>
+            <a:ext cx="2957789" cy="2077698"/>
+          </a:xfrm>
+          <a:prstGeom prst="roundRect">
+            <a:avLst>
+              <a:gd name="adj" fmla="val 5139"/>
+            </a:avLst>
+          </a:prstGeom>
+          <a:solidFill>
+            <a:schemeClr val="bg1"/>
+          </a:solidFill>
+          <a:ln>
+            <a:noFill/>
+          </a:ln>
+          <a:effectLst>
+            <a:outerShdw blurRad="228600" dist="50800" dir="5400000" rotWithShape="0">
+              <a:srgbClr val="1B2A4A">
+                <a:alpha val="22000"/>
+              </a:srgbClr>
+            </a:outerShdw>
+          </a:effectLst>
+        </p:spPr>
+        <p:txBody>
+          <a:bodyPr anchor="ctr" anchorCtr="0"/>
+          <a:lstStyle/>
+          <a:p>
+            <a:pPr algn="ctr"/>
+            <a:endParaRPr lang="ko-KR" altLang="en-US" sz="1400" b="1"/>
+          </a:p>
+        </p:txBody>
+      </p:sp>
+      <p:sp>
+        <p:nvSpPr>
+          <p:cNvPr id="92" name="사각형: 둥근 모서리 91">
+            <a:extLst>
+              <a:ext uri="{FF2B5EF4-FFF2-40B4-BE49-F238E27FC236}">
+                <a16:creationId xmlns:a16="http://schemas.microsoft.com/office/drawing/2014/main" id="{53B7273A-BDF9-437A-8C55-2D48EB8ED118}"/>
+              </a:ext>
+            </a:extLst>
+          </p:cNvPr>
+          <p:cNvSpPr>
+            <a:spLocks noGrp="1"/>
+          </p:cNvSpPr>
+          <p:nvPr/>
+        </p:nvSpPr>
+        <p:spPr>
+          <a:xfrm>
+            <a:off x="6601065" y="2042591"/>
+            <a:ext cx="2957789" cy="2077698"/>
+          </a:xfrm>
+          <a:prstGeom prst="roundRect">
+            <a:avLst>
+              <a:gd name="adj" fmla="val 5139"/>
+            </a:avLst>
+          </a:prstGeom>
+          <a:solidFill>
+            <a:schemeClr val="bg1"/>
+          </a:solidFill>
+          <a:ln>
+            <a:noFill/>
+          </a:ln>
+          <a:effectLst>
+            <a:outerShdw blurRad="228600" dist="50800" dir="5400000" rotWithShape="0">
+              <a:srgbClr val="1B2A4A">
+                <a:alpha val="22000"/>
+              </a:srgbClr>
+            </a:outerShdw>
+          </a:effectLst>
+        </p:spPr>
+        <p:txBody>
+          <a:bodyPr anchor="ctr" anchorCtr="0"/>
+          <a:lstStyle/>
+          <a:p>
+            <a:pPr algn="ctr"/>
+            <a:endParaRPr lang="ko-KR" altLang="en-US" sz="1400" b="1"/>
+          </a:p>
+        </p:txBody>
+      </p:sp>
+      <p:sp>
+        <p:nvSpPr>
+          <p:cNvPr id="90" name="사각형: 둥근 모서리 89">
+            <a:extLst>
+              <a:ext uri="{FF2B5EF4-FFF2-40B4-BE49-F238E27FC236}">
+                <a16:creationId xmlns:a16="http://schemas.microsoft.com/office/drawing/2014/main" id="{F432CC7F-46D1-4AF6-ADB6-0B1FC20372EE}"/>
+              </a:ext>
+            </a:extLst>
+          </p:cNvPr>
+          <p:cNvSpPr>
+            <a:spLocks noGrp="1"/>
+          </p:cNvSpPr>
+          <p:nvPr/>
+        </p:nvSpPr>
+        <p:spPr>
+          <a:xfrm>
+            <a:off x="298630" y="2042591"/>
+            <a:ext cx="2957789" cy="2077698"/>
+          </a:xfrm>
+          <a:prstGeom prst="roundRect">
+            <a:avLst>
+              <a:gd name="adj" fmla="val 5139"/>
+            </a:avLst>
+          </a:prstGeom>
+          <a:solidFill>
+            <a:schemeClr val="bg1"/>
+          </a:solidFill>
+          <a:ln>
+            <a:noFill/>
+          </a:ln>
+          <a:effectLst>
+            <a:outerShdw blurRad="228600" dist="50800" dir="5400000" rotWithShape="0">
+              <a:srgbClr val="1B2A4A">
+                <a:alpha val="22000"/>
+              </a:srgbClr>
+            </a:outerShdw>
+          </a:effectLst>
+        </p:spPr>
+        <p:txBody>
+          <a:bodyPr anchor="ctr" anchorCtr="0"/>
+          <a:lstStyle/>
+          <a:p>
+            <a:pPr algn="ctr"/>
+            <a:endParaRPr lang="ko-KR" altLang="en-US" sz="1400" b="1"/>
+          </a:p>
+        </p:txBody>
+      </p:sp>
+      <p:sp>
+        <p:nvSpPr>
+          <p:cNvPr id="88" name="사각형: 둥근 모서리 87">
+            <a:extLst>
+              <a:ext uri="{FF2B5EF4-FFF2-40B4-BE49-F238E27FC236}">
+                <a16:creationId xmlns:a16="http://schemas.microsoft.com/office/drawing/2014/main" id="{F4133112-5F7A-4066-BF47-F14ECA240030}"/>
+              </a:ext>
+            </a:extLst>
+          </p:cNvPr>
+          <p:cNvSpPr>
+            <a:spLocks noGrp="1"/>
+          </p:cNvSpPr>
+          <p:nvPr/>
+        </p:nvSpPr>
+        <p:spPr>
+          <a:xfrm>
+            <a:off x="298630" y="4424983"/>
+            <a:ext cx="2957789" cy="2079727"/>
+          </a:xfrm>
+          <a:prstGeom prst="roundRect">
+            <a:avLst>
+              <a:gd name="adj" fmla="val 5139"/>
+            </a:avLst>
+          </a:prstGeom>
+          <a:solidFill>
+            <a:schemeClr val="bg1"/>
+          </a:solidFill>
+          <a:ln>
+            <a:noFill/>
+          </a:ln>
+          <a:effectLst>
+            <a:outerShdw blurRad="228600" dist="50800" dir="5400000" rotWithShape="0">
+              <a:srgbClr val="1B2A4A">
+                <a:alpha val="22000"/>
+              </a:srgbClr>
+            </a:outerShdw>
+          </a:effectLst>
+        </p:spPr>
+        <p:txBody>
+          <a:bodyPr anchor="ctr" anchorCtr="0"/>
+          <a:lstStyle/>
+          <a:p>
+            <a:pPr algn="ctr"/>
+            <a:endParaRPr lang="ko-KR" altLang="en-US" sz="1400" b="1"/>
+          </a:p>
+        </p:txBody>
+      </p:sp>
+      <p:sp>
+        <p:nvSpPr>
+          <p:cNvPr id="89" name="사각형: 둥근 모서리 88">
+            <a:extLst>
+              <a:ext uri="{FF2B5EF4-FFF2-40B4-BE49-F238E27FC236}">
+                <a16:creationId xmlns:a16="http://schemas.microsoft.com/office/drawing/2014/main" id="{42CD2C78-F92D-43E1-9817-7DC040D68104}"/>
+              </a:ext>
+            </a:extLst>
+          </p:cNvPr>
+          <p:cNvSpPr>
+            <a:spLocks noGrp="1"/>
+          </p:cNvSpPr>
+          <p:nvPr/>
+        </p:nvSpPr>
+        <p:spPr>
+          <a:xfrm>
+            <a:off x="3448587" y="4424983"/>
+            <a:ext cx="2957789" cy="2079727"/>
+          </a:xfrm>
+          <a:prstGeom prst="roundRect">
+            <a:avLst>
+              <a:gd name="adj" fmla="val 5139"/>
+            </a:avLst>
+          </a:prstGeom>
+          <a:solidFill>
+            <a:schemeClr val="bg1"/>
+          </a:solidFill>
+          <a:ln>
+            <a:noFill/>
+          </a:ln>
+          <a:effectLst>
+            <a:outerShdw blurRad="228600" dist="50800" dir="5400000" rotWithShape="0">
+              <a:srgbClr val="1B2A4A">
+                <a:alpha val="22000"/>
+              </a:srgbClr>
+            </a:outerShdw>
+          </a:effectLst>
+        </p:spPr>
+        <p:txBody>
+          <a:bodyPr anchor="ctr" anchorCtr="0"/>
+          <a:lstStyle/>
+          <a:p>
+            <a:pPr algn="ctr"/>
+            <a:endParaRPr lang="ko-KR" altLang="en-US" sz="1400" b="1"/>
+          </a:p>
+        </p:txBody>
+      </p:sp>
+      <p:sp>
+        <p:nvSpPr>
+          <p:cNvPr id="87" name="사각형: 둥근 모서리 86">
+            <a:extLst>
+              <a:ext uri="{FF2B5EF4-FFF2-40B4-BE49-F238E27FC236}">
+                <a16:creationId xmlns:a16="http://schemas.microsoft.com/office/drawing/2014/main" id="{1618651D-F4E5-4D6F-B934-F71DF2559191}"/>
+              </a:ext>
+            </a:extLst>
+          </p:cNvPr>
+          <p:cNvSpPr>
+            <a:spLocks noGrp="1"/>
+          </p:cNvSpPr>
+          <p:nvPr/>
+        </p:nvSpPr>
+        <p:spPr>
+          <a:xfrm>
+            <a:off x="6601065" y="4427012"/>
+            <a:ext cx="2957789" cy="2077698"/>
+          </a:xfrm>
+          <a:prstGeom prst="roundRect">
+            <a:avLst>
+              <a:gd name="adj" fmla="val 5139"/>
+            </a:avLst>
+          </a:prstGeom>
+          <a:solidFill>
+            <a:schemeClr val="bg1"/>
+          </a:solidFill>
+          <a:ln>
+            <a:noFill/>
+          </a:ln>
+          <a:effectLst>
+            <a:outerShdw blurRad="228600" dist="50800" dir="5400000" rotWithShape="0">
+              <a:srgbClr val="1B2A4A">
+                <a:alpha val="22000"/>
+              </a:srgbClr>
+            </a:outerShdw>
+          </a:effectLst>
+        </p:spPr>
+        <p:txBody>
+          <a:bodyPr anchor="ctr" anchorCtr="0"/>
+          <a:lstStyle/>
+          <a:p>
+            <a:pPr algn="ctr"/>
+            <a:endParaRPr lang="ko-KR" altLang="en-US" sz="1400" b="1"/>
+          </a:p>
+        </p:txBody>
+      </p:sp>
+      <p:sp>
+        <p:nvSpPr>
+          <p:cNvPr id="4" name="TextBox 3">
+            <a:extLst>
+              <a:ext uri="{FF2B5EF4-FFF2-40B4-BE49-F238E27FC236}">
+                <a16:creationId xmlns:a16="http://schemas.microsoft.com/office/drawing/2014/main" id="{F565F164-0C45-4D87-8583-266FB8891880}"/>
+              </a:ext>
+            </a:extLst>
+          </p:cNvPr>
+          <p:cNvSpPr txBox="1"/>
+          <p:nvPr/>
+        </p:nvSpPr>
+        <p:spPr>
+          <a:xfrm>
+            <a:off x="181848" y="118834"/>
+            <a:ext cx="8281358" cy="400110"/>
+          </a:xfrm>
+          <a:prstGeom prst="rect">
+            <a:avLst/>
+          </a:prstGeom>
+          <a:noFill/>
+        </p:spPr>
+        <p:txBody>
+          <a:bodyPr wrap="square" rtlCol="0">
+            <a:spAutoFit/>
+          </a:bodyPr>
+          <a:lstStyle/>
+          <a:p>
+            <a:pPr marL="0" marR="0" lvl="0" indent="0" defTabSz="914400" rtl="0" eaLnBrk="1" fontAlgn="auto" latinLnBrk="1" hangingPunct="1">
+              <a:lnSpc>
+                <a:spcPct val="100000"/>
+              </a:lnSpc>
+              <a:spcBef>
+                <a:spcPts val="0"/>
+              </a:spcBef>
+              <a:spcAft>
+                <a:spcPts val="0"/>
+              </a:spcAft>
+              <a:buClrTx/>
+              <a:buSzTx/>
+              <a:buFontTx/>
+              <a:buNone/>
+              <a:tabLst/>
+              <a:defRPr/>
+            </a:pPr>
+            <a:r>
+              <a:rPr kumimoji="0" lang="en-US" altLang="ko-KR" sz="2000" b="1" i="0" u="none" strike="noStrike" kern="1200" cap="none" spc="-100" normalizeH="0" baseline="0" noProof="0">
+                <a:ln>
+                  <a:noFill/>
+                </a:ln>
+                <a:solidFill>
+                  <a:prstClr val="black"/>
+                </a:solidFill>
+                <a:effectLst/>
+                <a:uLnTx/>
+                <a:uFillTx/>
+                <a:latin typeface="맑은 고딕" panose="020B0503020000020004" pitchFamily="50" charset="-127"/>
+                <a:ea typeface="맑은 고딕" panose="020B0503020000020004" pitchFamily="50" charset="-127"/>
+                <a:cs typeface="+mn-cs"/>
+              </a:rPr>
+              <a:t>[</a:t>
+            </a:r>
+            <a:r>
+              <a:rPr kumimoji="0" lang="ko-KR" altLang="en-US" sz="2000" b="1" i="0" u="none" strike="noStrike" kern="1200" cap="none" spc="-100" normalizeH="0" baseline="0" noProof="0">
+                <a:ln>
+                  <a:noFill/>
+                </a:ln>
+                <a:solidFill>
+                  <a:prstClr val="black"/>
+                </a:solidFill>
+                <a:effectLst/>
+                <a:uLnTx/>
+                <a:uFillTx/>
+                <a:latin typeface="맑은 고딕" panose="020B0503020000020004" pitchFamily="50" charset="-127"/>
+                <a:ea typeface="맑은 고딕" panose="020B0503020000020004" pitchFamily="50" charset="-127"/>
+                <a:cs typeface="+mn-cs"/>
+              </a:rPr>
+              <a:t>첨부</a:t>
+            </a:r>
+            <a:r>
+              <a:rPr kumimoji="0" lang="en-US" altLang="ko-KR" sz="2000" b="1" i="0" u="none" strike="noStrike" kern="1200" cap="none" spc="-100" normalizeH="0" baseline="0" noProof="0">
+                <a:ln>
+                  <a:noFill/>
+                </a:ln>
+                <a:solidFill>
+                  <a:prstClr val="black"/>
+                </a:solidFill>
+                <a:effectLst/>
+                <a:uLnTx/>
+                <a:uFillTx/>
+                <a:latin typeface="맑은 고딕" panose="020B0503020000020004" pitchFamily="50" charset="-127"/>
+                <a:ea typeface="맑은 고딕" panose="020B0503020000020004" pitchFamily="50" charset="-127"/>
+                <a:cs typeface="+mn-cs"/>
+              </a:rPr>
+              <a:t>] </a:t>
+            </a:r>
+            <a:r>
+              <a:rPr kumimoji="0" lang="ko-KR" altLang="en-US" sz="2000" b="1" i="0" u="none" strike="noStrike" kern="1200" cap="none" spc="-100" normalizeH="0" baseline="0" noProof="0">
+                <a:ln>
+                  <a:noFill/>
+                </a:ln>
+                <a:solidFill>
+                  <a:prstClr val="black"/>
+                </a:solidFill>
+                <a:effectLst/>
+                <a:uLnTx/>
+                <a:uFillTx/>
+                <a:latin typeface="맑은 고딕" panose="020B0503020000020004" pitchFamily="50" charset="-127"/>
+                <a:ea typeface="맑은 고딕" panose="020B0503020000020004" pitchFamily="50" charset="-127"/>
+                <a:cs typeface="+mn-cs"/>
+              </a:rPr>
+              <a:t>서비스를 움직이는 기술</a:t>
+            </a:r>
+            <a:r>
+              <a:rPr kumimoji="0" lang="en-US" altLang="ko-KR" sz="2000" b="1" i="0" u="none" strike="noStrike" kern="1200" cap="none" spc="-100" normalizeH="0" baseline="0" noProof="0">
+                <a:ln>
+                  <a:noFill/>
+                </a:ln>
+                <a:solidFill>
+                  <a:prstClr val="black"/>
+                </a:solidFill>
+                <a:effectLst/>
+                <a:uLnTx/>
+                <a:uFillTx/>
+                <a:latin typeface="맑은 고딕" panose="020B0503020000020004" pitchFamily="50" charset="-127"/>
+                <a:ea typeface="맑은 고딕" panose="020B0503020000020004" pitchFamily="50" charset="-127"/>
+                <a:cs typeface="+mn-cs"/>
+              </a:rPr>
+              <a:t> </a:t>
+            </a:r>
+            <a:endParaRPr kumimoji="0" lang="ko-KR" altLang="en-US" sz="2000" b="1" i="0" u="none" strike="noStrike" kern="1200" cap="none" spc="-100" normalizeH="0" baseline="0" noProof="0" dirty="0">
+              <a:ln>
+                <a:noFill/>
+              </a:ln>
+              <a:solidFill>
+                <a:prstClr val="black"/>
+              </a:solidFill>
+              <a:effectLst/>
+              <a:uLnTx/>
+              <a:uFillTx/>
+              <a:latin typeface="맑은 고딕" panose="020B0503020000020004" pitchFamily="50" charset="-127"/>
+              <a:ea typeface="맑은 고딕" panose="020B0503020000020004" pitchFamily="50" charset="-127"/>
+              <a:cs typeface="+mn-cs"/>
+            </a:endParaRPr>
+          </a:p>
+        </p:txBody>
+      </p:sp>
+      <p:grpSp>
+        <p:nvGrpSpPr>
+          <p:cNvPr id="5" name="그룹 4">
+            <a:extLst>
+              <a:ext uri="{FF2B5EF4-FFF2-40B4-BE49-F238E27FC236}">
+                <a16:creationId xmlns:a16="http://schemas.microsoft.com/office/drawing/2014/main" id="{FE7BCA31-1083-4868-AB2E-E33DC45B396A}"/>
+              </a:ext>
+            </a:extLst>
+          </p:cNvPr>
+          <p:cNvGrpSpPr/>
+          <p:nvPr/>
+        </p:nvGrpSpPr>
+        <p:grpSpPr>
+          <a:xfrm>
+            <a:off x="301491" y="899849"/>
+            <a:ext cx="2097024" cy="859536"/>
+            <a:chOff x="436418" y="1076496"/>
+            <a:chExt cx="2097024" cy="859536"/>
+          </a:xfrm>
+        </p:grpSpPr>
+        <p:sp>
+          <p:nvSpPr>
+            <p:cNvPr id="59" name="Rounded Rectangle 43">
+              <a:extLst>
+                <a:ext uri="{FF2B5EF4-FFF2-40B4-BE49-F238E27FC236}">
+                  <a16:creationId xmlns:a16="http://schemas.microsoft.com/office/drawing/2014/main" id="{996F7484-581E-4BBF-817C-50E10F835049}"/>
+                </a:ext>
+              </a:extLst>
+            </p:cNvPr>
+            <p:cNvSpPr/>
+            <p:nvPr/>
+          </p:nvSpPr>
+          <p:spPr>
+            <a:xfrm>
+              <a:off x="436418" y="1076496"/>
+              <a:ext cx="2097024" cy="838893"/>
+            </a:xfrm>
+            <a:prstGeom prst="roundRect">
+              <a:avLst>
+                <a:gd name="adj" fmla="val 10000"/>
+              </a:avLst>
+            </a:prstGeom>
+            <a:solidFill>
+              <a:srgbClr val="EAF2FB"/>
+            </a:solidFill>
+            <a:ln>
+              <a:noFill/>
+            </a:ln>
+            <a:effectLst/>
+          </p:spPr>
+          <p:style>
+            <a:lnRef idx="1">
+              <a:schemeClr val="accent1"/>
+            </a:lnRef>
+            <a:fillRef idx="3">
+              <a:schemeClr val="accent1"/>
+            </a:fillRef>
+            <a:effectRef idx="2">
+              <a:schemeClr val="accent1"/>
+            </a:effectRef>
+            <a:fontRef idx="minor">
+              <a:schemeClr val="lt1"/>
+            </a:fontRef>
+          </p:style>
+          <p:txBody>
+            <a:bodyPr rtlCol="0" anchor="ctr"/>
+            <a:lstStyle/>
+            <a:p>
+              <a:pPr algn="ctr"/>
+              <a:endParaRPr/>
+            </a:p>
+          </p:txBody>
+        </p:sp>
+        <p:sp>
+          <p:nvSpPr>
+            <p:cNvPr id="62" name="TextBox 61">
+              <a:extLst>
+                <a:ext uri="{FF2B5EF4-FFF2-40B4-BE49-F238E27FC236}">
+                  <a16:creationId xmlns:a16="http://schemas.microsoft.com/office/drawing/2014/main" id="{D72EF195-B856-451C-876C-B2B2396A227F}"/>
+                </a:ext>
+              </a:extLst>
+            </p:cNvPr>
+            <p:cNvSpPr txBox="1"/>
+            <p:nvPr/>
+          </p:nvSpPr>
+          <p:spPr>
+            <a:xfrm>
+              <a:off x="601010" y="1222800"/>
+              <a:ext cx="1767840" cy="274320"/>
+            </a:xfrm>
+            <a:prstGeom prst="rect">
+              <a:avLst/>
+            </a:prstGeom>
+            <a:noFill/>
+          </p:spPr>
+          <p:txBody>
+            <a:bodyPr wrap="square" lIns="0" tIns="0" rIns="0" bIns="0" anchor="t">
+              <a:noAutofit/>
+            </a:bodyPr>
+            <a:lstStyle/>
+            <a:p>
+              <a:pPr algn="l">
+                <a:lnSpc>
+                  <a:spcPct val="100000"/>
+                </a:lnSpc>
+                <a:spcBef>
+                  <a:spcPts val="0"/>
+                </a:spcBef>
+                <a:spcAft>
+                  <a:spcPts val="0"/>
+                </a:spcAft>
+              </a:pPr>
+              <a:r>
+                <a:rPr sz="1400" b="0">
+                  <a:solidFill>
+                    <a:srgbClr val="1A1F2B"/>
+                  </a:solidFill>
+                  <a:latin typeface="+mn-ea"/>
+                </a:rPr>
+                <a:t>🔍  </a:t>
+              </a:r>
+              <a:r>
+                <a:rPr sz="1400" b="1">
+                  <a:solidFill>
+                    <a:srgbClr val="1A1F2B"/>
+                  </a:solidFill>
+                  <a:latin typeface="+mn-ea"/>
+                </a:rPr>
+                <a:t>질문 입력</a:t>
+              </a:r>
+            </a:p>
+          </p:txBody>
+        </p:sp>
+        <p:sp>
+          <p:nvSpPr>
+            <p:cNvPr id="64" name="TextBox 63">
+              <a:extLst>
+                <a:ext uri="{FF2B5EF4-FFF2-40B4-BE49-F238E27FC236}">
+                  <a16:creationId xmlns:a16="http://schemas.microsoft.com/office/drawing/2014/main" id="{95EBF4BE-BB55-4594-A2FC-BDDB35435C90}"/>
+                </a:ext>
+              </a:extLst>
+            </p:cNvPr>
+            <p:cNvSpPr txBox="1"/>
+            <p:nvPr/>
+          </p:nvSpPr>
+          <p:spPr>
+            <a:xfrm>
+              <a:off x="601010" y="1570272"/>
+              <a:ext cx="1767840" cy="365760"/>
+            </a:xfrm>
+            <a:prstGeom prst="rect">
+              <a:avLst/>
+            </a:prstGeom>
+            <a:noFill/>
+          </p:spPr>
+          <p:txBody>
+            <a:bodyPr wrap="square" lIns="0" tIns="0" rIns="0" bIns="0" anchor="t">
+              <a:noAutofit/>
+            </a:bodyPr>
+            <a:lstStyle/>
+            <a:p>
+              <a:pPr algn="l">
+                <a:lnSpc>
+                  <a:spcPct val="100000"/>
+                </a:lnSpc>
+                <a:spcBef>
+                  <a:spcPts val="0"/>
+                </a:spcBef>
+                <a:spcAft>
+                  <a:spcPts val="0"/>
+                </a:spcAft>
+              </a:pPr>
+              <a:r>
+                <a:rPr lang="ko-KR" altLang="en-US" sz="1200" b="0">
+                  <a:solidFill>
+                    <a:srgbClr val="6B7280"/>
+                  </a:solidFill>
+                  <a:latin typeface="+mn-ea"/>
+                </a:rPr>
+                <a:t>업무 상황 자연어 입력</a:t>
+              </a:r>
+              <a:endParaRPr sz="1200" b="0">
+                <a:solidFill>
+                  <a:srgbClr val="6B7280"/>
+                </a:solidFill>
+                <a:latin typeface="+mn-ea"/>
+              </a:endParaRPr>
+            </a:p>
+          </p:txBody>
+        </p:sp>
+      </p:grpSp>
+      <p:sp>
+        <p:nvSpPr>
+          <p:cNvPr id="65" name="TextBox 64">
+            <a:extLst>
+              <a:ext uri="{FF2B5EF4-FFF2-40B4-BE49-F238E27FC236}">
+                <a16:creationId xmlns:a16="http://schemas.microsoft.com/office/drawing/2014/main" id="{EFA33DF7-0CE6-4061-A974-4EC09107C85E}"/>
+              </a:ext>
+            </a:extLst>
+          </p:cNvPr>
+          <p:cNvSpPr txBox="1"/>
+          <p:nvPr/>
+        </p:nvSpPr>
+        <p:spPr>
+          <a:xfrm>
+            <a:off x="2439923" y="1194951"/>
+            <a:ext cx="201168" cy="365760"/>
+          </a:xfrm>
+          <a:prstGeom prst="rect">
+            <a:avLst/>
+          </a:prstGeom>
+          <a:noFill/>
+        </p:spPr>
+        <p:txBody>
+          <a:bodyPr wrap="square" lIns="0" tIns="0" rIns="0" bIns="0" anchor="t">
+            <a:noAutofit/>
+          </a:bodyPr>
+          <a:lstStyle/>
+          <a:p>
+            <a:pPr algn="ctr">
+              <a:lnSpc>
+                <a:spcPct val="100000"/>
+              </a:lnSpc>
+              <a:spcBef>
+                <a:spcPts val="0"/>
+              </a:spcBef>
+              <a:spcAft>
+                <a:spcPts val="0"/>
+              </a:spcAft>
+            </a:pPr>
+            <a:r>
+              <a:rPr sz="1600" b="1">
+                <a:solidFill>
+                  <a:srgbClr val="B9C2D1"/>
+                </a:solidFill>
+                <a:latin typeface="+mn-ea"/>
+              </a:rPr>
+              <a:t>›</a:t>
+            </a:r>
+          </a:p>
+        </p:txBody>
+      </p:sp>
+      <p:grpSp>
+        <p:nvGrpSpPr>
+          <p:cNvPr id="8" name="그룹 7">
+            <a:extLst>
+              <a:ext uri="{FF2B5EF4-FFF2-40B4-BE49-F238E27FC236}">
+                <a16:creationId xmlns:a16="http://schemas.microsoft.com/office/drawing/2014/main" id="{1F4AFCF0-0572-47D7-96C0-56A67E12F342}"/>
+              </a:ext>
+            </a:extLst>
+          </p:cNvPr>
+          <p:cNvGrpSpPr/>
+          <p:nvPr/>
+        </p:nvGrpSpPr>
+        <p:grpSpPr>
+          <a:xfrm>
+            <a:off x="2693046" y="899849"/>
+            <a:ext cx="2097024" cy="859536"/>
+            <a:chOff x="2734610" y="1076496"/>
+            <a:chExt cx="2097024" cy="859536"/>
+          </a:xfrm>
+        </p:grpSpPr>
+        <p:sp>
+          <p:nvSpPr>
+            <p:cNvPr id="66" name="Rounded Rectangle 47">
+              <a:extLst>
+                <a:ext uri="{FF2B5EF4-FFF2-40B4-BE49-F238E27FC236}">
+                  <a16:creationId xmlns:a16="http://schemas.microsoft.com/office/drawing/2014/main" id="{DFF7462E-22C3-465B-BD8C-A7149A940B61}"/>
+                </a:ext>
+              </a:extLst>
+            </p:cNvPr>
+            <p:cNvSpPr/>
+            <p:nvPr/>
+          </p:nvSpPr>
+          <p:spPr>
+            <a:xfrm>
+              <a:off x="2734610" y="1076496"/>
+              <a:ext cx="2097024" cy="838893"/>
+            </a:xfrm>
+            <a:prstGeom prst="roundRect">
+              <a:avLst>
+                <a:gd name="adj" fmla="val 10000"/>
+              </a:avLst>
+            </a:prstGeom>
+            <a:solidFill>
+              <a:srgbClr val="ECF4F1"/>
+            </a:solidFill>
+            <a:ln>
+              <a:noFill/>
+            </a:ln>
+            <a:effectLst/>
+          </p:spPr>
+          <p:style>
+            <a:lnRef idx="1">
+              <a:schemeClr val="accent1"/>
+            </a:lnRef>
+            <a:fillRef idx="3">
+              <a:schemeClr val="accent1"/>
+            </a:fillRef>
+            <a:effectRef idx="2">
+              <a:schemeClr val="accent1"/>
+            </a:effectRef>
+            <a:fontRef idx="minor">
+              <a:schemeClr val="lt1"/>
+            </a:fontRef>
+          </p:style>
+          <p:txBody>
+            <a:bodyPr rtlCol="0" anchor="ctr"/>
+            <a:lstStyle/>
+            <a:p>
+              <a:pPr algn="ctr"/>
+              <a:endParaRPr/>
+            </a:p>
+          </p:txBody>
+        </p:sp>
+        <p:sp>
+          <p:nvSpPr>
+            <p:cNvPr id="67" name="TextBox 66">
+              <a:extLst>
+                <a:ext uri="{FF2B5EF4-FFF2-40B4-BE49-F238E27FC236}">
+                  <a16:creationId xmlns:a16="http://schemas.microsoft.com/office/drawing/2014/main" id="{441A1475-CDB3-4063-BD45-5549C9CDBE81}"/>
+                </a:ext>
+              </a:extLst>
+            </p:cNvPr>
+            <p:cNvSpPr txBox="1"/>
+            <p:nvPr/>
+          </p:nvSpPr>
+          <p:spPr>
+            <a:xfrm>
+              <a:off x="2899202" y="1222800"/>
+              <a:ext cx="1767840" cy="274320"/>
+            </a:xfrm>
+            <a:prstGeom prst="rect">
+              <a:avLst/>
+            </a:prstGeom>
+            <a:noFill/>
+          </p:spPr>
+          <p:txBody>
+            <a:bodyPr wrap="square" lIns="0" tIns="0" rIns="0" bIns="0" anchor="t">
+              <a:noAutofit/>
+            </a:bodyPr>
+            <a:lstStyle/>
+            <a:p>
+              <a:pPr algn="l">
+                <a:lnSpc>
+                  <a:spcPct val="100000"/>
+                </a:lnSpc>
+                <a:spcBef>
+                  <a:spcPts val="0"/>
+                </a:spcBef>
+                <a:spcAft>
+                  <a:spcPts val="0"/>
+                </a:spcAft>
+              </a:pPr>
+              <a:r>
+                <a:rPr sz="1400" b="0">
+                  <a:solidFill>
+                    <a:srgbClr val="1A1F2B"/>
+                  </a:solidFill>
+                  <a:latin typeface="+mn-ea"/>
+                </a:rPr>
+                <a:t>📄  </a:t>
+              </a:r>
+              <a:r>
+                <a:rPr sz="1400" b="1">
+                  <a:solidFill>
+                    <a:srgbClr val="1A1F2B"/>
+                  </a:solidFill>
+                  <a:latin typeface="+mn-ea"/>
+                </a:rPr>
+                <a:t>문서 검색</a:t>
+              </a:r>
+            </a:p>
+          </p:txBody>
+        </p:sp>
+        <p:sp>
+          <p:nvSpPr>
+            <p:cNvPr id="68" name="TextBox 67">
+              <a:extLst>
+                <a:ext uri="{FF2B5EF4-FFF2-40B4-BE49-F238E27FC236}">
+                  <a16:creationId xmlns:a16="http://schemas.microsoft.com/office/drawing/2014/main" id="{BF636FE9-9972-4B85-98BB-BE28D8FF830B}"/>
+                </a:ext>
+              </a:extLst>
+            </p:cNvPr>
+            <p:cNvSpPr txBox="1"/>
+            <p:nvPr/>
+          </p:nvSpPr>
+          <p:spPr>
+            <a:xfrm>
+              <a:off x="2899202" y="1570272"/>
+              <a:ext cx="1767840" cy="365760"/>
+            </a:xfrm>
+            <a:prstGeom prst="rect">
+              <a:avLst/>
+            </a:prstGeom>
+            <a:noFill/>
+          </p:spPr>
+          <p:txBody>
+            <a:bodyPr wrap="square" lIns="0" tIns="0" rIns="0" bIns="0" anchor="t">
+              <a:noAutofit/>
+            </a:bodyPr>
+            <a:lstStyle/>
+            <a:p>
+              <a:pPr algn="l">
+                <a:lnSpc>
+                  <a:spcPct val="100000"/>
+                </a:lnSpc>
+                <a:spcBef>
+                  <a:spcPts val="0"/>
+                </a:spcBef>
+                <a:spcAft>
+                  <a:spcPts val="0"/>
+                </a:spcAft>
+              </a:pPr>
+              <a:r>
+                <a:rPr sz="1200" b="0">
+                  <a:solidFill>
+                    <a:srgbClr val="6B7280"/>
+                  </a:solidFill>
+                  <a:latin typeface="+mn-ea"/>
+                </a:rPr>
+                <a:t>관련 규정 · 지침 탐색</a:t>
+              </a:r>
+            </a:p>
+          </p:txBody>
+        </p:sp>
+      </p:grpSp>
+      <p:sp>
+        <p:nvSpPr>
+          <p:cNvPr id="69" name="TextBox 68">
+            <a:extLst>
+              <a:ext uri="{FF2B5EF4-FFF2-40B4-BE49-F238E27FC236}">
+                <a16:creationId xmlns:a16="http://schemas.microsoft.com/office/drawing/2014/main" id="{4D1CBAAD-7333-48B0-A6A6-E03764EB92B1}"/>
+              </a:ext>
+            </a:extLst>
+          </p:cNvPr>
+          <p:cNvSpPr txBox="1"/>
+          <p:nvPr/>
+        </p:nvSpPr>
+        <p:spPr>
+          <a:xfrm>
+            <a:off x="4831634" y="1194951"/>
+            <a:ext cx="201168" cy="365760"/>
+          </a:xfrm>
+          <a:prstGeom prst="rect">
+            <a:avLst/>
+          </a:prstGeom>
+          <a:noFill/>
+        </p:spPr>
+        <p:txBody>
+          <a:bodyPr wrap="square" lIns="0" tIns="0" rIns="0" bIns="0" anchor="t">
+            <a:noAutofit/>
+          </a:bodyPr>
+          <a:lstStyle/>
+          <a:p>
+            <a:pPr algn="ctr">
+              <a:lnSpc>
+                <a:spcPct val="100000"/>
+              </a:lnSpc>
+              <a:spcBef>
+                <a:spcPts val="0"/>
+              </a:spcBef>
+              <a:spcAft>
+                <a:spcPts val="0"/>
+              </a:spcAft>
+            </a:pPr>
+            <a:r>
+              <a:rPr sz="1600" b="1">
+                <a:solidFill>
+                  <a:srgbClr val="B9C2D1"/>
+                </a:solidFill>
+                <a:latin typeface="+mn-ea"/>
+              </a:rPr>
+              <a:t>›</a:t>
+            </a:r>
+          </a:p>
+        </p:txBody>
+      </p:sp>
+      <p:grpSp>
+        <p:nvGrpSpPr>
+          <p:cNvPr id="7" name="그룹 6">
+            <a:extLst>
+              <a:ext uri="{FF2B5EF4-FFF2-40B4-BE49-F238E27FC236}">
+                <a16:creationId xmlns:a16="http://schemas.microsoft.com/office/drawing/2014/main" id="{5DD803AB-E323-41F4-9A08-8C300E0C81CD}"/>
+              </a:ext>
+            </a:extLst>
+          </p:cNvPr>
+          <p:cNvGrpSpPr/>
+          <p:nvPr/>
+        </p:nvGrpSpPr>
+        <p:grpSpPr>
+          <a:xfrm>
+            <a:off x="5063975" y="899849"/>
+            <a:ext cx="2097024" cy="859536"/>
+            <a:chOff x="5032802" y="1076496"/>
+            <a:chExt cx="2097024" cy="859536"/>
+          </a:xfrm>
+        </p:grpSpPr>
+        <p:sp>
+          <p:nvSpPr>
+            <p:cNvPr id="71" name="Rounded Rectangle 51">
+              <a:extLst>
+                <a:ext uri="{FF2B5EF4-FFF2-40B4-BE49-F238E27FC236}">
+                  <a16:creationId xmlns:a16="http://schemas.microsoft.com/office/drawing/2014/main" id="{C71BF696-5EC6-4D25-820B-373DAD1344CC}"/>
+                </a:ext>
+              </a:extLst>
+            </p:cNvPr>
+            <p:cNvSpPr/>
+            <p:nvPr/>
+          </p:nvSpPr>
+          <p:spPr>
+            <a:xfrm>
+              <a:off x="5032802" y="1076496"/>
+              <a:ext cx="2097024" cy="838893"/>
+            </a:xfrm>
+            <a:prstGeom prst="roundRect">
+              <a:avLst>
+                <a:gd name="adj" fmla="val 10000"/>
+              </a:avLst>
+            </a:prstGeom>
+            <a:solidFill>
+              <a:srgbClr val="EEEFFA"/>
+            </a:solidFill>
+            <a:ln>
+              <a:noFill/>
+            </a:ln>
+            <a:effectLst/>
+          </p:spPr>
+          <p:style>
+            <a:lnRef idx="1">
+              <a:schemeClr val="accent1"/>
+            </a:lnRef>
+            <a:fillRef idx="3">
+              <a:schemeClr val="accent1"/>
+            </a:fillRef>
+            <a:effectRef idx="2">
+              <a:schemeClr val="accent1"/>
+            </a:effectRef>
+            <a:fontRef idx="minor">
+              <a:schemeClr val="lt1"/>
+            </a:fontRef>
+          </p:style>
+          <p:txBody>
+            <a:bodyPr rtlCol="0" anchor="ctr"/>
+            <a:lstStyle/>
+            <a:p>
+              <a:pPr algn="ctr"/>
+              <a:endParaRPr/>
+            </a:p>
+          </p:txBody>
+        </p:sp>
+        <p:sp>
+          <p:nvSpPr>
+            <p:cNvPr id="72" name="TextBox 71">
+              <a:extLst>
+                <a:ext uri="{FF2B5EF4-FFF2-40B4-BE49-F238E27FC236}">
+                  <a16:creationId xmlns:a16="http://schemas.microsoft.com/office/drawing/2014/main" id="{8B591218-5193-408A-B896-E1E3E89F7C27}"/>
+                </a:ext>
+              </a:extLst>
+            </p:cNvPr>
+            <p:cNvSpPr txBox="1"/>
+            <p:nvPr/>
+          </p:nvSpPr>
+          <p:spPr>
+            <a:xfrm>
+              <a:off x="5197394" y="1222800"/>
+              <a:ext cx="1767840" cy="274320"/>
+            </a:xfrm>
+            <a:prstGeom prst="rect">
+              <a:avLst/>
+            </a:prstGeom>
+            <a:noFill/>
+          </p:spPr>
+          <p:txBody>
+            <a:bodyPr wrap="square" lIns="0" tIns="0" rIns="0" bIns="0" anchor="t">
+              <a:noAutofit/>
+            </a:bodyPr>
+            <a:lstStyle/>
+            <a:p>
+              <a:pPr algn="l">
+                <a:lnSpc>
+                  <a:spcPct val="100000"/>
+                </a:lnSpc>
+                <a:spcBef>
+                  <a:spcPts val="0"/>
+                </a:spcBef>
+                <a:spcAft>
+                  <a:spcPts val="0"/>
+                </a:spcAft>
+              </a:pPr>
+              <a:r>
+                <a:rPr sz="1400" b="0">
+                  <a:solidFill>
+                    <a:srgbClr val="1A1F2B"/>
+                  </a:solidFill>
+                  <a:latin typeface="+mn-ea"/>
+                </a:rPr>
+                <a:t>💬  </a:t>
+              </a:r>
+              <a:r>
+                <a:rPr sz="1400" b="1">
+                  <a:solidFill>
+                    <a:srgbClr val="1A1F2B"/>
+                  </a:solidFill>
+                  <a:latin typeface="+mn-ea"/>
+                </a:rPr>
+                <a:t>답변 정리</a:t>
+              </a:r>
+            </a:p>
+          </p:txBody>
+        </p:sp>
+        <p:sp>
+          <p:nvSpPr>
+            <p:cNvPr id="79" name="TextBox 78">
+              <a:extLst>
+                <a:ext uri="{FF2B5EF4-FFF2-40B4-BE49-F238E27FC236}">
+                  <a16:creationId xmlns:a16="http://schemas.microsoft.com/office/drawing/2014/main" id="{7A8374F3-2CEF-4178-BE4D-3AC77DE3D521}"/>
+                </a:ext>
+              </a:extLst>
+            </p:cNvPr>
+            <p:cNvSpPr txBox="1"/>
+            <p:nvPr/>
+          </p:nvSpPr>
+          <p:spPr>
+            <a:xfrm>
+              <a:off x="5197394" y="1570272"/>
+              <a:ext cx="1767840" cy="365760"/>
+            </a:xfrm>
+            <a:prstGeom prst="rect">
+              <a:avLst/>
+            </a:prstGeom>
+            <a:noFill/>
+          </p:spPr>
+          <p:txBody>
+            <a:bodyPr wrap="square" lIns="0" tIns="0" rIns="0" bIns="0" anchor="t">
+              <a:noAutofit/>
+            </a:bodyPr>
+            <a:lstStyle/>
+            <a:p>
+              <a:pPr algn="l">
+                <a:lnSpc>
+                  <a:spcPct val="100000"/>
+                </a:lnSpc>
+                <a:spcBef>
+                  <a:spcPts val="0"/>
+                </a:spcBef>
+                <a:spcAft>
+                  <a:spcPts val="0"/>
+                </a:spcAft>
+              </a:pPr>
+              <a:r>
+                <a:rPr sz="1200" b="0">
+                  <a:solidFill>
+                    <a:srgbClr val="6B7280"/>
+                  </a:solidFill>
+                  <a:latin typeface="+mn-ea"/>
+                </a:rPr>
+                <a:t>절차와 담당부서 안내</a:t>
+              </a:r>
+            </a:p>
+          </p:txBody>
+        </p:sp>
+      </p:grpSp>
+      <p:sp>
+        <p:nvSpPr>
+          <p:cNvPr id="80" name="TextBox 79">
+            <a:extLst>
+              <a:ext uri="{FF2B5EF4-FFF2-40B4-BE49-F238E27FC236}">
+                <a16:creationId xmlns:a16="http://schemas.microsoft.com/office/drawing/2014/main" id="{E1BDA301-2686-4BA5-84A5-734CD9533801}"/>
+              </a:ext>
+            </a:extLst>
+          </p:cNvPr>
+          <p:cNvSpPr txBox="1"/>
+          <p:nvPr/>
+        </p:nvSpPr>
+        <p:spPr>
+          <a:xfrm>
+            <a:off x="7192172" y="1194951"/>
+            <a:ext cx="201168" cy="365760"/>
+          </a:xfrm>
+          <a:prstGeom prst="rect">
+            <a:avLst/>
+          </a:prstGeom>
+          <a:noFill/>
+        </p:spPr>
+        <p:txBody>
+          <a:bodyPr wrap="square" lIns="0" tIns="0" rIns="0" bIns="0" anchor="t">
+            <a:noAutofit/>
+          </a:bodyPr>
+          <a:lstStyle/>
+          <a:p>
+            <a:pPr algn="ctr">
+              <a:lnSpc>
+                <a:spcPct val="100000"/>
+              </a:lnSpc>
+              <a:spcBef>
+                <a:spcPts val="0"/>
+              </a:spcBef>
+              <a:spcAft>
+                <a:spcPts val="0"/>
+              </a:spcAft>
+            </a:pPr>
+            <a:r>
+              <a:rPr sz="1600" b="1">
+                <a:solidFill>
+                  <a:srgbClr val="B9C2D1"/>
+                </a:solidFill>
+                <a:latin typeface="+mn-ea"/>
+              </a:rPr>
+              <a:t>›</a:t>
+            </a:r>
+          </a:p>
+        </p:txBody>
+      </p:sp>
+      <p:grpSp>
+        <p:nvGrpSpPr>
+          <p:cNvPr id="6" name="그룹 5">
+            <a:extLst>
+              <a:ext uri="{FF2B5EF4-FFF2-40B4-BE49-F238E27FC236}">
+                <a16:creationId xmlns:a16="http://schemas.microsoft.com/office/drawing/2014/main" id="{BF5C8F40-E42C-4223-9F16-7D070BCB4568}"/>
+              </a:ext>
+            </a:extLst>
+          </p:cNvPr>
+          <p:cNvGrpSpPr/>
+          <p:nvPr/>
+        </p:nvGrpSpPr>
+        <p:grpSpPr>
+          <a:xfrm>
+            <a:off x="7451075" y="899849"/>
+            <a:ext cx="2097024" cy="859536"/>
+            <a:chOff x="7330994" y="1076496"/>
+            <a:chExt cx="2097024" cy="859536"/>
+          </a:xfrm>
+        </p:grpSpPr>
+        <p:sp>
+          <p:nvSpPr>
+            <p:cNvPr id="81" name="Rounded Rectangle 55">
+              <a:extLst>
+                <a:ext uri="{FF2B5EF4-FFF2-40B4-BE49-F238E27FC236}">
+                  <a16:creationId xmlns:a16="http://schemas.microsoft.com/office/drawing/2014/main" id="{73C7B102-EDCA-4808-8BFF-8EE3C8E62523}"/>
+                </a:ext>
+              </a:extLst>
+            </p:cNvPr>
+            <p:cNvSpPr/>
+            <p:nvPr/>
+          </p:nvSpPr>
+          <p:spPr>
+            <a:xfrm>
+              <a:off x="7330994" y="1076496"/>
+              <a:ext cx="2097024" cy="838893"/>
+            </a:xfrm>
+            <a:prstGeom prst="roundRect">
+              <a:avLst>
+                <a:gd name="adj" fmla="val 10000"/>
+              </a:avLst>
+            </a:prstGeom>
+            <a:solidFill>
+              <a:srgbClr val="EFF1F4"/>
+            </a:solidFill>
+            <a:ln>
+              <a:noFill/>
+            </a:ln>
+            <a:effectLst/>
+          </p:spPr>
+          <p:style>
+            <a:lnRef idx="1">
+              <a:schemeClr val="accent1"/>
+            </a:lnRef>
+            <a:fillRef idx="3">
+              <a:schemeClr val="accent1"/>
+            </a:fillRef>
+            <a:effectRef idx="2">
+              <a:schemeClr val="accent1"/>
+            </a:effectRef>
+            <a:fontRef idx="minor">
+              <a:schemeClr val="lt1"/>
+            </a:fontRef>
+          </p:style>
+          <p:txBody>
+            <a:bodyPr rtlCol="0" anchor="ctr"/>
+            <a:lstStyle/>
+            <a:p>
+              <a:pPr algn="ctr"/>
+              <a:endParaRPr/>
+            </a:p>
+          </p:txBody>
+        </p:sp>
+        <p:sp>
+          <p:nvSpPr>
+            <p:cNvPr id="82" name="TextBox 81">
+              <a:extLst>
+                <a:ext uri="{FF2B5EF4-FFF2-40B4-BE49-F238E27FC236}">
+                  <a16:creationId xmlns:a16="http://schemas.microsoft.com/office/drawing/2014/main" id="{C75A4594-9A26-41FA-A3DD-9E4F0FEC9167}"/>
+                </a:ext>
+              </a:extLst>
+            </p:cNvPr>
+            <p:cNvSpPr txBox="1"/>
+            <p:nvPr/>
+          </p:nvSpPr>
+          <p:spPr>
+            <a:xfrm>
+              <a:off x="7495586" y="1222800"/>
+              <a:ext cx="1767840" cy="274320"/>
+            </a:xfrm>
+            <a:prstGeom prst="rect">
+              <a:avLst/>
+            </a:prstGeom>
+            <a:noFill/>
+          </p:spPr>
+          <p:txBody>
+            <a:bodyPr wrap="square" lIns="0" tIns="0" rIns="0" bIns="0" anchor="t">
+              <a:noAutofit/>
+            </a:bodyPr>
+            <a:lstStyle/>
+            <a:p>
+              <a:pPr algn="l">
+                <a:lnSpc>
+                  <a:spcPct val="100000"/>
+                </a:lnSpc>
+                <a:spcBef>
+                  <a:spcPts val="0"/>
+                </a:spcBef>
+                <a:spcAft>
+                  <a:spcPts val="0"/>
+                </a:spcAft>
+              </a:pPr>
+              <a:r>
+                <a:rPr sz="1400" b="0">
+                  <a:solidFill>
+                    <a:srgbClr val="1A1F2B"/>
+                  </a:solidFill>
+                  <a:latin typeface="+mn-ea"/>
+                </a:rPr>
+                <a:t>📧  </a:t>
+              </a:r>
+              <a:r>
+                <a:rPr sz="1400" b="1">
+                  <a:solidFill>
+                    <a:srgbClr val="1A1F2B"/>
+                  </a:solidFill>
+                  <a:latin typeface="+mn-ea"/>
+                </a:rPr>
+                <a:t>협업 요청</a:t>
+              </a:r>
+            </a:p>
+          </p:txBody>
+        </p:sp>
+        <p:sp>
+          <p:nvSpPr>
+            <p:cNvPr id="83" name="TextBox 82">
+              <a:extLst>
+                <a:ext uri="{FF2B5EF4-FFF2-40B4-BE49-F238E27FC236}">
+                  <a16:creationId xmlns:a16="http://schemas.microsoft.com/office/drawing/2014/main" id="{38892051-C222-480F-B292-B0CEB153B102}"/>
+                </a:ext>
+              </a:extLst>
+            </p:cNvPr>
+            <p:cNvSpPr txBox="1"/>
+            <p:nvPr/>
+          </p:nvSpPr>
+          <p:spPr>
+            <a:xfrm>
+              <a:off x="7495586" y="1570272"/>
+              <a:ext cx="1767840" cy="365760"/>
+            </a:xfrm>
+            <a:prstGeom prst="rect">
+              <a:avLst/>
+            </a:prstGeom>
+            <a:noFill/>
+          </p:spPr>
+          <p:txBody>
+            <a:bodyPr wrap="square" lIns="0" tIns="0" rIns="0" bIns="0" anchor="t">
+              <a:noAutofit/>
+            </a:bodyPr>
+            <a:lstStyle/>
+            <a:p>
+              <a:pPr algn="l">
+                <a:lnSpc>
+                  <a:spcPct val="100000"/>
+                </a:lnSpc>
+                <a:spcBef>
+                  <a:spcPts val="0"/>
+                </a:spcBef>
+                <a:spcAft>
+                  <a:spcPts val="0"/>
+                </a:spcAft>
+              </a:pPr>
+              <a:r>
+                <a:rPr sz="1200" b="0">
+                  <a:solidFill>
+                    <a:srgbClr val="6B7280"/>
+                  </a:solidFill>
+                  <a:latin typeface="+mn-ea"/>
+                </a:rPr>
+                <a:t>메일 초안 자동 작성</a:t>
+              </a:r>
+            </a:p>
+          </p:txBody>
+        </p:sp>
+      </p:grpSp>
+      <p:pic>
+        <p:nvPicPr>
+          <p:cNvPr id="28" name="그래픽 27" descr="사용자 단색으로 채워진">
+            <a:extLst>
+              <a:ext uri="{FF2B5EF4-FFF2-40B4-BE49-F238E27FC236}">
+                <a16:creationId xmlns:a16="http://schemas.microsoft.com/office/drawing/2014/main" id="{7B3836CD-900E-4FF9-9FAF-0A95CD6F1811}"/>
+              </a:ext>
+            </a:extLst>
+          </p:cNvPr>
+          <p:cNvPicPr>
+            <a:picLocks noChangeAspect="1"/>
+          </p:cNvPicPr>
+          <p:nvPr/>
+        </p:nvPicPr>
+        <p:blipFill>
+          <a:blip r:embed="rId3">
+            <a:extLst>
+              <a:ext uri="{28A0092B-C50C-407E-A947-70E740481C1C}">
+                <a14:useLocalDpi xmlns:a14="http://schemas.microsoft.com/office/drawing/2010/main" val="0"/>
+              </a:ext>
+              <a:ext uri="{96DAC541-7B7A-43D3-8B79-37D633B846F1}">
+                <asvg:svgBlip xmlns:asvg="http://schemas.microsoft.com/office/drawing/2016/SVG/main" r:embed="rId4"/>
+              </a:ext>
+            </a:extLst>
+          </a:blip>
+          <a:stretch>
+            <a:fillRect/>
+          </a:stretch>
+        </p:blipFill>
+        <p:spPr>
+          <a:xfrm>
+            <a:off x="466083" y="2837068"/>
+            <a:ext cx="597557" cy="597557"/>
+          </a:xfrm>
+          <a:prstGeom prst="rect">
+            <a:avLst/>
+          </a:prstGeom>
+        </p:spPr>
+      </p:pic>
+      <p:sp>
+        <p:nvSpPr>
+          <p:cNvPr id="3" name="TextBox 2">
+            <a:extLst>
+              <a:ext uri="{FF2B5EF4-FFF2-40B4-BE49-F238E27FC236}">
+                <a16:creationId xmlns:a16="http://schemas.microsoft.com/office/drawing/2014/main" id="{DBDC2B4E-7821-40EC-BE7F-F126EFDA9CAC}"/>
+              </a:ext>
+            </a:extLst>
+          </p:cNvPr>
+          <p:cNvSpPr txBox="1"/>
+          <p:nvPr/>
+        </p:nvSpPr>
+        <p:spPr>
+          <a:xfrm>
+            <a:off x="1089640" y="2974264"/>
+            <a:ext cx="2038023" cy="323165"/>
+          </a:xfrm>
+          <a:prstGeom prst="rect">
+            <a:avLst/>
+          </a:prstGeom>
+          <a:noFill/>
+        </p:spPr>
+        <p:txBody>
+          <a:bodyPr wrap="square" rtlCol="0">
+            <a:spAutoFit/>
+          </a:bodyPr>
+          <a:lstStyle/>
+          <a:p>
+            <a:r>
+              <a:rPr lang="ko-KR" altLang="en-US" sz="1500" b="1"/>
+              <a:t>사용자 질문 입력</a:t>
+            </a:r>
+          </a:p>
+        </p:txBody>
+      </p:sp>
+      <p:sp>
+        <p:nvSpPr>
+          <p:cNvPr id="32" name="이등변 삼각형 31">
+            <a:extLst>
+              <a:ext uri="{FF2B5EF4-FFF2-40B4-BE49-F238E27FC236}">
+                <a16:creationId xmlns:a16="http://schemas.microsoft.com/office/drawing/2014/main" id="{49E8036D-CF03-4342-82F7-0B969952CBD2}"/>
+              </a:ext>
+            </a:extLst>
+          </p:cNvPr>
+          <p:cNvSpPr/>
+          <p:nvPr/>
+        </p:nvSpPr>
+        <p:spPr>
+          <a:xfrm rot="5400000">
+            <a:off x="3264302" y="3023495"/>
+            <a:ext cx="166088" cy="120792"/>
+          </a:xfrm>
+          <a:prstGeom prst="triangle">
+            <a:avLst/>
+          </a:prstGeom>
+          <a:solidFill>
+            <a:schemeClr val="bg1">
+              <a:lumMod val="75000"/>
+            </a:schemeClr>
+          </a:solidFill>
+          <a:ln>
+            <a:noFill/>
+          </a:ln>
+        </p:spPr>
+        <p:style>
+          <a:lnRef idx="2">
+            <a:schemeClr val="accent1">
+              <a:shade val="50000"/>
+            </a:schemeClr>
+          </a:lnRef>
+          <a:fillRef idx="1">
+            <a:schemeClr val="accent1"/>
+          </a:fillRef>
+          <a:effectRef idx="0">
+            <a:schemeClr val="accent1"/>
+          </a:effectRef>
+          <a:fontRef idx="minor">
+            <a:schemeClr val="lt1"/>
+          </a:fontRef>
+        </p:style>
+        <p:txBody>
+          <a:bodyPr rtlCol="0" anchor="ctr"/>
+          <a:lstStyle/>
+          <a:p>
+            <a:pPr algn="ctr"/>
+            <a:endParaRPr lang="ko-KR" altLang="en-US"/>
+          </a:p>
+        </p:txBody>
+      </p:sp>
+      <p:grpSp>
+        <p:nvGrpSpPr>
+          <p:cNvPr id="10" name="그룹 9">
+            <a:extLst>
+              <a:ext uri="{FF2B5EF4-FFF2-40B4-BE49-F238E27FC236}">
+                <a16:creationId xmlns:a16="http://schemas.microsoft.com/office/drawing/2014/main" id="{73058B3F-64B0-4739-B4A3-02231852EFAB}"/>
+              </a:ext>
+            </a:extLst>
+          </p:cNvPr>
+          <p:cNvGrpSpPr/>
+          <p:nvPr/>
+        </p:nvGrpSpPr>
+        <p:grpSpPr>
+          <a:xfrm>
+            <a:off x="3586545" y="2881369"/>
+            <a:ext cx="464698" cy="508954"/>
+            <a:chOff x="3660053" y="2741160"/>
+            <a:chExt cx="464698" cy="508954"/>
+          </a:xfrm>
+        </p:grpSpPr>
+        <p:sp>
+          <p:nvSpPr>
+            <p:cNvPr id="33" name="Rounded Rectangle 6">
+              <a:extLst>
+                <a:ext uri="{FF2B5EF4-FFF2-40B4-BE49-F238E27FC236}">
+                  <a16:creationId xmlns:a16="http://schemas.microsoft.com/office/drawing/2014/main" id="{6D78DBAC-2E3E-449F-956F-865E1BD8BC19}"/>
+                </a:ext>
+              </a:extLst>
+            </p:cNvPr>
+            <p:cNvSpPr/>
+            <p:nvPr/>
+          </p:nvSpPr>
+          <p:spPr>
+            <a:xfrm>
+              <a:off x="3660053" y="2773680"/>
+              <a:ext cx="464698" cy="464698"/>
+            </a:xfrm>
+            <a:prstGeom prst="roundRect">
+              <a:avLst>
+                <a:gd name="adj" fmla="val 32000"/>
+              </a:avLst>
+            </a:prstGeom>
+            <a:solidFill>
+              <a:srgbClr val="EAF2FB"/>
+            </a:solidFill>
+            <a:ln>
+              <a:noFill/>
+            </a:ln>
+            <a:effectLst/>
+          </p:spPr>
+          <p:style>
+            <a:lnRef idx="1">
+              <a:schemeClr val="accent1"/>
+            </a:lnRef>
+            <a:fillRef idx="3">
+              <a:schemeClr val="accent1"/>
+            </a:fillRef>
+            <a:effectRef idx="2">
+              <a:schemeClr val="accent1"/>
+            </a:effectRef>
+            <a:fontRef idx="minor">
+              <a:schemeClr val="lt1"/>
+            </a:fontRef>
+          </p:style>
+          <p:txBody>
+            <a:bodyPr rtlCol="0" anchor="ctr"/>
+            <a:lstStyle/>
+            <a:p>
+              <a:pPr algn="ctr"/>
+              <a:endParaRPr/>
+            </a:p>
+          </p:txBody>
+        </p:sp>
+        <p:sp>
+          <p:nvSpPr>
+            <p:cNvPr id="34" name="TextBox 33">
+              <a:extLst>
+                <a:ext uri="{FF2B5EF4-FFF2-40B4-BE49-F238E27FC236}">
+                  <a16:creationId xmlns:a16="http://schemas.microsoft.com/office/drawing/2014/main" id="{A7FD9A55-8AEE-4A93-89A6-F020825C0547}"/>
+                </a:ext>
+              </a:extLst>
+            </p:cNvPr>
+            <p:cNvSpPr txBox="1"/>
+            <p:nvPr/>
+          </p:nvSpPr>
+          <p:spPr>
+            <a:xfrm>
+              <a:off x="3660053" y="2741160"/>
+              <a:ext cx="464698" cy="508954"/>
+            </a:xfrm>
+            <a:prstGeom prst="rect">
+              <a:avLst/>
+            </a:prstGeom>
+            <a:noFill/>
+          </p:spPr>
+          <p:txBody>
+            <a:bodyPr wrap="square" lIns="0" tIns="0" rIns="0" bIns="0" anchor="ctr">
+              <a:noAutofit/>
+            </a:bodyPr>
+            <a:lstStyle/>
+            <a:p>
+              <a:pPr algn="ctr">
+                <a:lnSpc>
+                  <a:spcPct val="100000"/>
+                </a:lnSpc>
+                <a:spcBef>
+                  <a:spcPts val="0"/>
+                </a:spcBef>
+                <a:spcAft>
+                  <a:spcPts val="0"/>
+                </a:spcAft>
+              </a:pPr>
+              <a:r>
+                <a:rPr sz="1260" b="0">
+                  <a:solidFill>
+                    <a:srgbClr val="1A1F2B"/>
+                  </a:solidFill>
+                </a:rPr>
+                <a:t>🖥</a:t>
+              </a:r>
+            </a:p>
+          </p:txBody>
+        </p:sp>
+      </p:grpSp>
+      <p:sp>
+        <p:nvSpPr>
+          <p:cNvPr id="36" name="TextBox 35">
+            <a:extLst>
+              <a:ext uri="{FF2B5EF4-FFF2-40B4-BE49-F238E27FC236}">
+                <a16:creationId xmlns:a16="http://schemas.microsoft.com/office/drawing/2014/main" id="{A533DBD0-9B02-4B4D-8821-9A873EB46F6B}"/>
+              </a:ext>
+            </a:extLst>
+          </p:cNvPr>
+          <p:cNvSpPr txBox="1"/>
+          <p:nvPr/>
+        </p:nvSpPr>
+        <p:spPr>
+          <a:xfrm>
+            <a:off x="3639271" y="2200230"/>
+            <a:ext cx="2497328" cy="332160"/>
+          </a:xfrm>
+          <a:prstGeom prst="rect">
+            <a:avLst/>
+          </a:prstGeom>
+          <a:noFill/>
+        </p:spPr>
+        <p:txBody>
+          <a:bodyPr wrap="square" lIns="0" tIns="0" rIns="0" bIns="0" anchor="t">
+            <a:noAutofit/>
+          </a:bodyPr>
+          <a:lstStyle/>
+          <a:p>
+            <a:pPr algn="l">
+              <a:spcBef>
+                <a:spcPts val="300"/>
+              </a:spcBef>
+              <a:spcAft>
+                <a:spcPts val="0"/>
+              </a:spcAft>
+            </a:pPr>
+            <a:r>
+              <a:rPr lang="en-US" sz="1200" b="1">
+                <a:solidFill>
+                  <a:srgbClr val="2F6FED"/>
+                </a:solidFill>
+                <a:latin typeface="+mn-ea"/>
+              </a:rPr>
+              <a:t>Next.js 14 · React · TypeScript</a:t>
+            </a:r>
+            <a:endParaRPr sz="1200" b="1">
+              <a:solidFill>
+                <a:srgbClr val="2F6FED"/>
+              </a:solidFill>
+              <a:latin typeface="+mn-ea"/>
+            </a:endParaRPr>
+          </a:p>
+        </p:txBody>
+      </p:sp>
+      <p:grpSp>
+        <p:nvGrpSpPr>
+          <p:cNvPr id="9" name="그룹 8">
+            <a:extLst>
+              <a:ext uri="{FF2B5EF4-FFF2-40B4-BE49-F238E27FC236}">
+                <a16:creationId xmlns:a16="http://schemas.microsoft.com/office/drawing/2014/main" id="{D099DC11-FA1B-4D73-A508-74E6C8353D26}"/>
+              </a:ext>
+            </a:extLst>
+          </p:cNvPr>
+          <p:cNvGrpSpPr/>
+          <p:nvPr/>
+        </p:nvGrpSpPr>
+        <p:grpSpPr>
+          <a:xfrm>
+            <a:off x="6749049" y="2881369"/>
+            <a:ext cx="464698" cy="508954"/>
+            <a:chOff x="6728267" y="2845337"/>
+            <a:chExt cx="464698" cy="508954"/>
+          </a:xfrm>
+        </p:grpSpPr>
+        <p:sp>
+          <p:nvSpPr>
+            <p:cNvPr id="38" name="Rounded Rectangle 18">
+              <a:extLst>
+                <a:ext uri="{FF2B5EF4-FFF2-40B4-BE49-F238E27FC236}">
+                  <a16:creationId xmlns:a16="http://schemas.microsoft.com/office/drawing/2014/main" id="{0585A007-AE8D-485A-9E67-8EC82B66FC1B}"/>
+                </a:ext>
+              </a:extLst>
+            </p:cNvPr>
+            <p:cNvSpPr/>
+            <p:nvPr/>
+          </p:nvSpPr>
+          <p:spPr>
+            <a:xfrm>
+              <a:off x="6728267" y="2867466"/>
+              <a:ext cx="464698" cy="464698"/>
+            </a:xfrm>
+            <a:prstGeom prst="roundRect">
+              <a:avLst>
+                <a:gd name="adj" fmla="val 32000"/>
+              </a:avLst>
+            </a:prstGeom>
+            <a:solidFill>
+              <a:srgbClr val="EAF2FB"/>
+            </a:solidFill>
+            <a:ln>
+              <a:noFill/>
+            </a:ln>
+            <a:effectLst/>
+          </p:spPr>
+          <p:style>
+            <a:lnRef idx="1">
+              <a:schemeClr val="accent1"/>
+            </a:lnRef>
+            <a:fillRef idx="3">
+              <a:schemeClr val="accent1"/>
+            </a:fillRef>
+            <a:effectRef idx="2">
+              <a:schemeClr val="accent1"/>
+            </a:effectRef>
+            <a:fontRef idx="minor">
+              <a:schemeClr val="lt1"/>
+            </a:fontRef>
+          </p:style>
+          <p:txBody>
+            <a:bodyPr rtlCol="0" anchor="ctr"/>
+            <a:lstStyle/>
+            <a:p>
+              <a:pPr algn="ctr"/>
+              <a:endParaRPr/>
+            </a:p>
+          </p:txBody>
+        </p:sp>
+        <p:sp>
+          <p:nvSpPr>
+            <p:cNvPr id="39" name="TextBox 38">
+              <a:extLst>
+                <a:ext uri="{FF2B5EF4-FFF2-40B4-BE49-F238E27FC236}">
+                  <a16:creationId xmlns:a16="http://schemas.microsoft.com/office/drawing/2014/main" id="{C6271F58-8C72-4211-A91B-60E062CC763F}"/>
+                </a:ext>
+              </a:extLst>
+            </p:cNvPr>
+            <p:cNvSpPr txBox="1"/>
+            <p:nvPr/>
+          </p:nvSpPr>
+          <p:spPr>
+            <a:xfrm>
+              <a:off x="6728267" y="2845337"/>
+              <a:ext cx="464698" cy="508954"/>
+            </a:xfrm>
+            <a:prstGeom prst="rect">
+              <a:avLst/>
+            </a:prstGeom>
+            <a:noFill/>
+          </p:spPr>
+          <p:txBody>
+            <a:bodyPr wrap="square" lIns="0" tIns="0" rIns="0" bIns="0" anchor="ctr">
+              <a:noAutofit/>
+            </a:bodyPr>
+            <a:lstStyle/>
+            <a:p>
+              <a:pPr algn="ctr">
+                <a:lnSpc>
+                  <a:spcPct val="100000"/>
+                </a:lnSpc>
+                <a:spcBef>
+                  <a:spcPts val="0"/>
+                </a:spcBef>
+                <a:spcAft>
+                  <a:spcPts val="0"/>
+                </a:spcAft>
+              </a:pPr>
+              <a:r>
+                <a:rPr sz="1260" b="0">
+                  <a:solidFill>
+                    <a:srgbClr val="1A1F2B"/>
+                  </a:solidFill>
+                </a:rPr>
+                <a:t>🔍</a:t>
+              </a:r>
+            </a:p>
+          </p:txBody>
+        </p:sp>
+      </p:grpSp>
+      <p:sp>
+        <p:nvSpPr>
+          <p:cNvPr id="41" name="TextBox 40">
+            <a:extLst>
+              <a:ext uri="{FF2B5EF4-FFF2-40B4-BE49-F238E27FC236}">
+                <a16:creationId xmlns:a16="http://schemas.microsoft.com/office/drawing/2014/main" id="{0FAC1551-30F9-472F-BAFE-1496762D72BF}"/>
+              </a:ext>
+            </a:extLst>
+          </p:cNvPr>
+          <p:cNvSpPr txBox="1"/>
+          <p:nvPr/>
+        </p:nvSpPr>
+        <p:spPr>
+          <a:xfrm>
+            <a:off x="7214856" y="2880745"/>
+            <a:ext cx="2556061" cy="577081"/>
+          </a:xfrm>
+          <a:prstGeom prst="rect">
+            <a:avLst/>
+          </a:prstGeom>
+          <a:noFill/>
+        </p:spPr>
+        <p:txBody>
+          <a:bodyPr wrap="square" rtlCol="0">
+            <a:spAutoFit/>
+          </a:bodyPr>
+          <a:lstStyle/>
+          <a:p>
+            <a:pPr>
+              <a:spcBef>
+                <a:spcPts val="300"/>
+              </a:spcBef>
+            </a:pPr>
+            <a:r>
+              <a:rPr lang="en-US" altLang="ko-KR" sz="1500" b="1">
+                <a:latin typeface="+mn-ea"/>
+              </a:rPr>
+              <a:t>Embedding </a:t>
+            </a:r>
+            <a:r>
+              <a:rPr lang="ko-KR" altLang="en-US" sz="1500" b="1">
+                <a:latin typeface="+mn-ea"/>
+              </a:rPr>
+              <a:t>검색</a:t>
+            </a:r>
+            <a:endParaRPr lang="en-US" altLang="ko-KR" sz="1500" b="1">
+              <a:latin typeface="+mn-ea"/>
+            </a:endParaRPr>
+          </a:p>
+          <a:p>
+            <a:pPr marL="93663" indent="-93663">
+              <a:spcBef>
+                <a:spcPts val="300"/>
+              </a:spcBef>
+              <a:buFont typeface="Wingdings" panose="05000000000000000000" pitchFamily="2" charset="2"/>
+              <a:buChar char="§"/>
+            </a:pPr>
+            <a:r>
+              <a:rPr lang="en-US" altLang="ko-KR" sz="1400">
+                <a:latin typeface="+mn-ea"/>
+              </a:rPr>
+              <a:t> </a:t>
+            </a:r>
+            <a:r>
+              <a:rPr lang="ko-KR" altLang="en-US" sz="1400" spc="-40">
+                <a:latin typeface="+mn-ea"/>
+              </a:rPr>
+              <a:t>부서별 메타데이터 필터링</a:t>
+            </a:r>
+          </a:p>
+        </p:txBody>
+      </p:sp>
+      <p:sp>
+        <p:nvSpPr>
+          <p:cNvPr id="42" name="TextBox 41">
+            <a:extLst>
+              <a:ext uri="{FF2B5EF4-FFF2-40B4-BE49-F238E27FC236}">
+                <a16:creationId xmlns:a16="http://schemas.microsoft.com/office/drawing/2014/main" id="{771BA1C2-1259-4AD1-81CD-25C743F18DEE}"/>
+              </a:ext>
+            </a:extLst>
+          </p:cNvPr>
+          <p:cNvSpPr txBox="1"/>
+          <p:nvPr/>
+        </p:nvSpPr>
+        <p:spPr>
+          <a:xfrm>
+            <a:off x="6760132" y="2200230"/>
+            <a:ext cx="2865159" cy="448758"/>
+          </a:xfrm>
+          <a:prstGeom prst="rect">
+            <a:avLst/>
+          </a:prstGeom>
+          <a:noFill/>
+        </p:spPr>
+        <p:txBody>
+          <a:bodyPr wrap="square" lIns="0" tIns="0" rIns="0" bIns="0" anchor="t">
+            <a:noAutofit/>
+          </a:bodyPr>
+          <a:lstStyle/>
+          <a:p>
+            <a:pPr algn="l">
+              <a:spcBef>
+                <a:spcPts val="300"/>
+              </a:spcBef>
+              <a:spcAft>
+                <a:spcPts val="0"/>
+              </a:spcAft>
+            </a:pPr>
+            <a:r>
+              <a:rPr lang="en-US" sz="1200" b="1">
+                <a:solidFill>
+                  <a:srgbClr val="2F6FED"/>
+                </a:solidFill>
+                <a:latin typeface="+mn-ea"/>
+              </a:rPr>
+              <a:t>RAG </a:t>
+            </a:r>
+            <a:r>
+              <a:rPr sz="1200" b="1">
+                <a:solidFill>
+                  <a:srgbClr val="2F6FED"/>
+                </a:solidFill>
+                <a:latin typeface="+mn-ea"/>
+              </a:rPr>
+              <a:t>· </a:t>
+            </a:r>
+            <a:r>
+              <a:rPr lang="en-US" altLang="ko-KR" sz="1200" b="1">
+                <a:solidFill>
+                  <a:srgbClr val="2F6FED"/>
+                </a:solidFill>
+                <a:latin typeface="+mn-ea"/>
+              </a:rPr>
+              <a:t>OpenAI Embedding </a:t>
+            </a:r>
+          </a:p>
+          <a:p>
+            <a:pPr algn="l">
+              <a:spcBef>
+                <a:spcPts val="300"/>
+              </a:spcBef>
+              <a:spcAft>
+                <a:spcPts val="0"/>
+              </a:spcAft>
+            </a:pPr>
+            <a:r>
+              <a:rPr sz="1200" b="1">
+                <a:solidFill>
+                  <a:srgbClr val="2F6FED"/>
+                </a:solidFill>
+                <a:latin typeface="+mn-ea"/>
+              </a:rPr>
+              <a:t>MemoryVectorStore</a:t>
+            </a:r>
+          </a:p>
+        </p:txBody>
+      </p:sp>
+      <p:sp>
+        <p:nvSpPr>
+          <p:cNvPr id="43" name="이등변 삼각형 42">
+            <a:extLst>
+              <a:ext uri="{FF2B5EF4-FFF2-40B4-BE49-F238E27FC236}">
+                <a16:creationId xmlns:a16="http://schemas.microsoft.com/office/drawing/2014/main" id="{7B3738A7-306B-480C-9918-BD729986C622}"/>
+              </a:ext>
+            </a:extLst>
+          </p:cNvPr>
+          <p:cNvSpPr/>
+          <p:nvPr/>
+        </p:nvSpPr>
+        <p:spPr>
+          <a:xfrm rot="5400000">
+            <a:off x="6430066" y="3023495"/>
+            <a:ext cx="166088" cy="120792"/>
+          </a:xfrm>
+          <a:prstGeom prst="triangle">
+            <a:avLst/>
+          </a:prstGeom>
+          <a:solidFill>
+            <a:schemeClr val="bg1">
+              <a:lumMod val="75000"/>
+            </a:schemeClr>
+          </a:solidFill>
+          <a:ln>
+            <a:noFill/>
+          </a:ln>
+        </p:spPr>
+        <p:style>
+          <a:lnRef idx="2">
+            <a:schemeClr val="accent1">
+              <a:shade val="50000"/>
+            </a:schemeClr>
+          </a:lnRef>
+          <a:fillRef idx="1">
+            <a:schemeClr val="accent1"/>
+          </a:fillRef>
+          <a:effectRef idx="0">
+            <a:schemeClr val="accent1"/>
+          </a:effectRef>
+          <a:fontRef idx="minor">
+            <a:schemeClr val="lt1"/>
+          </a:fontRef>
+        </p:style>
+        <p:txBody>
+          <a:bodyPr rtlCol="0" anchor="ctr"/>
+          <a:lstStyle/>
+          <a:p>
+            <a:pPr algn="ctr"/>
+            <a:endParaRPr lang="ko-KR" altLang="en-US"/>
+          </a:p>
+        </p:txBody>
+      </p:sp>
+      <p:grpSp>
+        <p:nvGrpSpPr>
+          <p:cNvPr id="46" name="그룹 45">
+            <a:extLst>
+              <a:ext uri="{FF2B5EF4-FFF2-40B4-BE49-F238E27FC236}">
+                <a16:creationId xmlns:a16="http://schemas.microsoft.com/office/drawing/2014/main" id="{152F1FD1-BD14-4198-822E-F6AF4FE84033}"/>
+              </a:ext>
+            </a:extLst>
+          </p:cNvPr>
+          <p:cNvGrpSpPr/>
+          <p:nvPr/>
+        </p:nvGrpSpPr>
+        <p:grpSpPr>
+          <a:xfrm>
+            <a:off x="470649" y="5304978"/>
+            <a:ext cx="464698" cy="508954"/>
+            <a:chOff x="640080" y="3026664"/>
+            <a:chExt cx="384048" cy="420623"/>
+          </a:xfrm>
+        </p:grpSpPr>
+        <p:sp>
+          <p:nvSpPr>
+            <p:cNvPr id="47" name="Rounded Rectangle 24">
+              <a:extLst>
+                <a:ext uri="{FF2B5EF4-FFF2-40B4-BE49-F238E27FC236}">
+                  <a16:creationId xmlns:a16="http://schemas.microsoft.com/office/drawing/2014/main" id="{4A006D53-57D9-437E-B3AC-E62968AB47EF}"/>
+                </a:ext>
+              </a:extLst>
+            </p:cNvPr>
+            <p:cNvSpPr/>
+            <p:nvPr/>
+          </p:nvSpPr>
+          <p:spPr>
+            <a:xfrm>
+              <a:off x="640080" y="3044952"/>
+              <a:ext cx="384048" cy="384048"/>
+            </a:xfrm>
+            <a:prstGeom prst="roundRect">
+              <a:avLst>
+                <a:gd name="adj" fmla="val 32000"/>
+              </a:avLst>
+            </a:prstGeom>
+            <a:solidFill>
+              <a:srgbClr val="EAF2FB"/>
+            </a:solidFill>
+            <a:ln>
+              <a:noFill/>
+            </a:ln>
+            <a:effectLst/>
+          </p:spPr>
+          <p:style>
+            <a:lnRef idx="1">
+              <a:schemeClr val="accent1"/>
+            </a:lnRef>
+            <a:fillRef idx="3">
+              <a:schemeClr val="accent1"/>
+            </a:fillRef>
+            <a:effectRef idx="2">
+              <a:schemeClr val="accent1"/>
+            </a:effectRef>
+            <a:fontRef idx="minor">
+              <a:schemeClr val="lt1"/>
+            </a:fontRef>
+          </p:style>
+          <p:txBody>
+            <a:bodyPr rtlCol="0" anchor="ctr"/>
+            <a:lstStyle/>
+            <a:p>
+              <a:pPr algn="ctr"/>
+              <a:endParaRPr/>
+            </a:p>
+          </p:txBody>
+        </p:sp>
+        <p:sp>
+          <p:nvSpPr>
+            <p:cNvPr id="48" name="TextBox 47">
+              <a:extLst>
+                <a:ext uri="{FF2B5EF4-FFF2-40B4-BE49-F238E27FC236}">
+                  <a16:creationId xmlns:a16="http://schemas.microsoft.com/office/drawing/2014/main" id="{5E0FA8FB-EB67-4067-985B-8C7A3282ED47}"/>
+                </a:ext>
+              </a:extLst>
+            </p:cNvPr>
+            <p:cNvSpPr txBox="1"/>
+            <p:nvPr/>
+          </p:nvSpPr>
+          <p:spPr>
+            <a:xfrm>
+              <a:off x="640080" y="3026664"/>
+              <a:ext cx="384048" cy="420623"/>
+            </a:xfrm>
+            <a:prstGeom prst="rect">
+              <a:avLst/>
+            </a:prstGeom>
+            <a:noFill/>
+          </p:spPr>
+          <p:txBody>
+            <a:bodyPr wrap="square" lIns="0" tIns="0" rIns="0" bIns="0" anchor="ctr">
+              <a:noAutofit/>
+            </a:bodyPr>
+            <a:lstStyle/>
+            <a:p>
+              <a:pPr algn="ctr">
+                <a:lnSpc>
+                  <a:spcPct val="100000"/>
+                </a:lnSpc>
+                <a:spcBef>
+                  <a:spcPts val="0"/>
+                </a:spcBef>
+                <a:spcAft>
+                  <a:spcPts val="0"/>
+                </a:spcAft>
+              </a:pPr>
+              <a:r>
+                <a:rPr sz="1260" b="0">
+                  <a:solidFill>
+                    <a:srgbClr val="1A1F2B"/>
+                  </a:solidFill>
+                </a:rPr>
+                <a:t>💬</a:t>
+              </a:r>
+            </a:p>
+          </p:txBody>
+        </p:sp>
+      </p:grpSp>
+      <p:grpSp>
+        <p:nvGrpSpPr>
+          <p:cNvPr id="50" name="그룹 49">
+            <a:extLst>
+              <a:ext uri="{FF2B5EF4-FFF2-40B4-BE49-F238E27FC236}">
+                <a16:creationId xmlns:a16="http://schemas.microsoft.com/office/drawing/2014/main" id="{4A575AC3-D89F-4D14-9D0B-109871421C25}"/>
+              </a:ext>
+            </a:extLst>
+          </p:cNvPr>
+          <p:cNvGrpSpPr/>
+          <p:nvPr/>
+        </p:nvGrpSpPr>
+        <p:grpSpPr>
+          <a:xfrm>
+            <a:off x="3586545" y="5304978"/>
+            <a:ext cx="464698" cy="508954"/>
+            <a:chOff x="3704336" y="3026664"/>
+            <a:chExt cx="384048" cy="420623"/>
+          </a:xfrm>
+        </p:grpSpPr>
+        <p:sp>
+          <p:nvSpPr>
+            <p:cNvPr id="51" name="Rounded Rectangle 30">
+              <a:extLst>
+                <a:ext uri="{FF2B5EF4-FFF2-40B4-BE49-F238E27FC236}">
+                  <a16:creationId xmlns:a16="http://schemas.microsoft.com/office/drawing/2014/main" id="{18017F63-1BE6-4FEC-8CDC-532E579B8046}"/>
+                </a:ext>
+              </a:extLst>
+            </p:cNvPr>
+            <p:cNvSpPr/>
+            <p:nvPr/>
+          </p:nvSpPr>
+          <p:spPr>
+            <a:xfrm>
+              <a:off x="3704336" y="3044952"/>
+              <a:ext cx="384048" cy="384048"/>
+            </a:xfrm>
+            <a:prstGeom prst="roundRect">
+              <a:avLst>
+                <a:gd name="adj" fmla="val 32000"/>
+              </a:avLst>
+            </a:prstGeom>
+            <a:solidFill>
+              <a:srgbClr val="EAF2FB"/>
+            </a:solidFill>
+            <a:ln>
+              <a:noFill/>
+            </a:ln>
+            <a:effectLst/>
+          </p:spPr>
+          <p:style>
+            <a:lnRef idx="1">
+              <a:schemeClr val="accent1"/>
+            </a:lnRef>
+            <a:fillRef idx="3">
+              <a:schemeClr val="accent1"/>
+            </a:fillRef>
+            <a:effectRef idx="2">
+              <a:schemeClr val="accent1"/>
+            </a:effectRef>
+            <a:fontRef idx="minor">
+              <a:schemeClr val="lt1"/>
+            </a:fontRef>
+          </p:style>
+          <p:txBody>
+            <a:bodyPr rtlCol="0" anchor="ctr"/>
+            <a:lstStyle/>
+            <a:p>
+              <a:pPr algn="ctr"/>
+              <a:endParaRPr/>
+            </a:p>
+          </p:txBody>
+        </p:sp>
+        <p:sp>
+          <p:nvSpPr>
+            <p:cNvPr id="52" name="TextBox 51">
+              <a:extLst>
+                <a:ext uri="{FF2B5EF4-FFF2-40B4-BE49-F238E27FC236}">
+                  <a16:creationId xmlns:a16="http://schemas.microsoft.com/office/drawing/2014/main" id="{9C0BC2A9-B3E9-44BA-9385-67D93D6ACEA1}"/>
+                </a:ext>
+              </a:extLst>
+            </p:cNvPr>
+            <p:cNvSpPr txBox="1"/>
+            <p:nvPr/>
+          </p:nvSpPr>
+          <p:spPr>
+            <a:xfrm>
+              <a:off x="3704336" y="3026664"/>
+              <a:ext cx="384048" cy="420623"/>
+            </a:xfrm>
+            <a:prstGeom prst="rect">
+              <a:avLst/>
+            </a:prstGeom>
+            <a:noFill/>
+          </p:spPr>
+          <p:txBody>
+            <a:bodyPr wrap="square" lIns="0" tIns="0" rIns="0" bIns="0" anchor="ctr">
+              <a:noAutofit/>
+            </a:bodyPr>
+            <a:lstStyle/>
+            <a:p>
+              <a:pPr algn="ctr">
+                <a:lnSpc>
+                  <a:spcPct val="100000"/>
+                </a:lnSpc>
+                <a:spcBef>
+                  <a:spcPts val="0"/>
+                </a:spcBef>
+                <a:spcAft>
+                  <a:spcPts val="0"/>
+                </a:spcAft>
+              </a:pPr>
+              <a:r>
+                <a:rPr sz="1260" b="0">
+                  <a:solidFill>
+                    <a:srgbClr val="1A1F2B"/>
+                  </a:solidFill>
+                </a:rPr>
+                <a:t>📊</a:t>
+              </a:r>
+            </a:p>
+          </p:txBody>
+        </p:sp>
+      </p:grpSp>
+      <p:sp>
+        <p:nvSpPr>
+          <p:cNvPr id="57" name="TextBox 56">
+            <a:extLst>
+              <a:ext uri="{FF2B5EF4-FFF2-40B4-BE49-F238E27FC236}">
+                <a16:creationId xmlns:a16="http://schemas.microsoft.com/office/drawing/2014/main" id="{B9926761-4CCD-4333-AD5D-6F9FB4D2DBFD}"/>
+              </a:ext>
+            </a:extLst>
+          </p:cNvPr>
+          <p:cNvSpPr txBox="1"/>
+          <p:nvPr/>
+        </p:nvSpPr>
+        <p:spPr>
+          <a:xfrm>
+            <a:off x="3597628" y="4603966"/>
+            <a:ext cx="2865159" cy="448758"/>
+          </a:xfrm>
+          <a:prstGeom prst="rect">
+            <a:avLst/>
+          </a:prstGeom>
+          <a:noFill/>
+        </p:spPr>
+        <p:txBody>
+          <a:bodyPr wrap="square" lIns="0" tIns="0" rIns="0" bIns="0" anchor="t">
+            <a:noAutofit/>
+          </a:bodyPr>
+          <a:lstStyle/>
+          <a:p>
+            <a:pPr algn="l">
+              <a:spcBef>
+                <a:spcPts val="300"/>
+              </a:spcBef>
+              <a:spcAft>
+                <a:spcPts val="0"/>
+              </a:spcAft>
+            </a:pPr>
+            <a:r>
+              <a:rPr lang="en-US" sz="1200" b="1">
+                <a:solidFill>
+                  <a:srgbClr val="2F6FED"/>
+                </a:solidFill>
+                <a:latin typeface="+mn-ea"/>
+              </a:rPr>
+              <a:t>LangGraph</a:t>
+            </a:r>
+          </a:p>
+          <a:p>
+            <a:pPr algn="l">
+              <a:spcBef>
+                <a:spcPts val="300"/>
+              </a:spcBef>
+              <a:spcAft>
+                <a:spcPts val="0"/>
+              </a:spcAft>
+            </a:pPr>
+            <a:r>
+              <a:rPr lang="en-US" sz="1200" b="1">
+                <a:solidFill>
+                  <a:srgbClr val="2F6FED"/>
+                </a:solidFill>
+                <a:latin typeface="+mn-ea"/>
+              </a:rPr>
+              <a:t>RAGAS </a:t>
+            </a:r>
+            <a:r>
+              <a:rPr lang="en-US" altLang="ko-KR" sz="1200" b="1">
+                <a:solidFill>
+                  <a:srgbClr val="2F6FED"/>
+                </a:solidFill>
+                <a:latin typeface="+mn-ea"/>
+              </a:rPr>
+              <a:t>· LangSmith</a:t>
+            </a:r>
+            <a:endParaRPr sz="1200" b="1">
+              <a:solidFill>
+                <a:srgbClr val="2F6FED"/>
+              </a:solidFill>
+              <a:latin typeface="+mn-ea"/>
+            </a:endParaRPr>
+          </a:p>
+        </p:txBody>
+      </p:sp>
+      <p:sp>
+        <p:nvSpPr>
+          <p:cNvPr id="60" name="TextBox 59">
+            <a:extLst>
+              <a:ext uri="{FF2B5EF4-FFF2-40B4-BE49-F238E27FC236}">
+                <a16:creationId xmlns:a16="http://schemas.microsoft.com/office/drawing/2014/main" id="{E5537596-86A1-4738-9154-A93129F18A30}"/>
+              </a:ext>
+            </a:extLst>
+          </p:cNvPr>
+          <p:cNvSpPr txBox="1"/>
+          <p:nvPr/>
+        </p:nvSpPr>
+        <p:spPr>
+          <a:xfrm>
+            <a:off x="4083525" y="5139893"/>
+            <a:ext cx="2301334" cy="553998"/>
+          </a:xfrm>
+          <a:prstGeom prst="rect">
+            <a:avLst/>
+          </a:prstGeom>
+          <a:noFill/>
+        </p:spPr>
+        <p:txBody>
+          <a:bodyPr wrap="square" rtlCol="0">
+            <a:spAutoFit/>
+          </a:bodyPr>
+          <a:lstStyle/>
+          <a:p>
+            <a:r>
+              <a:rPr lang="ko-KR" altLang="en-US" sz="1500" b="1">
+                <a:latin typeface="+mn-ea"/>
+              </a:rPr>
+              <a:t>재검토 판정</a:t>
+            </a:r>
+            <a:endParaRPr lang="en-US" altLang="ko-KR" sz="1500" b="1">
+              <a:latin typeface="+mn-ea"/>
+            </a:endParaRPr>
+          </a:p>
+          <a:p>
+            <a:pPr marL="93663" indent="-93663">
+              <a:buFont typeface="Wingdings" panose="05000000000000000000" pitchFamily="2" charset="2"/>
+              <a:buChar char="§"/>
+            </a:pPr>
+            <a:r>
+              <a:rPr lang="en-US" altLang="ko-KR" sz="1400" b="1">
+                <a:latin typeface="+mn-ea"/>
+              </a:rPr>
+              <a:t> </a:t>
+            </a:r>
+            <a:r>
+              <a:rPr lang="en-US" altLang="ko-KR" sz="1400">
+                <a:latin typeface="+mn-ea"/>
+              </a:rPr>
+              <a:t>LangGraph</a:t>
+            </a:r>
+            <a:endParaRPr lang="ko-KR" altLang="en-US" sz="1400">
+              <a:latin typeface="+mn-ea"/>
+            </a:endParaRPr>
+          </a:p>
+        </p:txBody>
+      </p:sp>
+      <p:sp>
+        <p:nvSpPr>
+          <p:cNvPr id="61" name="TextBox 60">
+            <a:extLst>
+              <a:ext uri="{FF2B5EF4-FFF2-40B4-BE49-F238E27FC236}">
+                <a16:creationId xmlns:a16="http://schemas.microsoft.com/office/drawing/2014/main" id="{C578BC64-1104-49E9-A8C0-973F2F279CE8}"/>
+              </a:ext>
+            </a:extLst>
+          </p:cNvPr>
+          <p:cNvSpPr txBox="1"/>
+          <p:nvPr/>
+        </p:nvSpPr>
+        <p:spPr>
+          <a:xfrm>
+            <a:off x="4083525" y="5705816"/>
+            <a:ext cx="2225656" cy="754053"/>
+          </a:xfrm>
+          <a:prstGeom prst="rect">
+            <a:avLst/>
+          </a:prstGeom>
+          <a:noFill/>
+        </p:spPr>
+        <p:txBody>
+          <a:bodyPr wrap="square" rtlCol="0">
+            <a:spAutoFit/>
+          </a:bodyPr>
+          <a:lstStyle/>
+          <a:p>
+            <a:r>
+              <a:rPr lang="ko-KR" altLang="en-US" sz="1500" b="1"/>
+              <a:t>자동 채점 </a:t>
+            </a:r>
+            <a:endParaRPr lang="en-US" altLang="ko-KR" sz="1500" b="1"/>
+          </a:p>
+          <a:p>
+            <a:pPr marL="93663" indent="-93663">
+              <a:buFont typeface="Wingdings" panose="05000000000000000000" pitchFamily="2" charset="2"/>
+              <a:buChar char="§"/>
+            </a:pPr>
+            <a:r>
+              <a:rPr lang="en-US" altLang="ko-KR" sz="1400">
+                <a:latin typeface="+mn-ea"/>
+              </a:rPr>
+              <a:t> RAGAS · LangSmith </a:t>
+            </a:r>
+          </a:p>
+          <a:p>
+            <a:r>
+              <a:rPr lang="ko-KR" altLang="en-US" sz="1400">
+                <a:latin typeface="+mn-ea"/>
+              </a:rPr>
+              <a:t>  골든셋 평가</a:t>
+            </a:r>
+            <a:r>
+              <a:rPr lang="en-US" altLang="ko-KR" sz="1400">
+                <a:latin typeface="맑은 고딕" panose="020B0503020000020004" pitchFamily="50" charset="-127"/>
+                <a:ea typeface="맑은 고딕" panose="020B0503020000020004" pitchFamily="50" charset="-127"/>
+              </a:rPr>
+              <a:t> </a:t>
+            </a:r>
+            <a:endParaRPr lang="ko-KR" altLang="en-US" sz="1400"/>
+          </a:p>
+        </p:txBody>
+      </p:sp>
+      <p:sp>
+        <p:nvSpPr>
+          <p:cNvPr id="63" name="TextBox 62">
+            <a:extLst>
+              <a:ext uri="{FF2B5EF4-FFF2-40B4-BE49-F238E27FC236}">
+                <a16:creationId xmlns:a16="http://schemas.microsoft.com/office/drawing/2014/main" id="{4EE7B714-FB56-4BDE-9F1A-6E683CD88542}"/>
+              </a:ext>
+            </a:extLst>
+          </p:cNvPr>
+          <p:cNvSpPr txBox="1"/>
+          <p:nvPr/>
+        </p:nvSpPr>
+        <p:spPr>
+          <a:xfrm>
+            <a:off x="470815" y="4603966"/>
+            <a:ext cx="2865159" cy="448758"/>
+          </a:xfrm>
+          <a:prstGeom prst="rect">
+            <a:avLst/>
+          </a:prstGeom>
+          <a:noFill/>
+        </p:spPr>
+        <p:txBody>
+          <a:bodyPr wrap="square" lIns="0" tIns="0" rIns="0" bIns="0" anchor="t">
+            <a:noAutofit/>
+          </a:bodyPr>
+          <a:lstStyle/>
+          <a:p>
+            <a:pPr algn="l">
+              <a:spcBef>
+                <a:spcPts val="300"/>
+              </a:spcBef>
+              <a:spcAft>
+                <a:spcPts val="0"/>
+              </a:spcAft>
+            </a:pPr>
+            <a:r>
+              <a:rPr lang="en-US" sz="1200" b="1">
+                <a:solidFill>
+                  <a:srgbClr val="2F6FED"/>
+                </a:solidFill>
+                <a:latin typeface="+mn-ea"/>
+              </a:rPr>
+              <a:t>LangChain</a:t>
+            </a:r>
+          </a:p>
+          <a:p>
+            <a:pPr algn="l">
+              <a:spcBef>
+                <a:spcPts val="300"/>
+              </a:spcBef>
+              <a:spcAft>
+                <a:spcPts val="0"/>
+              </a:spcAft>
+            </a:pPr>
+            <a:r>
+              <a:rPr lang="en-US" sz="1200" b="1">
+                <a:solidFill>
+                  <a:srgbClr val="2F6FED"/>
+                </a:solidFill>
+                <a:latin typeface="+mn-ea"/>
+              </a:rPr>
+              <a:t>OpenAI </a:t>
+            </a:r>
+            <a:r>
+              <a:rPr lang="en-US" altLang="ko-KR" sz="1200" b="1">
+                <a:solidFill>
+                  <a:srgbClr val="2F6FED"/>
+                </a:solidFill>
+                <a:latin typeface="+mn-ea"/>
+              </a:rPr>
+              <a:t>· GPT-5.6-Luna</a:t>
+            </a:r>
+            <a:endParaRPr sz="1200" b="1">
+              <a:solidFill>
+                <a:srgbClr val="2F6FED"/>
+              </a:solidFill>
+              <a:latin typeface="+mn-ea"/>
+            </a:endParaRPr>
+          </a:p>
+        </p:txBody>
+      </p:sp>
+      <p:grpSp>
+        <p:nvGrpSpPr>
+          <p:cNvPr id="74" name="그룹 73">
+            <a:extLst>
+              <a:ext uri="{FF2B5EF4-FFF2-40B4-BE49-F238E27FC236}">
+                <a16:creationId xmlns:a16="http://schemas.microsoft.com/office/drawing/2014/main" id="{B8583573-7B0A-4021-BC60-A6290B016B94}"/>
+              </a:ext>
+            </a:extLst>
+          </p:cNvPr>
+          <p:cNvGrpSpPr/>
+          <p:nvPr/>
+        </p:nvGrpSpPr>
+        <p:grpSpPr>
+          <a:xfrm>
+            <a:off x="6749049" y="5304978"/>
+            <a:ext cx="464698" cy="508954"/>
+            <a:chOff x="6768592" y="3026664"/>
+            <a:chExt cx="384048" cy="420623"/>
+          </a:xfrm>
+        </p:grpSpPr>
+        <p:sp>
+          <p:nvSpPr>
+            <p:cNvPr id="75" name="Rounded Rectangle 36">
+              <a:extLst>
+                <a:ext uri="{FF2B5EF4-FFF2-40B4-BE49-F238E27FC236}">
+                  <a16:creationId xmlns:a16="http://schemas.microsoft.com/office/drawing/2014/main" id="{398FB2E0-9EA0-4D69-A220-5DF0D0682540}"/>
+                </a:ext>
+              </a:extLst>
+            </p:cNvPr>
+            <p:cNvSpPr/>
+            <p:nvPr/>
+          </p:nvSpPr>
+          <p:spPr>
+            <a:xfrm>
+              <a:off x="6768592" y="3044952"/>
+              <a:ext cx="384048" cy="384048"/>
+            </a:xfrm>
+            <a:prstGeom prst="roundRect">
+              <a:avLst>
+                <a:gd name="adj" fmla="val 32000"/>
+              </a:avLst>
+            </a:prstGeom>
+            <a:solidFill>
+              <a:srgbClr val="EAF2FB"/>
+            </a:solidFill>
+            <a:ln>
+              <a:noFill/>
+            </a:ln>
+            <a:effectLst/>
+          </p:spPr>
+          <p:style>
+            <a:lnRef idx="1">
+              <a:schemeClr val="accent1"/>
+            </a:lnRef>
+            <a:fillRef idx="3">
+              <a:schemeClr val="accent1"/>
+            </a:fillRef>
+            <a:effectRef idx="2">
+              <a:schemeClr val="accent1"/>
+            </a:effectRef>
+            <a:fontRef idx="minor">
+              <a:schemeClr val="lt1"/>
+            </a:fontRef>
+          </p:style>
+          <p:txBody>
+            <a:bodyPr rtlCol="0" anchor="ctr"/>
+            <a:lstStyle/>
+            <a:p>
+              <a:pPr algn="ctr"/>
+              <a:endParaRPr/>
+            </a:p>
+          </p:txBody>
+        </p:sp>
+        <p:sp>
+          <p:nvSpPr>
+            <p:cNvPr id="76" name="TextBox 75">
+              <a:extLst>
+                <a:ext uri="{FF2B5EF4-FFF2-40B4-BE49-F238E27FC236}">
+                  <a16:creationId xmlns:a16="http://schemas.microsoft.com/office/drawing/2014/main" id="{521CA3AF-B42D-4B1A-9724-7749C0165CD2}"/>
+                </a:ext>
+              </a:extLst>
+            </p:cNvPr>
+            <p:cNvSpPr txBox="1"/>
+            <p:nvPr/>
+          </p:nvSpPr>
+          <p:spPr>
+            <a:xfrm>
+              <a:off x="6768592" y="3026664"/>
+              <a:ext cx="384048" cy="420623"/>
+            </a:xfrm>
+            <a:prstGeom prst="rect">
+              <a:avLst/>
+            </a:prstGeom>
+            <a:noFill/>
+          </p:spPr>
+          <p:txBody>
+            <a:bodyPr wrap="square" lIns="0" tIns="0" rIns="0" bIns="0" anchor="ctr">
+              <a:noAutofit/>
+            </a:bodyPr>
+            <a:lstStyle/>
+            <a:p>
+              <a:pPr algn="ctr">
+                <a:lnSpc>
+                  <a:spcPct val="100000"/>
+                </a:lnSpc>
+                <a:spcBef>
+                  <a:spcPts val="0"/>
+                </a:spcBef>
+                <a:spcAft>
+                  <a:spcPts val="0"/>
+                </a:spcAft>
+              </a:pPr>
+              <a:r>
+                <a:rPr sz="1260" b="0">
+                  <a:solidFill>
+                    <a:srgbClr val="1A1F2B"/>
+                  </a:solidFill>
+                </a:rPr>
+                <a:t>📧</a:t>
+              </a:r>
+            </a:p>
+          </p:txBody>
+        </p:sp>
+      </p:grpSp>
+      <p:sp>
+        <p:nvSpPr>
+          <p:cNvPr id="77" name="TextBox 76">
+            <a:extLst>
+              <a:ext uri="{FF2B5EF4-FFF2-40B4-BE49-F238E27FC236}">
+                <a16:creationId xmlns:a16="http://schemas.microsoft.com/office/drawing/2014/main" id="{70A85C43-F232-45CA-9884-769B7B1D7D46}"/>
+              </a:ext>
+            </a:extLst>
+          </p:cNvPr>
+          <p:cNvSpPr txBox="1"/>
+          <p:nvPr/>
+        </p:nvSpPr>
+        <p:spPr>
+          <a:xfrm>
+            <a:off x="6771204" y="4559125"/>
+            <a:ext cx="2865159" cy="448758"/>
+          </a:xfrm>
+          <a:prstGeom prst="rect">
+            <a:avLst/>
+          </a:prstGeom>
+          <a:noFill/>
+        </p:spPr>
+        <p:txBody>
+          <a:bodyPr wrap="square" lIns="0" tIns="0" rIns="0" bIns="0" anchor="t">
+            <a:noAutofit/>
+          </a:bodyPr>
+          <a:lstStyle/>
+          <a:p>
+            <a:pPr algn="l">
+              <a:lnSpc>
+                <a:spcPct val="105000"/>
+              </a:lnSpc>
+              <a:spcBef>
+                <a:spcPts val="0"/>
+              </a:spcBef>
+              <a:spcAft>
+                <a:spcPts val="0"/>
+              </a:spcAft>
+            </a:pPr>
+            <a:r>
+              <a:rPr lang="en-US" altLang="ko-KR" sz="1200" b="1">
+                <a:solidFill>
+                  <a:srgbClr val="2F6FED"/>
+                </a:solidFill>
+                <a:latin typeface="+mn-ea"/>
+              </a:rPr>
+              <a:t>Nodemailer (Gmail SMTP)</a:t>
+            </a:r>
+          </a:p>
+        </p:txBody>
+      </p:sp>
+      <p:sp>
+        <p:nvSpPr>
+          <p:cNvPr id="85" name="TextBox 84">
+            <a:extLst>
+              <a:ext uri="{FF2B5EF4-FFF2-40B4-BE49-F238E27FC236}">
+                <a16:creationId xmlns:a16="http://schemas.microsoft.com/office/drawing/2014/main" id="{2AD29F69-7889-4007-B0FF-F195C85A5293}"/>
+              </a:ext>
+            </a:extLst>
+          </p:cNvPr>
+          <p:cNvSpPr txBox="1"/>
+          <p:nvPr/>
+        </p:nvSpPr>
+        <p:spPr>
+          <a:xfrm>
+            <a:off x="7214856" y="5227557"/>
+            <a:ext cx="2141482" cy="577081"/>
+          </a:xfrm>
+          <a:prstGeom prst="rect">
+            <a:avLst/>
+          </a:prstGeom>
+          <a:noFill/>
+        </p:spPr>
+        <p:txBody>
+          <a:bodyPr wrap="square" rtlCol="0">
+            <a:spAutoFit/>
+          </a:bodyPr>
+          <a:lstStyle/>
+          <a:p>
+            <a:pPr>
+              <a:spcBef>
+                <a:spcPts val="300"/>
+              </a:spcBef>
+            </a:pPr>
+            <a:r>
+              <a:rPr lang="ko-KR" altLang="en-US" sz="1500" b="1">
+                <a:latin typeface="+mn-ea"/>
+              </a:rPr>
+              <a:t>협업 요청</a:t>
+            </a:r>
+            <a:endParaRPr lang="en-US" altLang="ko-KR" sz="1500" b="1">
+              <a:latin typeface="+mn-ea"/>
+            </a:endParaRPr>
+          </a:p>
+          <a:p>
+            <a:pPr marL="176213" indent="-176213">
+              <a:spcBef>
+                <a:spcPts val="300"/>
+              </a:spcBef>
+              <a:buFont typeface="Wingdings" panose="05000000000000000000" pitchFamily="2" charset="2"/>
+              <a:buChar char="§"/>
+            </a:pPr>
+            <a:r>
+              <a:rPr lang="ko-KR" altLang="en-US" sz="1400" spc="-40">
+                <a:latin typeface="+mn-ea"/>
+              </a:rPr>
+              <a:t>중복</a:t>
+            </a:r>
+            <a:r>
+              <a:rPr lang="en-US" altLang="ko-KR" sz="1400" spc="-40">
+                <a:latin typeface="+mn-ea"/>
+              </a:rPr>
+              <a:t>, </a:t>
+            </a:r>
+            <a:r>
+              <a:rPr lang="ko-KR" altLang="en-US" sz="1400" spc="-40">
+                <a:latin typeface="+mn-ea"/>
+              </a:rPr>
+              <a:t>미등록 발송 방지</a:t>
+            </a:r>
+          </a:p>
+        </p:txBody>
+      </p:sp>
+      <p:sp>
+        <p:nvSpPr>
+          <p:cNvPr id="78" name="이등변 삼각형 77">
+            <a:extLst>
+              <a:ext uri="{FF2B5EF4-FFF2-40B4-BE49-F238E27FC236}">
+                <a16:creationId xmlns:a16="http://schemas.microsoft.com/office/drawing/2014/main" id="{C14491D8-7583-4FE3-A757-1190AE70C948}"/>
+              </a:ext>
+            </a:extLst>
+          </p:cNvPr>
+          <p:cNvSpPr/>
+          <p:nvPr/>
+        </p:nvSpPr>
+        <p:spPr>
+          <a:xfrm rot="5400000">
+            <a:off x="3264302" y="5357987"/>
+            <a:ext cx="166088" cy="120792"/>
+          </a:xfrm>
+          <a:prstGeom prst="triangle">
+            <a:avLst/>
+          </a:prstGeom>
+          <a:solidFill>
+            <a:schemeClr val="bg1">
+              <a:lumMod val="75000"/>
+            </a:schemeClr>
+          </a:solidFill>
+          <a:ln>
+            <a:noFill/>
+          </a:ln>
+        </p:spPr>
+        <p:style>
+          <a:lnRef idx="2">
+            <a:schemeClr val="accent1">
+              <a:shade val="50000"/>
+            </a:schemeClr>
+          </a:lnRef>
+          <a:fillRef idx="1">
+            <a:schemeClr val="accent1"/>
+          </a:fillRef>
+          <a:effectRef idx="0">
+            <a:schemeClr val="accent1"/>
+          </a:effectRef>
+          <a:fontRef idx="minor">
+            <a:schemeClr val="lt1"/>
+          </a:fontRef>
+        </p:style>
+        <p:txBody>
+          <a:bodyPr rtlCol="0" anchor="ctr"/>
+          <a:lstStyle/>
+          <a:p>
+            <a:pPr algn="ctr"/>
+            <a:endParaRPr lang="ko-KR" altLang="en-US"/>
+          </a:p>
+        </p:txBody>
+      </p:sp>
+      <p:sp>
+        <p:nvSpPr>
+          <p:cNvPr id="84" name="이등변 삼각형 83">
+            <a:extLst>
+              <a:ext uri="{FF2B5EF4-FFF2-40B4-BE49-F238E27FC236}">
+                <a16:creationId xmlns:a16="http://schemas.microsoft.com/office/drawing/2014/main" id="{E7E9A3EA-33DA-4DC3-A654-9E7445FEB849}"/>
+              </a:ext>
+            </a:extLst>
+          </p:cNvPr>
+          <p:cNvSpPr/>
+          <p:nvPr/>
+        </p:nvSpPr>
+        <p:spPr>
+          <a:xfrm rot="5400000">
+            <a:off x="6430066" y="5357987"/>
+            <a:ext cx="166088" cy="120792"/>
+          </a:xfrm>
+          <a:prstGeom prst="triangle">
+            <a:avLst/>
+          </a:prstGeom>
+          <a:solidFill>
+            <a:schemeClr val="bg1">
+              <a:lumMod val="75000"/>
+            </a:schemeClr>
+          </a:solidFill>
+          <a:ln>
+            <a:noFill/>
+          </a:ln>
+        </p:spPr>
+        <p:style>
+          <a:lnRef idx="2">
+            <a:schemeClr val="accent1">
+              <a:shade val="50000"/>
+            </a:schemeClr>
+          </a:lnRef>
+          <a:fillRef idx="1">
+            <a:schemeClr val="accent1"/>
+          </a:fillRef>
+          <a:effectRef idx="0">
+            <a:schemeClr val="accent1"/>
+          </a:effectRef>
+          <a:fontRef idx="minor">
+            <a:schemeClr val="lt1"/>
+          </a:fontRef>
+        </p:style>
+        <p:txBody>
+          <a:bodyPr rtlCol="0" anchor="ctr"/>
+          <a:lstStyle/>
+          <a:p>
+            <a:pPr algn="ctr"/>
+            <a:endParaRPr lang="ko-KR" altLang="en-US"/>
+          </a:p>
+        </p:txBody>
+      </p:sp>
+      <p:grpSp>
+        <p:nvGrpSpPr>
+          <p:cNvPr id="95" name="그룹 94">
+            <a:extLst>
+              <a:ext uri="{FF2B5EF4-FFF2-40B4-BE49-F238E27FC236}">
+                <a16:creationId xmlns:a16="http://schemas.microsoft.com/office/drawing/2014/main" id="{577D9965-528F-40EB-ABDF-17CDCADC3E9A}"/>
+              </a:ext>
+            </a:extLst>
+          </p:cNvPr>
+          <p:cNvGrpSpPr/>
+          <p:nvPr/>
+        </p:nvGrpSpPr>
+        <p:grpSpPr>
+          <a:xfrm>
+            <a:off x="232193" y="1917024"/>
+            <a:ext cx="302999" cy="292608"/>
+            <a:chOff x="5104899" y="1637275"/>
+            <a:chExt cx="302999" cy="292608"/>
+          </a:xfrm>
+        </p:grpSpPr>
+        <p:sp>
+          <p:nvSpPr>
+            <p:cNvPr id="96" name="Shape 30">
+              <a:extLst>
+                <a:ext uri="{FF2B5EF4-FFF2-40B4-BE49-F238E27FC236}">
+                  <a16:creationId xmlns:a16="http://schemas.microsoft.com/office/drawing/2014/main" id="{8B2B2B3A-DFBA-4616-8BF4-ED78A2BBE7E5}"/>
+                </a:ext>
+              </a:extLst>
+            </p:cNvPr>
+            <p:cNvSpPr/>
+            <p:nvPr/>
+          </p:nvSpPr>
+          <p:spPr>
+            <a:xfrm>
+              <a:off x="5115290" y="1637275"/>
+              <a:ext cx="292608" cy="292608"/>
+            </a:xfrm>
+            <a:prstGeom prst="ellipse">
+              <a:avLst/>
+            </a:prstGeom>
+            <a:solidFill>
+              <a:srgbClr val="6795DD"/>
+            </a:solidFill>
+            <a:ln/>
+          </p:spPr>
+        </p:sp>
+        <p:sp>
+          <p:nvSpPr>
+            <p:cNvPr id="97" name="Text 31">
+              <a:extLst>
+                <a:ext uri="{FF2B5EF4-FFF2-40B4-BE49-F238E27FC236}">
+                  <a16:creationId xmlns:a16="http://schemas.microsoft.com/office/drawing/2014/main" id="{C9D612DA-B3EE-4A61-814A-B16A2C0A8BEC}"/>
+                </a:ext>
+              </a:extLst>
+            </p:cNvPr>
+            <p:cNvSpPr txBox="1"/>
+            <p:nvPr/>
+          </p:nvSpPr>
+          <p:spPr>
+            <a:xfrm>
+              <a:off x="5104899" y="1637275"/>
+              <a:ext cx="292608" cy="292608"/>
+            </a:xfrm>
+            <a:prstGeom prst="rect">
+              <a:avLst/>
+            </a:prstGeom>
+            <a:noFill/>
+            <a:ln/>
+          </p:spPr>
+          <p:txBody>
+            <a:bodyPr wrap="square" lIns="0" tIns="0" rIns="0" bIns="0" rtlCol="0" anchor="ctr"/>
+            <a:lstStyle/>
+            <a:p>
+              <a:pPr marL="0" indent="0" algn="ctr">
+                <a:buNone/>
+              </a:pPr>
+              <a:r>
+                <a:rPr lang="en-US" sz="1100" b="1">
+                  <a:solidFill>
+                    <a:srgbClr val="FFFFFF"/>
+                  </a:solidFill>
+                  <a:latin typeface="HY견고딕" pitchFamily="34" charset="0"/>
+                  <a:ea typeface="HY견고딕" pitchFamily="34" charset="-122"/>
+                  <a:cs typeface="HY견고딕" pitchFamily="34" charset="-120"/>
+                </a:rPr>
+                <a:t>1</a:t>
+              </a:r>
+              <a:endParaRPr lang="en-US" sz="1100" dirty="0"/>
+            </a:p>
+          </p:txBody>
+        </p:sp>
+      </p:grpSp>
+      <p:grpSp>
+        <p:nvGrpSpPr>
+          <p:cNvPr id="98" name="그룹 97">
+            <a:extLst>
+              <a:ext uri="{FF2B5EF4-FFF2-40B4-BE49-F238E27FC236}">
+                <a16:creationId xmlns:a16="http://schemas.microsoft.com/office/drawing/2014/main" id="{940FF4C2-C6A6-4C4F-87D3-53ABD770BADB}"/>
+              </a:ext>
+            </a:extLst>
+          </p:cNvPr>
+          <p:cNvGrpSpPr/>
+          <p:nvPr/>
+        </p:nvGrpSpPr>
+        <p:grpSpPr>
+          <a:xfrm>
+            <a:off x="3414442" y="1917024"/>
+            <a:ext cx="302999" cy="292608"/>
+            <a:chOff x="5104899" y="1637275"/>
+            <a:chExt cx="302999" cy="292608"/>
+          </a:xfrm>
+        </p:grpSpPr>
+        <p:sp>
+          <p:nvSpPr>
+            <p:cNvPr id="99" name="Shape 30">
+              <a:extLst>
+                <a:ext uri="{FF2B5EF4-FFF2-40B4-BE49-F238E27FC236}">
+                  <a16:creationId xmlns:a16="http://schemas.microsoft.com/office/drawing/2014/main" id="{D0EFD2E6-2D5E-40DB-B18C-1991BAAA0098}"/>
+                </a:ext>
+              </a:extLst>
+            </p:cNvPr>
+            <p:cNvSpPr/>
+            <p:nvPr/>
+          </p:nvSpPr>
+          <p:spPr>
+            <a:xfrm>
+              <a:off x="5115290" y="1637275"/>
+              <a:ext cx="292608" cy="292608"/>
+            </a:xfrm>
+            <a:prstGeom prst="ellipse">
+              <a:avLst/>
+            </a:prstGeom>
+            <a:solidFill>
+              <a:srgbClr val="6795DD"/>
+            </a:solidFill>
+            <a:ln/>
+          </p:spPr>
+        </p:sp>
+        <p:sp>
+          <p:nvSpPr>
+            <p:cNvPr id="100" name="Text 31">
+              <a:extLst>
+                <a:ext uri="{FF2B5EF4-FFF2-40B4-BE49-F238E27FC236}">
+                  <a16:creationId xmlns:a16="http://schemas.microsoft.com/office/drawing/2014/main" id="{92F30C12-D3F3-4A00-BB80-EA44C3A1A912}"/>
+                </a:ext>
+              </a:extLst>
+            </p:cNvPr>
+            <p:cNvSpPr txBox="1"/>
+            <p:nvPr/>
+          </p:nvSpPr>
+          <p:spPr>
+            <a:xfrm>
+              <a:off x="5104899" y="1637275"/>
+              <a:ext cx="292608" cy="292608"/>
+            </a:xfrm>
+            <a:prstGeom prst="rect">
+              <a:avLst/>
+            </a:prstGeom>
+            <a:noFill/>
+            <a:ln/>
+          </p:spPr>
+          <p:txBody>
+            <a:bodyPr wrap="square" lIns="0" tIns="0" rIns="0" bIns="0" rtlCol="0" anchor="ctr"/>
+            <a:lstStyle/>
+            <a:p>
+              <a:pPr marL="0" indent="0" algn="ctr">
+                <a:buNone/>
+              </a:pPr>
+              <a:r>
+                <a:rPr lang="en-US" sz="1100" b="1">
+                  <a:solidFill>
+                    <a:srgbClr val="FFFFFF"/>
+                  </a:solidFill>
+                  <a:latin typeface="HY견고딕" pitchFamily="34" charset="0"/>
+                  <a:ea typeface="HY견고딕" pitchFamily="34" charset="-122"/>
+                  <a:cs typeface="HY견고딕" pitchFamily="34" charset="-120"/>
+                </a:rPr>
+                <a:t>2</a:t>
+              </a:r>
+              <a:endParaRPr lang="en-US" sz="1100" dirty="0"/>
+            </a:p>
+          </p:txBody>
+        </p:sp>
+      </p:grpSp>
+      <p:grpSp>
+        <p:nvGrpSpPr>
+          <p:cNvPr id="101" name="그룹 100">
+            <a:extLst>
+              <a:ext uri="{FF2B5EF4-FFF2-40B4-BE49-F238E27FC236}">
+                <a16:creationId xmlns:a16="http://schemas.microsoft.com/office/drawing/2014/main" id="{7195E955-8E8E-40AA-B105-C5453FBE5538}"/>
+              </a:ext>
+            </a:extLst>
+          </p:cNvPr>
+          <p:cNvGrpSpPr/>
+          <p:nvPr/>
+        </p:nvGrpSpPr>
+        <p:grpSpPr>
+          <a:xfrm>
+            <a:off x="6597549" y="1917024"/>
+            <a:ext cx="302999" cy="292608"/>
+            <a:chOff x="5104899" y="1637275"/>
+            <a:chExt cx="302999" cy="292608"/>
+          </a:xfrm>
+        </p:grpSpPr>
+        <p:sp>
+          <p:nvSpPr>
+            <p:cNvPr id="102" name="Shape 30">
+              <a:extLst>
+                <a:ext uri="{FF2B5EF4-FFF2-40B4-BE49-F238E27FC236}">
+                  <a16:creationId xmlns:a16="http://schemas.microsoft.com/office/drawing/2014/main" id="{23C05CBF-C1E0-4F32-8772-3AB9FB944086}"/>
+                </a:ext>
+              </a:extLst>
+            </p:cNvPr>
+            <p:cNvSpPr/>
+            <p:nvPr/>
+          </p:nvSpPr>
+          <p:spPr>
+            <a:xfrm>
+              <a:off x="5115290" y="1637275"/>
+              <a:ext cx="292608" cy="292608"/>
+            </a:xfrm>
+            <a:prstGeom prst="ellipse">
+              <a:avLst/>
+            </a:prstGeom>
+            <a:solidFill>
+              <a:srgbClr val="6795DD"/>
+            </a:solidFill>
+            <a:ln/>
+          </p:spPr>
+        </p:sp>
+        <p:sp>
+          <p:nvSpPr>
+            <p:cNvPr id="103" name="Text 31">
+              <a:extLst>
+                <a:ext uri="{FF2B5EF4-FFF2-40B4-BE49-F238E27FC236}">
+                  <a16:creationId xmlns:a16="http://schemas.microsoft.com/office/drawing/2014/main" id="{086CC501-8ABF-4CE4-8C2F-57BE49861B9D}"/>
+                </a:ext>
+              </a:extLst>
+            </p:cNvPr>
+            <p:cNvSpPr txBox="1"/>
+            <p:nvPr/>
+          </p:nvSpPr>
+          <p:spPr>
+            <a:xfrm>
+              <a:off x="5104899" y="1637275"/>
+              <a:ext cx="292608" cy="292608"/>
+            </a:xfrm>
+            <a:prstGeom prst="rect">
+              <a:avLst/>
+            </a:prstGeom>
+            <a:noFill/>
+            <a:ln/>
+          </p:spPr>
+          <p:txBody>
+            <a:bodyPr wrap="square" lIns="0" tIns="0" rIns="0" bIns="0" rtlCol="0" anchor="ctr"/>
+            <a:lstStyle/>
+            <a:p>
+              <a:pPr marL="0" indent="0" algn="ctr">
+                <a:buNone/>
+              </a:pPr>
+              <a:r>
+                <a:rPr lang="en-US" sz="1100" b="1">
+                  <a:solidFill>
+                    <a:srgbClr val="FFFFFF"/>
+                  </a:solidFill>
+                  <a:latin typeface="HY견고딕" pitchFamily="34" charset="0"/>
+                  <a:ea typeface="HY견고딕" pitchFamily="34" charset="-122"/>
+                  <a:cs typeface="HY견고딕" pitchFamily="34" charset="-120"/>
+                </a:rPr>
+                <a:t>3</a:t>
+              </a:r>
+              <a:endParaRPr lang="en-US" sz="1100" dirty="0"/>
+            </a:p>
+          </p:txBody>
+        </p:sp>
+      </p:grpSp>
+      <p:grpSp>
+        <p:nvGrpSpPr>
+          <p:cNvPr id="104" name="그룹 103">
+            <a:extLst>
+              <a:ext uri="{FF2B5EF4-FFF2-40B4-BE49-F238E27FC236}">
+                <a16:creationId xmlns:a16="http://schemas.microsoft.com/office/drawing/2014/main" id="{1D21CC5F-4C5B-4AE9-B3F0-0B7270C14D43}"/>
+              </a:ext>
+            </a:extLst>
+          </p:cNvPr>
+          <p:cNvGrpSpPr/>
+          <p:nvPr/>
+        </p:nvGrpSpPr>
+        <p:grpSpPr>
+          <a:xfrm>
+            <a:off x="232193" y="4261910"/>
+            <a:ext cx="302999" cy="292608"/>
+            <a:chOff x="5104899" y="1637275"/>
+            <a:chExt cx="302999" cy="292608"/>
+          </a:xfrm>
+        </p:grpSpPr>
+        <p:sp>
+          <p:nvSpPr>
+            <p:cNvPr id="105" name="Shape 30">
+              <a:extLst>
+                <a:ext uri="{FF2B5EF4-FFF2-40B4-BE49-F238E27FC236}">
+                  <a16:creationId xmlns:a16="http://schemas.microsoft.com/office/drawing/2014/main" id="{1168DE8F-D4BD-49C4-9AE4-9A8435FF49B0}"/>
+                </a:ext>
+              </a:extLst>
+            </p:cNvPr>
+            <p:cNvSpPr/>
+            <p:nvPr/>
+          </p:nvSpPr>
+          <p:spPr>
+            <a:xfrm>
+              <a:off x="5115290" y="1637275"/>
+              <a:ext cx="292608" cy="292608"/>
+            </a:xfrm>
+            <a:prstGeom prst="ellipse">
+              <a:avLst/>
+            </a:prstGeom>
+            <a:solidFill>
+              <a:srgbClr val="6795DD"/>
+            </a:solidFill>
+            <a:ln/>
+          </p:spPr>
+        </p:sp>
+        <p:sp>
+          <p:nvSpPr>
+            <p:cNvPr id="106" name="Text 31">
+              <a:extLst>
+                <a:ext uri="{FF2B5EF4-FFF2-40B4-BE49-F238E27FC236}">
+                  <a16:creationId xmlns:a16="http://schemas.microsoft.com/office/drawing/2014/main" id="{4FAB4E9D-491F-4D8E-BC85-4032D3D8B35F}"/>
+                </a:ext>
+              </a:extLst>
+            </p:cNvPr>
+            <p:cNvSpPr txBox="1"/>
+            <p:nvPr/>
+          </p:nvSpPr>
+          <p:spPr>
+            <a:xfrm>
+              <a:off x="5104899" y="1637275"/>
+              <a:ext cx="292608" cy="292608"/>
+            </a:xfrm>
+            <a:prstGeom prst="rect">
+              <a:avLst/>
+            </a:prstGeom>
+            <a:noFill/>
+            <a:ln/>
+          </p:spPr>
+          <p:txBody>
+            <a:bodyPr wrap="square" lIns="0" tIns="0" rIns="0" bIns="0" rtlCol="0" anchor="ctr"/>
+            <a:lstStyle/>
+            <a:p>
+              <a:pPr marL="0" indent="0" algn="ctr">
+                <a:buNone/>
+              </a:pPr>
+              <a:r>
+                <a:rPr lang="en-US" sz="1100" b="1">
+                  <a:solidFill>
+                    <a:srgbClr val="FFFFFF"/>
+                  </a:solidFill>
+                  <a:latin typeface="HY견고딕" pitchFamily="34" charset="0"/>
+                  <a:ea typeface="HY견고딕" pitchFamily="34" charset="-122"/>
+                  <a:cs typeface="HY견고딕" pitchFamily="34" charset="-120"/>
+                </a:rPr>
+                <a:t>4</a:t>
+              </a:r>
+              <a:endParaRPr lang="en-US" sz="1100" dirty="0"/>
+            </a:p>
+          </p:txBody>
+        </p:sp>
+      </p:grpSp>
+      <p:grpSp>
+        <p:nvGrpSpPr>
+          <p:cNvPr id="107" name="그룹 106">
+            <a:extLst>
+              <a:ext uri="{FF2B5EF4-FFF2-40B4-BE49-F238E27FC236}">
+                <a16:creationId xmlns:a16="http://schemas.microsoft.com/office/drawing/2014/main" id="{9DC409BF-A5B5-4665-A6C4-B9A583D9DC13}"/>
+              </a:ext>
+            </a:extLst>
+          </p:cNvPr>
+          <p:cNvGrpSpPr/>
+          <p:nvPr/>
+        </p:nvGrpSpPr>
+        <p:grpSpPr>
+          <a:xfrm>
+            <a:off x="3414442" y="4261910"/>
+            <a:ext cx="302999" cy="292608"/>
+            <a:chOff x="5104899" y="1637275"/>
+            <a:chExt cx="302999" cy="292608"/>
+          </a:xfrm>
+        </p:grpSpPr>
+        <p:sp>
+          <p:nvSpPr>
+            <p:cNvPr id="108" name="Shape 30">
+              <a:extLst>
+                <a:ext uri="{FF2B5EF4-FFF2-40B4-BE49-F238E27FC236}">
+                  <a16:creationId xmlns:a16="http://schemas.microsoft.com/office/drawing/2014/main" id="{34C04643-2414-4225-9C94-4F705E517459}"/>
+                </a:ext>
+              </a:extLst>
+            </p:cNvPr>
+            <p:cNvSpPr/>
+            <p:nvPr/>
+          </p:nvSpPr>
+          <p:spPr>
+            <a:xfrm>
+              <a:off x="5115290" y="1637275"/>
+              <a:ext cx="292608" cy="292608"/>
+            </a:xfrm>
+            <a:prstGeom prst="ellipse">
+              <a:avLst/>
+            </a:prstGeom>
+            <a:solidFill>
+              <a:srgbClr val="6795DD"/>
+            </a:solidFill>
+            <a:ln/>
+          </p:spPr>
+        </p:sp>
+        <p:sp>
+          <p:nvSpPr>
+            <p:cNvPr id="109" name="Text 31">
+              <a:extLst>
+                <a:ext uri="{FF2B5EF4-FFF2-40B4-BE49-F238E27FC236}">
+                  <a16:creationId xmlns:a16="http://schemas.microsoft.com/office/drawing/2014/main" id="{69FA204D-8D89-4844-8272-C77A0627D99F}"/>
+                </a:ext>
+              </a:extLst>
+            </p:cNvPr>
+            <p:cNvSpPr txBox="1"/>
+            <p:nvPr/>
+          </p:nvSpPr>
+          <p:spPr>
+            <a:xfrm>
+              <a:off x="5104899" y="1637275"/>
+              <a:ext cx="292608" cy="292608"/>
+            </a:xfrm>
+            <a:prstGeom prst="rect">
+              <a:avLst/>
+            </a:prstGeom>
+            <a:noFill/>
+            <a:ln/>
+          </p:spPr>
+          <p:txBody>
+            <a:bodyPr wrap="square" lIns="0" tIns="0" rIns="0" bIns="0" rtlCol="0" anchor="ctr"/>
+            <a:lstStyle/>
+            <a:p>
+              <a:pPr marL="0" indent="0" algn="ctr">
+                <a:buNone/>
+              </a:pPr>
+              <a:r>
+                <a:rPr lang="en-US" sz="1100" b="1">
+                  <a:solidFill>
+                    <a:srgbClr val="FFFFFF"/>
+                  </a:solidFill>
+                  <a:latin typeface="HY견고딕" pitchFamily="34" charset="0"/>
+                  <a:ea typeface="HY견고딕" pitchFamily="34" charset="-122"/>
+                  <a:cs typeface="HY견고딕" pitchFamily="34" charset="-120"/>
+                </a:rPr>
+                <a:t>5</a:t>
+              </a:r>
+              <a:endParaRPr lang="en-US" sz="1100" dirty="0"/>
+            </a:p>
+          </p:txBody>
+        </p:sp>
+      </p:grpSp>
+      <p:grpSp>
+        <p:nvGrpSpPr>
+          <p:cNvPr id="110" name="그룹 109">
+            <a:extLst>
+              <a:ext uri="{FF2B5EF4-FFF2-40B4-BE49-F238E27FC236}">
+                <a16:creationId xmlns:a16="http://schemas.microsoft.com/office/drawing/2014/main" id="{91F0B405-F830-42CA-BC6D-C63A639BF8AA}"/>
+              </a:ext>
+            </a:extLst>
+          </p:cNvPr>
+          <p:cNvGrpSpPr/>
+          <p:nvPr/>
+        </p:nvGrpSpPr>
+        <p:grpSpPr>
+          <a:xfrm>
+            <a:off x="6597549" y="4261910"/>
+            <a:ext cx="302999" cy="292608"/>
+            <a:chOff x="5104899" y="1637275"/>
+            <a:chExt cx="302999" cy="292608"/>
+          </a:xfrm>
+        </p:grpSpPr>
+        <p:sp>
+          <p:nvSpPr>
+            <p:cNvPr id="111" name="Shape 30">
+              <a:extLst>
+                <a:ext uri="{FF2B5EF4-FFF2-40B4-BE49-F238E27FC236}">
+                  <a16:creationId xmlns:a16="http://schemas.microsoft.com/office/drawing/2014/main" id="{91C303F0-3753-4963-A858-AC15B434AF5A}"/>
+                </a:ext>
+              </a:extLst>
+            </p:cNvPr>
+            <p:cNvSpPr/>
+            <p:nvPr/>
+          </p:nvSpPr>
+          <p:spPr>
+            <a:xfrm>
+              <a:off x="5115290" y="1637275"/>
+              <a:ext cx="292608" cy="292608"/>
+            </a:xfrm>
+            <a:prstGeom prst="ellipse">
+              <a:avLst/>
+            </a:prstGeom>
+            <a:solidFill>
+              <a:srgbClr val="6795DD"/>
+            </a:solidFill>
+            <a:ln/>
+          </p:spPr>
+        </p:sp>
+        <p:sp>
+          <p:nvSpPr>
+            <p:cNvPr id="112" name="Text 31">
+              <a:extLst>
+                <a:ext uri="{FF2B5EF4-FFF2-40B4-BE49-F238E27FC236}">
+                  <a16:creationId xmlns:a16="http://schemas.microsoft.com/office/drawing/2014/main" id="{97F17D6A-D313-42C1-925A-4E4A489C4D8D}"/>
+                </a:ext>
+              </a:extLst>
+            </p:cNvPr>
+            <p:cNvSpPr txBox="1"/>
+            <p:nvPr/>
+          </p:nvSpPr>
+          <p:spPr>
+            <a:xfrm>
+              <a:off x="5104899" y="1637275"/>
+              <a:ext cx="292608" cy="292608"/>
+            </a:xfrm>
+            <a:prstGeom prst="rect">
+              <a:avLst/>
+            </a:prstGeom>
+            <a:noFill/>
+            <a:ln/>
+          </p:spPr>
+          <p:txBody>
+            <a:bodyPr wrap="square" lIns="0" tIns="0" rIns="0" bIns="0" rtlCol="0" anchor="ctr"/>
+            <a:lstStyle/>
+            <a:p>
+              <a:pPr marL="0" indent="0" algn="ctr">
+                <a:buNone/>
+              </a:pPr>
+              <a:r>
+                <a:rPr lang="en-US" sz="1100" b="1">
+                  <a:solidFill>
+                    <a:srgbClr val="FFFFFF"/>
+                  </a:solidFill>
+                  <a:latin typeface="HY견고딕" pitchFamily="34" charset="0"/>
+                  <a:ea typeface="HY견고딕" pitchFamily="34" charset="-122"/>
+                  <a:cs typeface="HY견고딕" pitchFamily="34" charset="-120"/>
+                </a:rPr>
+                <a:t>6</a:t>
+              </a:r>
+              <a:endParaRPr lang="en-US" sz="1100" dirty="0"/>
+            </a:p>
+          </p:txBody>
+        </p:sp>
+      </p:grpSp>
+      <p:sp>
+        <p:nvSpPr>
+          <p:cNvPr id="113" name="TextBox 112">
+            <a:extLst>
+              <a:ext uri="{FF2B5EF4-FFF2-40B4-BE49-F238E27FC236}">
+                <a16:creationId xmlns:a16="http://schemas.microsoft.com/office/drawing/2014/main" id="{9CE0A0F1-CA9D-4AB3-A0A8-8D5412E08F92}"/>
+              </a:ext>
+            </a:extLst>
+          </p:cNvPr>
+          <p:cNvSpPr txBox="1"/>
+          <p:nvPr/>
+        </p:nvSpPr>
+        <p:spPr>
+          <a:xfrm>
+            <a:off x="989636" y="5227557"/>
+            <a:ext cx="2424806" cy="577081"/>
+          </a:xfrm>
+          <a:prstGeom prst="rect">
+            <a:avLst/>
+          </a:prstGeom>
+          <a:noFill/>
+        </p:spPr>
+        <p:txBody>
+          <a:bodyPr wrap="square" rtlCol="0">
+            <a:spAutoFit/>
+          </a:bodyPr>
+          <a:lstStyle/>
+          <a:p>
+            <a:pPr>
+              <a:spcBef>
+                <a:spcPts val="300"/>
+              </a:spcBef>
+            </a:pPr>
+            <a:r>
+              <a:rPr lang="ko-KR" altLang="en-US" sz="1500" b="1">
+                <a:latin typeface="+mn-ea"/>
+              </a:rPr>
+              <a:t>응답 생성</a:t>
+            </a:r>
+            <a:endParaRPr lang="en-US" altLang="ko-KR" sz="1500" b="1">
+              <a:latin typeface="+mn-ea"/>
+            </a:endParaRPr>
+          </a:p>
+          <a:p>
+            <a:pPr marL="176213" indent="-176213">
+              <a:spcBef>
+                <a:spcPts val="300"/>
+              </a:spcBef>
+              <a:buFont typeface="Wingdings" panose="05000000000000000000" pitchFamily="2" charset="2"/>
+              <a:buChar char="§"/>
+            </a:pPr>
+            <a:r>
+              <a:rPr lang="ko-KR" altLang="en-US" sz="1400" spc="-40">
+                <a:latin typeface="+mn-ea"/>
+              </a:rPr>
+              <a:t>근거 문서 인용 포함 판단</a:t>
+            </a:r>
+          </a:p>
+        </p:txBody>
+      </p:sp>
+      <p:sp>
+        <p:nvSpPr>
+          <p:cNvPr id="114" name="TextBox 113">
+            <a:extLst>
+              <a:ext uri="{FF2B5EF4-FFF2-40B4-BE49-F238E27FC236}">
+                <a16:creationId xmlns:a16="http://schemas.microsoft.com/office/drawing/2014/main" id="{0377F850-F23F-4F0F-9DB3-19DE32D713A8}"/>
+              </a:ext>
+            </a:extLst>
+          </p:cNvPr>
+          <p:cNvSpPr txBox="1"/>
+          <p:nvPr/>
+        </p:nvSpPr>
+        <p:spPr>
+          <a:xfrm>
+            <a:off x="4041488" y="2880745"/>
+            <a:ext cx="2556061" cy="577081"/>
+          </a:xfrm>
+          <a:prstGeom prst="rect">
+            <a:avLst/>
+          </a:prstGeom>
+          <a:noFill/>
+        </p:spPr>
+        <p:txBody>
+          <a:bodyPr wrap="square" rtlCol="0">
+            <a:spAutoFit/>
+          </a:bodyPr>
+          <a:lstStyle/>
+          <a:p>
+            <a:pPr>
+              <a:spcBef>
+                <a:spcPts val="300"/>
+              </a:spcBef>
+            </a:pPr>
+            <a:r>
+              <a:rPr lang="ko-KR" altLang="en-US" sz="1500" b="1">
+                <a:latin typeface="+mn-ea"/>
+              </a:rPr>
+              <a:t>요청 처리 서버</a:t>
+            </a:r>
+            <a:endParaRPr lang="en-US" altLang="ko-KR" sz="1500" b="1">
+              <a:latin typeface="+mn-ea"/>
+            </a:endParaRPr>
+          </a:p>
+          <a:p>
+            <a:pPr marL="93663" indent="-93663">
+              <a:spcBef>
+                <a:spcPts val="300"/>
+              </a:spcBef>
+              <a:buFont typeface="Wingdings" panose="05000000000000000000" pitchFamily="2" charset="2"/>
+              <a:buChar char="§"/>
+            </a:pPr>
+            <a:r>
+              <a:rPr lang="en-US" altLang="ko-KR" sz="1400">
+                <a:latin typeface="+mn-ea"/>
+              </a:rPr>
+              <a:t> </a:t>
+            </a:r>
+            <a:r>
+              <a:rPr lang="ko-KR" altLang="en-US" sz="1400" spc="-60">
+                <a:latin typeface="+mn-ea"/>
+              </a:rPr>
+              <a:t>화면</a:t>
+            </a:r>
+            <a:r>
+              <a:rPr lang="en-US" altLang="ko-KR" sz="1400" b="1">
+                <a:latin typeface="+mn-ea"/>
+              </a:rPr>
+              <a:t>·</a:t>
+            </a:r>
+            <a:r>
+              <a:rPr lang="ko-KR" altLang="en-US" sz="1400" spc="-60">
+                <a:latin typeface="+mn-ea"/>
+              </a:rPr>
+              <a:t>서버 하나로 통합 구성</a:t>
+            </a:r>
+          </a:p>
+        </p:txBody>
+      </p:sp>
+    </p:spTree>
+    <p:extLst>
+      <p:ext uri="{BB962C8B-B14F-4D97-AF65-F5344CB8AC3E}">
+        <p14:creationId xmlns:p14="http://schemas.microsoft.com/office/powerpoint/2010/main" val="192216185"/>
       </p:ext>
     </p:extLst>
   </p:cSld>

--- a/presentation/submission/26년 포스코퓨처엠 AI활용전문가 과정_사무계_송다혜.pptx
+++ b/presentation/submission/26년 포스코퓨처엠 AI활용전문가 과정_사무계_송다혜.pptx
@@ -17860,7 +17860,7 @@
         <p:spPr>
           <a:xfrm>
             <a:off x="556286" y="3739872"/>
-            <a:ext cx="9020791" cy="399999"/>
+            <a:ext cx="9020791" cy="406475"/>
           </a:xfrm>
           <a:prstGeom prst="rect">
             <a:avLst/>
@@ -17944,15 +17944,8 @@
               <a:t>투자</a:t>
             </a:r>
             <a:r>
-              <a:rPr lang="en-US" altLang="ko-KR" sz="1400" spc="-20">
-                <a:solidFill>
-                  <a:prstClr val="black"/>
-                </a:solidFill>
-                <a:latin typeface="맑은 고딕"/>
-                <a:ea typeface="맑은 고딕" panose="020B0503020000020004" pitchFamily="50" charset="-127"/>
-                <a:sym typeface="Wingdings" pitchFamily="2" charset="2"/>
-              </a:rPr>
-              <a:t>/</a:t>
+              <a:rPr lang="en-US" altLang="ko-KR" sz="1400"/>
+              <a:t>·</a:t>
             </a:r>
             <a:r>
               <a:rPr lang="ko-KR" altLang="en-US" sz="1400" spc="-20">

--- a/presentation/submission/26년 포스코퓨처엠 AI활용전문가 과정_사무계_송다혜.pptx
+++ b/presentation/submission/26년 포스코퓨처엠 AI활용전문가 과정_사무계_송다혜.pptx
@@ -767,7 +767,7 @@
           <a:p>
             <a:fld id="{6AC0F0B2-DC44-4D7F-B9BC-23EB46679998}" type="datetimeFigureOut">
               <a:rPr lang="ko-KR" altLang="en-US" smtClean="0"/>
-              <a:t>2026-09-13</a:t>
+              <a:t>2026-09-14</a:t>
             </a:fld>
             <a:endParaRPr lang="ko-KR" altLang="en-US"/>
           </a:p>
@@ -937,7 +937,7 @@
           <a:p>
             <a:fld id="{6AC0F0B2-DC44-4D7F-B9BC-23EB46679998}" type="datetimeFigureOut">
               <a:rPr lang="ko-KR" altLang="en-US" smtClean="0"/>
-              <a:t>2026-09-13</a:t>
+              <a:t>2026-09-14</a:t>
             </a:fld>
             <a:endParaRPr lang="ko-KR" altLang="en-US"/>
           </a:p>
@@ -1117,7 +1117,7 @@
           <a:p>
             <a:fld id="{6AC0F0B2-DC44-4D7F-B9BC-23EB46679998}" type="datetimeFigureOut">
               <a:rPr lang="ko-KR" altLang="en-US" smtClean="0"/>
-              <a:t>2026-09-13</a:t>
+              <a:t>2026-09-14</a:t>
             </a:fld>
             <a:endParaRPr lang="ko-KR" altLang="en-US"/>
           </a:p>
@@ -1287,7 +1287,7 @@
           <a:p>
             <a:fld id="{6AC0F0B2-DC44-4D7F-B9BC-23EB46679998}" type="datetimeFigureOut">
               <a:rPr lang="ko-KR" altLang="en-US" smtClean="0"/>
-              <a:t>2026-09-13</a:t>
+              <a:t>2026-09-14</a:t>
             </a:fld>
             <a:endParaRPr lang="ko-KR" altLang="en-US"/>
           </a:p>
@@ -1531,7 +1531,7 @@
           <a:p>
             <a:fld id="{6AC0F0B2-DC44-4D7F-B9BC-23EB46679998}" type="datetimeFigureOut">
               <a:rPr lang="ko-KR" altLang="en-US" smtClean="0"/>
-              <a:t>2026-09-13</a:t>
+              <a:t>2026-09-14</a:t>
             </a:fld>
             <a:endParaRPr lang="ko-KR" altLang="en-US"/>
           </a:p>
@@ -1763,7 +1763,7 @@
           <a:p>
             <a:fld id="{6AC0F0B2-DC44-4D7F-B9BC-23EB46679998}" type="datetimeFigureOut">
               <a:rPr lang="ko-KR" altLang="en-US" smtClean="0"/>
-              <a:t>2026-09-13</a:t>
+              <a:t>2026-09-14</a:t>
             </a:fld>
             <a:endParaRPr lang="ko-KR" altLang="en-US"/>
           </a:p>
@@ -2130,7 +2130,7 @@
           <a:p>
             <a:fld id="{6AC0F0B2-DC44-4D7F-B9BC-23EB46679998}" type="datetimeFigureOut">
               <a:rPr lang="ko-KR" altLang="en-US" smtClean="0"/>
-              <a:t>2026-09-13</a:t>
+              <a:t>2026-09-14</a:t>
             </a:fld>
             <a:endParaRPr lang="ko-KR" altLang="en-US"/>
           </a:p>
@@ -2248,7 +2248,7 @@
           <a:p>
             <a:fld id="{6AC0F0B2-DC44-4D7F-B9BC-23EB46679998}" type="datetimeFigureOut">
               <a:rPr lang="ko-KR" altLang="en-US" smtClean="0"/>
-              <a:t>2026-09-13</a:t>
+              <a:t>2026-09-14</a:t>
             </a:fld>
             <a:endParaRPr lang="ko-KR" altLang="en-US"/>
           </a:p>
@@ -2343,7 +2343,7 @@
           <a:p>
             <a:fld id="{6AC0F0B2-DC44-4D7F-B9BC-23EB46679998}" type="datetimeFigureOut">
               <a:rPr lang="ko-KR" altLang="en-US" smtClean="0"/>
-              <a:t>2026-09-13</a:t>
+              <a:t>2026-09-14</a:t>
             </a:fld>
             <a:endParaRPr lang="ko-KR" altLang="en-US"/>
           </a:p>
@@ -2620,7 +2620,7 @@
           <a:p>
             <a:fld id="{6AC0F0B2-DC44-4D7F-B9BC-23EB46679998}" type="datetimeFigureOut">
               <a:rPr lang="ko-KR" altLang="en-US" smtClean="0"/>
-              <a:t>2026-09-13</a:t>
+              <a:t>2026-09-14</a:t>
             </a:fld>
             <a:endParaRPr lang="ko-KR" altLang="en-US"/>
           </a:p>
@@ -2877,7 +2877,7 @@
           <a:p>
             <a:fld id="{6AC0F0B2-DC44-4D7F-B9BC-23EB46679998}" type="datetimeFigureOut">
               <a:rPr lang="ko-KR" altLang="en-US" smtClean="0"/>
-              <a:t>2026-09-13</a:t>
+              <a:t>2026-09-14</a:t>
             </a:fld>
             <a:endParaRPr lang="ko-KR" altLang="en-US"/>
           </a:p>
@@ -3090,7 +3090,7 @@
           <a:p>
             <a:fld id="{6AC0F0B2-DC44-4D7F-B9BC-23EB46679998}" type="datetimeFigureOut">
               <a:rPr lang="ko-KR" altLang="en-US" smtClean="0"/>
-              <a:t>2026-09-13</a:t>
+              <a:t>2026-09-14</a:t>
             </a:fld>
             <a:endParaRPr lang="ko-KR" altLang="en-US"/>
           </a:p>
@@ -6766,74 +6766,6 @@
                 <a:ea typeface="맑은 고딕" panose="020B0503020000020004" pitchFamily="50" charset="-127"/>
                 <a:cs typeface="+mn-cs"/>
               </a:rPr>
-              <a:t>RAGAS </a:t>
-            </a:r>
-            <a:r>
-              <a:rPr kumimoji="0" lang="ko-KR" altLang="en-US" sz="2000" b="1" i="0" u="none" strike="noStrike" kern="1200" cap="none" spc="-100" normalizeH="0" baseline="0" noProof="0">
-                <a:ln>
-                  <a:noFill/>
-                </a:ln>
-                <a:solidFill>
-                  <a:prstClr val="black"/>
-                </a:solidFill>
-                <a:effectLst/>
-                <a:uLnTx/>
-                <a:uFillTx/>
-                <a:latin typeface="맑은 고딕" panose="020B0503020000020004" pitchFamily="50" charset="-127"/>
-                <a:ea typeface="맑은 고딕" panose="020B0503020000020004" pitchFamily="50" charset="-127"/>
-                <a:cs typeface="+mn-cs"/>
-              </a:rPr>
-              <a:t>평가까지</a:t>
-            </a:r>
-            <a:r>
-              <a:rPr kumimoji="0" lang="en-US" altLang="ko-KR" sz="2000" b="1" i="0" u="none" strike="noStrike" kern="1200" cap="none" spc="-100" normalizeH="0" baseline="0" noProof="0">
-                <a:ln>
-                  <a:noFill/>
-                </a:ln>
-                <a:solidFill>
-                  <a:prstClr val="black"/>
-                </a:solidFill>
-                <a:effectLst/>
-                <a:uLnTx/>
-                <a:uFillTx/>
-                <a:latin typeface="맑은 고딕" panose="020B0503020000020004" pitchFamily="50" charset="-127"/>
-                <a:ea typeface="맑은 고딕" panose="020B0503020000020004" pitchFamily="50" charset="-127"/>
-                <a:cs typeface="+mn-cs"/>
-              </a:rPr>
-              <a:t>,</a:t>
-            </a:r>
-            <a:r>
-              <a:rPr kumimoji="0" lang="ko-KR" altLang="en-US" sz="2000" b="1" i="0" u="none" strike="noStrike" kern="1200" cap="none" spc="-100" normalizeH="0" baseline="0" noProof="0">
-                <a:ln>
-                  <a:noFill/>
-                </a:ln>
-                <a:solidFill>
-                  <a:prstClr val="black"/>
-                </a:solidFill>
-                <a:effectLst/>
-                <a:uLnTx/>
-                <a:uFillTx/>
-                <a:latin typeface="맑은 고딕" panose="020B0503020000020004" pitchFamily="50" charset="-127"/>
-                <a:ea typeface="맑은 고딕" panose="020B0503020000020004" pitchFamily="50" charset="-127"/>
-                <a:cs typeface="+mn-cs"/>
-              </a:rPr>
-              <a:t> </a:t>
-            </a:r>
-            <a:r>
-              <a:rPr kumimoji="0" lang="en-US" altLang="ko-KR" sz="2000" b="1" i="0" u="none" strike="noStrike" kern="1200" cap="none" spc="-100" normalizeH="0" baseline="0" noProof="0">
-                <a:ln>
-                  <a:noFill/>
-                </a:ln>
-                <a:solidFill>
-                  <a:prstClr val="black"/>
-                </a:solidFill>
-                <a:effectLst/>
-                <a:uLnTx/>
-                <a:uFillTx/>
-                <a:latin typeface="맑은 고딕" panose="020B0503020000020004" pitchFamily="50" charset="-127"/>
-                <a:ea typeface="맑은 고딕" panose="020B0503020000020004" pitchFamily="50" charset="-127"/>
-                <a:cs typeface="+mn-cs"/>
-              </a:rPr>
               <a:t>RAG</a:t>
             </a:r>
             <a:r>
@@ -6844,7 +6776,27 @@
                 <a:latin typeface="맑은 고딕" panose="020B0503020000020004" pitchFamily="50" charset="-127"/>
                 <a:ea typeface="맑은 고딕" panose="020B0503020000020004" pitchFamily="50" charset="-127"/>
               </a:rPr>
-              <a:t> 개발 과정</a:t>
+              <a:t> 검증 체계까지 </a:t>
+            </a:r>
+            <a:r>
+              <a:rPr lang="en-US" altLang="ko-KR" sz="2000" b="1" spc="-100">
+                <a:solidFill>
+                  <a:prstClr val="black"/>
+                </a:solidFill>
+                <a:latin typeface="맑은 고딕" panose="020B0503020000020004" pitchFamily="50" charset="-127"/>
+                <a:ea typeface="맑은 고딕" panose="020B0503020000020004" pitchFamily="50" charset="-127"/>
+              </a:rPr>
+              <a:t>3</a:t>
+            </a:r>
+            <a:r>
+              <a:rPr lang="ko-KR" altLang="en-US" sz="2000" b="1" spc="-100">
+                <a:solidFill>
+                  <a:prstClr val="black"/>
+                </a:solidFill>
+                <a:latin typeface="맑은 고딕" panose="020B0503020000020004" pitchFamily="50" charset="-127"/>
+                <a:ea typeface="맑은 고딕" panose="020B0503020000020004" pitchFamily="50" charset="-127"/>
+              </a:rPr>
+              <a:t>주간 개발 여정</a:t>
             </a:r>
             <a:endParaRPr kumimoji="0" lang="ko-KR" altLang="en-US" sz="2000" b="1" i="0" u="none" strike="noStrike" kern="1200" cap="none" spc="-100" normalizeH="0" baseline="0" noProof="0" dirty="0">
               <a:ln>

--- a/presentation/submission/26년 포스코퓨처엠 AI활용전문가 과정_사무계_송다혜.pptx
+++ b/presentation/submission/26년 포스코퓨처엠 AI활용전문가 과정_사무계_송다혜.pptx
@@ -9276,15 +9276,7 @@
             </a:pPr>
             <a:r>
               <a:rPr lang="ko-KR" altLang="en-US" sz="1300"/>
-              <a:t> 질문의 </a:t>
-            </a:r>
-            <a:r>
-              <a:rPr lang="ko-KR" altLang="en-US" sz="1300" b="1">
-                <a:solidFill>
-                  <a:srgbClr val="0000FF"/>
-                </a:solidFill>
-              </a:rPr>
-              <a:t>키워드</a:t>
+              <a:t> 질문의 키워드</a:t>
             </a:r>
             <a:r>
               <a:rPr lang="en-US" altLang="ko-KR" sz="1300"/>
@@ -9319,10 +9311,22 @@
             </a:r>
             <a:r>
               <a:rPr lang="ko-KR" altLang="en-US" sz="1300"/>
-              <a:t>사전에 정의한 규칙 기반 부서</a:t>
-            </a:r>
-            <a:r>
-              <a:rPr lang="en-US" altLang="ko-KR" sz="1300"/>
+              <a:t>사전에 정의한 </a:t>
+            </a:r>
+            <a:r>
+              <a:rPr lang="ko-KR" altLang="en-US" sz="1300" b="1">
+                <a:solidFill>
+                  <a:srgbClr val="0000FF"/>
+                </a:solidFill>
+              </a:rPr>
+              <a:t>규칙 기반 부서</a:t>
+            </a:r>
+            <a:r>
+              <a:rPr lang="en-US" altLang="ko-KR" sz="1300" b="1">
+                <a:solidFill>
+                  <a:srgbClr val="0000FF"/>
+                </a:solidFill>
+              </a:rPr>
               <a:t> </a:t>
             </a:r>
             <a:r>

--- a/presentation/submission/26년 포스코퓨처엠 AI활용전문가 과정_사무계_송다혜.pptx
+++ b/presentation/submission/26년 포스코퓨처엠 AI활용전문가 과정_사무계_송다혜.pptx
@@ -7658,10 +7658,10 @@
               <a:t> 사규</a:t>
             </a:r>
             <a:r>
-              <a:rPr lang="en-US" altLang="ko-KR" sz="1300">
-                <a:latin typeface="+mn-ea"/>
-              </a:rPr>
-              <a:t>, </a:t>
+              <a:rPr lang="ko-KR" altLang="en-US" sz="1300" spc="-40">
+                <a:latin typeface="+mn-ea"/>
+              </a:rPr>
+              <a:t> · </a:t>
             </a:r>
             <a:r>
               <a:rPr lang="ko-KR" altLang="en-US" sz="1300">
@@ -9824,7 +9824,7 @@
               <a:rPr lang="ko-KR" altLang="en-US" sz="1300">
                 <a:latin typeface="+mn-ea"/>
               </a:rPr>
-              <a:t> 평가용 골든셋</a:t>
+              <a:t> 평가용 테스트셋</a:t>
             </a:r>
             <a:r>
               <a:rPr lang="en-US" altLang="ko-KR" sz="1300">
@@ -13594,7 +13594,7 @@
         <p:spPr>
           <a:xfrm>
             <a:off x="7423332" y="5025200"/>
-            <a:ext cx="1670730" cy="292388"/>
+            <a:ext cx="2115480" cy="292388"/>
           </a:xfrm>
           <a:prstGeom prst="rect">
             <a:avLst/>
@@ -13611,7 +13611,7 @@
               <a:rPr lang="ko-KR" altLang="en-US" sz="1300" spc="-40">
                 <a:latin typeface="+mn-ea"/>
               </a:rPr>
-              <a:t>골든셋 정답률 상승 </a:t>
+              <a:t>테스트셋 정답률 상승 </a:t>
             </a:r>
             <a:endParaRPr lang="ko-KR" altLang="en-US" sz="1300" spc="-40">
               <a:solidFill>
@@ -14163,7 +14163,7 @@
                 </a:solidFill>
                 <a:latin typeface="+mn-ea"/>
               </a:rPr>
-              <a:t>골든셋 정답률 개선 </a:t>
+              <a:t>테스트셋 정답률 개선 </a:t>
             </a:r>
           </a:p>
         </p:txBody>
@@ -14363,19 +14363,19 @@
               <a:rPr lang="ko-KR" altLang="en-US" sz="1400" b="1">
                 <a:latin typeface="+mn-ea"/>
               </a:rPr>
-              <a:t>평가 기준을 적용하고</a:t>
+              <a:t>평가와 </a:t>
             </a:r>
             <a:r>
               <a:rPr lang="en-US" altLang="ko-KR" sz="1400" b="1">
                 <a:latin typeface="+mn-ea"/>
               </a:rPr>
-              <a:t>, LangSmith</a:t>
+              <a:t>LangSmith</a:t>
             </a:r>
             <a:r>
               <a:rPr lang="ko-KR" altLang="en-US" sz="1400" b="1">
                 <a:latin typeface="+mn-ea"/>
               </a:rPr>
-              <a:t>로 전체 실행 과정과 채점 결과를 자동 관리</a:t>
+              <a:t>를 활용해 판정 로직을 정밀화하고 검색 품질을 단계적으로 개선</a:t>
             </a:r>
             <a:endParaRPr kumimoji="0" lang="en-US" altLang="ko-KR" sz="1400" b="1" i="0" u="none" strike="noStrike" kern="1200" cap="none" spc="-20" normalizeH="0" baseline="0" noProof="0" dirty="0">
               <a:ln>
@@ -14856,7 +14856,7 @@
         <p:spPr>
           <a:xfrm>
             <a:off x="5481206" y="3235224"/>
-            <a:ext cx="4618758" cy="543739"/>
+            <a:ext cx="4070426" cy="543739"/>
           </a:xfrm>
           <a:prstGeom prst="rect">
             <a:avLst/>
@@ -14900,7 +14900,7 @@
               <a:rPr lang="ko-KR" altLang="en-US" sz="1300" spc="-80">
                 <a:latin typeface="+mn-ea"/>
               </a:rPr>
-              <a:t>라운드에 걸쳐 골든셋 정답률 단계적 개선 </a:t>
+              <a:t>라운드에 걸쳐 정답률 단계적 개선 </a:t>
             </a:r>
             <a:r>
               <a:rPr lang="en-US" altLang="ko-KR" sz="1300" spc="-80">
@@ -16421,7 +16421,7 @@
               <a:rPr lang="ko-KR" altLang="en-US" sz="1100">
                 <a:latin typeface="+mn-ea"/>
               </a:rPr>
-              <a:t>골든셋 </a:t>
+              <a:t>테스트셋 </a:t>
             </a:r>
             <a:r>
               <a:rPr lang="en-US" altLang="ko-KR" sz="1100">
@@ -17948,15 +17948,16 @@
               <a:t>, </a:t>
             </a:r>
             <a:r>
-              <a:rPr lang="ko-KR" altLang="en-US" sz="1400" spc="-20">
-                <a:solidFill>
-                  <a:prstClr val="black"/>
-                </a:solidFill>
-                <a:latin typeface="맑은 고딕"/>
-                <a:ea typeface="맑은 고딕" panose="020B0503020000020004" pitchFamily="50" charset="-127"/>
-                <a:sym typeface="Wingdings" pitchFamily="2" charset="2"/>
-              </a:rPr>
-              <a:t>실제 이메일 수신 여부 확인</a:t>
+              <a:rPr lang="ko-KR" altLang="en-US" sz="1400"/>
+              <a:t>협업 메일 초안 작성</a:t>
+            </a:r>
+            <a:r>
+              <a:rPr lang="en-US" altLang="ko-KR" sz="1400"/>
+              <a:t>·</a:t>
+            </a:r>
+            <a:r>
+              <a:rPr lang="ko-KR" altLang="en-US" sz="1400"/>
+              <a:t>검토 흐름 확인</a:t>
             </a:r>
             <a:endParaRPr kumimoji="0" lang="en-US" altLang="ko-KR" sz="1400" i="0" u="none" strike="noStrike" kern="1200" cap="none" spc="-20" normalizeH="0" baseline="0" noProof="0" dirty="0">
               <a:ln>
@@ -18442,23 +18443,15 @@
             <a:pPr algn="ctr"/>
             <a:r>
               <a:rPr lang="ko-KR" altLang="en-US" sz="1300"/>
-              <a:t>메일 발송 로그</a:t>
-            </a:r>
-            <a:r>
-              <a:rPr lang="en-US" altLang="ko-KR" sz="1300"/>
-              <a:t>·</a:t>
-            </a:r>
+              <a:t>메일 초안 검토 및</a:t>
+            </a:r>
+            <a:endParaRPr lang="en-US" altLang="ko-KR" sz="1300"/>
+          </a:p>
+          <a:p>
+            <a:pPr algn="ctr"/>
             <a:r>
               <a:rPr lang="ko-KR" altLang="en-US" sz="1300"/>
-              <a:t>수신함 캡처 </a:t>
-            </a:r>
-            <a:endParaRPr lang="en-US" altLang="ko-KR" sz="1300"/>
-          </a:p>
-          <a:p>
-            <a:pPr algn="ctr"/>
-            <a:r>
-              <a:rPr lang="ko-KR" altLang="en-US" sz="1300"/>
-              <a:t>정상 동작 검증</a:t>
+              <a:t>수정 기능 정상 동작 </a:t>
             </a:r>
           </a:p>
         </p:txBody>
@@ -19156,8 +19149,8 @@
         </p:blipFill>
         <p:spPr>
           <a:xfrm>
-            <a:off x="6817188" y="4753390"/>
-            <a:ext cx="320492" cy="320492"/>
+            <a:off x="6831756" y="4747176"/>
+            <a:ext cx="291356" cy="291356"/>
           </a:xfrm>
           <a:prstGeom prst="rect">
             <a:avLst/>
@@ -23810,7 +23803,7 @@
               <a:rPr lang="ko-KR" altLang="en-US" sz="1400">
                 <a:latin typeface="+mn-ea"/>
               </a:rPr>
-              <a:t>  골든셋 평가</a:t>
+              <a:t>  테스트셋 평가</a:t>
             </a:r>
             <a:r>
               <a:rPr lang="en-US" altLang="ko-KR" sz="1400">

--- a/presentation/submission/26년 포스코퓨처엠 AI활용전문가 과정_사무계_송다혜.pptx
+++ b/presentation/submission/26년 포스코퓨처엠 AI활용전문가 과정_사무계_송다혜.pptx
@@ -4978,52 +4978,6 @@
           <a:bodyPr anchor="ctr" anchorCtr="0"/>
           <a:lstStyle/>
           <a:p>
-            <a:r>
-              <a:rPr lang="ko-KR" altLang="en-US" sz="1400" b="1"/>
-              <a:t>               키워드 </a:t>
-            </a:r>
-            <a:r>
-              <a:rPr lang="en-US" altLang="ko-KR" sz="1400" b="1">
-                <a:latin typeface="+mn-ea"/>
-              </a:rPr>
-              <a:t>·</a:t>
-            </a:r>
-            <a:r>
-              <a:rPr lang="ko-KR" altLang="en-US" sz="1400" b="1">
-                <a:latin typeface="맑은 고딕" panose="020B0503020000020004" pitchFamily="50" charset="-127"/>
-                <a:ea typeface="맑은 고딕" panose="020B0503020000020004" pitchFamily="50" charset="-127"/>
-              </a:rPr>
-              <a:t> </a:t>
-            </a:r>
-            <a:r>
-              <a:rPr lang="ko-KR" altLang="en-US" sz="1400" b="1"/>
-              <a:t>유형 분석              절차</a:t>
-            </a:r>
-            <a:r>
-              <a:rPr lang="en-US" altLang="ko-KR" sz="1400" b="1"/>
-              <a:t> </a:t>
-            </a:r>
-            <a:r>
-              <a:rPr lang="en-US" altLang="ko-KR" sz="1400" b="1">
-                <a:latin typeface="+mn-ea"/>
-              </a:rPr>
-              <a:t>·</a:t>
-            </a:r>
-            <a:r>
-              <a:rPr lang="ko-KR" altLang="en-US" sz="1400" b="1">
-                <a:latin typeface="맑은 고딕" panose="020B0503020000020004" pitchFamily="50" charset="-127"/>
-                <a:ea typeface="맑은 고딕" panose="020B0503020000020004" pitchFamily="50" charset="-127"/>
-              </a:rPr>
-              <a:t> </a:t>
-            </a:r>
-            <a:r>
-              <a:rPr lang="ko-KR" altLang="en-US" sz="1400" b="1"/>
-              <a:t>지침 안내                   </a:t>
-            </a:r>
-            <a:r>
-              <a:rPr lang="en-US" altLang="ko-KR" sz="1400" b="1"/>
-              <a:t> </a:t>
-            </a:r>
             <a:endParaRPr lang="ko-KR" altLang="en-US" sz="1400" b="1"/>
           </a:p>
         </p:txBody>
@@ -5189,7 +5143,7 @@
         </p:blipFill>
         <p:spPr>
           <a:xfrm>
-            <a:off x="5076431" y="5167171"/>
+            <a:off x="5076431" y="5174180"/>
             <a:ext cx="425550" cy="425550"/>
           </a:xfrm>
           <a:prstGeom prst="rect">
@@ -6556,6 +6510,108 @@
           </p:txBody>
         </p:sp>
       </p:grpSp>
+      <p:sp>
+        <p:nvSpPr>
+          <p:cNvPr id="6" name="TextBox 5">
+            <a:extLst>
+              <a:ext uri="{FF2B5EF4-FFF2-40B4-BE49-F238E27FC236}">
+                <a16:creationId xmlns:a16="http://schemas.microsoft.com/office/drawing/2014/main" id="{394B4FA3-299F-44A4-9814-DF7562FF7206}"/>
+              </a:ext>
+            </a:extLst>
+          </p:cNvPr>
+          <p:cNvSpPr txBox="1"/>
+          <p:nvPr/>
+        </p:nvSpPr>
+        <p:spPr>
+          <a:xfrm>
+            <a:off x="3444544" y="5233067"/>
+            <a:ext cx="1787767" cy="307777"/>
+          </a:xfrm>
+          <a:prstGeom prst="rect">
+            <a:avLst/>
+          </a:prstGeom>
+          <a:noFill/>
+        </p:spPr>
+        <p:txBody>
+          <a:bodyPr wrap="square" rtlCol="0">
+            <a:spAutoFit/>
+          </a:bodyPr>
+          <a:lstStyle/>
+          <a:p>
+            <a:r>
+              <a:rPr lang="ko-KR" altLang="en-US" sz="1400" b="1"/>
+              <a:t>키워드 </a:t>
+            </a:r>
+            <a:r>
+              <a:rPr lang="en-US" altLang="ko-KR" sz="1400" b="1">
+                <a:latin typeface="+mn-ea"/>
+              </a:rPr>
+              <a:t>·</a:t>
+            </a:r>
+            <a:r>
+              <a:rPr lang="ko-KR" altLang="en-US" sz="1400" b="1">
+                <a:latin typeface="맑은 고딕" panose="020B0503020000020004" pitchFamily="50" charset="-127"/>
+                <a:ea typeface="맑은 고딕" panose="020B0503020000020004" pitchFamily="50" charset="-127"/>
+              </a:rPr>
+              <a:t> </a:t>
+            </a:r>
+            <a:r>
+              <a:rPr lang="ko-KR" altLang="en-US" sz="1400" b="1"/>
+              <a:t>유형 분석</a:t>
+            </a:r>
+            <a:endParaRPr lang="ko-KR" altLang="en-US" sz="1400"/>
+          </a:p>
+        </p:txBody>
+      </p:sp>
+      <p:sp>
+        <p:nvSpPr>
+          <p:cNvPr id="47" name="TextBox 46">
+            <a:extLst>
+              <a:ext uri="{FF2B5EF4-FFF2-40B4-BE49-F238E27FC236}">
+                <a16:creationId xmlns:a16="http://schemas.microsoft.com/office/drawing/2014/main" id="{B7E26BA9-348C-4386-8306-840E1DB40BB1}"/>
+              </a:ext>
+            </a:extLst>
+          </p:cNvPr>
+          <p:cNvSpPr txBox="1"/>
+          <p:nvPr/>
+        </p:nvSpPr>
+        <p:spPr>
+          <a:xfrm>
+            <a:off x="5489165" y="5233067"/>
+            <a:ext cx="1787767" cy="307777"/>
+          </a:xfrm>
+          <a:prstGeom prst="rect">
+            <a:avLst/>
+          </a:prstGeom>
+          <a:noFill/>
+        </p:spPr>
+        <p:txBody>
+          <a:bodyPr wrap="square" rtlCol="0">
+            <a:spAutoFit/>
+          </a:bodyPr>
+          <a:lstStyle/>
+          <a:p>
+            <a:r>
+              <a:rPr lang="ko-KR" altLang="en-US" sz="1400" b="1"/>
+              <a:t>절차 </a:t>
+            </a:r>
+            <a:r>
+              <a:rPr lang="en-US" altLang="ko-KR" sz="1400" b="1">
+                <a:latin typeface="+mn-ea"/>
+              </a:rPr>
+              <a:t>·</a:t>
+            </a:r>
+            <a:r>
+              <a:rPr lang="ko-KR" altLang="en-US" sz="1400" b="1">
+                <a:latin typeface="맑은 고딕" panose="020B0503020000020004" pitchFamily="50" charset="-127"/>
+                <a:ea typeface="맑은 고딕" panose="020B0503020000020004" pitchFamily="50" charset="-127"/>
+              </a:rPr>
+              <a:t> 지침 안내</a:t>
+            </a:r>
+            <a:endParaRPr lang="ko-KR" altLang="en-US" sz="1400"/>
+          </a:p>
+        </p:txBody>
+      </p:sp>
     </p:spTree>
     <p:extLst>
       <p:ext uri="{BB962C8B-B14F-4D97-AF65-F5344CB8AC3E}">
@@ -18426,8 +18482,8 @@
         </p:nvSpPr>
         <p:spPr>
           <a:xfrm>
-            <a:off x="6941126" y="5104523"/>
-            <a:ext cx="2253953" cy="492443"/>
+            <a:off x="6941126" y="5042177"/>
+            <a:ext cx="2253953" cy="530915"/>
           </a:xfrm>
           <a:prstGeom prst="rect">
             <a:avLst/>
@@ -18440,7 +18496,11 @@
           </a:bodyPr>
           <a:lstStyle/>
           <a:p>
-            <a:pPr algn="ctr"/>
+            <a:pPr algn="ctr">
+              <a:spcBef>
+                <a:spcPts val="300"/>
+              </a:spcBef>
+            </a:pPr>
             <a:r>
               <a:rPr lang="ko-KR" altLang="en-US" sz="1300"/>
               <a:t>메일 초안 검토 및</a:t>
@@ -18448,10 +18508,14 @@
             <a:endParaRPr lang="en-US" altLang="ko-KR" sz="1300"/>
           </a:p>
           <a:p>
-            <a:pPr algn="ctr"/>
+            <a:pPr algn="ctr">
+              <a:spcBef>
+                <a:spcPts val="300"/>
+              </a:spcBef>
+            </a:pPr>
             <a:r>
               <a:rPr lang="ko-KR" altLang="en-US" sz="1300"/>
-              <a:t>수정 기능 정상 동작 </a:t>
+              <a:t>수정 기능 정상 동작 점검 </a:t>
             </a:r>
           </a:p>
         </p:txBody>
@@ -18782,7 +18846,7 @@
         <p:spPr>
           <a:xfrm>
             <a:off x="6648327" y="5937415"/>
-            <a:ext cx="1049280" cy="369332"/>
+            <a:ext cx="727770" cy="369332"/>
           </a:xfrm>
           <a:prstGeom prst="rect">
             <a:avLst/>
@@ -18799,7 +18863,7 @@
               <a:rPr lang="en-US" altLang="ko-KR" b="1">
                 <a:latin typeface="+mn-ea"/>
               </a:rPr>
-              <a:t>6.0</a:t>
+              <a:t>6</a:t>
             </a:r>
             <a:r>
               <a:rPr lang="ko-KR" altLang="en-US" b="1">
@@ -18824,7 +18888,7 @@
         </p:nvSpPr>
         <p:spPr>
           <a:xfrm>
-            <a:off x="7273554" y="5975887"/>
+            <a:off x="7231990" y="5975887"/>
             <a:ext cx="2358818" cy="292388"/>
           </a:xfrm>
           <a:prstGeom prst="rect">
@@ -18840,7 +18904,15 @@
           <a:p>
             <a:r>
               <a:rPr lang="ko-KR" altLang="en-US" sz="1300" spc="-60"/>
-              <a:t>업무 요청부터 이메일 초안 작성</a:t>
+              <a:t>업무 요청 </a:t>
+            </a:r>
+            <a:r>
+              <a:rPr lang="en-US" altLang="ko-KR" sz="1300" spc="-60"/>
+              <a:t>~ </a:t>
+            </a:r>
+            <a:r>
+              <a:rPr lang="ko-KR" altLang="en-US" sz="1300" spc="-60"/>
+              <a:t>이메일 초안 작성 </a:t>
             </a:r>
             <a:endParaRPr lang="ko-KR" altLang="en-US" sz="1300" spc="-60">
               <a:solidFill>
@@ -18866,7 +18938,7 @@
         </p:nvSpPr>
         <p:spPr>
           <a:xfrm>
-            <a:off x="7273554" y="6297716"/>
+            <a:off x="7231990" y="6297716"/>
             <a:ext cx="2085311" cy="276999"/>
           </a:xfrm>
           <a:prstGeom prst="rect">

--- a/presentation/submission/26년 포스코퓨처엠 AI활용전문가 과정_사무계_송다혜.pptx
+++ b/presentation/submission/26년 포스코퓨처엠 AI활용전문가 과정_사무계_송다혜.pptx
@@ -18904,7 +18904,7 @@
           <a:p>
             <a:r>
               <a:rPr lang="ko-KR" altLang="en-US" sz="1300" spc="-60"/>
-              <a:t>업무 요청 </a:t>
+              <a:t>업무 입력 </a:t>
             </a:r>
             <a:r>
               <a:rPr lang="en-US" altLang="ko-KR" sz="1300" spc="-60"/>

--- a/presentation/submission/26년 포스코퓨처엠 AI활용전문가 과정_사무계_송다혜.pptx
+++ b/presentation/submission/26년 포스코퓨처엠 AI활용전문가 과정_사무계_송다혜.pptx
@@ -14808,7 +14808,7 @@
         </p:nvSpPr>
         <p:spPr>
           <a:xfrm>
-            <a:off x="5481206" y="2269442"/>
+            <a:off x="5481206" y="2278539"/>
             <a:ext cx="3891395" cy="292388"/>
           </a:xfrm>
           <a:prstGeom prst="rect">
@@ -14845,7 +14845,7 @@
         </p:nvSpPr>
         <p:spPr>
           <a:xfrm>
-            <a:off x="5481206" y="2767467"/>
+            <a:off x="5481206" y="2773463"/>
             <a:ext cx="4057606" cy="292388"/>
           </a:xfrm>
           <a:prstGeom prst="rect">
@@ -15095,7 +15095,7 @@
         </p:nvGrpSpPr>
         <p:grpSpPr>
           <a:xfrm>
-            <a:off x="5167245" y="1657206"/>
+            <a:off x="5167245" y="1635405"/>
             <a:ext cx="302999" cy="292608"/>
             <a:chOff x="5104899" y="1637275"/>
             <a:chExt cx="302999" cy="292608"/>
@@ -15187,7 +15187,7 @@
         </p:nvGrpSpPr>
         <p:grpSpPr>
           <a:xfrm>
-            <a:off x="5167245" y="2281009"/>
+            <a:off x="5172440" y="2275225"/>
             <a:ext cx="292608" cy="299016"/>
             <a:chOff x="5136072" y="2166708"/>
             <a:chExt cx="292608" cy="299016"/>
@@ -15279,7 +15279,7 @@
         </p:nvGrpSpPr>
         <p:grpSpPr>
           <a:xfrm>
-            <a:off x="5167245" y="2779240"/>
+            <a:off x="5172440" y="2773353"/>
             <a:ext cx="292608" cy="292608"/>
             <a:chOff x="5169505" y="2581811"/>
             <a:chExt cx="292608" cy="292608"/>
@@ -15371,7 +15371,7 @@
         </p:nvGrpSpPr>
         <p:grpSpPr>
           <a:xfrm>
-            <a:off x="5167245" y="3382448"/>
+            <a:off x="5172440" y="3360789"/>
             <a:ext cx="292608" cy="292608"/>
             <a:chOff x="5138700" y="3133064"/>
             <a:chExt cx="292608" cy="292608"/>
@@ -15534,9 +15534,7 @@
             <a:srgbClr val="F9FAFB"/>
           </a:solidFill>
           <a:ln w="12700">
-            <a:solidFill>
-              <a:srgbClr val="E1E6F0"/>
-            </a:solidFill>
+            <a:noFill/>
             <a:prstDash val="solid"/>
           </a:ln>
           <a:effectLst>
@@ -19253,7 +19251,7 @@
         <p:spPr>
           <a:xfrm>
             <a:off x="407561" y="1123557"/>
-            <a:ext cx="3401618" cy="2548297"/>
+            <a:ext cx="3301994" cy="2548297"/>
           </a:xfrm>
           <a:prstGeom prst="rect">
             <a:avLst/>
@@ -20694,7 +20692,7 @@
         <p:spPr>
           <a:xfrm>
             <a:off x="311600" y="1878502"/>
-            <a:ext cx="4915027" cy="1338828"/>
+            <a:ext cx="4915027" cy="1277273"/>
           </a:xfrm>
           <a:prstGeom prst="rect">
             <a:avLst/>
@@ -20724,54 +20722,54 @@
               <a:buChar char="§"/>
             </a:pPr>
             <a:r>
-              <a:rPr lang="en-US" altLang="ko-KR" sz="1400" spc="-40">
+              <a:rPr lang="en-US" altLang="ko-KR" sz="1300" spc="-40">
                 <a:latin typeface="+mn-ea"/>
               </a:rPr>
               <a:t> Python </a:t>
             </a:r>
             <a:r>
-              <a:rPr lang="ko-KR" altLang="en-US" sz="1400" spc="-40">
+              <a:rPr lang="ko-KR" altLang="en-US" sz="1300" spc="-40">
                 <a:latin typeface="+mn-ea"/>
               </a:rPr>
               <a:t>기초</a:t>
             </a:r>
             <a:r>
-              <a:rPr lang="en-US" altLang="ko-KR" sz="1400" spc="-40">
+              <a:rPr lang="en-US" altLang="ko-KR" sz="1300" spc="-40">
                 <a:latin typeface="+mn-ea"/>
               </a:rPr>
               <a:t>, VS</a:t>
             </a:r>
             <a:r>
-              <a:rPr lang="ko-KR" altLang="en-US" sz="1400" spc="-40">
+              <a:rPr lang="ko-KR" altLang="en-US" sz="1300" spc="-40">
                 <a:latin typeface="+mn-ea"/>
               </a:rPr>
               <a:t> </a:t>
             </a:r>
             <a:r>
-              <a:rPr lang="en-US" altLang="ko-KR" sz="1400" spc="-40">
+              <a:rPr lang="en-US" altLang="ko-KR" sz="1300" spc="-40">
                 <a:latin typeface="+mn-ea"/>
               </a:rPr>
               <a:t>Code,</a:t>
             </a:r>
             <a:r>
-              <a:rPr lang="ko-KR" altLang="en-US" sz="1400" spc="-40">
+              <a:rPr lang="ko-KR" altLang="en-US" sz="1300" spc="-40">
                 <a:latin typeface="+mn-ea"/>
               </a:rPr>
               <a:t> </a:t>
             </a:r>
             <a:r>
-              <a:rPr lang="en-US" altLang="ko-KR" sz="1400" spc="-40">
+              <a:rPr lang="en-US" altLang="ko-KR" sz="1300" spc="-40">
                 <a:latin typeface="+mn-ea"/>
               </a:rPr>
               <a:t>GitHub, LangChain, RAG </a:t>
             </a:r>
             <a:r>
-              <a:rPr lang="ko-KR" altLang="en-US" sz="1400" spc="-40">
+              <a:rPr lang="ko-KR" altLang="en-US" sz="1300" spc="-40">
                 <a:latin typeface="+mn-ea"/>
               </a:rPr>
               <a:t>등</a:t>
             </a:r>
-            <a:endParaRPr lang="en-US" altLang="ko-KR" sz="1400" spc="-40">
+            <a:endParaRPr lang="en-US" altLang="ko-KR" sz="1300" spc="-40">
               <a:latin typeface="+mn-ea"/>
             </a:endParaRPr>
           </a:p>
@@ -20791,30 +20789,30 @@
               </a:buClr>
             </a:pPr>
             <a:r>
-              <a:rPr lang="en-US" altLang="ko-KR" sz="1400" spc="-40">
+              <a:rPr lang="en-US" altLang="ko-KR" sz="1300" spc="-40">
                 <a:latin typeface="+mn-ea"/>
               </a:rPr>
               <a:t>  </a:t>
             </a:r>
             <a:r>
-              <a:rPr lang="ko-KR" altLang="en-US" sz="1400" spc="-40">
+              <a:rPr lang="ko-KR" altLang="en-US" sz="1300" spc="-40">
                 <a:latin typeface="+mn-ea"/>
               </a:rPr>
               <a:t>새로운 개념 학습</a:t>
             </a:r>
             <a:r>
-              <a:rPr lang="en-US" altLang="ko-KR" sz="1400" spc="-40">
+              <a:rPr lang="en-US" altLang="ko-KR" sz="1300" spc="-40">
                 <a:latin typeface="+mn-ea"/>
               </a:rPr>
               <a:t> </a:t>
             </a:r>
             <a:r>
-              <a:rPr lang="ko-KR" altLang="en-US" sz="1400" spc="-40">
+              <a:rPr lang="ko-KR" altLang="en-US" sz="1300" spc="-40">
                 <a:latin typeface="+mn-ea"/>
               </a:rPr>
               <a:t>→ 실제 웹 서비스 구현에 활용</a:t>
             </a:r>
-            <a:endParaRPr lang="en-US" altLang="ko-KR" sz="1400" spc="-40">
+            <a:endParaRPr lang="en-US" altLang="ko-KR" sz="1300" spc="-40">
               <a:latin typeface="+mn-ea"/>
             </a:endParaRPr>
           </a:p>
@@ -20836,37 +20834,43 @@
               <a:buChar char="§"/>
             </a:pPr>
             <a:r>
-              <a:rPr lang="ko-KR" altLang="en-US" sz="1400" spc="-40">
+              <a:rPr lang="ko-KR" altLang="en-US" sz="1300" spc="-40">
                 <a:latin typeface="+mn-ea"/>
               </a:rPr>
               <a:t> 반복 평가</a:t>
             </a:r>
             <a:r>
-              <a:rPr lang="en-US" altLang="ko-KR" sz="1400" b="1">
+              <a:rPr lang="en-US" altLang="ko-KR" sz="1300" b="1">
                 <a:latin typeface="+mn-ea"/>
               </a:rPr>
               <a:t>·</a:t>
             </a:r>
             <a:r>
-              <a:rPr lang="ko-KR" altLang="en-US" sz="1400" spc="-40">
-                <a:latin typeface="+mn-ea"/>
-              </a:rPr>
-              <a:t>모델 개선으로 주관부서 매칭 정확도 </a:t>
-            </a:r>
-            <a:r>
-              <a:rPr lang="en-US" altLang="ko-KR" sz="1400" spc="-40">
+              <a:rPr lang="ko-KR" altLang="en-US" sz="1300" spc="-40">
+                <a:latin typeface="+mn-ea"/>
+              </a:rPr>
+              <a:t>모델 개선으로 </a:t>
+            </a:r>
+            <a:r>
+              <a:rPr lang="ko-KR" altLang="en-US" sz="1300" spc="-60">
+                <a:latin typeface="+mn-ea"/>
+              </a:rPr>
+              <a:t>주관부서 매칭 정확도 향상 </a:t>
+            </a:r>
+            <a:r>
+              <a:rPr lang="en-US" altLang="ko-KR" sz="1300" spc="-60">
                 <a:latin typeface="+mn-ea"/>
               </a:rPr>
               <a:t>63 </a:t>
             </a:r>
             <a:r>
-              <a:rPr lang="ko-KR" altLang="en-US" sz="1400" spc="-40">
+              <a:rPr lang="ko-KR" altLang="en-US" sz="1300" spc="-60">
                 <a:latin typeface="+mn-ea"/>
               </a:rPr>
               <a:t>→ </a:t>
             </a:r>
             <a:r>
-              <a:rPr lang="en-US" altLang="ko-KR" sz="1400" spc="-40">
+              <a:rPr lang="en-US" altLang="ko-KR" sz="1300" spc="-60">
                 <a:latin typeface="+mn-ea"/>
               </a:rPr>
               <a:t>95% </a:t>
@@ -20890,30 +20894,30 @@
               <a:buChar char="§"/>
             </a:pPr>
             <a:r>
-              <a:rPr lang="en-US" altLang="ko-KR" sz="1400" spc="-40">
+              <a:rPr lang="en-US" altLang="ko-KR" sz="1300" spc="-40">
                 <a:latin typeface="+mn-ea"/>
               </a:rPr>
               <a:t> LangSmith</a:t>
             </a:r>
             <a:r>
-              <a:rPr lang="ko-KR" altLang="en-US" sz="1400" spc="-40">
+              <a:rPr lang="ko-KR" altLang="en-US" sz="1300" spc="-40">
                 <a:latin typeface="+mn-ea"/>
               </a:rPr>
               <a:t> 트레이싱</a:t>
             </a:r>
             <a:r>
-              <a:rPr lang="en-US" altLang="ko-KR" sz="1400" spc="-40">
+              <a:rPr lang="en-US" altLang="ko-KR" sz="1300" spc="-40">
                 <a:latin typeface="+mn-ea"/>
               </a:rPr>
               <a:t>·</a:t>
             </a:r>
             <a:r>
-              <a:rPr lang="ko-KR" altLang="en-US" sz="1400" spc="-40">
+              <a:rPr lang="ko-KR" altLang="en-US" sz="1300" spc="-40">
                 <a:latin typeface="+mn-ea"/>
               </a:rPr>
               <a:t>자동 채점 시스템 경험 </a:t>
             </a:r>
-            <a:endParaRPr lang="en-US" altLang="ko-KR" sz="1400" spc="-40">
+            <a:endParaRPr lang="en-US" altLang="ko-KR" sz="1300" spc="-40">
               <a:latin typeface="+mn-ea"/>
             </a:endParaRPr>
           </a:p>
@@ -20934,7 +20938,7 @@
         <p:spPr>
           <a:xfrm>
             <a:off x="5088082" y="1878502"/>
-            <a:ext cx="4890655" cy="1338828"/>
+            <a:ext cx="4890655" cy="1277273"/>
           </a:xfrm>
           <a:prstGeom prst="rect">
             <a:avLst/>
@@ -20964,36 +20968,36 @@
               <a:buChar char="§"/>
             </a:pPr>
             <a:r>
-              <a:rPr lang="ko-KR" altLang="en-US" sz="1400" spc="-40">
+              <a:rPr lang="ko-KR" altLang="en-US" sz="1300" spc="-40">
                 <a:latin typeface="+mn-ea"/>
               </a:rPr>
               <a:t> 회사 지침</a:t>
             </a:r>
             <a:r>
-              <a:rPr lang="en-US" altLang="ko-KR" sz="1400" spc="-40">
+              <a:rPr lang="en-US" altLang="ko-KR" sz="1300" spc="-40">
                 <a:latin typeface="+mn-ea"/>
               </a:rPr>
               <a:t>, </a:t>
             </a:r>
             <a:r>
-              <a:rPr lang="ko-KR" altLang="en-US" sz="1400" spc="-40">
+              <a:rPr lang="ko-KR" altLang="en-US" sz="1300" spc="-40">
                 <a:latin typeface="+mn-ea"/>
               </a:rPr>
               <a:t>규정</a:t>
             </a:r>
             <a:r>
-              <a:rPr lang="en-US" altLang="ko-KR" sz="1400" spc="-40">
+              <a:rPr lang="en-US" altLang="ko-KR" sz="1300" spc="-40">
                 <a:latin typeface="+mn-ea"/>
               </a:rPr>
               <a:t>, </a:t>
             </a:r>
             <a:r>
-              <a:rPr lang="ko-KR" altLang="en-US" sz="1400" spc="-40">
+              <a:rPr lang="ko-KR" altLang="en-US" sz="1300" spc="-40">
                 <a:latin typeface="+mn-ea"/>
               </a:rPr>
               <a:t>프로세스 데이터 추가 확보</a:t>
             </a:r>
-            <a:endParaRPr lang="en-US" altLang="ko-KR" sz="1400" spc="-40">
+            <a:endParaRPr lang="en-US" altLang="ko-KR" sz="1300" spc="-40">
               <a:latin typeface="+mn-ea"/>
             </a:endParaRPr>
           </a:p>
@@ -21015,18 +21019,18 @@
               <a:buChar char="§"/>
             </a:pPr>
             <a:r>
-              <a:rPr lang="en-US" altLang="ko-KR" sz="1400" spc="-40">
+              <a:rPr lang="en-US" altLang="ko-KR" sz="1300" spc="-40">
                 <a:latin typeface="+mn-ea"/>
               </a:rPr>
               <a:t> </a:t>
             </a:r>
             <a:r>
-              <a:rPr lang="ko-KR" altLang="en-US" sz="1400" spc="-40">
+              <a:rPr lang="ko-KR" altLang="en-US" sz="1300" spc="-40">
                 <a:latin typeface="+mn-ea"/>
               </a:rPr>
               <a:t>실제 업무 데이터로 다양한 상황 검증</a:t>
             </a:r>
-            <a:endParaRPr lang="en-US" altLang="ko-KR" sz="1400" spc="-40">
+            <a:endParaRPr lang="en-US" altLang="ko-KR" sz="1300" spc="-40">
               <a:latin typeface="+mn-ea"/>
             </a:endParaRPr>
           </a:p>
@@ -21048,22 +21052,34 @@
               <a:buChar char="§"/>
             </a:pPr>
             <a:r>
-              <a:rPr lang="en-US" altLang="ko-KR" sz="1400" spc="-40">
+              <a:rPr lang="en-US" altLang="ko-KR" sz="1300" spc="-40">
                 <a:latin typeface="+mn-ea"/>
               </a:rPr>
               <a:t> </a:t>
             </a:r>
             <a:r>
-              <a:rPr lang="ko-KR" altLang="en-US" sz="1400" spc="-40">
+              <a:rPr lang="ko-KR" altLang="en-US" sz="1300" spc="-40">
                 <a:latin typeface="+mn-ea"/>
               </a:rPr>
               <a:t>임베딩 유사도만으로 애매한 경계 사례 보완 </a:t>
             </a:r>
             <a:r>
-              <a:rPr lang="en-US" altLang="ko-KR" sz="1400" spc="-40">
-                <a:latin typeface="+mn-ea"/>
-              </a:rPr>
-              <a:t>(Reranking)</a:t>
+              <a:rPr lang="en-US" altLang="ko-KR" sz="1300" spc="-40">
+                <a:latin typeface="+mn-ea"/>
+              </a:rPr>
+              <a:t>(Reranking </a:t>
+            </a:r>
+            <a:r>
+              <a:rPr lang="ko-KR" altLang="en-US" sz="1300" spc="-40">
+                <a:latin typeface="+mn-ea"/>
+              </a:rPr>
+              <a:t>등</a:t>
+            </a:r>
+            <a:r>
+              <a:rPr lang="en-US" altLang="ko-KR" sz="1300" spc="-40">
+                <a:latin typeface="+mn-ea"/>
+              </a:rPr>
+              <a:t>)</a:t>
             </a:r>
           </a:p>
           <a:p>
@@ -21084,18 +21100,18 @@
               <a:buChar char="§"/>
             </a:pPr>
             <a:r>
-              <a:rPr lang="en-US" altLang="ko-KR" sz="1400" spc="-40">
+              <a:rPr lang="en-US" altLang="ko-KR" sz="1300" spc="-40">
                 <a:latin typeface="+mn-ea"/>
               </a:rPr>
               <a:t> </a:t>
             </a:r>
             <a:r>
-              <a:rPr lang="ko-KR" altLang="en-US" sz="1400" spc="-40">
+              <a:rPr lang="ko-KR" altLang="en-US" sz="1300" spc="-40">
                 <a:latin typeface="+mn-ea"/>
               </a:rPr>
               <a:t>현업 사용자 의견을 반영한 서비스 향상</a:t>
             </a:r>
-            <a:endParaRPr lang="en-US" altLang="ko-KR" sz="1400" spc="-40">
+            <a:endParaRPr lang="en-US" altLang="ko-KR" sz="1300" spc="-40">
               <a:latin typeface="+mn-ea"/>
             </a:endParaRPr>
           </a:p>

--- a/presentation/submission/26년 포스코퓨처엠 AI활용전문가 과정_사무계_송다혜.pptx
+++ b/presentation/submission/26년 포스코퓨처엠 AI활용전문가 과정_사무계_송다혜.pptx
@@ -12872,7 +12872,7 @@
                 <a:latin typeface="+mn-ea"/>
                 <a:sym typeface="Wingdings" pitchFamily="2" charset="2"/>
               </a:rPr>
-              <a:t>LangChain RAG 매칭 개선 결과</a:t>
+              <a:t>LangChain 기반 RAG 매칭 개선 결과</a:t>
             </a:r>
             <a:endParaRPr kumimoji="0" lang="en-US" altLang="ko-KR" sz="1400" b="0" i="0" u="none" strike="noStrike" kern="1200" cap="none" spc="-20" normalizeH="0" baseline="0" noProof="0" dirty="0">
               <a:ln>

--- a/presentation/submission/26년 포스코퓨처엠 AI활용전문가 과정_사무계_송다혜.pptx
+++ b/presentation/submission/26년 포스코퓨처엠 AI활용전문가 과정_사무계_송다혜.pptx
@@ -13755,7 +13755,7 @@
                 </a:solidFill>
                 <a:latin typeface="+mn-ea"/>
               </a:rPr>
-              <a:t>주관부서 매칭 정확도 향상</a:t>
+              <a:t>주관부서 매칭 정확도 개선</a:t>
             </a:r>
           </a:p>
         </p:txBody>
@@ -13832,7 +13832,7 @@
               <a:rPr lang="ko-KR" altLang="en-US" sz="1300" spc="-40">
                 <a:latin typeface="+mn-ea"/>
               </a:rPr>
-              <a:t>협업부서 정확도 대폭 개선</a:t>
+              <a:t>협업부서 정확도 대폭 향상</a:t>
             </a:r>
             <a:endParaRPr lang="ko-KR" altLang="en-US" sz="1300" spc="-40">
               <a:solidFill>
@@ -14652,7 +14652,7 @@
               <a:rPr lang="ko-KR" altLang="en-US" sz="1500" b="1" spc="-30">
                 <a:latin typeface="+mn-ea"/>
               </a:rPr>
-              <a:t>로 질문→검색→답변 과정 트레이싱</a:t>
+              <a:t>로 자동 채점된 테스트셋 평가 결과</a:t>
             </a:r>
             <a:r>
               <a:rPr lang="en-US" altLang="ko-KR" sz="1500" b="1" spc="-30">
@@ -15948,7 +15948,7 @@
               <a:rPr lang="ko-KR" altLang="en-US" sz="1300" spc="-40">
                 <a:latin typeface="+mn-ea"/>
               </a:rPr>
-              <a:t>응답속도 증가</a:t>
+              <a:t>응답속도 향상</a:t>
             </a:r>
             <a:endParaRPr lang="ko-KR" altLang="en-US" sz="1300" spc="-40">
               <a:solidFill>
@@ -16036,7 +16036,7 @@
                 </a:solidFill>
                 <a:latin typeface="+mn-ea"/>
               </a:rPr>
-              <a:t>주관부서 정확도 추가 향상</a:t>
+              <a:t>주관부서 매칭 정확도 확보</a:t>
             </a:r>
           </a:p>
         </p:txBody>

--- a/presentation/submission/26년 포스코퓨처엠 AI활용전문가 과정_사무계_송다혜.pptx
+++ b/presentation/submission/26년 포스코퓨처엠 AI활용전문가 과정_사무계_송다혜.pptx
@@ -767,7 +767,7 @@
           <a:p>
             <a:fld id="{6AC0F0B2-DC44-4D7F-B9BC-23EB46679998}" type="datetimeFigureOut">
               <a:rPr lang="ko-KR" altLang="en-US" smtClean="0"/>
-              <a:t>2026-09-14</a:t>
+              <a:t>2026-09-15</a:t>
             </a:fld>
             <a:endParaRPr lang="ko-KR" altLang="en-US"/>
           </a:p>
@@ -937,7 +937,7 @@
           <a:p>
             <a:fld id="{6AC0F0B2-DC44-4D7F-B9BC-23EB46679998}" type="datetimeFigureOut">
               <a:rPr lang="ko-KR" altLang="en-US" smtClean="0"/>
-              <a:t>2026-09-14</a:t>
+              <a:t>2026-09-15</a:t>
             </a:fld>
             <a:endParaRPr lang="ko-KR" altLang="en-US"/>
           </a:p>
@@ -1117,7 +1117,7 @@
           <a:p>
             <a:fld id="{6AC0F0B2-DC44-4D7F-B9BC-23EB46679998}" type="datetimeFigureOut">
               <a:rPr lang="ko-KR" altLang="en-US" smtClean="0"/>
-              <a:t>2026-09-14</a:t>
+              <a:t>2026-09-15</a:t>
             </a:fld>
             <a:endParaRPr lang="ko-KR" altLang="en-US"/>
           </a:p>
@@ -1287,7 +1287,7 @@
           <a:p>
             <a:fld id="{6AC0F0B2-DC44-4D7F-B9BC-23EB46679998}" type="datetimeFigureOut">
               <a:rPr lang="ko-KR" altLang="en-US" smtClean="0"/>
-              <a:t>2026-09-14</a:t>
+              <a:t>2026-09-15</a:t>
             </a:fld>
             <a:endParaRPr lang="ko-KR" altLang="en-US"/>
           </a:p>
@@ -1531,7 +1531,7 @@
           <a:p>
             <a:fld id="{6AC0F0B2-DC44-4D7F-B9BC-23EB46679998}" type="datetimeFigureOut">
               <a:rPr lang="ko-KR" altLang="en-US" smtClean="0"/>
-              <a:t>2026-09-14</a:t>
+              <a:t>2026-09-15</a:t>
             </a:fld>
             <a:endParaRPr lang="ko-KR" altLang="en-US"/>
           </a:p>
@@ -1763,7 +1763,7 @@
           <a:p>
             <a:fld id="{6AC0F0B2-DC44-4D7F-B9BC-23EB46679998}" type="datetimeFigureOut">
               <a:rPr lang="ko-KR" altLang="en-US" smtClean="0"/>
-              <a:t>2026-09-14</a:t>
+              <a:t>2026-09-15</a:t>
             </a:fld>
             <a:endParaRPr lang="ko-KR" altLang="en-US"/>
           </a:p>
@@ -2130,7 +2130,7 @@
           <a:p>
             <a:fld id="{6AC0F0B2-DC44-4D7F-B9BC-23EB46679998}" type="datetimeFigureOut">
               <a:rPr lang="ko-KR" altLang="en-US" smtClean="0"/>
-              <a:t>2026-09-14</a:t>
+              <a:t>2026-09-15</a:t>
             </a:fld>
             <a:endParaRPr lang="ko-KR" altLang="en-US"/>
           </a:p>
@@ -2248,7 +2248,7 @@
           <a:p>
             <a:fld id="{6AC0F0B2-DC44-4D7F-B9BC-23EB46679998}" type="datetimeFigureOut">
               <a:rPr lang="ko-KR" altLang="en-US" smtClean="0"/>
-              <a:t>2026-09-14</a:t>
+              <a:t>2026-09-15</a:t>
             </a:fld>
             <a:endParaRPr lang="ko-KR" altLang="en-US"/>
           </a:p>
@@ -2343,7 +2343,7 @@
           <a:p>
             <a:fld id="{6AC0F0B2-DC44-4D7F-B9BC-23EB46679998}" type="datetimeFigureOut">
               <a:rPr lang="ko-KR" altLang="en-US" smtClean="0"/>
-              <a:t>2026-09-14</a:t>
+              <a:t>2026-09-15</a:t>
             </a:fld>
             <a:endParaRPr lang="ko-KR" altLang="en-US"/>
           </a:p>
@@ -2620,7 +2620,7 @@
           <a:p>
             <a:fld id="{6AC0F0B2-DC44-4D7F-B9BC-23EB46679998}" type="datetimeFigureOut">
               <a:rPr lang="ko-KR" altLang="en-US" smtClean="0"/>
-              <a:t>2026-09-14</a:t>
+              <a:t>2026-09-15</a:t>
             </a:fld>
             <a:endParaRPr lang="ko-KR" altLang="en-US"/>
           </a:p>
@@ -2877,7 +2877,7 @@
           <a:p>
             <a:fld id="{6AC0F0B2-DC44-4D7F-B9BC-23EB46679998}" type="datetimeFigureOut">
               <a:rPr lang="ko-KR" altLang="en-US" smtClean="0"/>
-              <a:t>2026-09-14</a:t>
+              <a:t>2026-09-15</a:t>
             </a:fld>
             <a:endParaRPr lang="ko-KR" altLang="en-US"/>
           </a:p>
@@ -3090,7 +3090,7 @@
           <a:p>
             <a:fld id="{6AC0F0B2-DC44-4D7F-B9BC-23EB46679998}" type="datetimeFigureOut">
               <a:rPr lang="ko-KR" altLang="en-US" smtClean="0"/>
-              <a:t>2026-09-14</a:t>
+              <a:t>2026-09-15</a:t>
             </a:fld>
             <a:endParaRPr lang="ko-KR" altLang="en-US"/>
           </a:p>
@@ -21061,25 +21061,13 @@
               <a:rPr lang="ko-KR" altLang="en-US" sz="1300" spc="-40">
                 <a:latin typeface="+mn-ea"/>
               </a:rPr>
-              <a:t>임베딩 유사도만으로 애매한 경계 사례 보완 </a:t>
+              <a:t>검색 품질을 높이기 위한 기법 추가 적용 </a:t>
             </a:r>
             <a:r>
               <a:rPr lang="en-US" altLang="ko-KR" sz="1300" spc="-40">
                 <a:latin typeface="+mn-ea"/>
               </a:rPr>
-              <a:t>(Reranking </a:t>
-            </a:r>
-            <a:r>
-              <a:rPr lang="ko-KR" altLang="en-US" sz="1300" spc="-40">
-                <a:latin typeface="+mn-ea"/>
-              </a:rPr>
-              <a:t>등</a:t>
-            </a:r>
-            <a:r>
-              <a:rPr lang="en-US" altLang="ko-KR" sz="1300" spc="-40">
-                <a:latin typeface="+mn-ea"/>
-              </a:rPr>
-              <a:t>)</a:t>
+              <a:t>(Reranking, HyDE)</a:t>
             </a:r>
           </a:p>
           <a:p>

--- a/presentation/submission/26년 포스코퓨처엠 AI활용전문가 과정_사무계_송다혜.pptx
+++ b/presentation/submission/26년 포스코퓨처엠 AI활용전문가 과정_사무계_송다혜.pptx
@@ -12,7 +12,7 @@
     <p:sldId id="284" r:id="rId3"/>
     <p:sldId id="285" r:id="rId4"/>
     <p:sldId id="279" r:id="rId5"/>
-    <p:sldId id="287" r:id="rId6"/>
+    <p:sldId id="289" r:id="rId6"/>
     <p:sldId id="280" r:id="rId7"/>
     <p:sldId id="283" r:id="rId8"/>
     <p:sldId id="288" r:id="rId9"/>
@@ -13177,116 +13177,6 @@
       </p:grpSpPr>
       <p:sp>
         <p:nvSpPr>
-          <p:cNvPr id="65" name="Shape 10">
-            <a:extLst>
-              <a:ext uri="{FF2B5EF4-FFF2-40B4-BE49-F238E27FC236}">
-                <a16:creationId xmlns:a16="http://schemas.microsoft.com/office/drawing/2014/main" id="{22591E7D-BAF5-475C-94CC-AFCA136B26C8}"/>
-              </a:ext>
-            </a:extLst>
-          </p:cNvPr>
-          <p:cNvSpPr/>
-          <p:nvPr/>
-        </p:nvSpPr>
-        <p:spPr>
-          <a:xfrm>
-            <a:off x="351453" y="1306107"/>
-            <a:ext cx="4535223" cy="2582693"/>
-          </a:xfrm>
-          <a:prstGeom prst="roundRect">
-            <a:avLst>
-              <a:gd name="adj" fmla="val 2633"/>
-            </a:avLst>
-          </a:prstGeom>
-          <a:solidFill>
-            <a:srgbClr val="FFFFFF"/>
-          </a:solidFill>
-          <a:ln w="12700">
-            <a:solidFill>
-              <a:srgbClr val="E1E6F0"/>
-            </a:solidFill>
-            <a:prstDash val="solid"/>
-          </a:ln>
-          <a:effectLst>
-            <a:outerShdw blurRad="101600" dist="25400" dir="5400000" algn="bl" rotWithShape="0">
-              <a:srgbClr val="6B7CA8">
-                <a:alpha val="12000"/>
-              </a:srgbClr>
-            </a:outerShdw>
-          </a:effectLst>
-        </p:spPr>
-      </p:sp>
-      <p:pic>
-        <p:nvPicPr>
-          <p:cNvPr id="5" name="그림 4">
-            <a:extLst>
-              <a:ext uri="{FF2B5EF4-FFF2-40B4-BE49-F238E27FC236}">
-                <a16:creationId xmlns:a16="http://schemas.microsoft.com/office/drawing/2014/main" id="{E0C020AD-6E54-46E0-97B0-59A01BE40467}"/>
-              </a:ext>
-            </a:extLst>
-          </p:cNvPr>
-          <p:cNvPicPr>
-            <a:picLocks noChangeAspect="1"/>
-          </p:cNvPicPr>
-          <p:nvPr/>
-        </p:nvPicPr>
-        <p:blipFill>
-          <a:blip r:embed="rId3"/>
-          <a:stretch>
-            <a:fillRect/>
-          </a:stretch>
-        </p:blipFill>
-        <p:spPr>
-          <a:xfrm>
-            <a:off x="398361" y="1459854"/>
-            <a:ext cx="4445565" cy="2254216"/>
-          </a:xfrm>
-          <a:prstGeom prst="rect">
-            <a:avLst/>
-          </a:prstGeom>
-        </p:spPr>
-      </p:pic>
-      <p:sp>
-        <p:nvSpPr>
-          <p:cNvPr id="91" name="Shape 10">
-            <a:extLst>
-              <a:ext uri="{FF2B5EF4-FFF2-40B4-BE49-F238E27FC236}">
-                <a16:creationId xmlns:a16="http://schemas.microsoft.com/office/drawing/2014/main" id="{77EBBBFD-D2F1-4392-809F-F0195F6E44BA}"/>
-              </a:ext>
-            </a:extLst>
-          </p:cNvPr>
-          <p:cNvSpPr/>
-          <p:nvPr/>
-        </p:nvSpPr>
-        <p:spPr>
-          <a:xfrm>
-            <a:off x="5083914" y="1306107"/>
-            <a:ext cx="4535223" cy="2582693"/>
-          </a:xfrm>
-          <a:prstGeom prst="roundRect">
-            <a:avLst>
-              <a:gd name="adj" fmla="val 2633"/>
-            </a:avLst>
-          </a:prstGeom>
-          <a:solidFill>
-            <a:srgbClr val="FFFFFF"/>
-          </a:solidFill>
-          <a:ln w="12700">
-            <a:solidFill>
-              <a:srgbClr val="E1E6F0"/>
-            </a:solidFill>
-            <a:prstDash val="solid"/>
-          </a:ln>
-          <a:effectLst>
-            <a:outerShdw blurRad="101600" dist="25400" dir="5400000" algn="bl" rotWithShape="0">
-              <a:srgbClr val="6B7CA8">
-                <a:alpha val="12000"/>
-              </a:srgbClr>
-            </a:outerShdw>
-          </a:effectLst>
-        </p:spPr>
-      </p:sp>
-      <p:sp>
-        <p:nvSpPr>
           <p:cNvPr id="4" name="TextBox 3">
             <a:extLst>
               <a:ext uri="{FF2B5EF4-FFF2-40B4-BE49-F238E27FC236}">
@@ -14573,7 +14463,7 @@
             <p:nvPr/>
           </p:nvPicPr>
           <p:blipFill>
-            <a:blip r:embed="rId4" cstate="print"/>
+            <a:blip r:embed="rId3" cstate="print"/>
             <a:srcRect/>
             <a:stretch>
               <a:fillRect/>
@@ -14592,501 +14482,12 @@
           </p:spPr>
         </p:pic>
       </p:grpSp>
-      <p:sp>
-        <p:nvSpPr>
-          <p:cNvPr id="74" name="사각형: 둥근 모서리 73">
-            <a:extLst>
-              <a:ext uri="{FF2B5EF4-FFF2-40B4-BE49-F238E27FC236}">
-                <a16:creationId xmlns:a16="http://schemas.microsoft.com/office/drawing/2014/main" id="{8C1FA852-ED91-4F3E-B886-6380C80049D8}"/>
-              </a:ext>
-            </a:extLst>
-          </p:cNvPr>
-          <p:cNvSpPr/>
-          <p:nvPr/>
-        </p:nvSpPr>
-        <p:spPr>
-          <a:xfrm>
-            <a:off x="351453" y="1148234"/>
-            <a:ext cx="4534956" cy="307315"/>
-          </a:xfrm>
-          <a:prstGeom prst="roundRect">
-            <a:avLst/>
-          </a:prstGeom>
-          <a:solidFill>
-            <a:schemeClr val="accent1">
-              <a:lumMod val="75000"/>
-            </a:schemeClr>
-          </a:solidFill>
-          <a:ln>
-            <a:noFill/>
-          </a:ln>
-        </p:spPr>
-        <p:style>
-          <a:lnRef idx="2">
-            <a:schemeClr val="accent1">
-              <a:shade val="50000"/>
-            </a:schemeClr>
-          </a:lnRef>
-          <a:fillRef idx="1">
-            <a:schemeClr val="accent1"/>
-          </a:fillRef>
-          <a:effectRef idx="0">
-            <a:schemeClr val="accent1"/>
-          </a:effectRef>
-          <a:fontRef idx="minor">
-            <a:schemeClr val="lt1"/>
-          </a:fontRef>
-        </p:style>
-        <p:txBody>
-          <a:bodyPr rtlCol="0" anchor="ctr"/>
-          <a:lstStyle/>
-          <a:p>
-            <a:pPr algn="ctr"/>
-            <a:r>
-              <a:rPr lang="en-US" altLang="ko-KR" sz="1500" b="1" spc="-30">
-                <a:latin typeface="+mn-ea"/>
-              </a:rPr>
-              <a:t>LangSmith</a:t>
-            </a:r>
-            <a:r>
-              <a:rPr lang="ko-KR" altLang="en-US" sz="1500" b="1" spc="-30">
-                <a:latin typeface="+mn-ea"/>
-              </a:rPr>
-              <a:t>로 자동 채점된 테스트셋 평가 결과</a:t>
-            </a:r>
-            <a:r>
-              <a:rPr lang="en-US" altLang="ko-KR" sz="1500" b="1" spc="-30">
-                <a:latin typeface="+mn-ea"/>
-              </a:rPr>
-              <a:t>*</a:t>
-            </a:r>
-            <a:endParaRPr lang="ko-KR" altLang="en-US" sz="1500" b="1" spc="-30"/>
-          </a:p>
-        </p:txBody>
-      </p:sp>
-      <p:sp>
-        <p:nvSpPr>
-          <p:cNvPr id="76" name="TextBox 75">
-            <a:extLst>
-              <a:ext uri="{FF2B5EF4-FFF2-40B4-BE49-F238E27FC236}">
-                <a16:creationId xmlns:a16="http://schemas.microsoft.com/office/drawing/2014/main" id="{7B672848-9232-48EB-84F0-A2D7E7FC53E4}"/>
-              </a:ext>
-            </a:extLst>
-          </p:cNvPr>
-          <p:cNvSpPr txBox="1"/>
-          <p:nvPr/>
-        </p:nvSpPr>
-        <p:spPr>
-          <a:xfrm>
-            <a:off x="5481206" y="1509840"/>
-            <a:ext cx="4270333" cy="543739"/>
-          </a:xfrm>
-          <a:prstGeom prst="rect">
-            <a:avLst/>
-          </a:prstGeom>
-          <a:noFill/>
-        </p:spPr>
-        <p:txBody>
-          <a:bodyPr wrap="square">
-            <a:spAutoFit/>
-          </a:bodyPr>
-          <a:lstStyle/>
-          <a:p>
-            <a:pPr>
-              <a:spcBef>
-                <a:spcPts val="400"/>
-              </a:spcBef>
-            </a:pPr>
-            <a:r>
-              <a:rPr lang="ko-KR" altLang="en-US" sz="1300" spc="-40">
-                <a:latin typeface="+mn-ea"/>
-              </a:rPr>
-              <a:t>기존 </a:t>
-            </a:r>
-            <a:r>
-              <a:rPr lang="en-US" altLang="ko-KR" sz="1300" spc="-40">
-                <a:latin typeface="+mn-ea"/>
-              </a:rPr>
-              <a:t>LLM </a:t>
-            </a:r>
-            <a:r>
-              <a:rPr lang="ko-KR" altLang="en-US" sz="1300" spc="-40">
-                <a:latin typeface="+mn-ea"/>
-              </a:rPr>
-              <a:t>판단을 먼저 확인하고 보완하던 로직을 </a:t>
-            </a:r>
-            <a:endParaRPr lang="en-US" altLang="ko-KR" sz="1300" spc="-40">
-              <a:latin typeface="+mn-ea"/>
-            </a:endParaRPr>
-          </a:p>
-          <a:p>
-            <a:pPr>
-              <a:spcBef>
-                <a:spcPts val="400"/>
-              </a:spcBef>
-            </a:pPr>
-            <a:r>
-              <a:rPr lang="ko-KR" altLang="en-US" sz="1300" spc="-40">
-                <a:latin typeface="+mn-ea"/>
-              </a:rPr>
-              <a:t>부서 간 유사도 점수 격차 기반 판정으로 정밀화</a:t>
-            </a:r>
-          </a:p>
-        </p:txBody>
-      </p:sp>
-      <p:sp>
-        <p:nvSpPr>
-          <p:cNvPr id="77" name="사각형: 둥근 모서리 76">
-            <a:extLst>
-              <a:ext uri="{FF2B5EF4-FFF2-40B4-BE49-F238E27FC236}">
-                <a16:creationId xmlns:a16="http://schemas.microsoft.com/office/drawing/2014/main" id="{9B9AAB53-0B27-4520-97FA-828CD93836DC}"/>
-              </a:ext>
-            </a:extLst>
-          </p:cNvPr>
-          <p:cNvSpPr/>
-          <p:nvPr/>
-        </p:nvSpPr>
-        <p:spPr>
-          <a:xfrm>
-            <a:off x="5084181" y="1148234"/>
-            <a:ext cx="4534956" cy="315690"/>
-          </a:xfrm>
-          <a:prstGeom prst="roundRect">
-            <a:avLst/>
-          </a:prstGeom>
-          <a:solidFill>
-            <a:schemeClr val="accent1">
-              <a:lumMod val="75000"/>
-            </a:schemeClr>
-          </a:solidFill>
-          <a:ln>
-            <a:noFill/>
-          </a:ln>
-        </p:spPr>
-        <p:style>
-          <a:lnRef idx="2">
-            <a:schemeClr val="accent1">
-              <a:shade val="50000"/>
-            </a:schemeClr>
-          </a:lnRef>
-          <a:fillRef idx="1">
-            <a:schemeClr val="accent1"/>
-          </a:fillRef>
-          <a:effectRef idx="0">
-            <a:schemeClr val="accent1"/>
-          </a:effectRef>
-          <a:fontRef idx="minor">
-            <a:schemeClr val="lt1"/>
-          </a:fontRef>
-        </p:style>
-        <p:txBody>
-          <a:bodyPr rtlCol="0" anchor="ctr"/>
-          <a:lstStyle/>
-          <a:p>
-            <a:pPr algn="ctr"/>
-            <a:r>
-              <a:rPr lang="ko-KR" altLang="en-US" sz="1500" b="1" spc="-30">
-                <a:latin typeface="+mn-ea"/>
-              </a:rPr>
-              <a:t>핵심 개선 포인트</a:t>
-            </a:r>
-            <a:endParaRPr lang="ko-KR" altLang="en-US" sz="1500" b="1" spc="-30"/>
-          </a:p>
-        </p:txBody>
-      </p:sp>
-      <p:sp>
-        <p:nvSpPr>
-          <p:cNvPr id="80" name="TextBox 79">
-            <a:extLst>
-              <a:ext uri="{FF2B5EF4-FFF2-40B4-BE49-F238E27FC236}">
-                <a16:creationId xmlns:a16="http://schemas.microsoft.com/office/drawing/2014/main" id="{1DFF6387-7555-4BF0-9DD1-E09D88E6A124}"/>
-              </a:ext>
-            </a:extLst>
-          </p:cNvPr>
-          <p:cNvSpPr txBox="1"/>
-          <p:nvPr/>
-        </p:nvSpPr>
-        <p:spPr>
-          <a:xfrm>
-            <a:off x="5481206" y="2278539"/>
-            <a:ext cx="3891395" cy="292388"/>
-          </a:xfrm>
-          <a:prstGeom prst="rect">
-            <a:avLst/>
-          </a:prstGeom>
-          <a:noFill/>
-        </p:spPr>
-        <p:txBody>
-          <a:bodyPr wrap="square">
-            <a:spAutoFit/>
-          </a:bodyPr>
-          <a:lstStyle/>
-          <a:p>
-            <a:r>
-              <a:rPr lang="ko-KR" altLang="en-US" sz="1300" spc="-40">
-                <a:latin typeface="+mn-ea"/>
-              </a:rPr>
-              <a:t>협업부서 과다 포함 문제 개선</a:t>
-            </a:r>
-          </a:p>
-        </p:txBody>
-      </p:sp>
-      <p:sp>
-        <p:nvSpPr>
-          <p:cNvPr id="81" name="TextBox 80">
-            <a:extLst>
-              <a:ext uri="{FF2B5EF4-FFF2-40B4-BE49-F238E27FC236}">
-                <a16:creationId xmlns:a16="http://schemas.microsoft.com/office/drawing/2014/main" id="{E4900A9D-240F-436D-89BF-AE73FC002740}"/>
-              </a:ext>
-            </a:extLst>
-          </p:cNvPr>
-          <p:cNvSpPr txBox="1"/>
-          <p:nvPr/>
-        </p:nvSpPr>
-        <p:spPr>
-          <a:xfrm>
-            <a:off x="5481206" y="2773463"/>
-            <a:ext cx="4057606" cy="292388"/>
-          </a:xfrm>
-          <a:prstGeom prst="rect">
-            <a:avLst/>
-          </a:prstGeom>
-          <a:noFill/>
-        </p:spPr>
-        <p:txBody>
-          <a:bodyPr wrap="square">
-            <a:spAutoFit/>
-          </a:bodyPr>
-          <a:lstStyle/>
-          <a:p>
-            <a:pPr>
-              <a:spcBef>
-                <a:spcPts val="400"/>
-              </a:spcBef>
-            </a:pPr>
-            <a:r>
-              <a:rPr lang="ko-KR" altLang="en-US" sz="1300" spc="-40">
-                <a:latin typeface="+mn-ea"/>
-              </a:rPr>
-              <a:t>금액 비교 </a:t>
-            </a:r>
-            <a:r>
-              <a:rPr lang="en-US" altLang="ko-KR" sz="1300" spc="-40">
-                <a:latin typeface="+mn-ea"/>
-              </a:rPr>
-              <a:t>:</a:t>
-            </a:r>
-            <a:r>
-              <a:rPr lang="ko-KR" altLang="en-US" sz="1300" spc="-40">
-                <a:latin typeface="+mn-ea"/>
-              </a:rPr>
-              <a:t> </a:t>
-            </a:r>
-            <a:r>
-              <a:rPr lang="en-US" altLang="ko-KR" sz="1300" spc="-40">
-                <a:latin typeface="+mn-ea"/>
-              </a:rPr>
-              <a:t>LLM </a:t>
-            </a:r>
-            <a:r>
-              <a:rPr lang="ko-KR" altLang="en-US" sz="1300" spc="-40">
-                <a:latin typeface="+mn-ea"/>
-              </a:rPr>
-              <a:t>판단에서 직접 코드 계산으로 수정</a:t>
-            </a:r>
-          </a:p>
-        </p:txBody>
-      </p:sp>
-      <p:sp>
-        <p:nvSpPr>
-          <p:cNvPr id="82" name="TextBox 81">
-            <a:extLst>
-              <a:ext uri="{FF2B5EF4-FFF2-40B4-BE49-F238E27FC236}">
-                <a16:creationId xmlns:a16="http://schemas.microsoft.com/office/drawing/2014/main" id="{5E2ABFA0-B640-4B8D-91A7-CD720C8B254A}"/>
-              </a:ext>
-            </a:extLst>
-          </p:cNvPr>
-          <p:cNvSpPr txBox="1"/>
-          <p:nvPr/>
-        </p:nvSpPr>
-        <p:spPr>
-          <a:xfrm>
-            <a:off x="5481206" y="3235224"/>
-            <a:ext cx="4070426" cy="543739"/>
-          </a:xfrm>
-          <a:prstGeom prst="rect">
-            <a:avLst/>
-          </a:prstGeom>
-          <a:noFill/>
-        </p:spPr>
-        <p:txBody>
-          <a:bodyPr wrap="square">
-            <a:spAutoFit/>
-          </a:bodyPr>
-          <a:lstStyle/>
-          <a:p>
-            <a:pPr>
-              <a:spcBef>
-                <a:spcPts val="400"/>
-              </a:spcBef>
-            </a:pPr>
-            <a:r>
-              <a:rPr lang="ko-KR" altLang="en-US" sz="1300" spc="-40">
-                <a:latin typeface="+mn-ea"/>
-              </a:rPr>
-              <a:t>반복 재평가로 개선 효과 정량적 확인 </a:t>
-            </a:r>
-            <a:endParaRPr lang="en-US" altLang="ko-KR" sz="1300" spc="-40">
-              <a:latin typeface="+mn-ea"/>
-            </a:endParaRPr>
-          </a:p>
-          <a:p>
-            <a:pPr>
-              <a:spcBef>
-                <a:spcPts val="400"/>
-              </a:spcBef>
-            </a:pPr>
-            <a:r>
-              <a:rPr lang="en-US" altLang="ko-KR" sz="1300" spc="-80">
-                <a:latin typeface="+mn-ea"/>
-              </a:rPr>
-              <a:t>3</a:t>
-            </a:r>
-            <a:r>
-              <a:rPr lang="ko-KR" altLang="en-US" sz="1300" spc="-80">
-                <a:latin typeface="+mn-ea"/>
-              </a:rPr>
-              <a:t>라운드에 걸쳐 정답률 단계적 개선 </a:t>
-            </a:r>
-            <a:r>
-              <a:rPr lang="en-US" altLang="ko-KR" sz="1300" spc="-80">
-                <a:latin typeface="+mn-ea"/>
-              </a:rPr>
-              <a:t>(37</a:t>
-            </a:r>
-            <a:r>
-              <a:rPr lang="ko-KR" altLang="en-US" sz="1300" spc="-80">
-                <a:latin typeface="+mn-ea"/>
-              </a:rPr>
-              <a:t>→</a:t>
-            </a:r>
-            <a:r>
-              <a:rPr lang="en-US" altLang="ko-KR" sz="1300" spc="-80">
-                <a:latin typeface="+mn-ea"/>
-              </a:rPr>
-              <a:t>58</a:t>
-            </a:r>
-            <a:r>
-              <a:rPr lang="ko-KR" altLang="en-US" sz="1300" spc="-80">
-                <a:latin typeface="+mn-ea"/>
-              </a:rPr>
-              <a:t>→</a:t>
-            </a:r>
-            <a:r>
-              <a:rPr lang="en-US" altLang="ko-KR" sz="1300" spc="-80">
-                <a:latin typeface="+mn-ea"/>
-              </a:rPr>
-              <a:t>68%)</a:t>
-            </a:r>
-            <a:endParaRPr lang="ko-KR" altLang="en-US" sz="1300" spc="-80">
-              <a:latin typeface="+mn-ea"/>
-            </a:endParaRPr>
-          </a:p>
-        </p:txBody>
-      </p:sp>
-      <p:sp>
-        <p:nvSpPr>
-          <p:cNvPr id="83" name="Shape 13">
-            <a:extLst>
-              <a:ext uri="{FF2B5EF4-FFF2-40B4-BE49-F238E27FC236}">
-                <a16:creationId xmlns:a16="http://schemas.microsoft.com/office/drawing/2014/main" id="{43B3D376-C513-46D1-9C26-F6D7752A13E3}"/>
-              </a:ext>
-            </a:extLst>
-          </p:cNvPr>
-          <p:cNvSpPr/>
-          <p:nvPr/>
-        </p:nvSpPr>
-        <p:spPr>
-          <a:xfrm>
-            <a:off x="5142201" y="2139561"/>
-            <a:ext cx="4409431" cy="0"/>
-          </a:xfrm>
-          <a:prstGeom prst="line">
-            <a:avLst/>
-          </a:prstGeom>
-          <a:noFill/>
-          <a:ln w="9525">
-            <a:solidFill>
-              <a:srgbClr val="E1E6F0"/>
-            </a:solidFill>
-            <a:prstDash val="dash"/>
-          </a:ln>
-        </p:spPr>
-      </p:sp>
-      <p:sp>
-        <p:nvSpPr>
-          <p:cNvPr id="92" name="Shape 13">
-            <a:extLst>
-              <a:ext uri="{FF2B5EF4-FFF2-40B4-BE49-F238E27FC236}">
-                <a16:creationId xmlns:a16="http://schemas.microsoft.com/office/drawing/2014/main" id="{51DCD47B-4DFF-40D8-B95D-6FB1EC923583}"/>
-              </a:ext>
-            </a:extLst>
-          </p:cNvPr>
-          <p:cNvSpPr/>
-          <p:nvPr/>
-        </p:nvSpPr>
-        <p:spPr>
-          <a:xfrm>
-            <a:off x="5142201" y="2666037"/>
-            <a:ext cx="4409431" cy="0"/>
-          </a:xfrm>
-          <a:prstGeom prst="line">
-            <a:avLst/>
-          </a:prstGeom>
-          <a:noFill/>
-          <a:ln w="9525">
-            <a:solidFill>
-              <a:srgbClr val="E1E6F0"/>
-            </a:solidFill>
-            <a:prstDash val="dash"/>
-          </a:ln>
-        </p:spPr>
-      </p:sp>
-      <p:sp>
-        <p:nvSpPr>
-          <p:cNvPr id="93" name="Shape 13">
-            <a:extLst>
-              <a:ext uri="{FF2B5EF4-FFF2-40B4-BE49-F238E27FC236}">
-                <a16:creationId xmlns:a16="http://schemas.microsoft.com/office/drawing/2014/main" id="{9941CAED-E556-4C11-8F86-414A92C0FA47}"/>
-              </a:ext>
-            </a:extLst>
-          </p:cNvPr>
-          <p:cNvSpPr/>
-          <p:nvPr/>
-        </p:nvSpPr>
-        <p:spPr>
-          <a:xfrm>
-            <a:off x="5142201" y="3161340"/>
-            <a:ext cx="4409431" cy="0"/>
-          </a:xfrm>
-          <a:prstGeom prst="line">
-            <a:avLst/>
-          </a:prstGeom>
-          <a:noFill/>
-          <a:ln w="9525">
-            <a:solidFill>
-              <a:srgbClr val="E1E6F0"/>
-            </a:solidFill>
-            <a:prstDash val="dash"/>
-          </a:ln>
-        </p:spPr>
-      </p:sp>
       <p:grpSp>
         <p:nvGrpSpPr>
-          <p:cNvPr id="13" name="그룹 12">
-            <a:extLst>
-              <a:ext uri="{FF2B5EF4-FFF2-40B4-BE49-F238E27FC236}">
-                <a16:creationId xmlns:a16="http://schemas.microsoft.com/office/drawing/2014/main" id="{B625F4FE-8A54-4D58-9822-FCE06239A855}"/>
+          <p:cNvPr id="2" name="그룹 1">
+            <a:extLst>
+              <a:ext uri="{FF2B5EF4-FFF2-40B4-BE49-F238E27FC236}">
+                <a16:creationId xmlns:a16="http://schemas.microsoft.com/office/drawing/2014/main" id="{437953E7-6F79-4584-A170-1EE178228B77}"/>
               </a:ext>
             </a:extLst>
           </p:cNvPr>
@@ -15095,18 +14496,18 @@
         </p:nvGrpSpPr>
         <p:grpSpPr>
           <a:xfrm>
-            <a:off x="5167245" y="1635405"/>
-            <a:ext cx="302999" cy="292608"/>
-            <a:chOff x="5104899" y="1637275"/>
-            <a:chExt cx="302999" cy="292608"/>
+            <a:off x="353354" y="1148234"/>
+            <a:ext cx="4667625" cy="2740566"/>
+            <a:chOff x="5083914" y="1148234"/>
+            <a:chExt cx="4667625" cy="2740566"/>
           </a:xfrm>
         </p:grpSpPr>
         <p:sp>
           <p:nvSpPr>
-            <p:cNvPr id="94" name="Shape 30">
+            <p:cNvPr id="91" name="Shape 10">
               <a:extLst>
                 <a:ext uri="{FF2B5EF4-FFF2-40B4-BE49-F238E27FC236}">
-                  <a16:creationId xmlns:a16="http://schemas.microsoft.com/office/drawing/2014/main" id="{CD81A531-94E3-4523-997E-14DD3635E491}"/>
+                  <a16:creationId xmlns:a16="http://schemas.microsoft.com/office/drawing/2014/main" id="{77EBBBFD-D2F1-4392-809F-F0195F6E44BA}"/>
                 </a:ext>
               </a:extLst>
             </p:cNvPr>
@@ -15115,24 +14516,38 @@
           </p:nvSpPr>
           <p:spPr>
             <a:xfrm>
-              <a:off x="5115290" y="1637275"/>
-              <a:ext cx="292608" cy="292608"/>
+              <a:off x="5083914" y="1306107"/>
+              <a:ext cx="4535223" cy="2582693"/>
             </a:xfrm>
-            <a:prstGeom prst="ellipse">
-              <a:avLst/>
+            <a:prstGeom prst="roundRect">
+              <a:avLst>
+                <a:gd name="adj" fmla="val 2633"/>
+              </a:avLst>
             </a:prstGeom>
             <a:solidFill>
-              <a:srgbClr val="6795DD"/>
+              <a:srgbClr val="FFFFFF"/>
             </a:solidFill>
-            <a:ln/>
+            <a:ln w="12700">
+              <a:solidFill>
+                <a:srgbClr val="E1E6F0"/>
+              </a:solidFill>
+              <a:prstDash val="solid"/>
+            </a:ln>
+            <a:effectLst>
+              <a:outerShdw blurRad="101600" dist="25400" dir="5400000" algn="bl" rotWithShape="0">
+                <a:srgbClr val="6B7CA8">
+                  <a:alpha val="12000"/>
+                </a:srgbClr>
+              </a:outerShdw>
+            </a:effectLst>
           </p:spPr>
         </p:sp>
         <p:sp>
           <p:nvSpPr>
-            <p:cNvPr id="95" name="Text 31">
+            <p:cNvPr id="76" name="TextBox 75">
               <a:extLst>
                 <a:ext uri="{FF2B5EF4-FFF2-40B4-BE49-F238E27FC236}">
-                  <a16:creationId xmlns:a16="http://schemas.microsoft.com/office/drawing/2014/main" id="{92B37005-93DC-4E2A-BE51-A581879D47A5}"/>
+                  <a16:creationId xmlns:a16="http://schemas.microsoft.com/office/drawing/2014/main" id="{7B672848-9232-48EB-84F0-A2D7E7FC53E4}"/>
                 </a:ext>
               </a:extLst>
             </p:cNvPr>
@@ -15141,64 +14556,68 @@
           </p:nvSpPr>
           <p:spPr>
             <a:xfrm>
-              <a:off x="5104899" y="1637275"/>
-              <a:ext cx="292608" cy="292608"/>
+              <a:off x="5481206" y="1509840"/>
+              <a:ext cx="4270333" cy="543739"/>
             </a:xfrm>
             <a:prstGeom prst="rect">
               <a:avLst/>
             </a:prstGeom>
             <a:noFill/>
-            <a:ln/>
           </p:spPr>
           <p:txBody>
-            <a:bodyPr wrap="square" lIns="0" tIns="0" rIns="0" bIns="0" rtlCol="0" anchor="ctr"/>
+            <a:bodyPr wrap="square">
+              <a:spAutoFit/>
+            </a:bodyPr>
             <a:lstStyle/>
             <a:p>
-              <a:pPr marL="0" indent="0" algn="ctr">
-                <a:buNone/>
+              <a:pPr>
+                <a:spcBef>
+                  <a:spcPts val="400"/>
+                </a:spcBef>
               </a:pPr>
               <a:r>
-                <a:rPr lang="en-US" sz="1100" b="1">
-                  <a:solidFill>
-                    <a:srgbClr val="FFFFFF"/>
-                  </a:solidFill>
-                  <a:latin typeface="HY견고딕" pitchFamily="34" charset="0"/>
-                  <a:ea typeface="HY견고딕" pitchFamily="34" charset="-122"/>
-                  <a:cs typeface="HY견고딕" pitchFamily="34" charset="-120"/>
+                <a:rPr lang="ko-KR" altLang="en-US" sz="1300" spc="-40">
+                  <a:latin typeface="+mn-ea"/>
                 </a:rPr>
-                <a:t>1</a:t>
+                <a:t>기존 </a:t>
               </a:r>
-              <a:endParaRPr lang="en-US" sz="1100" dirty="0"/>
+              <a:r>
+                <a:rPr lang="en-US" altLang="ko-KR" sz="1300" spc="-40">
+                  <a:latin typeface="+mn-ea"/>
+                </a:rPr>
+                <a:t>LLM </a:t>
+              </a:r>
+              <a:r>
+                <a:rPr lang="ko-KR" altLang="en-US" sz="1300" spc="-40">
+                  <a:latin typeface="+mn-ea"/>
+                </a:rPr>
+                <a:t>판단을 먼저 확인하고 보완하던 로직을 </a:t>
+              </a:r>
+              <a:endParaRPr lang="en-US" altLang="ko-KR" sz="1300" spc="-40">
+                <a:latin typeface="+mn-ea"/>
+              </a:endParaRPr>
+            </a:p>
+            <a:p>
+              <a:pPr>
+                <a:spcBef>
+                  <a:spcPts val="400"/>
+                </a:spcBef>
+              </a:pPr>
+              <a:r>
+                <a:rPr lang="ko-KR" altLang="en-US" sz="1300" spc="-40">
+                  <a:latin typeface="+mn-ea"/>
+                </a:rPr>
+                <a:t>부서 간 유사도 점수 격차 기반 판정으로 정밀화</a:t>
+              </a:r>
             </a:p>
           </p:txBody>
         </p:sp>
-      </p:grpSp>
-      <p:grpSp>
-        <p:nvGrpSpPr>
-          <p:cNvPr id="12" name="그룹 11">
-            <a:extLst>
-              <a:ext uri="{FF2B5EF4-FFF2-40B4-BE49-F238E27FC236}">
-                <a16:creationId xmlns:a16="http://schemas.microsoft.com/office/drawing/2014/main" id="{7244287C-C3BD-435E-B1A5-C00D3FC74BA6}"/>
-              </a:ext>
-            </a:extLst>
-          </p:cNvPr>
-          <p:cNvGrpSpPr/>
-          <p:nvPr/>
-        </p:nvGrpSpPr>
-        <p:grpSpPr>
-          <a:xfrm>
-            <a:off x="5172440" y="2275225"/>
-            <a:ext cx="292608" cy="299016"/>
-            <a:chOff x="5136072" y="2166708"/>
-            <a:chExt cx="292608" cy="299016"/>
-          </a:xfrm>
-        </p:grpSpPr>
         <p:sp>
           <p:nvSpPr>
-            <p:cNvPr id="97" name="Shape 37">
+            <p:cNvPr id="77" name="사각형: 둥근 모서리 76">
               <a:extLst>
                 <a:ext uri="{FF2B5EF4-FFF2-40B4-BE49-F238E27FC236}">
-                  <a16:creationId xmlns:a16="http://schemas.microsoft.com/office/drawing/2014/main" id="{1B148B0F-10A7-4F4E-8A58-BC82DB48E4BD}"/>
+                  <a16:creationId xmlns:a16="http://schemas.microsoft.com/office/drawing/2014/main" id="{9B9AAB53-0B27-4520-97FA-828CD93836DC}"/>
                 </a:ext>
               </a:extLst>
             </p:cNvPr>
@@ -15207,24 +14626,58 @@
           </p:nvSpPr>
           <p:spPr>
             <a:xfrm>
-              <a:off x="5136072" y="2166708"/>
-              <a:ext cx="292608" cy="292608"/>
+              <a:off x="5084181" y="1148234"/>
+              <a:ext cx="4534956" cy="315690"/>
             </a:xfrm>
-            <a:prstGeom prst="ellipse">
+            <a:prstGeom prst="roundRect">
               <a:avLst/>
             </a:prstGeom>
             <a:solidFill>
-              <a:srgbClr val="6795DD"/>
+              <a:schemeClr val="accent1">
+                <a:lumMod val="75000"/>
+              </a:schemeClr>
             </a:solidFill>
-            <a:ln/>
+            <a:ln>
+              <a:noFill/>
+            </a:ln>
           </p:spPr>
+          <p:style>
+            <a:lnRef idx="2">
+              <a:schemeClr val="accent1">
+                <a:shade val="50000"/>
+              </a:schemeClr>
+            </a:lnRef>
+            <a:fillRef idx="1">
+              <a:schemeClr val="accent1"/>
+            </a:fillRef>
+            <a:effectRef idx="0">
+              <a:schemeClr val="accent1"/>
+            </a:effectRef>
+            <a:fontRef idx="minor">
+              <a:schemeClr val="lt1"/>
+            </a:fontRef>
+          </p:style>
+          <p:txBody>
+            <a:bodyPr rtlCol="0" anchor="ctr"/>
+            <a:lstStyle/>
+            <a:p>
+              <a:pPr algn="ctr"/>
+              <a:r>
+                <a:rPr lang="ko-KR" altLang="en-US" sz="1500" b="1" spc="-30">
+                  <a:latin typeface="+mn-ea"/>
+                </a:rPr>
+                <a:t>핵심 개선 포인트</a:t>
+              </a:r>
+              <a:endParaRPr lang="ko-KR" altLang="en-US" sz="1500" b="1" spc="-30"/>
+            </a:p>
+          </p:txBody>
         </p:sp>
         <p:sp>
           <p:nvSpPr>
-            <p:cNvPr id="98" name="Text 38">
+            <p:cNvPr id="80" name="TextBox 79">
               <a:extLst>
                 <a:ext uri="{FF2B5EF4-FFF2-40B4-BE49-F238E27FC236}">
-                  <a16:creationId xmlns:a16="http://schemas.microsoft.com/office/drawing/2014/main" id="{C2E0313E-BD3A-4030-92D2-32CA044D15B8}"/>
+                  <a16:creationId xmlns:a16="http://schemas.microsoft.com/office/drawing/2014/main" id="{1DFF6387-7555-4BF0-9DD1-E09D88E6A124}"/>
                 </a:ext>
               </a:extLst>
             </p:cNvPr>
@@ -15233,64 +14686,198 @@
           </p:nvSpPr>
           <p:spPr>
             <a:xfrm>
-              <a:off x="5136072" y="2173116"/>
-              <a:ext cx="292608" cy="292608"/>
+              <a:off x="5481206" y="2278539"/>
+              <a:ext cx="3891395" cy="292388"/>
             </a:xfrm>
             <a:prstGeom prst="rect">
               <a:avLst/>
             </a:prstGeom>
             <a:noFill/>
-            <a:ln/>
           </p:spPr>
           <p:txBody>
-            <a:bodyPr wrap="square" lIns="0" tIns="0" rIns="0" bIns="0" rtlCol="0" anchor="ctr"/>
+            <a:bodyPr wrap="square">
+              <a:spAutoFit/>
+            </a:bodyPr>
             <a:lstStyle/>
             <a:p>
-              <a:pPr marL="0" indent="0" algn="ctr">
-                <a:buNone/>
-              </a:pPr>
               <a:r>
-                <a:rPr lang="en-US" sz="1100" b="1">
-                  <a:solidFill>
-                    <a:srgbClr val="FFFFFF"/>
-                  </a:solidFill>
-                  <a:latin typeface="HY견고딕" pitchFamily="34" charset="0"/>
-                  <a:ea typeface="HY견고딕" pitchFamily="34" charset="-122"/>
-                  <a:cs typeface="HY견고딕" pitchFamily="34" charset="-120"/>
+                <a:rPr lang="ko-KR" altLang="en-US" sz="1300" spc="-40">
+                  <a:latin typeface="+mn-ea"/>
                 </a:rPr>
-                <a:t>2</a:t>
+                <a:t>협업부서 과다 포함 문제 개선</a:t>
               </a:r>
-              <a:endParaRPr lang="en-US" sz="1100" dirty="0"/>
             </a:p>
           </p:txBody>
         </p:sp>
-      </p:grpSp>
-      <p:grpSp>
-        <p:nvGrpSpPr>
-          <p:cNvPr id="14" name="그룹 13">
-            <a:extLst>
-              <a:ext uri="{FF2B5EF4-FFF2-40B4-BE49-F238E27FC236}">
-                <a16:creationId xmlns:a16="http://schemas.microsoft.com/office/drawing/2014/main" id="{069D93BA-3E5C-4002-ACDD-7BEA859B8BB1}"/>
-              </a:ext>
-            </a:extLst>
-          </p:cNvPr>
-          <p:cNvGrpSpPr/>
-          <p:nvPr/>
-        </p:nvGrpSpPr>
-        <p:grpSpPr>
-          <a:xfrm>
-            <a:off x="5172440" y="2773353"/>
-            <a:ext cx="292608" cy="292608"/>
-            <a:chOff x="5169505" y="2581811"/>
-            <a:chExt cx="292608" cy="292608"/>
-          </a:xfrm>
-        </p:grpSpPr>
         <p:sp>
           <p:nvSpPr>
-            <p:cNvPr id="99" name="Shape 44">
+            <p:cNvPr id="81" name="TextBox 80">
               <a:extLst>
                 <a:ext uri="{FF2B5EF4-FFF2-40B4-BE49-F238E27FC236}">
-                  <a16:creationId xmlns:a16="http://schemas.microsoft.com/office/drawing/2014/main" id="{77E93DDA-3659-417A-AA88-5CC2EF9C9722}"/>
+                  <a16:creationId xmlns:a16="http://schemas.microsoft.com/office/drawing/2014/main" id="{E4900A9D-240F-436D-89BF-AE73FC002740}"/>
+                </a:ext>
+              </a:extLst>
+            </p:cNvPr>
+            <p:cNvSpPr txBox="1"/>
+            <p:nvPr/>
+          </p:nvSpPr>
+          <p:spPr>
+            <a:xfrm>
+              <a:off x="5481206" y="2773463"/>
+              <a:ext cx="4057606" cy="292388"/>
+            </a:xfrm>
+            <a:prstGeom prst="rect">
+              <a:avLst/>
+            </a:prstGeom>
+            <a:noFill/>
+          </p:spPr>
+          <p:txBody>
+            <a:bodyPr wrap="square">
+              <a:spAutoFit/>
+            </a:bodyPr>
+            <a:lstStyle/>
+            <a:p>
+              <a:pPr>
+                <a:spcBef>
+                  <a:spcPts val="400"/>
+                </a:spcBef>
+              </a:pPr>
+              <a:r>
+                <a:rPr lang="ko-KR" altLang="en-US" sz="1300" spc="-40">
+                  <a:latin typeface="+mn-ea"/>
+                </a:rPr>
+                <a:t>금액 비교 </a:t>
+              </a:r>
+              <a:r>
+                <a:rPr lang="en-US" altLang="ko-KR" sz="1300" spc="-40">
+                  <a:latin typeface="+mn-ea"/>
+                </a:rPr>
+                <a:t>:</a:t>
+              </a:r>
+              <a:r>
+                <a:rPr lang="ko-KR" altLang="en-US" sz="1300" spc="-40">
+                  <a:latin typeface="+mn-ea"/>
+                </a:rPr>
+                <a:t> </a:t>
+              </a:r>
+              <a:r>
+                <a:rPr lang="en-US" altLang="ko-KR" sz="1300" spc="-40">
+                  <a:latin typeface="+mn-ea"/>
+                </a:rPr>
+                <a:t>LLM </a:t>
+              </a:r>
+              <a:r>
+                <a:rPr lang="ko-KR" altLang="en-US" sz="1300" spc="-40">
+                  <a:latin typeface="+mn-ea"/>
+                </a:rPr>
+                <a:t>판단에서 직접 코드 계산으로 수정</a:t>
+              </a:r>
+            </a:p>
+          </p:txBody>
+        </p:sp>
+        <p:sp>
+          <p:nvSpPr>
+            <p:cNvPr id="82" name="TextBox 81">
+              <a:extLst>
+                <a:ext uri="{FF2B5EF4-FFF2-40B4-BE49-F238E27FC236}">
+                  <a16:creationId xmlns:a16="http://schemas.microsoft.com/office/drawing/2014/main" id="{5E2ABFA0-B640-4B8D-91A7-CD720C8B254A}"/>
+                </a:ext>
+              </a:extLst>
+            </p:cNvPr>
+            <p:cNvSpPr txBox="1"/>
+            <p:nvPr/>
+          </p:nvSpPr>
+          <p:spPr>
+            <a:xfrm>
+              <a:off x="5481206" y="3235224"/>
+              <a:ext cx="4070426" cy="543739"/>
+            </a:xfrm>
+            <a:prstGeom prst="rect">
+              <a:avLst/>
+            </a:prstGeom>
+            <a:noFill/>
+          </p:spPr>
+          <p:txBody>
+            <a:bodyPr wrap="square">
+              <a:spAutoFit/>
+            </a:bodyPr>
+            <a:lstStyle/>
+            <a:p>
+              <a:pPr>
+                <a:spcBef>
+                  <a:spcPts val="400"/>
+                </a:spcBef>
+              </a:pPr>
+              <a:r>
+                <a:rPr lang="ko-KR" altLang="en-US" sz="1300" spc="-40">
+                  <a:latin typeface="+mn-ea"/>
+                </a:rPr>
+                <a:t>반복 재평가로 개선 효과 정량적 확인 </a:t>
+              </a:r>
+              <a:endParaRPr lang="en-US" altLang="ko-KR" sz="1300" spc="-40">
+                <a:latin typeface="+mn-ea"/>
+              </a:endParaRPr>
+            </a:p>
+            <a:p>
+              <a:pPr>
+                <a:spcBef>
+                  <a:spcPts val="400"/>
+                </a:spcBef>
+              </a:pPr>
+              <a:r>
+                <a:rPr lang="en-US" altLang="ko-KR" sz="1300" spc="-80">
+                  <a:latin typeface="+mn-ea"/>
+                </a:rPr>
+                <a:t>3</a:t>
+              </a:r>
+              <a:r>
+                <a:rPr lang="ko-KR" altLang="en-US" sz="1300" spc="-80">
+                  <a:latin typeface="+mn-ea"/>
+                </a:rPr>
+                <a:t>라운드에 걸쳐 정답률 단계적 개선 </a:t>
+              </a:r>
+              <a:r>
+                <a:rPr lang="en-US" altLang="ko-KR" sz="1300" spc="-80">
+                  <a:latin typeface="+mn-ea"/>
+                </a:rPr>
+                <a:t>(37</a:t>
+              </a:r>
+              <a:r>
+                <a:rPr lang="ko-KR" altLang="en-US" sz="1300" spc="-80">
+                  <a:latin typeface="+mn-ea"/>
+                </a:rPr>
+                <a:t>→</a:t>
+              </a:r>
+              <a:r>
+                <a:rPr lang="en-US" altLang="ko-KR" sz="1300" spc="-80">
+                  <a:latin typeface="+mn-ea"/>
+                </a:rPr>
+                <a:t>58</a:t>
+              </a:r>
+              <a:r>
+                <a:rPr lang="ko-KR" altLang="en-US" sz="1300" spc="-80">
+                  <a:latin typeface="+mn-ea"/>
+                </a:rPr>
+                <a:t>→</a:t>
+              </a:r>
+              <a:r>
+                <a:rPr lang="en-US" altLang="ko-KR" sz="1300" spc="-80">
+                  <a:latin typeface="+mn-ea"/>
+                </a:rPr>
+                <a:t>68%)</a:t>
+              </a:r>
+              <a:endParaRPr lang="ko-KR" altLang="en-US" sz="1300" spc="-80">
+                <a:latin typeface="+mn-ea"/>
+              </a:endParaRPr>
+            </a:p>
+          </p:txBody>
+        </p:sp>
+        <p:sp>
+          <p:nvSpPr>
+            <p:cNvPr id="83" name="Shape 13">
+              <a:extLst>
+                <a:ext uri="{FF2B5EF4-FFF2-40B4-BE49-F238E27FC236}">
+                  <a16:creationId xmlns:a16="http://schemas.microsoft.com/office/drawing/2014/main" id="{43B3D376-C513-46D1-9C26-F6D7752A13E3}"/>
                 </a:ext>
               </a:extLst>
             </p:cNvPr>
@@ -15299,90 +14886,27 @@
           </p:nvSpPr>
           <p:spPr>
             <a:xfrm>
-              <a:off x="5169505" y="2581811"/>
-              <a:ext cx="292608" cy="292608"/>
+              <a:off x="5142201" y="2139561"/>
+              <a:ext cx="4409431" cy="0"/>
             </a:xfrm>
-            <a:prstGeom prst="ellipse">
+            <a:prstGeom prst="line">
               <a:avLst/>
             </a:prstGeom>
-            <a:solidFill>
-              <a:srgbClr val="6795DD"/>
-            </a:solidFill>
-            <a:ln/>
+            <a:noFill/>
+            <a:ln w="9525">
+              <a:solidFill>
+                <a:srgbClr val="E1E6F0"/>
+              </a:solidFill>
+              <a:prstDash val="dash"/>
+            </a:ln>
           </p:spPr>
         </p:sp>
         <p:sp>
           <p:nvSpPr>
-            <p:cNvPr id="100" name="Text 45">
+            <p:cNvPr id="92" name="Shape 13">
               <a:extLst>
                 <a:ext uri="{FF2B5EF4-FFF2-40B4-BE49-F238E27FC236}">
-                  <a16:creationId xmlns:a16="http://schemas.microsoft.com/office/drawing/2014/main" id="{1B11820E-2590-4B03-BCD9-CD2AFC647CDC}"/>
-                </a:ext>
-              </a:extLst>
-            </p:cNvPr>
-            <p:cNvSpPr txBox="1"/>
-            <p:nvPr/>
-          </p:nvSpPr>
-          <p:spPr>
-            <a:xfrm>
-              <a:off x="5169505" y="2581811"/>
-              <a:ext cx="292608" cy="292608"/>
-            </a:xfrm>
-            <a:prstGeom prst="rect">
-              <a:avLst/>
-            </a:prstGeom>
-            <a:noFill/>
-            <a:ln/>
-          </p:spPr>
-          <p:txBody>
-            <a:bodyPr wrap="square" lIns="0" tIns="0" rIns="0" bIns="0" rtlCol="0" anchor="ctr"/>
-            <a:lstStyle/>
-            <a:p>
-              <a:pPr marL="0" indent="0" algn="ctr">
-                <a:buNone/>
-              </a:pPr>
-              <a:r>
-                <a:rPr lang="en-US" sz="1100" b="1">
-                  <a:solidFill>
-                    <a:srgbClr val="FFFFFF"/>
-                  </a:solidFill>
-                  <a:latin typeface="HY견고딕" pitchFamily="34" charset="0"/>
-                  <a:ea typeface="HY견고딕" pitchFamily="34" charset="-122"/>
-                  <a:cs typeface="HY견고딕" pitchFamily="34" charset="-120"/>
-                </a:rPr>
-                <a:t>3</a:t>
-              </a:r>
-              <a:endParaRPr lang="en-US" sz="1100" dirty="0"/>
-            </a:p>
-          </p:txBody>
-        </p:sp>
-      </p:grpSp>
-      <p:grpSp>
-        <p:nvGrpSpPr>
-          <p:cNvPr id="15" name="그룹 14">
-            <a:extLst>
-              <a:ext uri="{FF2B5EF4-FFF2-40B4-BE49-F238E27FC236}">
-                <a16:creationId xmlns:a16="http://schemas.microsoft.com/office/drawing/2014/main" id="{51B0BF19-3E8E-425D-A7F3-CC7FF5E35BD2}"/>
-              </a:ext>
-            </a:extLst>
-          </p:cNvPr>
-          <p:cNvGrpSpPr/>
-          <p:nvPr/>
-        </p:nvGrpSpPr>
-        <p:grpSpPr>
-          <a:xfrm>
-            <a:off x="5172440" y="3360789"/>
-            <a:ext cx="292608" cy="292608"/>
-            <a:chOff x="5138700" y="3133064"/>
-            <a:chExt cx="292608" cy="292608"/>
-          </a:xfrm>
-        </p:grpSpPr>
-        <p:sp>
-          <p:nvSpPr>
-            <p:cNvPr id="102" name="Shape 51">
-              <a:extLst>
-                <a:ext uri="{FF2B5EF4-FFF2-40B4-BE49-F238E27FC236}">
-                  <a16:creationId xmlns:a16="http://schemas.microsoft.com/office/drawing/2014/main" id="{B511D697-374B-459E-A7D8-8DAB1E6E896A}"/>
+                  <a16:creationId xmlns:a16="http://schemas.microsoft.com/office/drawing/2014/main" id="{51DCD47B-4DFF-40D8-B95D-6FB1EC923583}"/>
                 </a:ext>
               </a:extLst>
             </p:cNvPr>
@@ -15391,63 +14915,418 @@
           </p:nvSpPr>
           <p:spPr>
             <a:xfrm>
-              <a:off x="5138700" y="3133064"/>
-              <a:ext cx="292608" cy="292608"/>
+              <a:off x="5142201" y="2666037"/>
+              <a:ext cx="4409431" cy="0"/>
             </a:xfrm>
-            <a:prstGeom prst="ellipse">
+            <a:prstGeom prst="line">
               <a:avLst/>
             </a:prstGeom>
-            <a:solidFill>
-              <a:srgbClr val="6795DD"/>
-            </a:solidFill>
-            <a:ln/>
+            <a:noFill/>
+            <a:ln w="9525">
+              <a:solidFill>
+                <a:srgbClr val="E1E6F0"/>
+              </a:solidFill>
+              <a:prstDash val="dash"/>
+            </a:ln>
           </p:spPr>
         </p:sp>
         <p:sp>
           <p:nvSpPr>
-            <p:cNvPr id="103" name="Text 52">
+            <p:cNvPr id="93" name="Shape 13">
               <a:extLst>
                 <a:ext uri="{FF2B5EF4-FFF2-40B4-BE49-F238E27FC236}">
-                  <a16:creationId xmlns:a16="http://schemas.microsoft.com/office/drawing/2014/main" id="{650677A3-60D1-4616-A467-94C0107E73F4}"/>
+                  <a16:creationId xmlns:a16="http://schemas.microsoft.com/office/drawing/2014/main" id="{9941CAED-E556-4C11-8F86-414A92C0FA47}"/>
                 </a:ext>
               </a:extLst>
             </p:cNvPr>
-            <p:cNvSpPr txBox="1"/>
+            <p:cNvSpPr/>
             <p:nvPr/>
           </p:nvSpPr>
           <p:spPr>
             <a:xfrm>
-              <a:off x="5138700" y="3133064"/>
-              <a:ext cx="292608" cy="292608"/>
+              <a:off x="5142201" y="3161340"/>
+              <a:ext cx="4409431" cy="0"/>
             </a:xfrm>
-            <a:prstGeom prst="rect">
+            <a:prstGeom prst="line">
               <a:avLst/>
             </a:prstGeom>
             <a:noFill/>
-            <a:ln/>
+            <a:ln w="9525">
+              <a:solidFill>
+                <a:srgbClr val="E1E6F0"/>
+              </a:solidFill>
+              <a:prstDash val="dash"/>
+            </a:ln>
           </p:spPr>
-          <p:txBody>
-            <a:bodyPr wrap="square" lIns="0" tIns="0" rIns="0" bIns="0" rtlCol="0" anchor="ctr"/>
-            <a:lstStyle/>
-            <a:p>
-              <a:pPr marL="0" indent="0" algn="ctr">
-                <a:buNone/>
-              </a:pPr>
-              <a:r>
-                <a:rPr lang="en-US" sz="1100" b="1">
-                  <a:solidFill>
-                    <a:srgbClr val="FFFFFF"/>
-                  </a:solidFill>
-                  <a:latin typeface="HY견고딕" pitchFamily="34" charset="0"/>
-                  <a:ea typeface="HY견고딕" pitchFamily="34" charset="-122"/>
-                  <a:cs typeface="HY견고딕" pitchFamily="34" charset="-120"/>
-                </a:rPr>
-                <a:t>4</a:t>
-              </a:r>
-              <a:endParaRPr lang="en-US" sz="1100" dirty="0"/>
-            </a:p>
-          </p:txBody>
         </p:sp>
+        <p:grpSp>
+          <p:nvGrpSpPr>
+            <p:cNvPr id="13" name="그룹 12">
+              <a:extLst>
+                <a:ext uri="{FF2B5EF4-FFF2-40B4-BE49-F238E27FC236}">
+                  <a16:creationId xmlns:a16="http://schemas.microsoft.com/office/drawing/2014/main" id="{B625F4FE-8A54-4D58-9822-FCE06239A855}"/>
+                </a:ext>
+              </a:extLst>
+            </p:cNvPr>
+            <p:cNvGrpSpPr/>
+            <p:nvPr/>
+          </p:nvGrpSpPr>
+          <p:grpSpPr>
+            <a:xfrm>
+              <a:off x="5167245" y="1635405"/>
+              <a:ext cx="302999" cy="292608"/>
+              <a:chOff x="5104899" y="1637275"/>
+              <a:chExt cx="302999" cy="292608"/>
+            </a:xfrm>
+          </p:grpSpPr>
+          <p:sp>
+            <p:nvSpPr>
+              <p:cNvPr id="94" name="Shape 30">
+                <a:extLst>
+                  <a:ext uri="{FF2B5EF4-FFF2-40B4-BE49-F238E27FC236}">
+                    <a16:creationId xmlns:a16="http://schemas.microsoft.com/office/drawing/2014/main" id="{CD81A531-94E3-4523-997E-14DD3635E491}"/>
+                  </a:ext>
+                </a:extLst>
+              </p:cNvPr>
+              <p:cNvSpPr/>
+              <p:nvPr/>
+            </p:nvSpPr>
+            <p:spPr>
+              <a:xfrm>
+                <a:off x="5115290" y="1637275"/>
+                <a:ext cx="292608" cy="292608"/>
+              </a:xfrm>
+              <a:prstGeom prst="ellipse">
+                <a:avLst/>
+              </a:prstGeom>
+              <a:solidFill>
+                <a:srgbClr val="6795DD"/>
+              </a:solidFill>
+              <a:ln/>
+            </p:spPr>
+          </p:sp>
+          <p:sp>
+            <p:nvSpPr>
+              <p:cNvPr id="95" name="Text 31">
+                <a:extLst>
+                  <a:ext uri="{FF2B5EF4-FFF2-40B4-BE49-F238E27FC236}">
+                    <a16:creationId xmlns:a16="http://schemas.microsoft.com/office/drawing/2014/main" id="{92B37005-93DC-4E2A-BE51-A581879D47A5}"/>
+                  </a:ext>
+                </a:extLst>
+              </p:cNvPr>
+              <p:cNvSpPr txBox="1"/>
+              <p:nvPr/>
+            </p:nvSpPr>
+            <p:spPr>
+              <a:xfrm>
+                <a:off x="5104899" y="1637275"/>
+                <a:ext cx="292608" cy="292608"/>
+              </a:xfrm>
+              <a:prstGeom prst="rect">
+                <a:avLst/>
+              </a:prstGeom>
+              <a:noFill/>
+              <a:ln/>
+            </p:spPr>
+            <p:txBody>
+              <a:bodyPr wrap="square" lIns="0" tIns="0" rIns="0" bIns="0" rtlCol="0" anchor="ctr"/>
+              <a:lstStyle/>
+              <a:p>
+                <a:pPr marL="0" indent="0" algn="ctr">
+                  <a:buNone/>
+                </a:pPr>
+                <a:r>
+                  <a:rPr lang="en-US" sz="1100" b="1">
+                    <a:solidFill>
+                      <a:srgbClr val="FFFFFF"/>
+                    </a:solidFill>
+                    <a:latin typeface="HY견고딕" pitchFamily="34" charset="0"/>
+                    <a:ea typeface="HY견고딕" pitchFamily="34" charset="-122"/>
+                    <a:cs typeface="HY견고딕" pitchFamily="34" charset="-120"/>
+                  </a:rPr>
+                  <a:t>1</a:t>
+                </a:r>
+                <a:endParaRPr lang="en-US" sz="1100" dirty="0"/>
+              </a:p>
+            </p:txBody>
+          </p:sp>
+        </p:grpSp>
+        <p:grpSp>
+          <p:nvGrpSpPr>
+            <p:cNvPr id="12" name="그룹 11">
+              <a:extLst>
+                <a:ext uri="{FF2B5EF4-FFF2-40B4-BE49-F238E27FC236}">
+                  <a16:creationId xmlns:a16="http://schemas.microsoft.com/office/drawing/2014/main" id="{7244287C-C3BD-435E-B1A5-C00D3FC74BA6}"/>
+                </a:ext>
+              </a:extLst>
+            </p:cNvPr>
+            <p:cNvGrpSpPr/>
+            <p:nvPr/>
+          </p:nvGrpSpPr>
+          <p:grpSpPr>
+            <a:xfrm>
+              <a:off x="5172440" y="2275225"/>
+              <a:ext cx="292608" cy="299016"/>
+              <a:chOff x="5136072" y="2166708"/>
+              <a:chExt cx="292608" cy="299016"/>
+            </a:xfrm>
+          </p:grpSpPr>
+          <p:sp>
+            <p:nvSpPr>
+              <p:cNvPr id="97" name="Shape 37">
+                <a:extLst>
+                  <a:ext uri="{FF2B5EF4-FFF2-40B4-BE49-F238E27FC236}">
+                    <a16:creationId xmlns:a16="http://schemas.microsoft.com/office/drawing/2014/main" id="{1B148B0F-10A7-4F4E-8A58-BC82DB48E4BD}"/>
+                  </a:ext>
+                </a:extLst>
+              </p:cNvPr>
+              <p:cNvSpPr/>
+              <p:nvPr/>
+            </p:nvSpPr>
+            <p:spPr>
+              <a:xfrm>
+                <a:off x="5136072" y="2166708"/>
+                <a:ext cx="292608" cy="292608"/>
+              </a:xfrm>
+              <a:prstGeom prst="ellipse">
+                <a:avLst/>
+              </a:prstGeom>
+              <a:solidFill>
+                <a:srgbClr val="6795DD"/>
+              </a:solidFill>
+              <a:ln/>
+            </p:spPr>
+          </p:sp>
+          <p:sp>
+            <p:nvSpPr>
+              <p:cNvPr id="98" name="Text 38">
+                <a:extLst>
+                  <a:ext uri="{FF2B5EF4-FFF2-40B4-BE49-F238E27FC236}">
+                    <a16:creationId xmlns:a16="http://schemas.microsoft.com/office/drawing/2014/main" id="{C2E0313E-BD3A-4030-92D2-32CA044D15B8}"/>
+                  </a:ext>
+                </a:extLst>
+              </p:cNvPr>
+              <p:cNvSpPr txBox="1"/>
+              <p:nvPr/>
+            </p:nvSpPr>
+            <p:spPr>
+              <a:xfrm>
+                <a:off x="5136072" y="2173116"/>
+                <a:ext cx="292608" cy="292608"/>
+              </a:xfrm>
+              <a:prstGeom prst="rect">
+                <a:avLst/>
+              </a:prstGeom>
+              <a:noFill/>
+              <a:ln/>
+            </p:spPr>
+            <p:txBody>
+              <a:bodyPr wrap="square" lIns="0" tIns="0" rIns="0" bIns="0" rtlCol="0" anchor="ctr"/>
+              <a:lstStyle/>
+              <a:p>
+                <a:pPr marL="0" indent="0" algn="ctr">
+                  <a:buNone/>
+                </a:pPr>
+                <a:r>
+                  <a:rPr lang="en-US" sz="1100" b="1">
+                    <a:solidFill>
+                      <a:srgbClr val="FFFFFF"/>
+                    </a:solidFill>
+                    <a:latin typeface="HY견고딕" pitchFamily="34" charset="0"/>
+                    <a:ea typeface="HY견고딕" pitchFamily="34" charset="-122"/>
+                    <a:cs typeface="HY견고딕" pitchFamily="34" charset="-120"/>
+                  </a:rPr>
+                  <a:t>2</a:t>
+                </a:r>
+                <a:endParaRPr lang="en-US" sz="1100" dirty="0"/>
+              </a:p>
+            </p:txBody>
+          </p:sp>
+        </p:grpSp>
+        <p:grpSp>
+          <p:nvGrpSpPr>
+            <p:cNvPr id="14" name="그룹 13">
+              <a:extLst>
+                <a:ext uri="{FF2B5EF4-FFF2-40B4-BE49-F238E27FC236}">
+                  <a16:creationId xmlns:a16="http://schemas.microsoft.com/office/drawing/2014/main" id="{069D93BA-3E5C-4002-ACDD-7BEA859B8BB1}"/>
+                </a:ext>
+              </a:extLst>
+            </p:cNvPr>
+            <p:cNvGrpSpPr/>
+            <p:nvPr/>
+          </p:nvGrpSpPr>
+          <p:grpSpPr>
+            <a:xfrm>
+              <a:off x="5172440" y="2773353"/>
+              <a:ext cx="292608" cy="292608"/>
+              <a:chOff x="5169505" y="2581811"/>
+              <a:chExt cx="292608" cy="292608"/>
+            </a:xfrm>
+          </p:grpSpPr>
+          <p:sp>
+            <p:nvSpPr>
+              <p:cNvPr id="99" name="Shape 44">
+                <a:extLst>
+                  <a:ext uri="{FF2B5EF4-FFF2-40B4-BE49-F238E27FC236}">
+                    <a16:creationId xmlns:a16="http://schemas.microsoft.com/office/drawing/2014/main" id="{77E93DDA-3659-417A-AA88-5CC2EF9C9722}"/>
+                  </a:ext>
+                </a:extLst>
+              </p:cNvPr>
+              <p:cNvSpPr/>
+              <p:nvPr/>
+            </p:nvSpPr>
+            <p:spPr>
+              <a:xfrm>
+                <a:off x="5169505" y="2581811"/>
+                <a:ext cx="292608" cy="292608"/>
+              </a:xfrm>
+              <a:prstGeom prst="ellipse">
+                <a:avLst/>
+              </a:prstGeom>
+              <a:solidFill>
+                <a:srgbClr val="6795DD"/>
+              </a:solidFill>
+              <a:ln/>
+            </p:spPr>
+          </p:sp>
+          <p:sp>
+            <p:nvSpPr>
+              <p:cNvPr id="100" name="Text 45">
+                <a:extLst>
+                  <a:ext uri="{FF2B5EF4-FFF2-40B4-BE49-F238E27FC236}">
+                    <a16:creationId xmlns:a16="http://schemas.microsoft.com/office/drawing/2014/main" id="{1B11820E-2590-4B03-BCD9-CD2AFC647CDC}"/>
+                  </a:ext>
+                </a:extLst>
+              </p:cNvPr>
+              <p:cNvSpPr txBox="1"/>
+              <p:nvPr/>
+            </p:nvSpPr>
+            <p:spPr>
+              <a:xfrm>
+                <a:off x="5169505" y="2581811"/>
+                <a:ext cx="292608" cy="292608"/>
+              </a:xfrm>
+              <a:prstGeom prst="rect">
+                <a:avLst/>
+              </a:prstGeom>
+              <a:noFill/>
+              <a:ln/>
+            </p:spPr>
+            <p:txBody>
+              <a:bodyPr wrap="square" lIns="0" tIns="0" rIns="0" bIns="0" rtlCol="0" anchor="ctr"/>
+              <a:lstStyle/>
+              <a:p>
+                <a:pPr marL="0" indent="0" algn="ctr">
+                  <a:buNone/>
+                </a:pPr>
+                <a:r>
+                  <a:rPr lang="en-US" sz="1100" b="1">
+                    <a:solidFill>
+                      <a:srgbClr val="FFFFFF"/>
+                    </a:solidFill>
+                    <a:latin typeface="HY견고딕" pitchFamily="34" charset="0"/>
+                    <a:ea typeface="HY견고딕" pitchFamily="34" charset="-122"/>
+                    <a:cs typeface="HY견고딕" pitchFamily="34" charset="-120"/>
+                  </a:rPr>
+                  <a:t>3</a:t>
+                </a:r>
+                <a:endParaRPr lang="en-US" sz="1100" dirty="0"/>
+              </a:p>
+            </p:txBody>
+          </p:sp>
+        </p:grpSp>
+        <p:grpSp>
+          <p:nvGrpSpPr>
+            <p:cNvPr id="15" name="그룹 14">
+              <a:extLst>
+                <a:ext uri="{FF2B5EF4-FFF2-40B4-BE49-F238E27FC236}">
+                  <a16:creationId xmlns:a16="http://schemas.microsoft.com/office/drawing/2014/main" id="{51B0BF19-3E8E-425D-A7F3-CC7FF5E35BD2}"/>
+                </a:ext>
+              </a:extLst>
+            </p:cNvPr>
+            <p:cNvGrpSpPr/>
+            <p:nvPr/>
+          </p:nvGrpSpPr>
+          <p:grpSpPr>
+            <a:xfrm>
+              <a:off x="5172440" y="3360789"/>
+              <a:ext cx="292608" cy="292608"/>
+              <a:chOff x="5138700" y="3133064"/>
+              <a:chExt cx="292608" cy="292608"/>
+            </a:xfrm>
+          </p:grpSpPr>
+          <p:sp>
+            <p:nvSpPr>
+              <p:cNvPr id="102" name="Shape 51">
+                <a:extLst>
+                  <a:ext uri="{FF2B5EF4-FFF2-40B4-BE49-F238E27FC236}">
+                    <a16:creationId xmlns:a16="http://schemas.microsoft.com/office/drawing/2014/main" id="{B511D697-374B-459E-A7D8-8DAB1E6E896A}"/>
+                  </a:ext>
+                </a:extLst>
+              </p:cNvPr>
+              <p:cNvSpPr/>
+              <p:nvPr/>
+            </p:nvSpPr>
+            <p:spPr>
+              <a:xfrm>
+                <a:off x="5138700" y="3133064"/>
+                <a:ext cx="292608" cy="292608"/>
+              </a:xfrm>
+              <a:prstGeom prst="ellipse">
+                <a:avLst/>
+              </a:prstGeom>
+              <a:solidFill>
+                <a:srgbClr val="6795DD"/>
+              </a:solidFill>
+              <a:ln/>
+            </p:spPr>
+          </p:sp>
+          <p:sp>
+            <p:nvSpPr>
+              <p:cNvPr id="103" name="Text 52">
+                <a:extLst>
+                  <a:ext uri="{FF2B5EF4-FFF2-40B4-BE49-F238E27FC236}">
+                    <a16:creationId xmlns:a16="http://schemas.microsoft.com/office/drawing/2014/main" id="{650677A3-60D1-4616-A467-94C0107E73F4}"/>
+                  </a:ext>
+                </a:extLst>
+              </p:cNvPr>
+              <p:cNvSpPr txBox="1"/>
+              <p:nvPr/>
+            </p:nvSpPr>
+            <p:spPr>
+              <a:xfrm>
+                <a:off x="5138700" y="3133064"/>
+                <a:ext cx="292608" cy="292608"/>
+              </a:xfrm>
+              <a:prstGeom prst="rect">
+                <a:avLst/>
+              </a:prstGeom>
+              <a:noFill/>
+              <a:ln/>
+            </p:spPr>
+            <p:txBody>
+              <a:bodyPr wrap="square" lIns="0" tIns="0" rIns="0" bIns="0" rtlCol="0" anchor="ctr"/>
+              <a:lstStyle/>
+              <a:p>
+                <a:pPr marL="0" indent="0" algn="ctr">
+                  <a:buNone/>
+                </a:pPr>
+                <a:r>
+                  <a:rPr lang="en-US" sz="1100" b="1">
+                    <a:solidFill>
+                      <a:srgbClr val="FFFFFF"/>
+                    </a:solidFill>
+                    <a:latin typeface="HY견고딕" pitchFamily="34" charset="0"/>
+                    <a:ea typeface="HY견고딕" pitchFamily="34" charset="-122"/>
+                    <a:cs typeface="HY견고딕" pitchFamily="34" charset="-120"/>
+                  </a:rPr>
+                  <a:t>4</a:t>
+                </a:r>
+                <a:endParaRPr lang="en-US" sz="1100" dirty="0"/>
+              </a:p>
+            </p:txBody>
+          </p:sp>
+        </p:grpSp>
       </p:grpSp>
       <p:sp>
         <p:nvSpPr>
@@ -16436,68 +16315,12 @@
           </a:p>
         </p:txBody>
       </p:sp>
-      <p:sp>
-        <p:nvSpPr>
-          <p:cNvPr id="72" name="TextBox 71">
-            <a:extLst>
-              <a:ext uri="{FF2B5EF4-FFF2-40B4-BE49-F238E27FC236}">
-                <a16:creationId xmlns:a16="http://schemas.microsoft.com/office/drawing/2014/main" id="{9F1399A8-F879-4FEC-9DFB-1D11467EC11B}"/>
-              </a:ext>
-            </a:extLst>
-          </p:cNvPr>
-          <p:cNvSpPr txBox="1"/>
-          <p:nvPr/>
-        </p:nvSpPr>
-        <p:spPr>
-          <a:xfrm>
-            <a:off x="2566555" y="3674689"/>
-            <a:ext cx="2286571" cy="261610"/>
-          </a:xfrm>
-          <a:prstGeom prst="rect">
-            <a:avLst/>
-          </a:prstGeom>
-          <a:noFill/>
-        </p:spPr>
-        <p:txBody>
-          <a:bodyPr wrap="square" rtlCol="0">
-            <a:spAutoFit/>
-          </a:bodyPr>
-          <a:lstStyle/>
-          <a:p>
-            <a:pPr algn="r"/>
-            <a:r>
-              <a:rPr lang="en-US" altLang="ko-KR" sz="1100">
-                <a:latin typeface="+mn-ea"/>
-              </a:rPr>
-              <a:t>* </a:t>
-            </a:r>
-            <a:r>
-              <a:rPr lang="ko-KR" altLang="en-US" sz="1100">
-                <a:latin typeface="+mn-ea"/>
-              </a:rPr>
-              <a:t>테스트셋 </a:t>
-            </a:r>
-            <a:r>
-              <a:rPr lang="en-US" altLang="ko-KR" sz="1100">
-                <a:latin typeface="+mn-ea"/>
-              </a:rPr>
-              <a:t>19</a:t>
-            </a:r>
-            <a:r>
-              <a:rPr lang="ko-KR" altLang="en-US" sz="1100">
-                <a:latin typeface="+mn-ea"/>
-              </a:rPr>
-              <a:t>건 기준</a:t>
-            </a:r>
-          </a:p>
-        </p:txBody>
-      </p:sp>
       <p:grpSp>
         <p:nvGrpSpPr>
-          <p:cNvPr id="10" name="그룹 9">
-            <a:extLst>
-              <a:ext uri="{FF2B5EF4-FFF2-40B4-BE49-F238E27FC236}">
-                <a16:creationId xmlns:a16="http://schemas.microsoft.com/office/drawing/2014/main" id="{A879A11C-BFE7-4663-8070-C7683062E7FC}"/>
+          <p:cNvPr id="6" name="그룹 5">
+            <a:extLst>
+              <a:ext uri="{FF2B5EF4-FFF2-40B4-BE49-F238E27FC236}">
+                <a16:creationId xmlns:a16="http://schemas.microsoft.com/office/drawing/2014/main" id="{5A3DDC95-2A12-4E49-9088-F184AAF0B7B6}"/>
               </a:ext>
             </a:extLst>
           </p:cNvPr>
@@ -16506,18 +16329,18 @@
         </p:nvGrpSpPr>
         <p:grpSpPr>
           <a:xfrm>
-            <a:off x="1065233" y="2172115"/>
-            <a:ext cx="3820041" cy="551408"/>
-            <a:chOff x="-3319430" y="2677076"/>
-            <a:chExt cx="3820041" cy="551408"/>
+            <a:off x="5033223" y="1148234"/>
+            <a:ext cx="4535223" cy="2788065"/>
+            <a:chOff x="351453" y="1148234"/>
+            <a:chExt cx="4535223" cy="2788065"/>
           </a:xfrm>
         </p:grpSpPr>
         <p:sp>
           <p:nvSpPr>
-            <p:cNvPr id="9" name="사각형: 둥근 모서리 8">
+            <p:cNvPr id="65" name="Shape 10">
               <a:extLst>
                 <a:ext uri="{FF2B5EF4-FFF2-40B4-BE49-F238E27FC236}">
-                  <a16:creationId xmlns:a16="http://schemas.microsoft.com/office/drawing/2014/main" id="{7034B27B-D7F7-49BF-8CF1-7AA52843A412}"/>
+                  <a16:creationId xmlns:a16="http://schemas.microsoft.com/office/drawing/2014/main" id="{22591E7D-BAF5-475C-94CC-AFCA136B26C8}"/>
                 </a:ext>
               </a:extLst>
             </p:cNvPr>
@@ -16526,8 +16349,313 @@
           </p:nvSpPr>
           <p:spPr>
             <a:xfrm>
-              <a:off x="-3319430" y="2677076"/>
+              <a:off x="351453" y="1306107"/>
+              <a:ext cx="4535223" cy="2582693"/>
+            </a:xfrm>
+            <a:prstGeom prst="roundRect">
+              <a:avLst>
+                <a:gd name="adj" fmla="val 2633"/>
+              </a:avLst>
+            </a:prstGeom>
+            <a:solidFill>
+              <a:srgbClr val="FFFFFF"/>
+            </a:solidFill>
+            <a:ln w="12700">
+              <a:solidFill>
+                <a:srgbClr val="E1E6F0"/>
+              </a:solidFill>
+              <a:prstDash val="solid"/>
+            </a:ln>
+            <a:effectLst>
+              <a:outerShdw blurRad="101600" dist="25400" dir="5400000" algn="bl" rotWithShape="0">
+                <a:srgbClr val="6B7CA8">
+                  <a:alpha val="12000"/>
+                </a:srgbClr>
+              </a:outerShdw>
+            </a:effectLst>
+          </p:spPr>
+        </p:sp>
+        <p:pic>
+          <p:nvPicPr>
+            <p:cNvPr id="5" name="그림 4">
+              <a:extLst>
+                <a:ext uri="{FF2B5EF4-FFF2-40B4-BE49-F238E27FC236}">
+                  <a16:creationId xmlns:a16="http://schemas.microsoft.com/office/drawing/2014/main" id="{E0C020AD-6E54-46E0-97B0-59A01BE40467}"/>
+                </a:ext>
+              </a:extLst>
+            </p:cNvPr>
+            <p:cNvPicPr>
+              <a:picLocks noChangeAspect="1"/>
+            </p:cNvPicPr>
+            <p:nvPr/>
+          </p:nvPicPr>
+          <p:blipFill>
+            <a:blip r:embed="rId4"/>
+            <a:stretch>
+              <a:fillRect/>
+            </a:stretch>
+          </p:blipFill>
+          <p:spPr>
+            <a:xfrm>
+              <a:off x="398361" y="1459854"/>
+              <a:ext cx="4445565" cy="2254216"/>
+            </a:xfrm>
+            <a:prstGeom prst="rect">
+              <a:avLst/>
+            </a:prstGeom>
+          </p:spPr>
+        </p:pic>
+        <p:sp>
+          <p:nvSpPr>
+            <p:cNvPr id="74" name="사각형: 둥근 모서리 73">
+              <a:extLst>
+                <a:ext uri="{FF2B5EF4-FFF2-40B4-BE49-F238E27FC236}">
+                  <a16:creationId xmlns:a16="http://schemas.microsoft.com/office/drawing/2014/main" id="{8C1FA852-ED91-4F3E-B886-6380C80049D8}"/>
+                </a:ext>
+              </a:extLst>
+            </p:cNvPr>
+            <p:cNvSpPr/>
+            <p:nvPr/>
+          </p:nvSpPr>
+          <p:spPr>
+            <a:xfrm>
+              <a:off x="351453" y="1148234"/>
+              <a:ext cx="4534956" cy="307315"/>
+            </a:xfrm>
+            <a:prstGeom prst="roundRect">
+              <a:avLst/>
+            </a:prstGeom>
+            <a:solidFill>
+              <a:schemeClr val="accent1">
+                <a:lumMod val="75000"/>
+              </a:schemeClr>
+            </a:solidFill>
+            <a:ln>
+              <a:noFill/>
+            </a:ln>
+          </p:spPr>
+          <p:style>
+            <a:lnRef idx="2">
+              <a:schemeClr val="accent1">
+                <a:shade val="50000"/>
+              </a:schemeClr>
+            </a:lnRef>
+            <a:fillRef idx="1">
+              <a:schemeClr val="accent1"/>
+            </a:fillRef>
+            <a:effectRef idx="0">
+              <a:schemeClr val="accent1"/>
+            </a:effectRef>
+            <a:fontRef idx="minor">
+              <a:schemeClr val="lt1"/>
+            </a:fontRef>
+          </p:style>
+          <p:txBody>
+            <a:bodyPr rtlCol="0" anchor="ctr"/>
+            <a:lstStyle/>
+            <a:p>
+              <a:pPr algn="ctr"/>
+              <a:r>
+                <a:rPr lang="en-US" altLang="ko-KR" sz="1500" b="1" spc="-30">
+                  <a:latin typeface="+mn-ea"/>
+                </a:rPr>
+                <a:t>LangSmith</a:t>
+              </a:r>
+              <a:r>
+                <a:rPr lang="ko-KR" altLang="en-US" sz="1500" b="1" spc="-30">
+                  <a:latin typeface="+mn-ea"/>
+                </a:rPr>
+                <a:t>로 자동 채점된 테스트셋 평가 결과</a:t>
+              </a:r>
+              <a:r>
+                <a:rPr lang="en-US" altLang="ko-KR" sz="1500" b="1" spc="-30">
+                  <a:latin typeface="+mn-ea"/>
+                </a:rPr>
+                <a:t>*</a:t>
+              </a:r>
+              <a:endParaRPr lang="ko-KR" altLang="en-US" sz="1500" b="1" spc="-30"/>
+            </a:p>
+          </p:txBody>
+        </p:sp>
+        <p:sp>
+          <p:nvSpPr>
+            <p:cNvPr id="72" name="TextBox 71">
+              <a:extLst>
+                <a:ext uri="{FF2B5EF4-FFF2-40B4-BE49-F238E27FC236}">
+                  <a16:creationId xmlns:a16="http://schemas.microsoft.com/office/drawing/2014/main" id="{9F1399A8-F879-4FEC-9DFB-1D11467EC11B}"/>
+                </a:ext>
+              </a:extLst>
+            </p:cNvPr>
+            <p:cNvSpPr txBox="1"/>
+            <p:nvPr/>
+          </p:nvSpPr>
+          <p:spPr>
+            <a:xfrm>
+              <a:off x="2566555" y="3674689"/>
+              <a:ext cx="2286571" cy="261610"/>
+            </a:xfrm>
+            <a:prstGeom prst="rect">
+              <a:avLst/>
+            </a:prstGeom>
+            <a:noFill/>
+          </p:spPr>
+          <p:txBody>
+            <a:bodyPr wrap="square" rtlCol="0">
+              <a:spAutoFit/>
+            </a:bodyPr>
+            <a:lstStyle/>
+            <a:p>
+              <a:pPr algn="r"/>
+              <a:r>
+                <a:rPr lang="en-US" altLang="ko-KR" sz="1100">
+                  <a:latin typeface="+mn-ea"/>
+                </a:rPr>
+                <a:t>* </a:t>
+              </a:r>
+              <a:r>
+                <a:rPr lang="ko-KR" altLang="en-US" sz="1100">
+                  <a:latin typeface="+mn-ea"/>
+                </a:rPr>
+                <a:t>테스트셋 </a:t>
+              </a:r>
+              <a:r>
+                <a:rPr lang="en-US" altLang="ko-KR" sz="1100">
+                  <a:latin typeface="+mn-ea"/>
+                </a:rPr>
+                <a:t>19</a:t>
+              </a:r>
+              <a:r>
+                <a:rPr lang="ko-KR" altLang="en-US" sz="1100">
+                  <a:latin typeface="+mn-ea"/>
+                </a:rPr>
+                <a:t>건 기준</a:t>
+              </a:r>
+            </a:p>
+          </p:txBody>
+        </p:sp>
+        <p:grpSp>
+          <p:nvGrpSpPr>
+            <p:cNvPr id="10" name="그룹 9">
+              <a:extLst>
+                <a:ext uri="{FF2B5EF4-FFF2-40B4-BE49-F238E27FC236}">
+                  <a16:creationId xmlns:a16="http://schemas.microsoft.com/office/drawing/2014/main" id="{A879A11C-BFE7-4663-8070-C7683062E7FC}"/>
+                </a:ext>
+              </a:extLst>
+            </p:cNvPr>
+            <p:cNvGrpSpPr/>
+            <p:nvPr/>
+          </p:nvGrpSpPr>
+          <p:grpSpPr>
+            <a:xfrm>
+              <a:off x="1065233" y="2172115"/>
               <a:ext cx="3820041" cy="551408"/>
+              <a:chOff x="-3319430" y="2677076"/>
+              <a:chExt cx="3820041" cy="551408"/>
+            </a:xfrm>
+          </p:grpSpPr>
+          <p:sp>
+            <p:nvSpPr>
+              <p:cNvPr id="9" name="사각형: 둥근 모서리 8">
+                <a:extLst>
+                  <a:ext uri="{FF2B5EF4-FFF2-40B4-BE49-F238E27FC236}">
+                    <a16:creationId xmlns:a16="http://schemas.microsoft.com/office/drawing/2014/main" id="{7034B27B-D7F7-49BF-8CF1-7AA52843A412}"/>
+                  </a:ext>
+                </a:extLst>
+              </p:cNvPr>
+              <p:cNvSpPr/>
+              <p:nvPr/>
+            </p:nvSpPr>
+            <p:spPr>
+              <a:xfrm>
+                <a:off x="-3319430" y="2677076"/>
+                <a:ext cx="3820041" cy="551408"/>
+              </a:xfrm>
+              <a:prstGeom prst="roundRect">
+                <a:avLst/>
+              </a:prstGeom>
+              <a:noFill/>
+              <a:ln w="19050">
+                <a:solidFill>
+                  <a:srgbClr val="0070C0"/>
+                </a:solidFill>
+              </a:ln>
+            </p:spPr>
+            <p:style>
+              <a:lnRef idx="2">
+                <a:schemeClr val="accent1">
+                  <a:shade val="50000"/>
+                </a:schemeClr>
+              </a:lnRef>
+              <a:fillRef idx="1">
+                <a:schemeClr val="accent1"/>
+              </a:fillRef>
+              <a:effectRef idx="0">
+                <a:schemeClr val="accent1"/>
+              </a:effectRef>
+              <a:fontRef idx="minor">
+                <a:schemeClr val="lt1"/>
+              </a:fontRef>
+            </p:style>
+            <p:txBody>
+              <a:bodyPr rtlCol="0" anchor="ctr"/>
+              <a:lstStyle/>
+              <a:p>
+                <a:pPr algn="ctr"/>
+                <a:endParaRPr lang="ko-KR" altLang="en-US"/>
+              </a:p>
+            </p:txBody>
+          </p:sp>
+          <p:pic>
+            <p:nvPicPr>
+              <p:cNvPr id="73" name="그림 72">
+                <a:extLst>
+                  <a:ext uri="{FF2B5EF4-FFF2-40B4-BE49-F238E27FC236}">
+                    <a16:creationId xmlns:a16="http://schemas.microsoft.com/office/drawing/2014/main" id="{B2414B01-EA20-4F93-BFED-40DAB6411FC0}"/>
+                  </a:ext>
+                </a:extLst>
+              </p:cNvPr>
+              <p:cNvPicPr>
+                <a:picLocks noChangeAspect="1"/>
+              </p:cNvPicPr>
+              <p:nvPr/>
+            </p:nvPicPr>
+            <p:blipFill>
+              <a:blip r:embed="rId5"/>
+              <a:stretch>
+                <a:fillRect/>
+              </a:stretch>
+            </p:blipFill>
+            <p:spPr>
+              <a:xfrm>
+                <a:off x="-3254283" y="2706981"/>
+                <a:ext cx="3711262" cy="487624"/>
+              </a:xfrm>
+              <a:prstGeom prst="rect">
+                <a:avLst/>
+              </a:prstGeom>
+              <a:noFill/>
+              <a:ln w="19050">
+                <a:noFill/>
+              </a:ln>
+            </p:spPr>
+          </p:pic>
+        </p:grpSp>
+        <p:sp>
+          <p:nvSpPr>
+            <p:cNvPr id="75" name="사각형: 둥근 모서리 74">
+              <a:extLst>
+                <a:ext uri="{FF2B5EF4-FFF2-40B4-BE49-F238E27FC236}">
+                  <a16:creationId xmlns:a16="http://schemas.microsoft.com/office/drawing/2014/main" id="{B3369A65-3330-4382-810B-16F512116A9D}"/>
+                </a:ext>
+              </a:extLst>
+            </p:cNvPr>
+            <p:cNvSpPr/>
+            <p:nvPr/>
+          </p:nvSpPr>
+          <p:spPr>
+            <a:xfrm>
+              <a:off x="3278007" y="1601231"/>
+              <a:ext cx="1597664" cy="169741"/>
             </a:xfrm>
             <a:prstGeom prst="roundRect">
               <a:avLst/>
@@ -16564,97 +16692,11 @@
             </a:p>
           </p:txBody>
         </p:sp>
-        <p:pic>
-          <p:nvPicPr>
-            <p:cNvPr id="73" name="그림 72">
-              <a:extLst>
-                <a:ext uri="{FF2B5EF4-FFF2-40B4-BE49-F238E27FC236}">
-                  <a16:creationId xmlns:a16="http://schemas.microsoft.com/office/drawing/2014/main" id="{B2414B01-EA20-4F93-BFED-40DAB6411FC0}"/>
-                </a:ext>
-              </a:extLst>
-            </p:cNvPr>
-            <p:cNvPicPr>
-              <a:picLocks noChangeAspect="1"/>
-            </p:cNvPicPr>
-            <p:nvPr/>
-          </p:nvPicPr>
-          <p:blipFill>
-            <a:blip r:embed="rId5"/>
-            <a:stretch>
-              <a:fillRect/>
-            </a:stretch>
-          </p:blipFill>
-          <p:spPr>
-            <a:xfrm>
-              <a:off x="-3254283" y="2706981"/>
-              <a:ext cx="3711262" cy="487624"/>
-            </a:xfrm>
-            <a:prstGeom prst="rect">
-              <a:avLst/>
-            </a:prstGeom>
-            <a:noFill/>
-            <a:ln w="19050">
-              <a:noFill/>
-            </a:ln>
-          </p:spPr>
-        </p:pic>
       </p:grpSp>
-      <p:sp>
-        <p:nvSpPr>
-          <p:cNvPr id="75" name="사각형: 둥근 모서리 74">
-            <a:extLst>
-              <a:ext uri="{FF2B5EF4-FFF2-40B4-BE49-F238E27FC236}">
-                <a16:creationId xmlns:a16="http://schemas.microsoft.com/office/drawing/2014/main" id="{B3369A65-3330-4382-810B-16F512116A9D}"/>
-              </a:ext>
-            </a:extLst>
-          </p:cNvPr>
-          <p:cNvSpPr/>
-          <p:nvPr/>
-        </p:nvSpPr>
-        <p:spPr>
-          <a:xfrm>
-            <a:off x="3278007" y="1601231"/>
-            <a:ext cx="1597664" cy="169741"/>
-          </a:xfrm>
-          <a:prstGeom prst="roundRect">
-            <a:avLst/>
-          </a:prstGeom>
-          <a:noFill/>
-          <a:ln w="19050">
-            <a:solidFill>
-              <a:srgbClr val="0070C0"/>
-            </a:solidFill>
-          </a:ln>
-        </p:spPr>
-        <p:style>
-          <a:lnRef idx="2">
-            <a:schemeClr val="accent1">
-              <a:shade val="50000"/>
-            </a:schemeClr>
-          </a:lnRef>
-          <a:fillRef idx="1">
-            <a:schemeClr val="accent1"/>
-          </a:fillRef>
-          <a:effectRef idx="0">
-            <a:schemeClr val="accent1"/>
-          </a:effectRef>
-          <a:fontRef idx="minor">
-            <a:schemeClr val="lt1"/>
-          </a:fontRef>
-        </p:style>
-        <p:txBody>
-          <a:bodyPr rtlCol="0" anchor="ctr"/>
-          <a:lstStyle/>
-          <a:p>
-            <a:pPr algn="ctr"/>
-            <a:endParaRPr lang="ko-KR" altLang="en-US"/>
-          </a:p>
-        </p:txBody>
-      </p:sp>
     </p:spTree>
     <p:extLst>
       <p:ext uri="{BB962C8B-B14F-4D97-AF65-F5344CB8AC3E}">
-        <p14:creationId xmlns:p14="http://schemas.microsoft.com/office/powerpoint/2010/main" val="187503836"/>
+        <p14:creationId xmlns:p14="http://schemas.microsoft.com/office/powerpoint/2010/main" val="4080595807"/>
       </p:ext>
     </p:extLst>
   </p:cSld>

--- a/presentation/submission/26년 포스코퓨처엠 AI활용전문가 과정_사무계_송다혜.pptx
+++ b/presentation/submission/26년 포스코퓨처엠 AI활용전문가 과정_사무계_송다혜.pptx
@@ -4701,7 +4701,7 @@
         </p:nvGrpSpPr>
         <p:grpSpPr>
           <a:xfrm>
-            <a:off x="310399" y="4409996"/>
+            <a:off x="310399" y="4413234"/>
             <a:ext cx="194324" cy="180020"/>
             <a:chOff x="416496" y="3577457"/>
             <a:chExt cx="194324" cy="180020"/>
@@ -6972,7 +6972,7 @@
         </p:nvGrpSpPr>
         <p:grpSpPr>
           <a:xfrm>
-            <a:off x="310399" y="822532"/>
+            <a:off x="310399" y="812141"/>
             <a:ext cx="194324" cy="180020"/>
             <a:chOff x="416496" y="3577457"/>
             <a:chExt cx="194324" cy="180020"/>
@@ -12905,7 +12905,7 @@
         </p:nvGrpSpPr>
         <p:grpSpPr>
           <a:xfrm>
-            <a:off x="310399" y="822532"/>
+            <a:off x="310399" y="812141"/>
             <a:ext cx="194324" cy="180020"/>
             <a:chOff x="416496" y="3577457"/>
             <a:chExt cx="194324" cy="180020"/>
@@ -14354,7 +14354,7 @@
         </p:nvGrpSpPr>
         <p:grpSpPr>
           <a:xfrm>
-            <a:off x="310399" y="822532"/>
+            <a:off x="310399" y="815379"/>
             <a:ext cx="194324" cy="180020"/>
             <a:chOff x="416496" y="3577457"/>
             <a:chExt cx="194324" cy="180020"/>
@@ -18087,7 +18087,7 @@
         </p:nvGrpSpPr>
         <p:grpSpPr>
           <a:xfrm>
-            <a:off x="310399" y="3849861"/>
+            <a:off x="310399" y="3853099"/>
             <a:ext cx="194324" cy="180020"/>
             <a:chOff x="416496" y="3577457"/>
             <a:chExt cx="194324" cy="180020"/>
@@ -18343,7 +18343,7 @@
         </p:nvGrpSpPr>
         <p:grpSpPr>
           <a:xfrm>
-            <a:off x="310399" y="822532"/>
+            <a:off x="310399" y="812141"/>
             <a:ext cx="194324" cy="180020"/>
             <a:chOff x="416496" y="3577457"/>
             <a:chExt cx="194324" cy="180020"/>
@@ -19579,7 +19579,7 @@
         </p:nvGrpSpPr>
         <p:grpSpPr>
           <a:xfrm>
-            <a:off x="310399" y="4080523"/>
+            <a:off x="310399" y="4083761"/>
             <a:ext cx="194324" cy="180020"/>
             <a:chOff x="416496" y="3577457"/>
             <a:chExt cx="194324" cy="180020"/>
@@ -21241,7 +21241,7 @@
         </p:nvGrpSpPr>
         <p:grpSpPr>
           <a:xfrm>
-            <a:off x="310399" y="822532"/>
+            <a:off x="310399" y="812141"/>
             <a:ext cx="194324" cy="180020"/>
             <a:chOff x="416496" y="3577457"/>
             <a:chExt cx="194324" cy="180020"/>

--- a/presentation/submission/26년 포스코퓨처엠 AI활용전문가 과정_사무계_송다혜.pptx
+++ b/presentation/submission/26년 포스코퓨처엠 AI활용전문가 과정_사무계_송다혜.pptx
@@ -10360,7 +10360,39 @@
                 <a:latin typeface="+mn-ea"/>
                 <a:cs typeface="+mn-cs"/>
               </a:rPr>
-              <a:t>. </a:t>
+              <a:t>. (2</a:t>
+            </a:r>
+            <a:r>
+              <a:rPr kumimoji="0" lang="ko-KR" altLang="en-US" sz="2000" b="1" i="0" u="none" strike="noStrike" kern="1200" cap="none" spc="-100" normalizeH="0" baseline="0" noProof="0">
+                <a:ln>
+                  <a:noFill/>
+                </a:ln>
+                <a:solidFill>
+                  <a:prstClr val="black"/>
+                </a:solidFill>
+                <a:effectLst/>
+                <a:uLnTx/>
+                <a:uFillTx/>
+                <a:latin typeface="+mn-ea"/>
+                <a:cs typeface="+mn-cs"/>
+              </a:rPr>
+              <a:t>주차</a:t>
+            </a:r>
+            <a:r>
+              <a:rPr kumimoji="0" lang="en-US" altLang="ko-KR" sz="2000" b="1" i="0" u="none" strike="noStrike" kern="1200" cap="none" spc="-100" normalizeH="0" baseline="0" noProof="0">
+                <a:ln>
+                  <a:noFill/>
+                </a:ln>
+                <a:solidFill>
+                  <a:prstClr val="black"/>
+                </a:solidFill>
+                <a:effectLst/>
+                <a:uLnTx/>
+                <a:uFillTx/>
+                <a:latin typeface="+mn-ea"/>
+                <a:cs typeface="+mn-cs"/>
+              </a:rPr>
+              <a:t>) </a:t>
             </a:r>
             <a:r>
               <a:rPr lang="en-US" altLang="ko-KR" sz="2000" b="1" spc="-100">
@@ -13189,8 +13221,8 @@
         </p:nvSpPr>
         <p:spPr>
           <a:xfrm>
-            <a:off x="181848" y="118834"/>
-            <a:ext cx="8281358" cy="400110"/>
+            <a:off x="181847" y="118834"/>
+            <a:ext cx="9500617" cy="400110"/>
           </a:xfrm>
           <a:prstGeom prst="rect">
             <a:avLst/>
@@ -13234,7 +13266,39 @@
                 <a:latin typeface="+mn-ea"/>
                 <a:cs typeface="+mn-cs"/>
               </a:rPr>
-              <a:t>4. </a:t>
+              <a:t>4. (3</a:t>
+            </a:r>
+            <a:r>
+              <a:rPr kumimoji="0" lang="ko-KR" altLang="en-US" sz="2000" b="1" i="0" u="none" strike="noStrike" kern="1200" cap="none" spc="-100" normalizeH="0" baseline="0" noProof="0">
+                <a:ln>
+                  <a:noFill/>
+                </a:ln>
+                <a:solidFill>
+                  <a:prstClr val="black"/>
+                </a:solidFill>
+                <a:effectLst/>
+                <a:uLnTx/>
+                <a:uFillTx/>
+                <a:latin typeface="+mn-ea"/>
+                <a:cs typeface="+mn-cs"/>
+              </a:rPr>
+              <a:t>주차</a:t>
+            </a:r>
+            <a:r>
+              <a:rPr kumimoji="0" lang="en-US" altLang="ko-KR" sz="2000" b="1" i="0" u="none" strike="noStrike" kern="1200" cap="none" spc="-100" normalizeH="0" baseline="0" noProof="0">
+                <a:ln>
+                  <a:noFill/>
+                </a:ln>
+                <a:solidFill>
+                  <a:prstClr val="black"/>
+                </a:solidFill>
+                <a:effectLst/>
+                <a:uLnTx/>
+                <a:uFillTx/>
+                <a:latin typeface="+mn-ea"/>
+                <a:cs typeface="+mn-cs"/>
+              </a:rPr>
+              <a:t>) </a:t>
             </a:r>
             <a:r>
               <a:rPr lang="en-US" altLang="ko-KR" sz="2000" b="1" spc="-100">
